--- a/docs/architecture-verification/Profit-Prophet-完整驗證.pptx
+++ b/docs/architecture-verification/Profit-Prophet-完整驗證.pptx
@@ -3898,7 +3898,7 @@
                 <a:ea typeface="Arial"/>
                 <a:cs typeface="Arial"/>
               </a:rPr>
-              <a:t>• Model: Claude Haiku 4.5</a:t>
+              <a:t>• Model: Claude Sonnet 4</a:t>
             </a:r>
           </a:p>
           <a:p>
@@ -6590,7 +6590,7 @@
                 <a:ea typeface="Arial"/>
                 <a:cs typeface="Arial"/>
               </a:rPr>
-              <a:t>• LLM: Claude 3 Sonnet → Claude Haiku 4.5 (低延遲低成本)</a:t>
+              <a:t>• LLM: Claude 3 Sonnet → Claude Sonnet 4 (高性能推理)</a:t>
             </a:r>
           </a:p>
           <a:p>
@@ -8607,7 +8607,7 @@
                 <a:ea typeface="Arial"/>
                 <a:cs typeface="Arial"/>
               </a:rPr>
-              <a:t>✓ 可擴展架構 (Bedrock + Claude Haiku 4.5)</a:t>
+              <a:t>✓ 可擴展架構 (Bedrock + Claude Sonnet 4)</a:t>
             </a:r>
           </a:p>
         </p:txBody>

--- a/docs/architecture-verification/Profit-Prophet-完整驗證.pptx
+++ b/docs/architecture-verification/Profit-Prophet-完整驗證.pptx
@@ -6929,8 +6929,8 @@
         </p:nvSpPr>
         <p:spPr>
           <a:xfrm>
-            <a:off x="1219169" y="4114800"/>
-            <a:ext cx="9753356" cy="411480"/>
+            <a:off x="1219169" y="4046220"/>
+            <a:ext cx="9753356" cy="342900"/>
           </a:xfrm>
           <a:prstGeom prst="rect">
             <a:avLst/>
@@ -6945,7 +6945,7 @@
           <a:p>
             <a:pPr algn="ctr"/>
             <a:r>
-              <a:rPr sz="2430" b="1" i="0">
+              <a:rPr sz="2160" b="1" i="0">
                 <a:solidFill>
                   <a:srgbClr val="DC2626">
                     <a:alpha val="100000"/>
@@ -6955,7 +6955,7 @@
                 <a:ea typeface="Arial"/>
                 <a:cs typeface="Arial"/>
               </a:rPr>
-              <a:t>❌ 但是...</a:t>
+              <a:t>⚠️ 但是...</a:t>
             </a:r>
           </a:p>
         </p:txBody>
@@ -6968,8 +6968,8 @@
         </p:nvSpPr>
         <p:spPr>
           <a:xfrm>
-            <a:off x="1828754" y="4663440"/>
-            <a:ext cx="8534186" cy="617220"/>
+            <a:off x="1828754" y="4526280"/>
+            <a:ext cx="8534186" cy="548640"/>
           </a:xfrm>
           <a:prstGeom prst="rect">
             <a:avLst/>
@@ -6994,7 +6994,7 @@
                 <a:ea typeface="Arial"/>
                 <a:cs typeface="Arial"/>
               </a:rPr>
-              <a:t>Nova Sonic 目前僅支援:</a:t>
+              <a:t>Nova Sonic 支援中文，但帶有明顯 ABC 腔調</a:t>
             </a:r>
           </a:p>
           <a:p>
@@ -7010,7 +7010,7 @@
                 <a:ea typeface="Arial"/>
                 <a:cs typeface="Arial"/>
               </a:rPr>
-              <a:t>英語、西班牙語、法語、義大利語、德語、葡萄牙語、印地語</a:t>
+              <a:t>(美式華語)</a:t>
             </a:r>
           </a:p>
         </p:txBody>
@@ -7023,8 +7023,8 @@
         </p:nvSpPr>
         <p:spPr>
           <a:xfrm>
-            <a:off x="1219169" y="5486400"/>
-            <a:ext cx="9753356" cy="480060"/>
+            <a:off x="1219169" y="5212080"/>
+            <a:ext cx="9753356" cy="411480"/>
           </a:xfrm>
           <a:prstGeom prst="rect">
             <a:avLst/>
@@ -7039,7 +7039,7 @@
           <a:p>
             <a:pPr algn="ctr"/>
             <a:r>
-              <a:rPr sz="2700" b="1" i="0">
+              <a:rPr sz="2052" b="1" i="0">
                 <a:solidFill>
                   <a:srgbClr val="DC2626">
                     <a:alpha val="100000"/>
@@ -7049,7 +7049,46 @@
                 <a:ea typeface="Arial"/>
                 <a:cs typeface="Arial"/>
               </a:rPr>
-              <a:t>❌ 不支援中文</a:t>
+              <a:t>❌ 不適合台灣長照現場</a:t>
+            </a:r>
+          </a:p>
+        </p:txBody>
+      </p:sp>
+      <p:sp>
+        <p:nvSpPr>
+          <p:cNvPr id="11" name="TextBox 10"/>
+          <p:cNvSpPr txBox="1"/>
+          <p:nvPr/>
+        </p:nvSpPr>
+        <p:spPr>
+          <a:xfrm>
+            <a:off x="1219169" y="5692140"/>
+            <a:ext cx="9753356" cy="274320"/>
+          </a:xfrm>
+          <a:prstGeom prst="rect">
+            <a:avLst/>
+          </a:prstGeom>
+          <a:noFill/>
+        </p:spPr>
+        <p:txBody>
+          <a:bodyPr wrap="square" anchor="ctr" lIns="0" rIns="0" tIns="0" bIns="0">
+            <a:spAutoFit/>
+          </a:bodyPr>
+          <a:lstStyle/>
+          <a:p>
+            <a:pPr algn="ctr"/>
+            <a:r>
+              <a:rPr sz="1404" b="0" i="0">
+                <a:solidFill>
+                  <a:srgbClr val="545B64">
+                    <a:alpha val="100000"/>
+                  </a:srgbClr>
+                </a:solidFill>
+                <a:latin typeface="Arial"/>
+                <a:ea typeface="Arial"/>
+                <a:cs typeface="Arial"/>
+              </a:rPr>
+              <a:t>長者與照服員主要使用台灣國語與台語</a:t>
             </a:r>
           </a:p>
         </p:txBody>

--- a/docs/architecture-verification/Profit-Prophet-完整驗證.pptx
+++ b/docs/architecture-verification/Profit-Prophet-完整驗證.pptx
@@ -13,6 +13,7 @@
     <p:sldId id="261" r:id="rId12"/>
     <p:sldId id="262" r:id="rId13"/>
     <p:sldId id="263" r:id="rId14"/>
+    <p:sldId id="264" r:id="rId15"/>
   </p:sldIdLst>
   <p:sldSz cx="12191695" cy="6858000" type="screen4x3"/>
   <p:notesSz cx="6858000" cy="9144000"/>
@@ -3481,7 +3482,283 @@
       </p:sp>
       <p:sp>
         <p:nvSpPr>
-          <p:cNvPr id="3" name="TextBox 2"/>
+          <p:cNvPr id="3" name="Rounded Rectangle 2"/>
+          <p:cNvSpPr/>
+          <p:nvPr/>
+        </p:nvSpPr>
+        <p:spPr>
+          <a:xfrm>
+            <a:off x="975335" y="1645920"/>
+            <a:ext cx="3291757" cy="1645920"/>
+          </a:xfrm>
+          <a:prstGeom prst="roundRect">
+            <a:avLst>
+              <a:gd name="adj" fmla="val 3000"/>
+            </a:avLst>
+          </a:prstGeom>
+          <a:solidFill>
+            <a:srgbClr val="2563EB"/>
+          </a:solidFill>
+          <a:ln>
+            <a:noFill/>
+          </a:ln>
+          <a:effectLst/>
+        </p:spPr>
+        <p:style>
+          <a:lnRef idx="1">
+            <a:schemeClr val="accent1"/>
+          </a:lnRef>
+          <a:fillRef idx="3">
+            <a:schemeClr val="accent1"/>
+          </a:fillRef>
+          <a:effectRef idx="2">
+            <a:schemeClr val="accent1"/>
+          </a:effectRef>
+          <a:fontRef idx="minor">
+            <a:schemeClr val="lt1"/>
+          </a:fontRef>
+        </p:style>
+        <p:txBody>
+          <a:bodyPr rtlCol="0" anchor="ctr"/>
+          <a:lstStyle/>
+          <a:p>
+            <a:pPr algn="ctr"/>
+          </a:p>
+        </p:txBody>
+      </p:sp>
+      <p:sp>
+        <p:nvSpPr>
+          <p:cNvPr id="4" name="Rounded Rectangle 3"/>
+          <p:cNvSpPr/>
+          <p:nvPr/>
+        </p:nvSpPr>
+        <p:spPr>
+          <a:xfrm>
+            <a:off x="975335" y="1645920"/>
+            <a:ext cx="3291757" cy="480060"/>
+          </a:xfrm>
+          <a:prstGeom prst="roundRect">
+            <a:avLst>
+              <a:gd name="adj" fmla="val 3000"/>
+            </a:avLst>
+          </a:prstGeom>
+          <a:solidFill>
+            <a:srgbClr val="2563EB"/>
+          </a:solidFill>
+          <a:ln>
+            <a:noFill/>
+          </a:ln>
+          <a:effectLst/>
+        </p:spPr>
+        <p:style>
+          <a:lnRef idx="1">
+            <a:schemeClr val="accent1"/>
+          </a:lnRef>
+          <a:fillRef idx="3">
+            <a:schemeClr val="accent1"/>
+          </a:fillRef>
+          <a:effectRef idx="2">
+            <a:schemeClr val="accent1"/>
+          </a:effectRef>
+          <a:fontRef idx="minor">
+            <a:schemeClr val="lt1"/>
+          </a:fontRef>
+        </p:style>
+        <p:txBody>
+          <a:bodyPr rtlCol="0" anchor="ctr"/>
+          <a:lstStyle/>
+          <a:p>
+            <a:pPr algn="ctr"/>
+          </a:p>
+        </p:txBody>
+      </p:sp>
+      <p:sp>
+        <p:nvSpPr>
+          <p:cNvPr id="5" name="Rounded Rectangle 4"/>
+          <p:cNvSpPr/>
+          <p:nvPr/>
+        </p:nvSpPr>
+        <p:spPr>
+          <a:xfrm>
+            <a:off x="4571885" y="1645920"/>
+            <a:ext cx="3291757" cy="1783080"/>
+          </a:xfrm>
+          <a:prstGeom prst="roundRect">
+            <a:avLst>
+              <a:gd name="adj" fmla="val 3000"/>
+            </a:avLst>
+          </a:prstGeom>
+          <a:solidFill>
+            <a:srgbClr val="FF9900"/>
+          </a:solidFill>
+          <a:ln>
+            <a:noFill/>
+          </a:ln>
+          <a:effectLst/>
+        </p:spPr>
+        <p:style>
+          <a:lnRef idx="1">
+            <a:schemeClr val="accent1"/>
+          </a:lnRef>
+          <a:fillRef idx="3">
+            <a:schemeClr val="accent1"/>
+          </a:fillRef>
+          <a:effectRef idx="2">
+            <a:schemeClr val="accent1"/>
+          </a:effectRef>
+          <a:fontRef idx="minor">
+            <a:schemeClr val="lt1"/>
+          </a:fontRef>
+        </p:style>
+        <p:txBody>
+          <a:bodyPr rtlCol="0" anchor="ctr"/>
+          <a:lstStyle/>
+          <a:p>
+            <a:pPr algn="ctr"/>
+          </a:p>
+        </p:txBody>
+      </p:sp>
+      <p:sp>
+        <p:nvSpPr>
+          <p:cNvPr id="6" name="Rounded Rectangle 5"/>
+          <p:cNvSpPr/>
+          <p:nvPr/>
+        </p:nvSpPr>
+        <p:spPr>
+          <a:xfrm>
+            <a:off x="4571885" y="1645920"/>
+            <a:ext cx="3291757" cy="480060"/>
+          </a:xfrm>
+          <a:prstGeom prst="roundRect">
+            <a:avLst>
+              <a:gd name="adj" fmla="val 3000"/>
+            </a:avLst>
+          </a:prstGeom>
+          <a:solidFill>
+            <a:srgbClr val="FF9900"/>
+          </a:solidFill>
+          <a:ln>
+            <a:noFill/>
+          </a:ln>
+          <a:effectLst/>
+        </p:spPr>
+        <p:style>
+          <a:lnRef idx="1">
+            <a:schemeClr val="accent1"/>
+          </a:lnRef>
+          <a:fillRef idx="3">
+            <a:schemeClr val="accent1"/>
+          </a:fillRef>
+          <a:effectRef idx="2">
+            <a:schemeClr val="accent1"/>
+          </a:effectRef>
+          <a:fontRef idx="minor">
+            <a:schemeClr val="lt1"/>
+          </a:fontRef>
+        </p:style>
+        <p:txBody>
+          <a:bodyPr rtlCol="0" anchor="ctr"/>
+          <a:lstStyle/>
+          <a:p>
+            <a:pPr algn="ctr"/>
+          </a:p>
+        </p:txBody>
+      </p:sp>
+      <p:sp>
+        <p:nvSpPr>
+          <p:cNvPr id="7" name="Rounded Rectangle 6"/>
+          <p:cNvSpPr/>
+          <p:nvPr/>
+        </p:nvSpPr>
+        <p:spPr>
+          <a:xfrm>
+            <a:off x="8168435" y="1645920"/>
+            <a:ext cx="3047923" cy="1783080"/>
+          </a:xfrm>
+          <a:prstGeom prst="roundRect">
+            <a:avLst>
+              <a:gd name="adj" fmla="val 3000"/>
+            </a:avLst>
+          </a:prstGeom>
+          <a:solidFill>
+            <a:srgbClr val="16A34A"/>
+          </a:solidFill>
+          <a:ln>
+            <a:noFill/>
+          </a:ln>
+          <a:effectLst/>
+        </p:spPr>
+        <p:style>
+          <a:lnRef idx="1">
+            <a:schemeClr val="accent1"/>
+          </a:lnRef>
+          <a:fillRef idx="3">
+            <a:schemeClr val="accent1"/>
+          </a:fillRef>
+          <a:effectRef idx="2">
+            <a:schemeClr val="accent1"/>
+          </a:effectRef>
+          <a:fontRef idx="minor">
+            <a:schemeClr val="lt1"/>
+          </a:fontRef>
+        </p:style>
+        <p:txBody>
+          <a:bodyPr rtlCol="0" anchor="ctr"/>
+          <a:lstStyle/>
+          <a:p>
+            <a:pPr algn="ctr"/>
+          </a:p>
+        </p:txBody>
+      </p:sp>
+      <p:sp>
+        <p:nvSpPr>
+          <p:cNvPr id="8" name="Rounded Rectangle 7"/>
+          <p:cNvSpPr/>
+          <p:nvPr/>
+        </p:nvSpPr>
+        <p:spPr>
+          <a:xfrm>
+            <a:off x="8168435" y="1645920"/>
+            <a:ext cx="3047923" cy="480060"/>
+          </a:xfrm>
+          <a:prstGeom prst="roundRect">
+            <a:avLst>
+              <a:gd name="adj" fmla="val 3000"/>
+            </a:avLst>
+          </a:prstGeom>
+          <a:solidFill>
+            <a:srgbClr val="16A34A"/>
+          </a:solidFill>
+          <a:ln>
+            <a:noFill/>
+          </a:ln>
+          <a:effectLst/>
+        </p:spPr>
+        <p:style>
+          <a:lnRef idx="1">
+            <a:schemeClr val="accent1"/>
+          </a:lnRef>
+          <a:fillRef idx="3">
+            <a:schemeClr val="accent1"/>
+          </a:fillRef>
+          <a:effectRef idx="2">
+            <a:schemeClr val="accent1"/>
+          </a:effectRef>
+          <a:fontRef idx="minor">
+            <a:schemeClr val="lt1"/>
+          </a:fontRef>
+        </p:style>
+        <p:txBody>
+          <a:bodyPr rtlCol="0" anchor="ctr"/>
+          <a:lstStyle/>
+          <a:p>
+            <a:pPr algn="ctr"/>
+          </a:p>
+        </p:txBody>
+      </p:sp>
+      <p:sp>
+        <p:nvSpPr>
+          <p:cNvPr id="9" name="TextBox 8"/>
           <p:cNvSpPr txBox="1"/>
           <p:nvPr/>
         </p:nvSpPr>
@@ -3513,21 +3790,21 @@
                 <a:ea typeface="Arial"/>
                 <a:cs typeface="Arial"/>
               </a:rPr>
-              <a:t>完整驗證結果</a:t>
-            </a:r>
-          </a:p>
-        </p:txBody>
-      </p:sp>
-      <p:sp>
-        <p:nvSpPr>
-          <p:cNvPr id="4" name="TextBox 3"/>
+              <a:t>AI 輔助開發工作流程</a:t>
+            </a:r>
+          </a:p>
+        </p:txBody>
+      </p:sp>
+      <p:sp>
+        <p:nvSpPr>
+          <p:cNvPr id="10" name="TextBox 9"/>
           <p:cNvSpPr txBox="1"/>
           <p:nvPr/>
         </p:nvSpPr>
         <p:spPr>
           <a:xfrm>
-            <a:off x="1219169" y="1234440"/>
-            <a:ext cx="9753356" cy="342900"/>
+            <a:off x="1219169" y="1165860"/>
+            <a:ext cx="9753356" cy="274320"/>
           </a:xfrm>
           <a:prstGeom prst="rect">
             <a:avLst/>
@@ -3542,30 +3819,30 @@
           <a:p>
             <a:pPr algn="ctr"/>
             <a:r>
-              <a:rPr sz="2160" b="1" i="0">
-                <a:solidFill>
-                  <a:srgbClr val="16A34A">
-                    <a:alpha val="100000"/>
-                  </a:srgbClr>
-                </a:solidFill>
-                <a:latin typeface="Arial"/>
-                <a:ea typeface="Arial"/>
-                <a:cs typeface="Arial"/>
-              </a:rPr>
-              <a:t>✅ 所有核心服務已驗證並運作中</a:t>
-            </a:r>
-          </a:p>
-        </p:txBody>
-      </p:sp>
-      <p:sp>
-        <p:nvSpPr>
-          <p:cNvPr id="5" name="TextBox 4"/>
+              <a:rPr sz="1728" b="1" i="0">
+                <a:solidFill>
+                  <a:srgbClr val="FF9900">
+                    <a:alpha val="100000"/>
+                  </a:srgbClr>
+                </a:solidFill>
+                <a:latin typeface="Arial"/>
+                <a:ea typeface="Arial"/>
+                <a:cs typeface="Arial"/>
+              </a:rPr>
+              <a:t>Kiro + Speckit + GitHub 整合</a:t>
+            </a:r>
+          </a:p>
+        </p:txBody>
+      </p:sp>
+      <p:sp>
+        <p:nvSpPr>
+          <p:cNvPr id="11" name="TextBox 10"/>
           <p:cNvSpPr txBox="1"/>
           <p:nvPr/>
         </p:nvSpPr>
         <p:spPr>
           <a:xfrm>
-            <a:off x="975335" y="1920240"/>
+            <a:off x="975335" y="1783080"/>
             <a:ext cx="3291757" cy="342900"/>
           </a:xfrm>
           <a:prstGeom prst="rect">
@@ -3579,32 +3856,32 @@
           </a:bodyPr>
           <a:lstStyle/>
           <a:p>
-            <a:pPr algn="l"/>
+            <a:pPr algn="ctr"/>
             <a:r>
               <a:rPr sz="1728" b="1" i="0">
                 <a:solidFill>
-                  <a:srgbClr val="FF9900">
-                    <a:alpha val="100000"/>
-                  </a:srgbClr>
-                </a:solidFill>
-                <a:latin typeface="Arial"/>
-                <a:ea typeface="Arial"/>
-                <a:cs typeface="Arial"/>
-              </a:rPr>
-              <a:t>CloudFront CDN</a:t>
-            </a:r>
-          </a:p>
-        </p:txBody>
-      </p:sp>
-      <p:sp>
-        <p:nvSpPr>
-          <p:cNvPr id="6" name="TextBox 5"/>
+                  <a:srgbClr val="FFFFFF">
+                    <a:alpha val="100000"/>
+                  </a:srgbClr>
+                </a:solidFill>
+                <a:latin typeface="Arial"/>
+                <a:ea typeface="Arial"/>
+                <a:cs typeface="Arial"/>
+              </a:rPr>
+              <a:t>🤖 Kiro - AI 開發代理</a:t>
+            </a:r>
+          </a:p>
+        </p:txBody>
+      </p:sp>
+      <p:sp>
+        <p:nvSpPr>
+          <p:cNvPr id="12" name="TextBox 11"/>
           <p:cNvSpPr txBox="1"/>
           <p:nvPr/>
         </p:nvSpPr>
         <p:spPr>
           <a:xfrm>
-            <a:off x="975335" y="2331720"/>
+            <a:off x="975335" y="2194560"/>
             <a:ext cx="3291757" cy="960120"/>
           </a:xfrm>
           <a:prstGeom prst="rect">
@@ -3630,7 +3907,7 @@
                 <a:ea typeface="Arial"/>
                 <a:cs typeface="Arial"/>
               </a:rPr>
-              <a:t>• ID: E1NHT4ZC7ZFGUP</a:t>
+              <a:t>• Agents (代理)</a:t>
             </a:r>
           </a:p>
           <a:p>
@@ -3646,7 +3923,7 @@
                 <a:ea typeface="Arial"/>
                 <a:cs typeface="Arial"/>
               </a:rPr>
-              <a:t>• Status: Deployed ✅</a:t>
+              <a:t>• Powers (觸發器)</a:t>
             </a:r>
           </a:p>
           <a:p>
@@ -3662,7 +3939,7 @@
                 <a:ea typeface="Arial"/>
                 <a:cs typeface="Arial"/>
               </a:rPr>
-              <a:t>• d1qintm5rk17ye.cloudfront.net</a:t>
+              <a:t>• Steering (指引)</a:t>
             </a:r>
           </a:p>
           <a:p>
@@ -3678,20 +3955,20 @@
                 <a:ea typeface="Arial"/>
                 <a:cs typeface="Arial"/>
               </a:rPr>
-              <a:t>• HTTP/2 + IPv6</a:t>
-            </a:r>
-          </a:p>
-        </p:txBody>
-      </p:sp>
-      <p:sp>
-        <p:nvSpPr>
-          <p:cNvPr id="7" name="TextBox 6"/>
+              <a:t>• Skills (技能模組)</a:t>
+            </a:r>
+          </a:p>
+        </p:txBody>
+      </p:sp>
+      <p:sp>
+        <p:nvSpPr>
+          <p:cNvPr id="13" name="TextBox 12"/>
           <p:cNvSpPr txBox="1"/>
           <p:nvPr/>
         </p:nvSpPr>
         <p:spPr>
           <a:xfrm>
-            <a:off x="4510927" y="1920240"/>
+            <a:off x="4571885" y="1783080"/>
             <a:ext cx="3291757" cy="342900"/>
           </a:xfrm>
           <a:prstGeom prst="rect">
@@ -3705,33 +3982,33 @@
           </a:bodyPr>
           <a:lstStyle/>
           <a:p>
-            <a:pPr algn="l"/>
+            <a:pPr algn="ctr"/>
             <a:r>
               <a:rPr sz="1728" b="1" i="0">
                 <a:solidFill>
-                  <a:srgbClr val="FF9900">
-                    <a:alpha val="100000"/>
-                  </a:srgbClr>
-                </a:solidFill>
-                <a:latin typeface="Arial"/>
-                <a:ea typeface="Arial"/>
-                <a:cs typeface="Arial"/>
-              </a:rPr>
-              <a:t>EC2 後端 (LiveCaption)</a:t>
-            </a:r>
-          </a:p>
-        </p:txBody>
-      </p:sp>
-      <p:sp>
-        <p:nvSpPr>
-          <p:cNvPr id="8" name="TextBox 7"/>
+                  <a:srgbClr val="FFFFFF">
+                    <a:alpha val="100000"/>
+                  </a:srgbClr>
+                </a:solidFill>
+                <a:latin typeface="Arial"/>
+                <a:ea typeface="Arial"/>
+                <a:cs typeface="Arial"/>
+              </a:rPr>
+              <a:t>📋 Speckit - 規格管理</a:t>
+            </a:r>
+          </a:p>
+        </p:txBody>
+      </p:sp>
+      <p:sp>
+        <p:nvSpPr>
+          <p:cNvPr id="14" name="TextBox 13"/>
           <p:cNvSpPr txBox="1"/>
           <p:nvPr/>
         </p:nvSpPr>
         <p:spPr>
           <a:xfrm>
-            <a:off x="4510927" y="2331720"/>
-            <a:ext cx="3291757" cy="960120"/>
+            <a:off x="4571885" y="2194560"/>
+            <a:ext cx="3291757" cy="1097280"/>
           </a:xfrm>
           <a:prstGeom prst="rect">
             <a:avLst/>
@@ -3756,7 +4033,7 @@
                 <a:ea typeface="Arial"/>
                 <a:cs typeface="Arial"/>
               </a:rPr>
-              <a:t>• Instance: t3.micro ✅</a:t>
+              <a:t>• specify (建立規格)</a:t>
             </a:r>
           </a:p>
           <a:p>
@@ -3772,7 +4049,7 @@
                 <a:ea typeface="Arial"/>
                 <a:cs typeface="Arial"/>
               </a:rPr>
-              <a:t>• WebSocket 服務 (Python)</a:t>
+              <a:t>• plan (實作計畫)</a:t>
             </a:r>
           </a:p>
           <a:p>
@@ -3788,7 +4065,7 @@
                 <a:ea typeface="Arial"/>
                 <a:cs typeface="Arial"/>
               </a:rPr>
-              <a:t>• Transcribe Streaming 封裝</a:t>
+              <a:t>• tasks (任務清單)</a:t>
             </a:r>
           </a:p>
           <a:p>
@@ -3804,21 +4081,37 @@
                 <a:ea typeface="Arial"/>
                 <a:cs typeface="Arial"/>
               </a:rPr>
-              <a:t>• 說話者辨識 + 多語言</a:t>
-            </a:r>
-          </a:p>
-        </p:txBody>
-      </p:sp>
-      <p:sp>
-        <p:nvSpPr>
-          <p:cNvPr id="9" name="TextBox 8"/>
+              <a:t>• implement (執行)</a:t>
+            </a:r>
+          </a:p>
+          <a:p>
+            <a:pPr algn="l"/>
+            <a:r>
+              <a:rPr sz="1296" b="0" i="0">
+                <a:solidFill>
+                  <a:srgbClr val="232F3E">
+                    <a:alpha val="100000"/>
+                  </a:srgbClr>
+                </a:solidFill>
+                <a:latin typeface="Arial"/>
+                <a:ea typeface="Arial"/>
+                <a:cs typeface="Arial"/>
+              </a:rPr>
+              <a:t>• daily-report (日報)</a:t>
+            </a:r>
+          </a:p>
+        </p:txBody>
+      </p:sp>
+      <p:sp>
+        <p:nvSpPr>
+          <p:cNvPr id="15" name="TextBox 14"/>
           <p:cNvSpPr txBox="1"/>
           <p:nvPr/>
         </p:nvSpPr>
         <p:spPr>
           <a:xfrm>
-            <a:off x="8046518" y="1920240"/>
-            <a:ext cx="3291757" cy="342900"/>
+            <a:off x="8168435" y="1783080"/>
+            <a:ext cx="3047923" cy="342900"/>
           </a:xfrm>
           <a:prstGeom prst="rect">
             <a:avLst/>
@@ -3831,33 +4124,33 @@
           </a:bodyPr>
           <a:lstStyle/>
           <a:p>
-            <a:pPr algn="l"/>
+            <a:pPr algn="ctr"/>
             <a:r>
               <a:rPr sz="1728" b="1" i="0">
                 <a:solidFill>
-                  <a:srgbClr val="FF9900">
-                    <a:alpha val="100000"/>
-                  </a:srgbClr>
-                </a:solidFill>
-                <a:latin typeface="Arial"/>
-                <a:ea typeface="Arial"/>
-                <a:cs typeface="Arial"/>
-              </a:rPr>
-              <a:t>Bedrock Knowledge Base</a:t>
-            </a:r>
-          </a:p>
-        </p:txBody>
-      </p:sp>
-      <p:sp>
-        <p:nvSpPr>
-          <p:cNvPr id="10" name="TextBox 9"/>
+                  <a:srgbClr val="FFFFFF">
+                    <a:alpha val="100000"/>
+                  </a:srgbClr>
+                </a:solidFill>
+                <a:latin typeface="Arial"/>
+                <a:ea typeface="Arial"/>
+                <a:cs typeface="Arial"/>
+              </a:rPr>
+              <a:t>🔀 GitHub - CI/CD</a:t>
+            </a:r>
+          </a:p>
+        </p:txBody>
+      </p:sp>
+      <p:sp>
+        <p:nvSpPr>
+          <p:cNvPr id="16" name="TextBox 15"/>
           <p:cNvSpPr txBox="1"/>
           <p:nvPr/>
         </p:nvSpPr>
         <p:spPr>
           <a:xfrm>
-            <a:off x="8046518" y="2331720"/>
-            <a:ext cx="3291757" cy="960120"/>
+            <a:off x="8168435" y="2194560"/>
+            <a:ext cx="3047923" cy="1097280"/>
           </a:xfrm>
           <a:prstGeom prst="rect">
             <a:avLst/>
@@ -3882,7 +4175,7 @@
                 <a:ea typeface="Arial"/>
                 <a:cs typeface="Arial"/>
               </a:rPr>
-              <a:t>• KB: H4NWXXP6DZ ✅</a:t>
+              <a:t>• Feature branches</a:t>
             </a:r>
           </a:p>
           <a:p>
@@ -3898,7 +4191,7 @@
                 <a:ea typeface="Arial"/>
                 <a:cs typeface="Arial"/>
               </a:rPr>
-              <a:t>• Model: Claude Sonnet 4</a:t>
+              <a:t>• GitHub Actions</a:t>
             </a:r>
           </a:p>
           <a:p>
@@ -3914,7 +4207,7 @@
                 <a:ea typeface="Arial"/>
                 <a:cs typeface="Arial"/>
               </a:rPr>
-              <a:t>• S3 Vectors 儲存</a:t>
+              <a:t>• 自動測試與建置</a:t>
             </a:r>
           </a:p>
           <a:p>
@@ -3930,21 +4223,37 @@
                 <a:ea typeface="Arial"/>
                 <a:cs typeface="Arial"/>
               </a:rPr>
-              <a:t>• RetrieveAndGenerate API</a:t>
-            </a:r>
-          </a:p>
-        </p:txBody>
-      </p:sp>
-      <p:sp>
-        <p:nvSpPr>
-          <p:cNvPr id="11" name="TextBox 10"/>
+              <a:t>• Pull Request</a:t>
+            </a:r>
+          </a:p>
+          <a:p>
+            <a:pPr algn="l"/>
+            <a:r>
+              <a:rPr sz="1296" b="0" i="0">
+                <a:solidFill>
+                  <a:srgbClr val="232F3E">
+                    <a:alpha val="100000"/>
+                  </a:srgbClr>
+                </a:solidFill>
+                <a:latin typeface="Arial"/>
+                <a:ea typeface="Arial"/>
+                <a:cs typeface="Arial"/>
+              </a:rPr>
+              <a:t>• Code Review</a:t>
+            </a:r>
+          </a:p>
+        </p:txBody>
+      </p:sp>
+      <p:sp>
+        <p:nvSpPr>
+          <p:cNvPr id="17" name="TextBox 16"/>
           <p:cNvSpPr txBox="1"/>
           <p:nvPr/>
         </p:nvSpPr>
         <p:spPr>
           <a:xfrm>
-            <a:off x="975335" y="3566160"/>
-            <a:ext cx="3291757" cy="342900"/>
+            <a:off x="1219169" y="3566160"/>
+            <a:ext cx="9753356" cy="274320"/>
           </a:xfrm>
           <a:prstGeom prst="rect">
             <a:avLst/>
@@ -3957,7 +4266,7 @@
           </a:bodyPr>
           <a:lstStyle/>
           <a:p>
-            <a:pPr algn="l"/>
+            <a:pPr algn="ctr"/>
             <a:r>
               <a:rPr sz="1728" b="1" i="0">
                 <a:solidFill>
@@ -3969,21 +4278,138 @@
                 <a:ea typeface="Arial"/>
                 <a:cs typeface="Arial"/>
               </a:rPr>
-              <a:t>DynamoDB (3 表)</a:t>
-            </a:r>
-          </a:p>
-        </p:txBody>
-      </p:sp>
-      <p:sp>
-        <p:nvSpPr>
-          <p:cNvPr id="12" name="TextBox 11"/>
+              <a:t>完整工作流程</a:t>
+            </a:r>
+          </a:p>
+        </p:txBody>
+      </p:sp>
+      <p:sp>
+        <p:nvSpPr>
+          <p:cNvPr id="18" name="TextBox 17"/>
           <p:cNvSpPr txBox="1"/>
           <p:nvPr/>
         </p:nvSpPr>
         <p:spPr>
           <a:xfrm>
-            <a:off x="975335" y="3977639"/>
-            <a:ext cx="3291757" cy="960120"/>
+            <a:off x="1219169" y="3977639"/>
+            <a:ext cx="9753356" cy="342900"/>
+          </a:xfrm>
+          <a:prstGeom prst="rect">
+            <a:avLst/>
+          </a:prstGeom>
+          <a:noFill/>
+        </p:spPr>
+        <p:txBody>
+          <a:bodyPr wrap="square" anchor="ctr" lIns="0" rIns="0" tIns="0" bIns="0">
+            <a:spAutoFit/>
+          </a:bodyPr>
+          <a:lstStyle/>
+          <a:p>
+            <a:pPr algn="ctr"/>
+            <a:r>
+              <a:rPr sz="1296" b="0" i="0">
+                <a:solidFill>
+                  <a:srgbClr val="232F3E">
+                    <a:alpha val="100000"/>
+                  </a:srgbClr>
+                </a:solidFill>
+                <a:latin typeface="Arial"/>
+                <a:ea typeface="Arial"/>
+                <a:cs typeface="Arial"/>
+              </a:rPr>
+              <a:t>需求 → specify → spec → plan → tasks → git.feature → 分支</a:t>
+            </a:r>
+          </a:p>
+        </p:txBody>
+      </p:sp>
+      <p:sp>
+        <p:nvSpPr>
+          <p:cNvPr id="19" name="TextBox 18"/>
+          <p:cNvSpPr txBox="1"/>
+          <p:nvPr/>
+        </p:nvSpPr>
+        <p:spPr>
+          <a:xfrm>
+            <a:off x="1219169" y="4389120"/>
+            <a:ext cx="9753356" cy="342900"/>
+          </a:xfrm>
+          <a:prstGeom prst="rect">
+            <a:avLst/>
+          </a:prstGeom>
+          <a:noFill/>
+        </p:spPr>
+        <p:txBody>
+          <a:bodyPr wrap="square" anchor="ctr" lIns="0" rIns="0" tIns="0" bIns="0">
+            <a:spAutoFit/>
+          </a:bodyPr>
+          <a:lstStyle/>
+          <a:p>
+            <a:pPr algn="ctr"/>
+            <a:r>
+              <a:rPr sz="1296" b="0" i="0">
+                <a:solidFill>
+                  <a:srgbClr val="232F3E">
+                    <a:alpha val="100000"/>
+                  </a:srgbClr>
+                </a:solidFill>
+                <a:latin typeface="Arial"/>
+                <a:ea typeface="Arial"/>
+                <a:cs typeface="Arial"/>
+              </a:rPr>
+              <a:t>→ implement → 編碼 → GitHub Actions → PR → Merge</a:t>
+            </a:r>
+          </a:p>
+        </p:txBody>
+      </p:sp>
+      <p:sp>
+        <p:nvSpPr>
+          <p:cNvPr id="20" name="TextBox 19"/>
+          <p:cNvSpPr txBox="1"/>
+          <p:nvPr/>
+        </p:nvSpPr>
+        <p:spPr>
+          <a:xfrm>
+            <a:off x="1219169" y="5006340"/>
+            <a:ext cx="9753356" cy="274320"/>
+          </a:xfrm>
+          <a:prstGeom prst="rect">
+            <a:avLst/>
+          </a:prstGeom>
+          <a:noFill/>
+        </p:spPr>
+        <p:txBody>
+          <a:bodyPr wrap="square" anchor="ctr" lIns="0" rIns="0" tIns="0" bIns="0">
+            <a:spAutoFit/>
+          </a:bodyPr>
+          <a:lstStyle/>
+          <a:p>
+            <a:pPr algn="l"/>
+            <a:r>
+              <a:rPr sz="1512" b="1" i="0">
+                <a:solidFill>
+                  <a:srgbClr val="2563EB">
+                    <a:alpha val="100000"/>
+                  </a:srgbClr>
+                </a:solidFill>
+                <a:latin typeface="Arial"/>
+                <a:ea typeface="Arial"/>
+                <a:cs typeface="Arial"/>
+              </a:rPr>
+              <a:t>實際執行記錄 (2026-08-01/02)</a:t>
+            </a:r>
+          </a:p>
+        </p:txBody>
+      </p:sp>
+      <p:sp>
+        <p:nvSpPr>
+          <p:cNvPr id="21" name="TextBox 20"/>
+          <p:cNvSpPr txBox="1"/>
+          <p:nvPr/>
+        </p:nvSpPr>
+        <p:spPr>
+          <a:xfrm>
+            <a:off x="1463003" y="5349240"/>
+            <a:ext cx="9509522" cy="685800"/>
           </a:xfrm>
           <a:prstGeom prst="rect">
             <a:avLst/>
@@ -3998,356 +4424,33 @@
           <a:p>
             <a:pPr algn="l"/>
             <a:r>
-              <a:rPr sz="1296" b="0" i="0">
-                <a:solidFill>
-                  <a:srgbClr val="232F3E">
-                    <a:alpha val="100000"/>
-                  </a:srgbClr>
-                </a:solidFill>
-                <a:latin typeface="Arial"/>
-                <a:ea typeface="Arial"/>
-                <a:cs typeface="Arial"/>
-              </a:rPr>
-              <a:t>• conversations (對話記錄)</a:t>
-            </a:r>
-          </a:p>
-          <a:p>
-            <a:pPr algn="l"/>
-            <a:r>
-              <a:rPr sz="1296" b="0" i="0">
-                <a:solidFill>
-                  <a:srgbClr val="232F3E">
-                    <a:alpha val="100000"/>
-                  </a:srgbClr>
-                </a:solidFill>
-                <a:latin typeface="Arial"/>
-                <a:ea typeface="Arial"/>
-                <a:cs typeface="Arial"/>
-              </a:rPr>
-              <a:t>• elder_profile (11 筆)</a:t>
-            </a:r>
-          </a:p>
-          <a:p>
-            <a:pPr algn="l"/>
-            <a:r>
-              <a:rPr sz="1296" b="0" i="0">
-                <a:solidFill>
-                  <a:srgbClr val="232F3E">
-                    <a:alpha val="100000"/>
-                  </a:srgbClr>
-                </a:solidFill>
-                <a:latin typeface="Arial"/>
-                <a:ea typeface="Arial"/>
-                <a:cs typeface="Arial"/>
-              </a:rPr>
-              <a:t>• elder_memory (事件記錄)</a:t>
-            </a:r>
-          </a:p>
-          <a:p>
-            <a:pPr algn="l"/>
-            <a:r>
-              <a:rPr sz="1296" b="0" i="0">
-                <a:solidFill>
-                  <a:srgbClr val="232F3E">
-                    <a:alpha val="100000"/>
-                  </a:srgbClr>
-                </a:solidFill>
-                <a:latin typeface="Arial"/>
-                <a:ea typeface="Arial"/>
-                <a:cs typeface="Arial"/>
-              </a:rPr>
-              <a:t>✅ All ACTIVE</a:t>
-            </a:r>
-          </a:p>
-        </p:txBody>
-      </p:sp>
-      <p:sp>
-        <p:nvSpPr>
-          <p:cNvPr id="13" name="TextBox 12"/>
-          <p:cNvSpPr txBox="1"/>
-          <p:nvPr/>
-        </p:nvSpPr>
-        <p:spPr>
-          <a:xfrm>
-            <a:off x="4510927" y="3566160"/>
-            <a:ext cx="3291757" cy="342900"/>
-          </a:xfrm>
-          <a:prstGeom prst="rect">
-            <a:avLst/>
-          </a:prstGeom>
-          <a:noFill/>
-        </p:spPr>
-        <p:txBody>
-          <a:bodyPr wrap="square" anchor="ctr" lIns="0" rIns="0" tIns="0" bIns="0">
-            <a:spAutoFit/>
-          </a:bodyPr>
-          <a:lstStyle/>
-          <a:p>
-            <a:pPr algn="l"/>
-            <a:r>
-              <a:rPr sz="1728" b="1" i="0">
-                <a:solidFill>
-                  <a:srgbClr val="FF9900">
-                    <a:alpha val="100000"/>
-                  </a:srgbClr>
-                </a:solidFill>
-                <a:latin typeface="Arial"/>
-                <a:ea typeface="Arial"/>
-                <a:cs typeface="Arial"/>
-              </a:rPr>
-              <a:t>Cognito + 語音服務</a:t>
-            </a:r>
-          </a:p>
-        </p:txBody>
-      </p:sp>
-      <p:sp>
-        <p:nvSpPr>
-          <p:cNvPr id="14" name="TextBox 13"/>
-          <p:cNvSpPr txBox="1"/>
-          <p:nvPr/>
-        </p:nvSpPr>
-        <p:spPr>
-          <a:xfrm>
-            <a:off x="4510927" y="3977639"/>
-            <a:ext cx="3291757" cy="960120"/>
-          </a:xfrm>
-          <a:prstGeom prst="rect">
-            <a:avLst/>
-          </a:prstGeom>
-          <a:noFill/>
-        </p:spPr>
-        <p:txBody>
-          <a:bodyPr wrap="square" anchor="t" lIns="0" rIns="0" tIns="0" bIns="0">
-            <a:spAutoFit/>
-          </a:bodyPr>
-          <a:lstStyle/>
-          <a:p>
-            <a:pPr algn="l"/>
-            <a:r>
-              <a:rPr sz="1296" b="0" i="0">
-                <a:solidFill>
-                  <a:srgbClr val="232F3E">
-                    <a:alpha val="100000"/>
-                  </a:srgbClr>
-                </a:solidFill>
-                <a:latin typeface="Arial"/>
-                <a:ea typeface="Arial"/>
-                <a:cs typeface="Arial"/>
-              </a:rPr>
-              <a:t>• Identity Pool ✅</a:t>
-            </a:r>
-          </a:p>
-          <a:p>
-            <a:pPr algn="l"/>
-            <a:r>
-              <a:rPr sz="1296" b="0" i="0">
-                <a:solidFill>
-                  <a:srgbClr val="232F3E">
-                    <a:alpha val="100000"/>
-                  </a:srgbClr>
-                </a:solidFill>
-                <a:latin typeface="Arial"/>
-                <a:ea typeface="Arial"/>
-                <a:cs typeface="Arial"/>
-              </a:rPr>
-              <a:t>• Transcribe (zh-TW)</a:t>
-            </a:r>
-          </a:p>
-          <a:p>
-            <a:pPr algn="l"/>
-            <a:r>
-              <a:rPr sz="1296" b="0" i="0">
-                <a:solidFill>
-                  <a:srgbClr val="232F3E">
-                    <a:alpha val="100000"/>
-                  </a:srgbClr>
-                </a:solidFill>
-                <a:latin typeface="Arial"/>
-                <a:ea typeface="Arial"/>
-                <a:cs typeface="Arial"/>
-              </a:rPr>
-              <a:t>• Polly (Zhiyu Neural)</a:t>
-            </a:r>
-          </a:p>
-          <a:p>
-            <a:pPr algn="l"/>
-            <a:r>
-              <a:rPr sz="1296" b="0" i="0">
-                <a:solidFill>
-                  <a:srgbClr val="232F3E">
-                    <a:alpha val="100000"/>
-                  </a:srgbClr>
-                </a:solidFill>
-                <a:latin typeface="Arial"/>
-                <a:ea typeface="Arial"/>
-                <a:cs typeface="Arial"/>
-              </a:rPr>
-              <a:t>• 最小 IAM 權限</a:t>
-            </a:r>
-          </a:p>
-        </p:txBody>
-      </p:sp>
-      <p:sp>
-        <p:nvSpPr>
-          <p:cNvPr id="15" name="TextBox 14"/>
-          <p:cNvSpPr txBox="1"/>
-          <p:nvPr/>
-        </p:nvSpPr>
-        <p:spPr>
-          <a:xfrm>
-            <a:off x="8046518" y="3566160"/>
-            <a:ext cx="3291757" cy="342900"/>
-          </a:xfrm>
-          <a:prstGeom prst="rect">
-            <a:avLst/>
-          </a:prstGeom>
-          <a:noFill/>
-        </p:spPr>
-        <p:txBody>
-          <a:bodyPr wrap="square" anchor="ctr" lIns="0" rIns="0" tIns="0" bIns="0">
-            <a:spAutoFit/>
-          </a:bodyPr>
-          <a:lstStyle/>
-          <a:p>
-            <a:pPr algn="l"/>
-            <a:r>
-              <a:rPr sz="1728" b="1" i="0">
-                <a:solidFill>
-                  <a:srgbClr val="FF9900">
-                    <a:alpha val="100000"/>
-                  </a:srgbClr>
-                </a:solidFill>
-                <a:latin typeface="Arial"/>
-                <a:ea typeface="Arial"/>
-                <a:cs typeface="Arial"/>
-              </a:rPr>
-              <a:t>Lambda 函數群</a:t>
-            </a:r>
-          </a:p>
-        </p:txBody>
-      </p:sp>
-      <p:sp>
-        <p:nvSpPr>
-          <p:cNvPr id="16" name="TextBox 15"/>
-          <p:cNvSpPr txBox="1"/>
-          <p:nvPr/>
-        </p:nvSpPr>
-        <p:spPr>
-          <a:xfrm>
-            <a:off x="8046518" y="3977639"/>
-            <a:ext cx="3291757" cy="960120"/>
-          </a:xfrm>
-          <a:prstGeom prst="rect">
-            <a:avLst/>
-          </a:prstGeom>
-          <a:noFill/>
-        </p:spPr>
-        <p:txBody>
-          <a:bodyPr wrap="square" anchor="t" lIns="0" rIns="0" tIns="0" bIns="0">
-            <a:spAutoFit/>
-          </a:bodyPr>
-          <a:lstStyle/>
-          <a:p>
-            <a:pPr algn="l"/>
-            <a:r>
-              <a:rPr sz="1296" b="0" i="0">
-                <a:solidFill>
-                  <a:srgbClr val="232F3E">
-                    <a:alpha val="100000"/>
-                  </a:srgbClr>
-                </a:solidFill>
-                <a:latin typeface="Arial"/>
-                <a:ea typeface="Arial"/>
-                <a:cs typeface="Arial"/>
-              </a:rPr>
-              <a:t>• caremate-ai-speech-dev</a:t>
-            </a:r>
-          </a:p>
-          <a:p>
-            <a:pPr algn="l"/>
-            <a:r>
-              <a:rPr sz="1296" b="0" i="0">
-                <a:solidFill>
-                  <a:srgbClr val="232F3E">
-                    <a:alpha val="100000"/>
-                  </a:srgbClr>
-                </a:solidFill>
-                <a:latin typeface="Arial"/>
-                <a:ea typeface="Arial"/>
-                <a:cs typeface="Arial"/>
-              </a:rPr>
-              <a:t>• caremate-ai-chat-dev</a:t>
-            </a:r>
-          </a:p>
-          <a:p>
-            <a:pPr algn="l"/>
-            <a:r>
-              <a:rPr sz="1296" b="0" i="0">
-                <a:solidFill>
-                  <a:srgbClr val="232F3E">
-                    <a:alpha val="100000"/>
-                  </a:srgbClr>
-                </a:solidFill>
-                <a:latin typeface="Arial"/>
-                <a:ea typeface="Arial"/>
-                <a:cs typeface="Arial"/>
-              </a:rPr>
-              <a:t>• caremate-ai-summary-dev</a:t>
-            </a:r>
-          </a:p>
-          <a:p>
-            <a:pPr algn="l"/>
-            <a:r>
-              <a:rPr sz="1296" b="0" i="0">
-                <a:solidFill>
-                  <a:srgbClr val="232F3E">
-                    <a:alpha val="100000"/>
-                  </a:srgbClr>
-                </a:solidFill>
-                <a:latin typeface="Arial"/>
-                <a:ea typeface="Arial"/>
-                <a:cs typeface="Arial"/>
-              </a:rPr>
-              <a:t>• +2 more functions</a:t>
-            </a:r>
-          </a:p>
-        </p:txBody>
-      </p:sp>
-      <p:sp>
-        <p:nvSpPr>
-          <p:cNvPr id="17" name="TextBox 16"/>
-          <p:cNvSpPr txBox="1"/>
-          <p:nvPr/>
-        </p:nvSpPr>
-        <p:spPr>
-          <a:xfrm>
-            <a:off x="1219169" y="5486400"/>
-            <a:ext cx="9753356" cy="342900"/>
-          </a:xfrm>
-          <a:prstGeom prst="rect">
-            <a:avLst/>
-          </a:prstGeom>
-          <a:noFill/>
-        </p:spPr>
-        <p:txBody>
-          <a:bodyPr wrap="square" anchor="ctr" lIns="0" rIns="0" tIns="0" bIns="0">
-            <a:spAutoFit/>
-          </a:bodyPr>
-          <a:lstStyle/>
-          <a:p>
-            <a:pPr algn="ctr"/>
-            <a:r>
-              <a:rPr sz="1404" b="1" i="0">
-                <a:solidFill>
-                  <a:srgbClr val="16A34A">
-                    <a:alpha val="100000"/>
-                  </a:srgbClr>
-                </a:solidFill>
-                <a:latin typeface="Arial"/>
-                <a:ea typeface="Arial"/>
-                <a:cs typeface="Arial"/>
-              </a:rPr>
-              <a:t>驗證時間: 2026-08-02 | 整體評分: 95% ✅</a:t>
+              <a:rPr sz="1188" b="0" i="0">
+                <a:solidFill>
+                  <a:srgbClr val="232F3E">
+                    <a:alpha val="100000"/>
+                  </a:srgbClr>
+                </a:solidFill>
+                <a:latin typeface="Arial"/>
+                <a:ea typeface="Arial"/>
+                <a:cs typeface="Arial"/>
+              </a:rPr>
+              <a:t>• 8+ speckit 命令執行  • 5 個 feature branches  • 架構驗證 (claude-code)</a:t>
+            </a:r>
+          </a:p>
+          <a:p>
+            <a:pPr algn="l"/>
+            <a:r>
+              <a:rPr sz="1188" b="0" i="0">
+                <a:solidFill>
+                  <a:srgbClr val="232F3E">
+                    <a:alpha val="100000"/>
+                  </a:srgbClr>
+                </a:solidFill>
+                <a:latin typeface="Arial"/>
+                <a:ea typeface="Arial"/>
+                <a:cs typeface="Arial"/>
+              </a:rPr>
+              <a:t>• 6 份文件生成  • 7 次 commits (08-02)  • CI/CD 全程自動化</a:t>
             </a:r>
           </a:p>
         </p:txBody>
@@ -4385,7 +4488,7 @@
             <a:avLst/>
           </a:prstGeom>
           <a:solidFill>
-            <a:srgbClr val="FFFFFF"/>
+            <a:srgbClr val="F8F9FA"/>
           </a:solidFill>
           <a:ln>
             <a:noFill/>
@@ -4416,145 +4519,7 @@
       </p:sp>
       <p:sp>
         <p:nvSpPr>
-          <p:cNvPr id="3" name="Rounded Rectangle 2"/>
-          <p:cNvSpPr/>
-          <p:nvPr/>
-        </p:nvSpPr>
-        <p:spPr>
-          <a:xfrm>
-            <a:off x="5242428" y="1577340"/>
-            <a:ext cx="1706837" cy="480060"/>
-          </a:xfrm>
-          <a:prstGeom prst="roundRect">
-            <a:avLst>
-              <a:gd name="adj" fmla="val 3000"/>
-            </a:avLst>
-          </a:prstGeom>
-          <a:solidFill>
-            <a:srgbClr val="2563EB"/>
-          </a:solidFill>
-          <a:ln>
-            <a:noFill/>
-          </a:ln>
-          <a:effectLst/>
-        </p:spPr>
-        <p:style>
-          <a:lnRef idx="1">
-            <a:schemeClr val="accent1"/>
-          </a:lnRef>
-          <a:fillRef idx="3">
-            <a:schemeClr val="accent1"/>
-          </a:fillRef>
-          <a:effectRef idx="2">
-            <a:schemeClr val="accent1"/>
-          </a:effectRef>
-          <a:fontRef idx="minor">
-            <a:schemeClr val="lt1"/>
-          </a:fontRef>
-        </p:style>
-        <p:txBody>
-          <a:bodyPr rtlCol="0" anchor="ctr"/>
-          <a:lstStyle/>
-          <a:p>
-            <a:pPr algn="ctr"/>
-          </a:p>
-        </p:txBody>
-      </p:sp>
-      <p:sp>
-        <p:nvSpPr>
-          <p:cNvPr id="4" name="Rounded Rectangle 3"/>
-          <p:cNvSpPr/>
-          <p:nvPr/>
-        </p:nvSpPr>
-        <p:spPr>
-          <a:xfrm>
-            <a:off x="3047923" y="2468880"/>
-            <a:ext cx="2194505" cy="617220"/>
-          </a:xfrm>
-          <a:prstGeom prst="roundRect">
-            <a:avLst>
-              <a:gd name="adj" fmla="val 3000"/>
-            </a:avLst>
-          </a:prstGeom>
-          <a:solidFill>
-            <a:srgbClr val="FF9900"/>
-          </a:solidFill>
-          <a:ln>
-            <a:noFill/>
-          </a:ln>
-          <a:effectLst/>
-        </p:spPr>
-        <p:style>
-          <a:lnRef idx="1">
-            <a:schemeClr val="accent1"/>
-          </a:lnRef>
-          <a:fillRef idx="3">
-            <a:schemeClr val="accent1"/>
-          </a:fillRef>
-          <a:effectRef idx="2">
-            <a:schemeClr val="accent1"/>
-          </a:effectRef>
-          <a:fontRef idx="minor">
-            <a:schemeClr val="lt1"/>
-          </a:fontRef>
-        </p:style>
-        <p:txBody>
-          <a:bodyPr rtlCol="0" anchor="ctr"/>
-          <a:lstStyle/>
-          <a:p>
-            <a:pPr algn="ctr"/>
-          </a:p>
-        </p:txBody>
-      </p:sp>
-      <p:sp>
-        <p:nvSpPr>
-          <p:cNvPr id="5" name="Rounded Rectangle 4"/>
-          <p:cNvSpPr/>
-          <p:nvPr/>
-        </p:nvSpPr>
-        <p:spPr>
-          <a:xfrm>
-            <a:off x="6949266" y="2468880"/>
-            <a:ext cx="2194505" cy="754380"/>
-          </a:xfrm>
-          <a:prstGeom prst="roundRect">
-            <a:avLst>
-              <a:gd name="adj" fmla="val 3000"/>
-            </a:avLst>
-          </a:prstGeom>
-          <a:solidFill>
-            <a:srgbClr val="DC2626"/>
-          </a:solidFill>
-          <a:ln>
-            <a:noFill/>
-          </a:ln>
-          <a:effectLst/>
-        </p:spPr>
-        <p:style>
-          <a:lnRef idx="1">
-            <a:schemeClr val="accent1"/>
-          </a:lnRef>
-          <a:fillRef idx="3">
-            <a:schemeClr val="accent1"/>
-          </a:fillRef>
-          <a:effectRef idx="2">
-            <a:schemeClr val="accent1"/>
-          </a:effectRef>
-          <a:fontRef idx="minor">
-            <a:schemeClr val="lt1"/>
-          </a:fontRef>
-        </p:style>
-        <p:txBody>
-          <a:bodyPr rtlCol="0" anchor="ctr"/>
-          <a:lstStyle/>
-          <a:p>
-            <a:pPr algn="ctr"/>
-          </a:p>
-        </p:txBody>
-      </p:sp>
-      <p:sp>
-        <p:nvSpPr>
-          <p:cNvPr id="6" name="TextBox 5"/>
+          <p:cNvPr id="3" name="TextBox 2"/>
           <p:cNvSpPr txBox="1"/>
           <p:nvPr/>
         </p:nvSpPr>
@@ -4586,21 +4551,21 @@
                 <a:ea typeface="Arial"/>
                 <a:cs typeface="Arial"/>
               </a:rPr>
-              <a:t>實際架構圖 (已驗證)</a:t>
-            </a:r>
-          </a:p>
-        </p:txBody>
-      </p:sp>
-      <p:sp>
-        <p:nvSpPr>
-          <p:cNvPr id="7" name="TextBox 6"/>
+              <a:t>完整驗證結果</a:t>
+            </a:r>
+          </a:p>
+        </p:txBody>
+      </p:sp>
+      <p:sp>
+        <p:nvSpPr>
+          <p:cNvPr id="4" name="TextBox 3"/>
           <p:cNvSpPr txBox="1"/>
           <p:nvPr/>
         </p:nvSpPr>
         <p:spPr>
           <a:xfrm>
-            <a:off x="1219169" y="1165860"/>
-            <a:ext cx="9753356" cy="274320"/>
+            <a:off x="1219169" y="1234440"/>
+            <a:ext cx="9753356" cy="342900"/>
           </a:xfrm>
           <a:prstGeom prst="rect">
             <a:avLst/>
@@ -4615,31 +4580,31 @@
           <a:p>
             <a:pPr algn="ctr"/>
             <a:r>
-              <a:rPr sz="1512" b="1" i="0">
-                <a:solidFill>
-                  <a:srgbClr val="DC2626">
-                    <a:alpha val="100000"/>
-                  </a:srgbClr>
-                </a:solidFill>
-                <a:latin typeface="Arial"/>
-                <a:ea typeface="Arial"/>
-                <a:cs typeface="Arial"/>
-              </a:rPr>
-              <a:t>前端直連 AWS 服務 | 無中介層 Lambda</a:t>
-            </a:r>
-          </a:p>
-        </p:txBody>
-      </p:sp>
-      <p:sp>
-        <p:nvSpPr>
-          <p:cNvPr id="8" name="TextBox 7"/>
+              <a:rPr sz="2160" b="1" i="0">
+                <a:solidFill>
+                  <a:srgbClr val="16A34A">
+                    <a:alpha val="100000"/>
+                  </a:srgbClr>
+                </a:solidFill>
+                <a:latin typeface="Arial"/>
+                <a:ea typeface="Arial"/>
+                <a:cs typeface="Arial"/>
+              </a:rPr>
+              <a:t>✅ 所有核心服務已驗證並運作中</a:t>
+            </a:r>
+          </a:p>
+        </p:txBody>
+      </p:sp>
+      <p:sp>
+        <p:nvSpPr>
+          <p:cNvPr id="5" name="TextBox 4"/>
           <p:cNvSpPr txBox="1"/>
           <p:nvPr/>
         </p:nvSpPr>
         <p:spPr>
           <a:xfrm>
-            <a:off x="5242428" y="1645920"/>
-            <a:ext cx="1706837" cy="411480"/>
+            <a:off x="975335" y="1920240"/>
+            <a:ext cx="3291757" cy="342900"/>
           </a:xfrm>
           <a:prstGeom prst="rect">
             <a:avLst/>
@@ -4652,49 +4617,120 @@
           </a:bodyPr>
           <a:lstStyle/>
           <a:p>
-            <a:pPr algn="ctr"/>
-            <a:r>
-              <a:rPr sz="1512" b="1" i="0">
-                <a:solidFill>
-                  <a:srgbClr val="FFFFFF">
-                    <a:alpha val="100000"/>
-                  </a:srgbClr>
-                </a:solidFill>
-                <a:latin typeface="Arial"/>
-                <a:ea typeface="Arial"/>
-                <a:cs typeface="Arial"/>
-              </a:rPr>
-              <a:t>User</a:t>
-            </a:r>
-          </a:p>
-          <a:p>
-            <a:pPr algn="ctr"/>
-            <a:r>
-              <a:rPr sz="1512" b="1" i="0">
-                <a:solidFill>
-                  <a:srgbClr val="FFFFFF">
-                    <a:alpha val="100000"/>
-                  </a:srgbClr>
-                </a:solidFill>
-                <a:latin typeface="Arial"/>
-                <a:ea typeface="Arial"/>
-                <a:cs typeface="Arial"/>
-              </a:rPr>
-              <a:t>(Browser)</a:t>
-            </a:r>
-          </a:p>
-        </p:txBody>
-      </p:sp>
-      <p:sp>
-        <p:nvSpPr>
-          <p:cNvPr id="9" name="TextBox 8"/>
+            <a:pPr algn="l"/>
+            <a:r>
+              <a:rPr sz="1728" b="1" i="0">
+                <a:solidFill>
+                  <a:srgbClr val="FF9900">
+                    <a:alpha val="100000"/>
+                  </a:srgbClr>
+                </a:solidFill>
+                <a:latin typeface="Arial"/>
+                <a:ea typeface="Arial"/>
+                <a:cs typeface="Arial"/>
+              </a:rPr>
+              <a:t>CloudFront CDN</a:t>
+            </a:r>
+          </a:p>
+        </p:txBody>
+      </p:sp>
+      <p:sp>
+        <p:nvSpPr>
+          <p:cNvPr id="6" name="TextBox 5"/>
           <p:cNvSpPr txBox="1"/>
           <p:nvPr/>
         </p:nvSpPr>
         <p:spPr>
           <a:xfrm>
-            <a:off x="3047923" y="2537460"/>
-            <a:ext cx="2194505" cy="480060"/>
+            <a:off x="975335" y="2331720"/>
+            <a:ext cx="3291757" cy="960120"/>
+          </a:xfrm>
+          <a:prstGeom prst="rect">
+            <a:avLst/>
+          </a:prstGeom>
+          <a:noFill/>
+        </p:spPr>
+        <p:txBody>
+          <a:bodyPr wrap="square" anchor="t" lIns="0" rIns="0" tIns="0" bIns="0">
+            <a:spAutoFit/>
+          </a:bodyPr>
+          <a:lstStyle/>
+          <a:p>
+            <a:pPr algn="l"/>
+            <a:r>
+              <a:rPr sz="1296" b="0" i="0">
+                <a:solidFill>
+                  <a:srgbClr val="232F3E">
+                    <a:alpha val="100000"/>
+                  </a:srgbClr>
+                </a:solidFill>
+                <a:latin typeface="Arial"/>
+                <a:ea typeface="Arial"/>
+                <a:cs typeface="Arial"/>
+              </a:rPr>
+              <a:t>• ID: E1NHT4ZC7ZFGUP</a:t>
+            </a:r>
+          </a:p>
+          <a:p>
+            <a:pPr algn="l"/>
+            <a:r>
+              <a:rPr sz="1296" b="0" i="0">
+                <a:solidFill>
+                  <a:srgbClr val="232F3E">
+                    <a:alpha val="100000"/>
+                  </a:srgbClr>
+                </a:solidFill>
+                <a:latin typeface="Arial"/>
+                <a:ea typeface="Arial"/>
+                <a:cs typeface="Arial"/>
+              </a:rPr>
+              <a:t>• Status: Deployed ✅</a:t>
+            </a:r>
+          </a:p>
+          <a:p>
+            <a:pPr algn="l"/>
+            <a:r>
+              <a:rPr sz="1296" b="0" i="0">
+                <a:solidFill>
+                  <a:srgbClr val="232F3E">
+                    <a:alpha val="100000"/>
+                  </a:srgbClr>
+                </a:solidFill>
+                <a:latin typeface="Arial"/>
+                <a:ea typeface="Arial"/>
+                <a:cs typeface="Arial"/>
+              </a:rPr>
+              <a:t>• d1qintm5rk17ye.cloudfront.net</a:t>
+            </a:r>
+          </a:p>
+          <a:p>
+            <a:pPr algn="l"/>
+            <a:r>
+              <a:rPr sz="1296" b="0" i="0">
+                <a:solidFill>
+                  <a:srgbClr val="232F3E">
+                    <a:alpha val="100000"/>
+                  </a:srgbClr>
+                </a:solidFill>
+                <a:latin typeface="Arial"/>
+                <a:ea typeface="Arial"/>
+                <a:cs typeface="Arial"/>
+              </a:rPr>
+              <a:t>• HTTP/2 + IPv6</a:t>
+            </a:r>
+          </a:p>
+        </p:txBody>
+      </p:sp>
+      <p:sp>
+        <p:nvSpPr>
+          <p:cNvPr id="7" name="TextBox 6"/>
+          <p:cNvSpPr txBox="1"/>
+          <p:nvPr/>
+        </p:nvSpPr>
+        <p:spPr>
+          <a:xfrm>
+            <a:off x="4510927" y="1920240"/>
+            <a:ext cx="3291757" cy="342900"/>
           </a:xfrm>
           <a:prstGeom prst="rect">
             <a:avLst/>
@@ -4707,49 +4743,120 @@
           </a:bodyPr>
           <a:lstStyle/>
           <a:p>
-            <a:pPr algn="ctr"/>
-            <a:r>
-              <a:rPr sz="1404" b="1" i="0">
-                <a:solidFill>
-                  <a:srgbClr val="FFFFFF">
-                    <a:alpha val="100000"/>
-                  </a:srgbClr>
-                </a:solidFill>
-                <a:latin typeface="Arial"/>
-                <a:ea typeface="Arial"/>
-                <a:cs typeface="Arial"/>
-              </a:rPr>
-              <a:t>CloudFront CDN</a:t>
-            </a:r>
-          </a:p>
-          <a:p>
-            <a:pPr algn="ctr"/>
-            <a:r>
-              <a:rPr sz="1404" b="1" i="0">
-                <a:solidFill>
-                  <a:srgbClr val="FFFFFF">
-                    <a:alpha val="100000"/>
-                  </a:srgbClr>
-                </a:solidFill>
-                <a:latin typeface="Arial"/>
-                <a:ea typeface="Arial"/>
-                <a:cs typeface="Arial"/>
-              </a:rPr>
-              <a:t>E1NHT4ZC7ZFGUP</a:t>
-            </a:r>
-          </a:p>
-        </p:txBody>
-      </p:sp>
-      <p:sp>
-        <p:nvSpPr>
-          <p:cNvPr id="10" name="TextBox 9"/>
+            <a:pPr algn="l"/>
+            <a:r>
+              <a:rPr sz="1728" b="1" i="0">
+                <a:solidFill>
+                  <a:srgbClr val="FF9900">
+                    <a:alpha val="100000"/>
+                  </a:srgbClr>
+                </a:solidFill>
+                <a:latin typeface="Arial"/>
+                <a:ea typeface="Arial"/>
+                <a:cs typeface="Arial"/>
+              </a:rPr>
+              <a:t>EC2 後端 (LiveCaption)</a:t>
+            </a:r>
+          </a:p>
+        </p:txBody>
+      </p:sp>
+      <p:sp>
+        <p:nvSpPr>
+          <p:cNvPr id="8" name="TextBox 7"/>
           <p:cNvSpPr txBox="1"/>
           <p:nvPr/>
         </p:nvSpPr>
         <p:spPr>
           <a:xfrm>
-            <a:off x="6949266" y="2537460"/>
-            <a:ext cx="2194505" cy="617220"/>
+            <a:off x="4510927" y="2331720"/>
+            <a:ext cx="3291757" cy="960120"/>
+          </a:xfrm>
+          <a:prstGeom prst="rect">
+            <a:avLst/>
+          </a:prstGeom>
+          <a:noFill/>
+        </p:spPr>
+        <p:txBody>
+          <a:bodyPr wrap="square" anchor="t" lIns="0" rIns="0" tIns="0" bIns="0">
+            <a:spAutoFit/>
+          </a:bodyPr>
+          <a:lstStyle/>
+          <a:p>
+            <a:pPr algn="l"/>
+            <a:r>
+              <a:rPr sz="1296" b="0" i="0">
+                <a:solidFill>
+                  <a:srgbClr val="232F3E">
+                    <a:alpha val="100000"/>
+                  </a:srgbClr>
+                </a:solidFill>
+                <a:latin typeface="Arial"/>
+                <a:ea typeface="Arial"/>
+                <a:cs typeface="Arial"/>
+              </a:rPr>
+              <a:t>• Instance: t3.micro ✅</a:t>
+            </a:r>
+          </a:p>
+          <a:p>
+            <a:pPr algn="l"/>
+            <a:r>
+              <a:rPr sz="1296" b="0" i="0">
+                <a:solidFill>
+                  <a:srgbClr val="232F3E">
+                    <a:alpha val="100000"/>
+                  </a:srgbClr>
+                </a:solidFill>
+                <a:latin typeface="Arial"/>
+                <a:ea typeface="Arial"/>
+                <a:cs typeface="Arial"/>
+              </a:rPr>
+              <a:t>• WebSocket 服務 (Python)</a:t>
+            </a:r>
+          </a:p>
+          <a:p>
+            <a:pPr algn="l"/>
+            <a:r>
+              <a:rPr sz="1296" b="0" i="0">
+                <a:solidFill>
+                  <a:srgbClr val="232F3E">
+                    <a:alpha val="100000"/>
+                  </a:srgbClr>
+                </a:solidFill>
+                <a:latin typeface="Arial"/>
+                <a:ea typeface="Arial"/>
+                <a:cs typeface="Arial"/>
+              </a:rPr>
+              <a:t>• Transcribe Streaming 封裝</a:t>
+            </a:r>
+          </a:p>
+          <a:p>
+            <a:pPr algn="l"/>
+            <a:r>
+              <a:rPr sz="1296" b="0" i="0">
+                <a:solidFill>
+                  <a:srgbClr val="232F3E">
+                    <a:alpha val="100000"/>
+                  </a:srgbClr>
+                </a:solidFill>
+                <a:latin typeface="Arial"/>
+                <a:ea typeface="Arial"/>
+                <a:cs typeface="Arial"/>
+              </a:rPr>
+              <a:t>• 說話者辨識 + 多語言</a:t>
+            </a:r>
+          </a:p>
+        </p:txBody>
+      </p:sp>
+      <p:sp>
+        <p:nvSpPr>
+          <p:cNvPr id="9" name="TextBox 8"/>
+          <p:cNvSpPr txBox="1"/>
+          <p:nvPr/>
+        </p:nvSpPr>
+        <p:spPr>
+          <a:xfrm>
+            <a:off x="8046518" y="1920240"/>
+            <a:ext cx="3291757" cy="342900"/>
           </a:xfrm>
           <a:prstGeom prst="rect">
             <a:avLst/>
@@ -4762,51 +4869,106 @@
           </a:bodyPr>
           <a:lstStyle/>
           <a:p>
-            <a:pPr algn="ctr"/>
-            <a:r>
-              <a:rPr sz="1404" b="1" i="0">
-                <a:solidFill>
-                  <a:srgbClr val="FFFFFF">
-                    <a:alpha val="100000"/>
-                  </a:srgbClr>
-                </a:solidFill>
-                <a:latin typeface="Arial"/>
-                <a:ea typeface="Arial"/>
-                <a:cs typeface="Arial"/>
-              </a:rPr>
-              <a:t>EC2 Backend</a:t>
-            </a:r>
-          </a:p>
-          <a:p>
-            <a:pPr algn="ctr"/>
-            <a:r>
-              <a:rPr sz="1404" b="1" i="0">
-                <a:solidFill>
-                  <a:srgbClr val="FFFFFF">
-                    <a:alpha val="100000"/>
-                  </a:srgbClr>
-                </a:solidFill>
-                <a:latin typeface="Arial"/>
-                <a:ea typeface="Arial"/>
-                <a:cs typeface="Arial"/>
-              </a:rPr>
-              <a:t>LiveCaption</a:t>
-            </a:r>
-          </a:p>
-          <a:p>
-            <a:pPr algn="ctr"/>
-            <a:r>
-              <a:rPr sz="1404" b="1" i="0">
-                <a:solidFill>
-                  <a:srgbClr val="FFFFFF">
-                    <a:alpha val="100000"/>
-                  </a:srgbClr>
-                </a:solidFill>
-                <a:latin typeface="Arial"/>
-                <a:ea typeface="Arial"/>
-                <a:cs typeface="Arial"/>
-              </a:rPr>
-              <a:t>WebSocket</a:t>
+            <a:pPr algn="l"/>
+            <a:r>
+              <a:rPr sz="1728" b="1" i="0">
+                <a:solidFill>
+                  <a:srgbClr val="FF9900">
+                    <a:alpha val="100000"/>
+                  </a:srgbClr>
+                </a:solidFill>
+                <a:latin typeface="Arial"/>
+                <a:ea typeface="Arial"/>
+                <a:cs typeface="Arial"/>
+              </a:rPr>
+              <a:t>Bedrock Knowledge Base</a:t>
+            </a:r>
+          </a:p>
+        </p:txBody>
+      </p:sp>
+      <p:sp>
+        <p:nvSpPr>
+          <p:cNvPr id="10" name="TextBox 9"/>
+          <p:cNvSpPr txBox="1"/>
+          <p:nvPr/>
+        </p:nvSpPr>
+        <p:spPr>
+          <a:xfrm>
+            <a:off x="8046518" y="2331720"/>
+            <a:ext cx="3291757" cy="960120"/>
+          </a:xfrm>
+          <a:prstGeom prst="rect">
+            <a:avLst/>
+          </a:prstGeom>
+          <a:noFill/>
+        </p:spPr>
+        <p:txBody>
+          <a:bodyPr wrap="square" anchor="t" lIns="0" rIns="0" tIns="0" bIns="0">
+            <a:spAutoFit/>
+          </a:bodyPr>
+          <a:lstStyle/>
+          <a:p>
+            <a:pPr algn="l"/>
+            <a:r>
+              <a:rPr sz="1296" b="0" i="0">
+                <a:solidFill>
+                  <a:srgbClr val="232F3E">
+                    <a:alpha val="100000"/>
+                  </a:srgbClr>
+                </a:solidFill>
+                <a:latin typeface="Arial"/>
+                <a:ea typeface="Arial"/>
+                <a:cs typeface="Arial"/>
+              </a:rPr>
+              <a:t>• KB: H4NWXXP6DZ ✅</a:t>
+            </a:r>
+          </a:p>
+          <a:p>
+            <a:pPr algn="l"/>
+            <a:r>
+              <a:rPr sz="1296" b="0" i="0">
+                <a:solidFill>
+                  <a:srgbClr val="232F3E">
+                    <a:alpha val="100000"/>
+                  </a:srgbClr>
+                </a:solidFill>
+                <a:latin typeface="Arial"/>
+                <a:ea typeface="Arial"/>
+                <a:cs typeface="Arial"/>
+              </a:rPr>
+              <a:t>• Model: Claude Sonnet 4</a:t>
+            </a:r>
+          </a:p>
+          <a:p>
+            <a:pPr algn="l"/>
+            <a:r>
+              <a:rPr sz="1296" b="0" i="0">
+                <a:solidFill>
+                  <a:srgbClr val="232F3E">
+                    <a:alpha val="100000"/>
+                  </a:srgbClr>
+                </a:solidFill>
+                <a:latin typeface="Arial"/>
+                <a:ea typeface="Arial"/>
+                <a:cs typeface="Arial"/>
+              </a:rPr>
+              <a:t>• S3 Vectors 儲存</a:t>
+            </a:r>
+          </a:p>
+          <a:p>
+            <a:pPr algn="l"/>
+            <a:r>
+              <a:rPr sz="1296" b="0" i="0">
+                <a:solidFill>
+                  <a:srgbClr val="232F3E">
+                    <a:alpha val="100000"/>
+                  </a:srgbClr>
+                </a:solidFill>
+                <a:latin typeface="Arial"/>
+                <a:ea typeface="Arial"/>
+                <a:cs typeface="Arial"/>
+              </a:rPr>
+              <a:t>• RetrieveAndGenerate API</a:t>
             </a:r>
           </a:p>
         </p:txBody>
@@ -4819,8 +4981,8 @@
         </p:nvSpPr>
         <p:spPr>
           <a:xfrm>
-            <a:off x="1219169" y="3703320"/>
-            <a:ext cx="1584920" cy="411480"/>
+            <a:off x="975335" y="3566160"/>
+            <a:ext cx="3291757" cy="342900"/>
           </a:xfrm>
           <a:prstGeom prst="rect">
             <a:avLst/>
@@ -4833,35 +4995,19 @@
           </a:bodyPr>
           <a:lstStyle/>
           <a:p>
-            <a:pPr algn="ctr"/>
-            <a:r>
-              <a:rPr sz="1296" b="1" i="0">
-                <a:solidFill>
-                  <a:srgbClr val="232F3E">
-                    <a:alpha val="100000"/>
-                  </a:srgbClr>
-                </a:solidFill>
-                <a:latin typeface="Arial"/>
-                <a:ea typeface="Arial"/>
-                <a:cs typeface="Arial"/>
-              </a:rPr>
-              <a:t>S3</a:t>
-            </a:r>
-          </a:p>
-          <a:p>
-            <a:pPr algn="ctr"/>
-            <a:r>
-              <a:rPr sz="1296" b="1" i="0">
-                <a:solidFill>
-                  <a:srgbClr val="232F3E">
-                    <a:alpha val="100000"/>
-                  </a:srgbClr>
-                </a:solidFill>
-                <a:latin typeface="Arial"/>
-                <a:ea typeface="Arial"/>
-                <a:cs typeface="Arial"/>
-              </a:rPr>
-              <a:t>React SPA</a:t>
+            <a:pPr algn="l"/>
+            <a:r>
+              <a:rPr sz="1728" b="1" i="0">
+                <a:solidFill>
+                  <a:srgbClr val="FF9900">
+                    <a:alpha val="100000"/>
+                  </a:srgbClr>
+                </a:solidFill>
+                <a:latin typeface="Arial"/>
+                <a:ea typeface="Arial"/>
+                <a:cs typeface="Arial"/>
+              </a:rPr>
+              <a:t>DynamoDB (3 表)</a:t>
             </a:r>
           </a:p>
         </p:txBody>
@@ -4874,8 +5020,95 @@
         </p:nvSpPr>
         <p:spPr>
           <a:xfrm>
-            <a:off x="3291757" y="3703320"/>
-            <a:ext cx="1584920" cy="411480"/>
+            <a:off x="975335" y="3977639"/>
+            <a:ext cx="3291757" cy="960120"/>
+          </a:xfrm>
+          <a:prstGeom prst="rect">
+            <a:avLst/>
+          </a:prstGeom>
+          <a:noFill/>
+        </p:spPr>
+        <p:txBody>
+          <a:bodyPr wrap="square" anchor="t" lIns="0" rIns="0" tIns="0" bIns="0">
+            <a:spAutoFit/>
+          </a:bodyPr>
+          <a:lstStyle/>
+          <a:p>
+            <a:pPr algn="l"/>
+            <a:r>
+              <a:rPr sz="1296" b="0" i="0">
+                <a:solidFill>
+                  <a:srgbClr val="232F3E">
+                    <a:alpha val="100000"/>
+                  </a:srgbClr>
+                </a:solidFill>
+                <a:latin typeface="Arial"/>
+                <a:ea typeface="Arial"/>
+                <a:cs typeface="Arial"/>
+              </a:rPr>
+              <a:t>• conversations (對話記錄)</a:t>
+            </a:r>
+          </a:p>
+          <a:p>
+            <a:pPr algn="l"/>
+            <a:r>
+              <a:rPr sz="1296" b="0" i="0">
+                <a:solidFill>
+                  <a:srgbClr val="232F3E">
+                    <a:alpha val="100000"/>
+                  </a:srgbClr>
+                </a:solidFill>
+                <a:latin typeface="Arial"/>
+                <a:ea typeface="Arial"/>
+                <a:cs typeface="Arial"/>
+              </a:rPr>
+              <a:t>• elder_profile (11 筆)</a:t>
+            </a:r>
+          </a:p>
+          <a:p>
+            <a:pPr algn="l"/>
+            <a:r>
+              <a:rPr sz="1296" b="0" i="0">
+                <a:solidFill>
+                  <a:srgbClr val="232F3E">
+                    <a:alpha val="100000"/>
+                  </a:srgbClr>
+                </a:solidFill>
+                <a:latin typeface="Arial"/>
+                <a:ea typeface="Arial"/>
+                <a:cs typeface="Arial"/>
+              </a:rPr>
+              <a:t>• elder_memory (事件記錄)</a:t>
+            </a:r>
+          </a:p>
+          <a:p>
+            <a:pPr algn="l"/>
+            <a:r>
+              <a:rPr sz="1296" b="0" i="0">
+                <a:solidFill>
+                  <a:srgbClr val="232F3E">
+                    <a:alpha val="100000"/>
+                  </a:srgbClr>
+                </a:solidFill>
+                <a:latin typeface="Arial"/>
+                <a:ea typeface="Arial"/>
+                <a:cs typeface="Arial"/>
+              </a:rPr>
+              <a:t>✅ All ACTIVE</a:t>
+            </a:r>
+          </a:p>
+        </p:txBody>
+      </p:sp>
+      <p:sp>
+        <p:nvSpPr>
+          <p:cNvPr id="13" name="TextBox 12"/>
+          <p:cNvSpPr txBox="1"/>
+          <p:nvPr/>
+        </p:nvSpPr>
+        <p:spPr>
+          <a:xfrm>
+            <a:off x="4510927" y="3566160"/>
+            <a:ext cx="3291757" cy="342900"/>
           </a:xfrm>
           <a:prstGeom prst="rect">
             <a:avLst/>
@@ -4888,49 +5121,120 @@
           </a:bodyPr>
           <a:lstStyle/>
           <a:p>
-            <a:pPr algn="ctr"/>
-            <a:r>
-              <a:rPr sz="1296" b="1" i="0">
-                <a:solidFill>
-                  <a:srgbClr val="232F3E">
-                    <a:alpha val="100000"/>
-                  </a:srgbClr>
-                </a:solidFill>
-                <a:latin typeface="Arial"/>
-                <a:ea typeface="Arial"/>
-                <a:cs typeface="Arial"/>
-              </a:rPr>
-              <a:t>Cognito</a:t>
-            </a:r>
-          </a:p>
-          <a:p>
-            <a:pPr algn="ctr"/>
-            <a:r>
-              <a:rPr sz="1296" b="1" i="0">
-                <a:solidFill>
-                  <a:srgbClr val="232F3E">
-                    <a:alpha val="100000"/>
-                  </a:srgbClr>
-                </a:solidFill>
-                <a:latin typeface="Arial"/>
-                <a:ea typeface="Arial"/>
-                <a:cs typeface="Arial"/>
-              </a:rPr>
-              <a:t>Identity</a:t>
-            </a:r>
-          </a:p>
-        </p:txBody>
-      </p:sp>
-      <p:sp>
-        <p:nvSpPr>
-          <p:cNvPr id="13" name="TextBox 12"/>
+            <a:pPr algn="l"/>
+            <a:r>
+              <a:rPr sz="1728" b="1" i="0">
+                <a:solidFill>
+                  <a:srgbClr val="FF9900">
+                    <a:alpha val="100000"/>
+                  </a:srgbClr>
+                </a:solidFill>
+                <a:latin typeface="Arial"/>
+                <a:ea typeface="Arial"/>
+                <a:cs typeface="Arial"/>
+              </a:rPr>
+              <a:t>Cognito + 語音服務</a:t>
+            </a:r>
+          </a:p>
+        </p:txBody>
+      </p:sp>
+      <p:sp>
+        <p:nvSpPr>
+          <p:cNvPr id="14" name="TextBox 13"/>
           <p:cNvSpPr txBox="1"/>
           <p:nvPr/>
         </p:nvSpPr>
         <p:spPr>
           <a:xfrm>
-            <a:off x="5364345" y="3703320"/>
-            <a:ext cx="1584920" cy="411480"/>
+            <a:off x="4510927" y="3977639"/>
+            <a:ext cx="3291757" cy="960120"/>
+          </a:xfrm>
+          <a:prstGeom prst="rect">
+            <a:avLst/>
+          </a:prstGeom>
+          <a:noFill/>
+        </p:spPr>
+        <p:txBody>
+          <a:bodyPr wrap="square" anchor="t" lIns="0" rIns="0" tIns="0" bIns="0">
+            <a:spAutoFit/>
+          </a:bodyPr>
+          <a:lstStyle/>
+          <a:p>
+            <a:pPr algn="l"/>
+            <a:r>
+              <a:rPr sz="1296" b="0" i="0">
+                <a:solidFill>
+                  <a:srgbClr val="232F3E">
+                    <a:alpha val="100000"/>
+                  </a:srgbClr>
+                </a:solidFill>
+                <a:latin typeface="Arial"/>
+                <a:ea typeface="Arial"/>
+                <a:cs typeface="Arial"/>
+              </a:rPr>
+              <a:t>• Identity Pool ✅</a:t>
+            </a:r>
+          </a:p>
+          <a:p>
+            <a:pPr algn="l"/>
+            <a:r>
+              <a:rPr sz="1296" b="0" i="0">
+                <a:solidFill>
+                  <a:srgbClr val="232F3E">
+                    <a:alpha val="100000"/>
+                  </a:srgbClr>
+                </a:solidFill>
+                <a:latin typeface="Arial"/>
+                <a:ea typeface="Arial"/>
+                <a:cs typeface="Arial"/>
+              </a:rPr>
+              <a:t>• Transcribe (zh-TW)</a:t>
+            </a:r>
+          </a:p>
+          <a:p>
+            <a:pPr algn="l"/>
+            <a:r>
+              <a:rPr sz="1296" b="0" i="0">
+                <a:solidFill>
+                  <a:srgbClr val="232F3E">
+                    <a:alpha val="100000"/>
+                  </a:srgbClr>
+                </a:solidFill>
+                <a:latin typeface="Arial"/>
+                <a:ea typeface="Arial"/>
+                <a:cs typeface="Arial"/>
+              </a:rPr>
+              <a:t>• Polly (Zhiyu Neural)</a:t>
+            </a:r>
+          </a:p>
+          <a:p>
+            <a:pPr algn="l"/>
+            <a:r>
+              <a:rPr sz="1296" b="0" i="0">
+                <a:solidFill>
+                  <a:srgbClr val="232F3E">
+                    <a:alpha val="100000"/>
+                  </a:srgbClr>
+                </a:solidFill>
+                <a:latin typeface="Arial"/>
+                <a:ea typeface="Arial"/>
+                <a:cs typeface="Arial"/>
+              </a:rPr>
+              <a:t>• 最小 IAM 權限</a:t>
+            </a:r>
+          </a:p>
+        </p:txBody>
+      </p:sp>
+      <p:sp>
+        <p:nvSpPr>
+          <p:cNvPr id="15" name="TextBox 14"/>
+          <p:cNvSpPr txBox="1"/>
+          <p:nvPr/>
+        </p:nvSpPr>
+        <p:spPr>
+          <a:xfrm>
+            <a:off x="8046518" y="3566160"/>
+            <a:ext cx="3291757" cy="342900"/>
           </a:xfrm>
           <a:prstGeom prst="rect">
             <a:avLst/>
@@ -4943,49 +5247,120 @@
           </a:bodyPr>
           <a:lstStyle/>
           <a:p>
-            <a:pPr algn="ctr"/>
-            <a:r>
-              <a:rPr sz="1296" b="1" i="0">
-                <a:solidFill>
-                  <a:srgbClr val="232F3E">
-                    <a:alpha val="100000"/>
-                  </a:srgbClr>
-                </a:solidFill>
-                <a:latin typeface="Arial"/>
-                <a:ea typeface="Arial"/>
-                <a:cs typeface="Arial"/>
-              </a:rPr>
-              <a:t>Transcribe</a:t>
-            </a:r>
-          </a:p>
-          <a:p>
-            <a:pPr algn="ctr"/>
-            <a:r>
-              <a:rPr sz="1296" b="1" i="0">
-                <a:solidFill>
-                  <a:srgbClr val="232F3E">
-                    <a:alpha val="100000"/>
-                  </a:srgbClr>
-                </a:solidFill>
-                <a:latin typeface="Arial"/>
-                <a:ea typeface="Arial"/>
-                <a:cs typeface="Arial"/>
-              </a:rPr>
-              <a:t>Streaming</a:t>
-            </a:r>
-          </a:p>
-        </p:txBody>
-      </p:sp>
-      <p:sp>
-        <p:nvSpPr>
-          <p:cNvPr id="14" name="TextBox 13"/>
+            <a:pPr algn="l"/>
+            <a:r>
+              <a:rPr sz="1728" b="1" i="0">
+                <a:solidFill>
+                  <a:srgbClr val="FF9900">
+                    <a:alpha val="100000"/>
+                  </a:srgbClr>
+                </a:solidFill>
+                <a:latin typeface="Arial"/>
+                <a:ea typeface="Arial"/>
+                <a:cs typeface="Arial"/>
+              </a:rPr>
+              <a:t>Lambda 函數群</a:t>
+            </a:r>
+          </a:p>
+        </p:txBody>
+      </p:sp>
+      <p:sp>
+        <p:nvSpPr>
+          <p:cNvPr id="16" name="TextBox 15"/>
           <p:cNvSpPr txBox="1"/>
           <p:nvPr/>
         </p:nvSpPr>
         <p:spPr>
           <a:xfrm>
-            <a:off x="7436933" y="3703320"/>
-            <a:ext cx="1584920" cy="411480"/>
+            <a:off x="8046518" y="3977639"/>
+            <a:ext cx="3291757" cy="960120"/>
+          </a:xfrm>
+          <a:prstGeom prst="rect">
+            <a:avLst/>
+          </a:prstGeom>
+          <a:noFill/>
+        </p:spPr>
+        <p:txBody>
+          <a:bodyPr wrap="square" anchor="t" lIns="0" rIns="0" tIns="0" bIns="0">
+            <a:spAutoFit/>
+          </a:bodyPr>
+          <a:lstStyle/>
+          <a:p>
+            <a:pPr algn="l"/>
+            <a:r>
+              <a:rPr sz="1296" b="0" i="0">
+                <a:solidFill>
+                  <a:srgbClr val="232F3E">
+                    <a:alpha val="100000"/>
+                  </a:srgbClr>
+                </a:solidFill>
+                <a:latin typeface="Arial"/>
+                <a:ea typeface="Arial"/>
+                <a:cs typeface="Arial"/>
+              </a:rPr>
+              <a:t>• caremate-ai-speech-dev</a:t>
+            </a:r>
+          </a:p>
+          <a:p>
+            <a:pPr algn="l"/>
+            <a:r>
+              <a:rPr sz="1296" b="0" i="0">
+                <a:solidFill>
+                  <a:srgbClr val="232F3E">
+                    <a:alpha val="100000"/>
+                  </a:srgbClr>
+                </a:solidFill>
+                <a:latin typeface="Arial"/>
+                <a:ea typeface="Arial"/>
+                <a:cs typeface="Arial"/>
+              </a:rPr>
+              <a:t>• caremate-ai-chat-dev</a:t>
+            </a:r>
+          </a:p>
+          <a:p>
+            <a:pPr algn="l"/>
+            <a:r>
+              <a:rPr sz="1296" b="0" i="0">
+                <a:solidFill>
+                  <a:srgbClr val="232F3E">
+                    <a:alpha val="100000"/>
+                  </a:srgbClr>
+                </a:solidFill>
+                <a:latin typeface="Arial"/>
+                <a:ea typeface="Arial"/>
+                <a:cs typeface="Arial"/>
+              </a:rPr>
+              <a:t>• caremate-ai-summary-dev</a:t>
+            </a:r>
+          </a:p>
+          <a:p>
+            <a:pPr algn="l"/>
+            <a:r>
+              <a:rPr sz="1296" b="0" i="0">
+                <a:solidFill>
+                  <a:srgbClr val="232F3E">
+                    <a:alpha val="100000"/>
+                  </a:srgbClr>
+                </a:solidFill>
+                <a:latin typeface="Arial"/>
+                <a:ea typeface="Arial"/>
+                <a:cs typeface="Arial"/>
+              </a:rPr>
+              <a:t>• +2 more functions</a:t>
+            </a:r>
+          </a:p>
+        </p:txBody>
+      </p:sp>
+      <p:sp>
+        <p:nvSpPr>
+          <p:cNvPr id="17" name="TextBox 16"/>
+          <p:cNvSpPr txBox="1"/>
+          <p:nvPr/>
+        </p:nvSpPr>
+        <p:spPr>
+          <a:xfrm>
+            <a:off x="1219169" y="5486400"/>
+            <a:ext cx="9753356" cy="342900"/>
           </a:xfrm>
           <a:prstGeom prst="rect">
             <a:avLst/>
@@ -5000,282 +5375,7 @@
           <a:p>
             <a:pPr algn="ctr"/>
             <a:r>
-              <a:rPr sz="1296" b="1" i="0">
-                <a:solidFill>
-                  <a:srgbClr val="232F3E">
-                    <a:alpha val="100000"/>
-                  </a:srgbClr>
-                </a:solidFill>
-                <a:latin typeface="Arial"/>
-                <a:ea typeface="Arial"/>
-                <a:cs typeface="Arial"/>
-              </a:rPr>
-              <a:t>Bedrock</a:t>
-            </a:r>
-          </a:p>
-          <a:p>
-            <a:pPr algn="ctr"/>
-            <a:r>
-              <a:rPr sz="1296" b="1" i="0">
-                <a:solidFill>
-                  <a:srgbClr val="232F3E">
-                    <a:alpha val="100000"/>
-                  </a:srgbClr>
-                </a:solidFill>
-                <a:latin typeface="Arial"/>
-                <a:ea typeface="Arial"/>
-                <a:cs typeface="Arial"/>
-              </a:rPr>
-              <a:t>KB + Claude</a:t>
-            </a:r>
-          </a:p>
-        </p:txBody>
-      </p:sp>
-      <p:sp>
-        <p:nvSpPr>
-          <p:cNvPr id="15" name="TextBox 14"/>
-          <p:cNvSpPr txBox="1"/>
-          <p:nvPr/>
-        </p:nvSpPr>
-        <p:spPr>
-          <a:xfrm>
-            <a:off x="9509522" y="3703320"/>
-            <a:ext cx="1584920" cy="411480"/>
-          </a:xfrm>
-          <a:prstGeom prst="rect">
-            <a:avLst/>
-          </a:prstGeom>
-          <a:noFill/>
-        </p:spPr>
-        <p:txBody>
-          <a:bodyPr wrap="square" anchor="ctr" lIns="0" rIns="0" tIns="0" bIns="0">
-            <a:spAutoFit/>
-          </a:bodyPr>
-          <a:lstStyle/>
-          <a:p>
-            <a:pPr algn="ctr"/>
-            <a:r>
-              <a:rPr sz="1296" b="1" i="0">
-                <a:solidFill>
-                  <a:srgbClr val="232F3E">
-                    <a:alpha val="100000"/>
-                  </a:srgbClr>
-                </a:solidFill>
-                <a:latin typeface="Arial"/>
-                <a:ea typeface="Arial"/>
-                <a:cs typeface="Arial"/>
-              </a:rPr>
-              <a:t>Polly</a:t>
-            </a:r>
-          </a:p>
-          <a:p>
-            <a:pPr algn="ctr"/>
-            <a:r>
-              <a:rPr sz="1296" b="1" i="0">
-                <a:solidFill>
-                  <a:srgbClr val="232F3E">
-                    <a:alpha val="100000"/>
-                  </a:srgbClr>
-                </a:solidFill>
-                <a:latin typeface="Arial"/>
-                <a:ea typeface="Arial"/>
-                <a:cs typeface="Arial"/>
-              </a:rPr>
-              <a:t>Zhiyu</a:t>
-            </a:r>
-          </a:p>
-        </p:txBody>
-      </p:sp>
-      <p:sp>
-        <p:nvSpPr>
-          <p:cNvPr id="16" name="TextBox 15"/>
-          <p:cNvSpPr txBox="1"/>
-          <p:nvPr/>
-        </p:nvSpPr>
-        <p:spPr>
-          <a:xfrm>
-            <a:off x="1219169" y="4800600"/>
-            <a:ext cx="4267093" cy="548640"/>
-          </a:xfrm>
-          <a:prstGeom prst="rect">
-            <a:avLst/>
-          </a:prstGeom>
-          <a:noFill/>
-        </p:spPr>
-        <p:txBody>
-          <a:bodyPr wrap="square" anchor="ctr" lIns="0" rIns="0" tIns="0" bIns="0">
-            <a:spAutoFit/>
-          </a:bodyPr>
-          <a:lstStyle/>
-          <a:p>
-            <a:pPr algn="ctr"/>
-            <a:r>
-              <a:rPr sz="1188" b="0" i="0">
-                <a:solidFill>
-                  <a:srgbClr val="232F3E">
-                    <a:alpha val="100000"/>
-                  </a:srgbClr>
-                </a:solidFill>
-                <a:latin typeface="Arial"/>
-                <a:ea typeface="Arial"/>
-                <a:cs typeface="Arial"/>
-              </a:rPr>
-              <a:t>DynamoDB (3 表)</a:t>
-            </a:r>
-          </a:p>
-          <a:p>
-            <a:pPr algn="ctr"/>
-            <a:r>
-              <a:rPr sz="1188" b="0" i="0">
-                <a:solidFill>
-                  <a:srgbClr val="232F3E">
-                    <a:alpha val="100000"/>
-                  </a:srgbClr>
-                </a:solidFill>
-                <a:latin typeface="Arial"/>
-                <a:ea typeface="Arial"/>
-                <a:cs typeface="Arial"/>
-              </a:rPr>
-              <a:t>conversations | elder_profile | elder_memory</a:t>
-            </a:r>
-          </a:p>
-        </p:txBody>
-      </p:sp>
-      <p:sp>
-        <p:nvSpPr>
-          <p:cNvPr id="17" name="TextBox 16"/>
-          <p:cNvSpPr txBox="1"/>
-          <p:nvPr/>
-        </p:nvSpPr>
-        <p:spPr>
-          <a:xfrm>
-            <a:off x="6095847" y="4800600"/>
-            <a:ext cx="2438339" cy="548640"/>
-          </a:xfrm>
-          <a:prstGeom prst="rect">
-            <a:avLst/>
-          </a:prstGeom>
-          <a:noFill/>
-        </p:spPr>
-        <p:txBody>
-          <a:bodyPr wrap="square" anchor="ctr" lIns="0" rIns="0" tIns="0" bIns="0">
-            <a:spAutoFit/>
-          </a:bodyPr>
-          <a:lstStyle/>
-          <a:p>
-            <a:pPr algn="ctr"/>
-            <a:r>
-              <a:rPr sz="1188" b="0" i="0">
-                <a:solidFill>
-                  <a:srgbClr val="232F3E">
-                    <a:alpha val="100000"/>
-                  </a:srgbClr>
-                </a:solidFill>
-                <a:latin typeface="Arial"/>
-                <a:ea typeface="Arial"/>
-                <a:cs typeface="Arial"/>
-              </a:rPr>
-              <a:t>S3 Vectors</a:t>
-            </a:r>
-          </a:p>
-          <a:p>
-            <a:pPr algn="ctr"/>
-            <a:r>
-              <a:rPr sz="1188" b="0" i="0">
-                <a:solidFill>
-                  <a:srgbClr val="232F3E">
-                    <a:alpha val="100000"/>
-                  </a:srgbClr>
-                </a:solidFill>
-                <a:latin typeface="Arial"/>
-                <a:ea typeface="Arial"/>
-                <a:cs typeface="Arial"/>
-              </a:rPr>
-              <a:t>+ Audio Bucket</a:t>
-            </a:r>
-          </a:p>
-        </p:txBody>
-      </p:sp>
-      <p:sp>
-        <p:nvSpPr>
-          <p:cNvPr id="18" name="TextBox 17"/>
-          <p:cNvSpPr txBox="1"/>
-          <p:nvPr/>
-        </p:nvSpPr>
-        <p:spPr>
-          <a:xfrm>
-            <a:off x="9143771" y="4800600"/>
-            <a:ext cx="1950671" cy="548640"/>
-          </a:xfrm>
-          <a:prstGeom prst="rect">
-            <a:avLst/>
-          </a:prstGeom>
-          <a:noFill/>
-        </p:spPr>
-        <p:txBody>
-          <a:bodyPr wrap="square" anchor="ctr" lIns="0" rIns="0" tIns="0" bIns="0">
-            <a:spAutoFit/>
-          </a:bodyPr>
-          <a:lstStyle/>
-          <a:p>
-            <a:pPr algn="ctr"/>
-            <a:r>
-              <a:rPr sz="1188" b="0" i="0">
-                <a:solidFill>
-                  <a:srgbClr val="232F3E">
-                    <a:alpha val="100000"/>
-                  </a:srgbClr>
-                </a:solidFill>
-                <a:latin typeface="Arial"/>
-                <a:ea typeface="Arial"/>
-                <a:cs typeface="Arial"/>
-              </a:rPr>
-              <a:t>Lambda 函數</a:t>
-            </a:r>
-          </a:p>
-          <a:p>
-            <a:pPr algn="ctr"/>
-            <a:r>
-              <a:rPr sz="1188" b="0" i="0">
-                <a:solidFill>
-                  <a:srgbClr val="232F3E">
-                    <a:alpha val="100000"/>
-                  </a:srgbClr>
-                </a:solidFill>
-                <a:latin typeface="Arial"/>
-                <a:ea typeface="Arial"/>
-                <a:cs typeface="Arial"/>
-              </a:rPr>
-              <a:t>(5 functions)</a:t>
-            </a:r>
-          </a:p>
-        </p:txBody>
-      </p:sp>
-      <p:sp>
-        <p:nvSpPr>
-          <p:cNvPr id="19" name="TextBox 18"/>
-          <p:cNvSpPr txBox="1"/>
-          <p:nvPr/>
-        </p:nvSpPr>
-        <p:spPr>
-          <a:xfrm>
-            <a:off x="1828754" y="3223260"/>
-            <a:ext cx="1219169" cy="205740"/>
-          </a:xfrm>
-          <a:prstGeom prst="rect">
-            <a:avLst/>
-          </a:prstGeom>
-          <a:noFill/>
-        </p:spPr>
-        <p:txBody>
-          <a:bodyPr wrap="square" anchor="ctr" lIns="0" rIns="0" tIns="0" bIns="0">
-            <a:spAutoFit/>
-          </a:bodyPr>
-          <a:lstStyle/>
-          <a:p>
-            <a:pPr algn="ctr"/>
-            <a:r>
-              <a:rPr sz="1080" b="1" i="0">
+              <a:rPr sz="1404" b="1" i="0">
                 <a:solidFill>
                   <a:srgbClr val="16A34A">
                     <a:alpha val="100000"/>
@@ -5285,85 +5385,7 @@
                 <a:ea typeface="Arial"/>
                 <a:cs typeface="Arial"/>
               </a:rPr>
-              <a:t>/* → S3</a:t>
-            </a:r>
-          </a:p>
-        </p:txBody>
-      </p:sp>
-      <p:sp>
-        <p:nvSpPr>
-          <p:cNvPr id="20" name="TextBox 19"/>
-          <p:cNvSpPr txBox="1"/>
-          <p:nvPr/>
-        </p:nvSpPr>
-        <p:spPr>
-          <a:xfrm>
-            <a:off x="7315017" y="3223260"/>
-            <a:ext cx="1463003" cy="205740"/>
-          </a:xfrm>
-          <a:prstGeom prst="rect">
-            <a:avLst/>
-          </a:prstGeom>
-          <a:noFill/>
-        </p:spPr>
-        <p:txBody>
-          <a:bodyPr wrap="square" anchor="ctr" lIns="0" rIns="0" tIns="0" bIns="0">
-            <a:spAutoFit/>
-          </a:bodyPr>
-          <a:lstStyle/>
-          <a:p>
-            <a:pPr algn="ctr"/>
-            <a:r>
-              <a:rPr sz="1080" b="1" i="0">
-                <a:solidFill>
-                  <a:srgbClr val="2563EB">
-                    <a:alpha val="100000"/>
-                  </a:srgbClr>
-                </a:solidFill>
-                <a:latin typeface="Arial"/>
-                <a:ea typeface="Arial"/>
-                <a:cs typeface="Arial"/>
-              </a:rPr>
-              <a:t>/ws/* → EC2</a:t>
-            </a:r>
-          </a:p>
-        </p:txBody>
-      </p:sp>
-      <p:sp>
-        <p:nvSpPr>
-          <p:cNvPr id="21" name="TextBox 20"/>
-          <p:cNvSpPr txBox="1"/>
-          <p:nvPr/>
-        </p:nvSpPr>
-        <p:spPr>
-          <a:xfrm>
-            <a:off x="5730096" y="2125980"/>
-            <a:ext cx="731501" cy="137160"/>
-          </a:xfrm>
-          <a:prstGeom prst="rect">
-            <a:avLst/>
-          </a:prstGeom>
-          <a:noFill/>
-        </p:spPr>
-        <p:txBody>
-          <a:bodyPr wrap="square" anchor="ctr" lIns="0" rIns="0" tIns="0" bIns="0">
-            <a:spAutoFit/>
-          </a:bodyPr>
-          <a:lstStyle/>
-          <a:p>
-            <a:pPr algn="ctr"/>
-            <a:r>
-              <a:rPr sz="971" b="0" i="0">
-                <a:solidFill>
-                  <a:srgbClr val="545B64">
-                    <a:alpha val="100000"/>
-                  </a:srgbClr>
-                </a:solidFill>
-                <a:latin typeface="Arial"/>
-                <a:ea typeface="Arial"/>
-                <a:cs typeface="Arial"/>
-              </a:rPr>
-              <a:t>HTTPS</a:t>
+              <a:t>驗證時間: 2026-08-02 | 整體評分: 95% ✅</a:t>
             </a:r>
           </a:p>
         </p:txBody>
@@ -5401,7 +5423,7 @@
             <a:avLst/>
           </a:prstGeom>
           <a:solidFill>
-            <a:srgbClr val="F8F9FA"/>
+            <a:srgbClr val="FFFFFF"/>
           </a:solidFill>
           <a:ln>
             <a:noFill/>
@@ -5438,8 +5460,8 @@
         </p:nvSpPr>
         <p:spPr>
           <a:xfrm>
-            <a:off x="975335" y="1714500"/>
-            <a:ext cx="4632844" cy="480060"/>
+            <a:off x="5242428" y="1577340"/>
+            <a:ext cx="1706837" cy="480060"/>
           </a:xfrm>
           <a:prstGeom prst="roundRect">
             <a:avLst>
@@ -5447,7 +5469,7 @@
             </a:avLst>
           </a:prstGeom>
           <a:solidFill>
-            <a:srgbClr val="DC2626"/>
+            <a:srgbClr val="2563EB"/>
           </a:solidFill>
           <a:ln>
             <a:noFill/>
@@ -5484,8 +5506,8 @@
         </p:nvSpPr>
         <p:spPr>
           <a:xfrm>
-            <a:off x="6583515" y="1714500"/>
-            <a:ext cx="4632844" cy="480060"/>
+            <a:off x="3047923" y="2468880"/>
+            <a:ext cx="2194505" cy="617220"/>
           </a:xfrm>
           <a:prstGeom prst="roundRect">
             <a:avLst>
@@ -5493,7 +5515,7 @@
             </a:avLst>
           </a:prstGeom>
           <a:solidFill>
-            <a:srgbClr val="16A34A"/>
+            <a:srgbClr val="FF9900"/>
           </a:solidFill>
           <a:ln>
             <a:noFill/>
@@ -5524,7 +5546,53 @@
       </p:sp>
       <p:sp>
         <p:nvSpPr>
-          <p:cNvPr id="5" name="TextBox 4"/>
+          <p:cNvPr id="5" name="Rounded Rectangle 4"/>
+          <p:cNvSpPr/>
+          <p:nvPr/>
+        </p:nvSpPr>
+        <p:spPr>
+          <a:xfrm>
+            <a:off x="6949266" y="2468880"/>
+            <a:ext cx="2194505" cy="754380"/>
+          </a:xfrm>
+          <a:prstGeom prst="roundRect">
+            <a:avLst>
+              <a:gd name="adj" fmla="val 3000"/>
+            </a:avLst>
+          </a:prstGeom>
+          <a:solidFill>
+            <a:srgbClr val="DC2626"/>
+          </a:solidFill>
+          <a:ln>
+            <a:noFill/>
+          </a:ln>
+          <a:effectLst/>
+        </p:spPr>
+        <p:style>
+          <a:lnRef idx="1">
+            <a:schemeClr val="accent1"/>
+          </a:lnRef>
+          <a:fillRef idx="3">
+            <a:schemeClr val="accent1"/>
+          </a:fillRef>
+          <a:effectRef idx="2">
+            <a:schemeClr val="accent1"/>
+          </a:effectRef>
+          <a:fontRef idx="minor">
+            <a:schemeClr val="lt1"/>
+          </a:fontRef>
+        </p:style>
+        <p:txBody>
+          <a:bodyPr rtlCol="0" anchor="ctr"/>
+          <a:lstStyle/>
+          <a:p>
+            <a:pPr algn="ctr"/>
+          </a:p>
+        </p:txBody>
+      </p:sp>
+      <p:sp>
+        <p:nvSpPr>
+          <p:cNvPr id="6" name="TextBox 5"/>
           <p:cNvSpPr txBox="1"/>
           <p:nvPr/>
         </p:nvSpPr>
@@ -5556,20 +5624,20 @@
                 <a:ea typeface="Arial"/>
                 <a:cs typeface="Arial"/>
               </a:rPr>
-              <a:t>LiveCaption 語音辨識層</a:t>
-            </a:r>
-          </a:p>
-        </p:txBody>
-      </p:sp>
-      <p:sp>
-        <p:nvSpPr>
-          <p:cNvPr id="6" name="TextBox 5"/>
+              <a:t>實際架構圖 (已驗證)</a:t>
+            </a:r>
+          </a:p>
+        </p:txBody>
+      </p:sp>
+      <p:sp>
+        <p:nvSpPr>
+          <p:cNvPr id="7" name="TextBox 6"/>
           <p:cNvSpPr txBox="1"/>
           <p:nvPr/>
         </p:nvSpPr>
         <p:spPr>
           <a:xfrm>
-            <a:off x="1219169" y="1234440"/>
+            <a:off x="1219169" y="1165860"/>
             <a:ext cx="9753356" cy="274320"/>
           </a:xfrm>
           <a:prstGeom prst="rect">
@@ -5587,29 +5655,29 @@
             <a:r>
               <a:rPr sz="1512" b="1" i="0">
                 <a:solidFill>
-                  <a:srgbClr val="FF9900">
-                    <a:alpha val="100000"/>
-                  </a:srgbClr>
-                </a:solidFill>
-                <a:latin typeface="Arial"/>
-                <a:ea typeface="Arial"/>
-                <a:cs typeface="Arial"/>
-              </a:rPr>
-              <a:t>Amazon Transcribe Streaming 封裝 | 專為長照現場優化</a:t>
-            </a:r>
-          </a:p>
-        </p:txBody>
-      </p:sp>
-      <p:sp>
-        <p:nvSpPr>
-          <p:cNvPr id="7" name="TextBox 6"/>
+                  <a:srgbClr val="DC2626">
+                    <a:alpha val="100000"/>
+                  </a:srgbClr>
+                </a:solidFill>
+                <a:latin typeface="Arial"/>
+                <a:ea typeface="Arial"/>
+                <a:cs typeface="Arial"/>
+              </a:rPr>
+              <a:t>前端直連 AWS 服務 | 無中介層 Lambda</a:t>
+            </a:r>
+          </a:p>
+        </p:txBody>
+      </p:sp>
+      <p:sp>
+        <p:nvSpPr>
+          <p:cNvPr id="8" name="TextBox 7"/>
           <p:cNvSpPr txBox="1"/>
           <p:nvPr/>
         </p:nvSpPr>
         <p:spPr>
           <a:xfrm>
-            <a:off x="975335" y="1851660"/>
-            <a:ext cx="4632844" cy="342900"/>
+            <a:off x="5242428" y="1645920"/>
+            <a:ext cx="1706837" cy="411480"/>
           </a:xfrm>
           <a:prstGeom prst="rect">
             <a:avLst/>
@@ -5624,7 +5692,7 @@
           <a:p>
             <a:pPr algn="ctr"/>
             <a:r>
-              <a:rPr sz="1728" b="1" i="0">
+              <a:rPr sz="1512" b="1" i="0">
                 <a:solidFill>
                   <a:srgbClr val="FFFFFF">
                     <a:alpha val="100000"/>
@@ -5634,21 +5702,37 @@
                 <a:ea typeface="Arial"/>
                 <a:cs typeface="Arial"/>
               </a:rPr>
-              <a:t>長照現場問題</a:t>
-            </a:r>
-          </a:p>
-        </p:txBody>
-      </p:sp>
-      <p:sp>
-        <p:nvSpPr>
-          <p:cNvPr id="8" name="TextBox 7"/>
+              <a:t>User</a:t>
+            </a:r>
+          </a:p>
+          <a:p>
+            <a:pPr algn="ctr"/>
+            <a:r>
+              <a:rPr sz="1512" b="1" i="0">
+                <a:solidFill>
+                  <a:srgbClr val="FFFFFF">
+                    <a:alpha val="100000"/>
+                  </a:srgbClr>
+                </a:solidFill>
+                <a:latin typeface="Arial"/>
+                <a:ea typeface="Arial"/>
+                <a:cs typeface="Arial"/>
+              </a:rPr>
+              <a:t>(Browser)</a:t>
+            </a:r>
+          </a:p>
+        </p:txBody>
+      </p:sp>
+      <p:sp>
+        <p:nvSpPr>
+          <p:cNvPr id="9" name="TextBox 8"/>
           <p:cNvSpPr txBox="1"/>
           <p:nvPr/>
         </p:nvSpPr>
         <p:spPr>
           <a:xfrm>
-            <a:off x="6583515" y="1851660"/>
-            <a:ext cx="4632844" cy="342900"/>
+            <a:off x="3047923" y="2537460"/>
+            <a:ext cx="2194505" cy="480060"/>
           </a:xfrm>
           <a:prstGeom prst="rect">
             <a:avLst/>
@@ -5663,7 +5747,7 @@
           <a:p>
             <a:pPr algn="ctr"/>
             <a:r>
-              <a:rPr sz="1728" b="1" i="0">
+              <a:rPr sz="1404" b="1" i="0">
                 <a:solidFill>
                   <a:srgbClr val="FFFFFF">
                     <a:alpha val="100000"/>
@@ -5673,62 +5757,23 @@
                 <a:ea typeface="Arial"/>
                 <a:cs typeface="Arial"/>
               </a:rPr>
-              <a:t>LiveCaption 解決方案</a:t>
-            </a:r>
-          </a:p>
-        </p:txBody>
-      </p:sp>
-      <p:sp>
-        <p:nvSpPr>
-          <p:cNvPr id="9" name="TextBox 8"/>
-          <p:cNvSpPr txBox="1"/>
-          <p:nvPr/>
-        </p:nvSpPr>
-        <p:spPr>
-          <a:xfrm>
-            <a:off x="975335" y="2331720"/>
-            <a:ext cx="4632844" cy="548640"/>
-          </a:xfrm>
-          <a:prstGeom prst="rect">
-            <a:avLst/>
-          </a:prstGeom>
-          <a:noFill/>
-        </p:spPr>
-        <p:txBody>
-          <a:bodyPr wrap="square" anchor="t" lIns="0" rIns="0" tIns="0" bIns="0">
-            <a:spAutoFit/>
-          </a:bodyPr>
-          <a:lstStyle/>
-          <a:p>
-            <a:pPr algn="l"/>
-            <a:r>
-              <a:rPr sz="1296" b="0" i="0">
-                <a:solidFill>
-                  <a:srgbClr val="232F3E">
-                    <a:alpha val="100000"/>
-                  </a:srgbClr>
-                </a:solidFill>
-                <a:latin typeface="Arial"/>
-                <a:ea typeface="Arial"/>
-                <a:cs typeface="Arial"/>
-              </a:rPr>
-              <a:t>長者講話慢、停頓長 (數十秒)</a:t>
-            </a:r>
-          </a:p>
-          <a:p>
-            <a:pPr algn="l"/>
-            <a:r>
-              <a:rPr sz="1296" b="0" i="0">
-                <a:solidFill>
-                  <a:srgbClr val="232F3E">
-                    <a:alpha val="100000"/>
-                  </a:srgbClr>
-                </a:solidFill>
-                <a:latin typeface="Arial"/>
-                <a:ea typeface="Arial"/>
-                <a:cs typeface="Arial"/>
-              </a:rPr>
-              <a:t>→ Transcribe 收不到音訊就斷線</a:t>
+              <a:t>CloudFront CDN</a:t>
+            </a:r>
+          </a:p>
+          <a:p>
+            <a:pPr algn="ctr"/>
+            <a:r>
+              <a:rPr sz="1404" b="1" i="0">
+                <a:solidFill>
+                  <a:srgbClr val="FFFFFF">
+                    <a:alpha val="100000"/>
+                  </a:srgbClr>
+                </a:solidFill>
+                <a:latin typeface="Arial"/>
+                <a:ea typeface="Arial"/>
+                <a:cs typeface="Arial"/>
+              </a:rPr>
+              <a:t>E1NHT4ZC7ZFGUP</a:t>
             </a:r>
           </a:p>
         </p:txBody>
@@ -5741,393 +5786,8 @@
         </p:nvSpPr>
         <p:spPr>
           <a:xfrm>
-            <a:off x="6583515" y="2331720"/>
-            <a:ext cx="4632844" cy="548640"/>
-          </a:xfrm>
-          <a:prstGeom prst="rect">
-            <a:avLst/>
-          </a:prstGeom>
-          <a:noFill/>
-        </p:spPr>
-        <p:txBody>
-          <a:bodyPr wrap="square" anchor="t" lIns="0" rIns="0" tIns="0" bIns="0">
-            <a:spAutoFit/>
-          </a:bodyPr>
-          <a:lstStyle/>
-          <a:p>
-            <a:pPr algn="l"/>
-            <a:r>
-              <a:rPr sz="1296" b="1" i="0">
-                <a:solidFill>
-                  <a:srgbClr val="16A34A">
-                    <a:alpha val="100000"/>
-                  </a:srgbClr>
-                </a:solidFill>
-                <a:latin typeface="Arial"/>
-                <a:ea typeface="Arial"/>
-                <a:cs typeface="Arial"/>
-              </a:rPr>
-              <a:t>silence_keepalive</a:t>
-            </a:r>
-          </a:p>
-          <a:p>
-            <a:pPr algn="l"/>
-            <a:r>
-              <a:rPr sz="1296" b="1" i="0">
-                <a:solidFill>
-                  <a:srgbClr val="16A34A">
-                    <a:alpha val="100000"/>
-                  </a:srgbClr>
-                </a:solidFill>
-                <a:latin typeface="Arial"/>
-                <a:ea typeface="Arial"/>
-                <a:cs typeface="Arial"/>
-              </a:rPr>
-              <a:t>閒置 3 秒自動補靜音幀維持連線</a:t>
-            </a:r>
-          </a:p>
-        </p:txBody>
-      </p:sp>
-      <p:sp>
-        <p:nvSpPr>
-          <p:cNvPr id="11" name="TextBox 10"/>
-          <p:cNvSpPr txBox="1"/>
-          <p:nvPr/>
-        </p:nvSpPr>
-        <p:spPr>
-          <a:xfrm>
-            <a:off x="975335" y="3017520"/>
-            <a:ext cx="4632844" cy="548640"/>
-          </a:xfrm>
-          <a:prstGeom prst="rect">
-            <a:avLst/>
-          </a:prstGeom>
-          <a:noFill/>
-        </p:spPr>
-        <p:txBody>
-          <a:bodyPr wrap="square" anchor="t" lIns="0" rIns="0" tIns="0" bIns="0">
-            <a:spAutoFit/>
-          </a:bodyPr>
-          <a:lstStyle/>
-          <a:p>
-            <a:pPr algn="l"/>
-            <a:r>
-              <a:rPr sz="1296" b="0" i="0">
-                <a:solidFill>
-                  <a:srgbClr val="232F3E">
-                    <a:alpha val="100000"/>
-                  </a:srgbClr>
-                </a:solidFill>
-                <a:latin typeface="Arial"/>
-                <a:ea typeface="Arial"/>
-                <a:cs typeface="Arial"/>
-              </a:rPr>
-              <a:t>partial 結果反覆改寫</a:t>
-            </a:r>
-          </a:p>
-          <a:p>
-            <a:pPr algn="l"/>
-            <a:r>
-              <a:rPr sz="1296" b="0" i="0">
-                <a:solidFill>
-                  <a:srgbClr val="232F3E">
-                    <a:alpha val="100000"/>
-                  </a:srgbClr>
-                </a:solidFill>
-                <a:latin typeface="Arial"/>
-                <a:ea typeface="Arial"/>
-                <a:cs typeface="Arial"/>
-              </a:rPr>
-              <a:t>→ 字幕在螢幕上跳動，長者讀不完</a:t>
-            </a:r>
-          </a:p>
-        </p:txBody>
-      </p:sp>
-      <p:sp>
-        <p:nvSpPr>
-          <p:cNvPr id="12" name="TextBox 11"/>
-          <p:cNvSpPr txBox="1"/>
-          <p:nvPr/>
-        </p:nvSpPr>
-        <p:spPr>
-          <a:xfrm>
-            <a:off x="6583515" y="3017520"/>
-            <a:ext cx="4632844" cy="548640"/>
-          </a:xfrm>
-          <a:prstGeom prst="rect">
-            <a:avLst/>
-          </a:prstGeom>
-          <a:noFill/>
-        </p:spPr>
-        <p:txBody>
-          <a:bodyPr wrap="square" anchor="t" lIns="0" rIns="0" tIns="0" bIns="0">
-            <a:spAutoFit/>
-          </a:bodyPr>
-          <a:lstStyle/>
-          <a:p>
-            <a:pPr algn="l"/>
-            <a:r>
-              <a:rPr sz="1296" b="1" i="0">
-                <a:solidFill>
-                  <a:srgbClr val="16A34A">
-                    <a:alpha val="100000"/>
-                  </a:srgbClr>
-                </a:solidFill>
-                <a:latin typeface="Arial"/>
-                <a:ea typeface="Arial"/>
-                <a:cs typeface="Arial"/>
-              </a:rPr>
-              <a:t>enable_partial_results_stabilization=high</a:t>
-            </a:r>
-          </a:p>
-          <a:p>
-            <a:pPr algn="l"/>
-            <a:r>
-              <a:rPr sz="1296" b="1" i="0">
-                <a:solidFill>
-                  <a:srgbClr val="16A34A">
-                    <a:alpha val="100000"/>
-                  </a:srgbClr>
-                </a:solidFill>
-                <a:latin typeface="Arial"/>
-                <a:ea typeface="Arial"/>
-                <a:cs typeface="Arial"/>
-              </a:rPr>
-              <a:t>已辨識的字不再變動</a:t>
-            </a:r>
-          </a:p>
-        </p:txBody>
-      </p:sp>
-      <p:sp>
-        <p:nvSpPr>
-          <p:cNvPr id="13" name="TextBox 12"/>
-          <p:cNvSpPr txBox="1"/>
-          <p:nvPr/>
-        </p:nvSpPr>
-        <p:spPr>
-          <a:xfrm>
-            <a:off x="975335" y="3703320"/>
-            <a:ext cx="4632844" cy="548640"/>
-          </a:xfrm>
-          <a:prstGeom prst="rect">
-            <a:avLst/>
-          </a:prstGeom>
-          <a:noFill/>
-        </p:spPr>
-        <p:txBody>
-          <a:bodyPr wrap="square" anchor="t" lIns="0" rIns="0" tIns="0" bIns="0">
-            <a:spAutoFit/>
-          </a:bodyPr>
-          <a:lstStyle/>
-          <a:p>
-            <a:pPr algn="l"/>
-            <a:r>
-              <a:rPr sz="1296" b="0" i="0">
-                <a:solidFill>
-                  <a:srgbClr val="232F3E">
-                    <a:alpha val="100000"/>
-                  </a:srgbClr>
-                </a:solidFill>
-                <a:latin typeface="Arial"/>
-                <a:ea typeface="Arial"/>
-                <a:cs typeface="Arial"/>
-              </a:rPr>
-              <a:t>印尼/越南籍照服員與長者混講</a:t>
-            </a:r>
-          </a:p>
-          <a:p>
-            <a:pPr algn="l"/>
-            <a:r>
-              <a:rPr sz="1296" b="0" i="0">
-                <a:solidFill>
-                  <a:srgbClr val="232F3E">
-                    <a:alpha val="100000"/>
-                  </a:srgbClr>
-                </a:solidFill>
-                <a:latin typeface="Arial"/>
-                <a:ea typeface="Arial"/>
-                <a:cs typeface="Arial"/>
-              </a:rPr>
-              <a:t>→ 無法事先指定語言</a:t>
-            </a:r>
-          </a:p>
-        </p:txBody>
-      </p:sp>
-      <p:sp>
-        <p:nvSpPr>
-          <p:cNvPr id="14" name="TextBox 13"/>
-          <p:cNvSpPr txBox="1"/>
-          <p:nvPr/>
-        </p:nvSpPr>
-        <p:spPr>
-          <a:xfrm>
-            <a:off x="6583515" y="3703320"/>
-            <a:ext cx="4632844" cy="548640"/>
-          </a:xfrm>
-          <a:prstGeom prst="rect">
-            <a:avLst/>
-          </a:prstGeom>
-          <a:noFill/>
-        </p:spPr>
-        <p:txBody>
-          <a:bodyPr wrap="square" anchor="t" lIns="0" rIns="0" tIns="0" bIns="0">
-            <a:spAutoFit/>
-          </a:bodyPr>
-          <a:lstStyle/>
-          <a:p>
-            <a:pPr algn="l"/>
-            <a:r>
-              <a:rPr sz="1296" b="1" i="0">
-                <a:solidFill>
-                  <a:srgbClr val="16A34A">
-                    <a:alpha val="100000"/>
-                  </a:srgbClr>
-                </a:solidFill>
-                <a:latin typeface="Arial"/>
-                <a:ea typeface="Arial"/>
-                <a:cs typeface="Arial"/>
-              </a:rPr>
-              <a:t>identify_language 自動判定</a:t>
-            </a:r>
-          </a:p>
-          <a:p>
-            <a:pPr algn="l"/>
-            <a:r>
-              <a:rPr sz="1296" b="1" i="0">
-                <a:solidFill>
-                  <a:srgbClr val="16A34A">
-                    <a:alpha val="100000"/>
-                  </a:srgbClr>
-                </a:solidFill>
-                <a:latin typeface="Arial"/>
-                <a:ea typeface="Arial"/>
-                <a:cs typeface="Arial"/>
-              </a:rPr>
-              <a:t>zh-TW/id-ID/vi-VN/en/ja/th</a:t>
-            </a:r>
-          </a:p>
-        </p:txBody>
-      </p:sp>
-      <p:sp>
-        <p:nvSpPr>
-          <p:cNvPr id="15" name="TextBox 14"/>
-          <p:cNvSpPr txBox="1"/>
-          <p:nvPr/>
-        </p:nvSpPr>
-        <p:spPr>
-          <a:xfrm>
-            <a:off x="975335" y="4389120"/>
-            <a:ext cx="4632844" cy="548640"/>
-          </a:xfrm>
-          <a:prstGeom prst="rect">
-            <a:avLst/>
-          </a:prstGeom>
-          <a:noFill/>
-        </p:spPr>
-        <p:txBody>
-          <a:bodyPr wrap="square" anchor="t" lIns="0" rIns="0" tIns="0" bIns="0">
-            <a:spAutoFit/>
-          </a:bodyPr>
-          <a:lstStyle/>
-          <a:p>
-            <a:pPr algn="l"/>
-            <a:r>
-              <a:rPr sz="1296" b="0" i="0">
-                <a:solidFill>
-                  <a:srgbClr val="232F3E">
-                    <a:alpha val="100000"/>
-                  </a:srgbClr>
-                </a:solidFill>
-                <a:latin typeface="Arial"/>
-                <a:ea typeface="Arial"/>
-                <a:cs typeface="Arial"/>
-              </a:rPr>
-              <a:t>需分辨「照服員說的」vs「長者說的」</a:t>
-            </a:r>
-          </a:p>
-          <a:p>
-            <a:pPr algn="l"/>
-            <a:r>
-              <a:rPr sz="1296" b="0" i="0">
-                <a:solidFill>
-                  <a:srgbClr val="232F3E">
-                    <a:alpha val="100000"/>
-                  </a:srgbClr>
-                </a:solidFill>
-                <a:latin typeface="Arial"/>
-                <a:ea typeface="Arial"/>
-                <a:cs typeface="Arial"/>
-              </a:rPr>
-              <a:t>→ 交班記錄需要語者標示</a:t>
-            </a:r>
-          </a:p>
-        </p:txBody>
-      </p:sp>
-      <p:sp>
-        <p:nvSpPr>
-          <p:cNvPr id="16" name="TextBox 15"/>
-          <p:cNvSpPr txBox="1"/>
-          <p:nvPr/>
-        </p:nvSpPr>
-        <p:spPr>
-          <a:xfrm>
-            <a:off x="6583515" y="4389120"/>
-            <a:ext cx="4632844" cy="548640"/>
-          </a:xfrm>
-          <a:prstGeom prst="rect">
-            <a:avLst/>
-          </a:prstGeom>
-          <a:noFill/>
-        </p:spPr>
-        <p:txBody>
-          <a:bodyPr wrap="square" anchor="t" lIns="0" rIns="0" tIns="0" bIns="0">
-            <a:spAutoFit/>
-          </a:bodyPr>
-          <a:lstStyle/>
-          <a:p>
-            <a:pPr algn="l"/>
-            <a:r>
-              <a:rPr sz="1296" b="1" i="0">
-                <a:solidFill>
-                  <a:srgbClr val="16A34A">
-                    <a:alpha val="100000"/>
-                  </a:srgbClr>
-                </a:solidFill>
-                <a:latin typeface="Arial"/>
-                <a:ea typeface="Arial"/>
-                <a:cs typeface="Arial"/>
-              </a:rPr>
-              <a:t>show_speaker_label</a:t>
-            </a:r>
-          </a:p>
-          <a:p>
-            <a:pPr algn="l"/>
-            <a:r>
-              <a:rPr sz="1296" b="1" i="0">
-                <a:solidFill>
-                  <a:srgbClr val="16A34A">
-                    <a:alpha val="100000"/>
-                  </a:srgbClr>
-                </a:solidFill>
-                <a:latin typeface="Arial"/>
-                <a:ea typeface="Arial"/>
-                <a:cs typeface="Arial"/>
-              </a:rPr>
-              <a:t>產生語者標籤寫入 segment.speakers</a:t>
-            </a:r>
-          </a:p>
-        </p:txBody>
-      </p:sp>
-      <p:sp>
-        <p:nvSpPr>
-          <p:cNvPr id="17" name="TextBox 16"/>
-          <p:cNvSpPr txBox="1"/>
-          <p:nvPr/>
-        </p:nvSpPr>
-        <p:spPr>
-          <a:xfrm>
-            <a:off x="1219169" y="5486400"/>
-            <a:ext cx="9753356" cy="342900"/>
+            <a:off x="6949266" y="2537460"/>
+            <a:ext cx="2194505" cy="617220"/>
           </a:xfrm>
           <a:prstGeom prst="rect">
             <a:avLst/>
@@ -6144,6 +5804,556 @@
             <a:r>
               <a:rPr sz="1404" b="1" i="0">
                 <a:solidFill>
+                  <a:srgbClr val="FFFFFF">
+                    <a:alpha val="100000"/>
+                  </a:srgbClr>
+                </a:solidFill>
+                <a:latin typeface="Arial"/>
+                <a:ea typeface="Arial"/>
+                <a:cs typeface="Arial"/>
+              </a:rPr>
+              <a:t>EC2 Backend</a:t>
+            </a:r>
+          </a:p>
+          <a:p>
+            <a:pPr algn="ctr"/>
+            <a:r>
+              <a:rPr sz="1404" b="1" i="0">
+                <a:solidFill>
+                  <a:srgbClr val="FFFFFF">
+                    <a:alpha val="100000"/>
+                  </a:srgbClr>
+                </a:solidFill>
+                <a:latin typeface="Arial"/>
+                <a:ea typeface="Arial"/>
+                <a:cs typeface="Arial"/>
+              </a:rPr>
+              <a:t>LiveCaption</a:t>
+            </a:r>
+          </a:p>
+          <a:p>
+            <a:pPr algn="ctr"/>
+            <a:r>
+              <a:rPr sz="1404" b="1" i="0">
+                <a:solidFill>
+                  <a:srgbClr val="FFFFFF">
+                    <a:alpha val="100000"/>
+                  </a:srgbClr>
+                </a:solidFill>
+                <a:latin typeface="Arial"/>
+                <a:ea typeface="Arial"/>
+                <a:cs typeface="Arial"/>
+              </a:rPr>
+              <a:t>WebSocket</a:t>
+            </a:r>
+          </a:p>
+        </p:txBody>
+      </p:sp>
+      <p:sp>
+        <p:nvSpPr>
+          <p:cNvPr id="11" name="TextBox 10"/>
+          <p:cNvSpPr txBox="1"/>
+          <p:nvPr/>
+        </p:nvSpPr>
+        <p:spPr>
+          <a:xfrm>
+            <a:off x="1219169" y="3703320"/>
+            <a:ext cx="1584920" cy="411480"/>
+          </a:xfrm>
+          <a:prstGeom prst="rect">
+            <a:avLst/>
+          </a:prstGeom>
+          <a:noFill/>
+        </p:spPr>
+        <p:txBody>
+          <a:bodyPr wrap="square" anchor="ctr" lIns="0" rIns="0" tIns="0" bIns="0">
+            <a:spAutoFit/>
+          </a:bodyPr>
+          <a:lstStyle/>
+          <a:p>
+            <a:pPr algn="ctr"/>
+            <a:r>
+              <a:rPr sz="1296" b="1" i="0">
+                <a:solidFill>
+                  <a:srgbClr val="232F3E">
+                    <a:alpha val="100000"/>
+                  </a:srgbClr>
+                </a:solidFill>
+                <a:latin typeface="Arial"/>
+                <a:ea typeface="Arial"/>
+                <a:cs typeface="Arial"/>
+              </a:rPr>
+              <a:t>S3</a:t>
+            </a:r>
+          </a:p>
+          <a:p>
+            <a:pPr algn="ctr"/>
+            <a:r>
+              <a:rPr sz="1296" b="1" i="0">
+                <a:solidFill>
+                  <a:srgbClr val="232F3E">
+                    <a:alpha val="100000"/>
+                  </a:srgbClr>
+                </a:solidFill>
+                <a:latin typeface="Arial"/>
+                <a:ea typeface="Arial"/>
+                <a:cs typeface="Arial"/>
+              </a:rPr>
+              <a:t>React SPA</a:t>
+            </a:r>
+          </a:p>
+        </p:txBody>
+      </p:sp>
+      <p:sp>
+        <p:nvSpPr>
+          <p:cNvPr id="12" name="TextBox 11"/>
+          <p:cNvSpPr txBox="1"/>
+          <p:nvPr/>
+        </p:nvSpPr>
+        <p:spPr>
+          <a:xfrm>
+            <a:off x="3291757" y="3703320"/>
+            <a:ext cx="1584920" cy="411480"/>
+          </a:xfrm>
+          <a:prstGeom prst="rect">
+            <a:avLst/>
+          </a:prstGeom>
+          <a:noFill/>
+        </p:spPr>
+        <p:txBody>
+          <a:bodyPr wrap="square" anchor="ctr" lIns="0" rIns="0" tIns="0" bIns="0">
+            <a:spAutoFit/>
+          </a:bodyPr>
+          <a:lstStyle/>
+          <a:p>
+            <a:pPr algn="ctr"/>
+            <a:r>
+              <a:rPr sz="1296" b="1" i="0">
+                <a:solidFill>
+                  <a:srgbClr val="232F3E">
+                    <a:alpha val="100000"/>
+                  </a:srgbClr>
+                </a:solidFill>
+                <a:latin typeface="Arial"/>
+                <a:ea typeface="Arial"/>
+                <a:cs typeface="Arial"/>
+              </a:rPr>
+              <a:t>Cognito</a:t>
+            </a:r>
+          </a:p>
+          <a:p>
+            <a:pPr algn="ctr"/>
+            <a:r>
+              <a:rPr sz="1296" b="1" i="0">
+                <a:solidFill>
+                  <a:srgbClr val="232F3E">
+                    <a:alpha val="100000"/>
+                  </a:srgbClr>
+                </a:solidFill>
+                <a:latin typeface="Arial"/>
+                <a:ea typeface="Arial"/>
+                <a:cs typeface="Arial"/>
+              </a:rPr>
+              <a:t>Identity</a:t>
+            </a:r>
+          </a:p>
+        </p:txBody>
+      </p:sp>
+      <p:sp>
+        <p:nvSpPr>
+          <p:cNvPr id="13" name="TextBox 12"/>
+          <p:cNvSpPr txBox="1"/>
+          <p:nvPr/>
+        </p:nvSpPr>
+        <p:spPr>
+          <a:xfrm>
+            <a:off x="5364345" y="3703320"/>
+            <a:ext cx="1584920" cy="411480"/>
+          </a:xfrm>
+          <a:prstGeom prst="rect">
+            <a:avLst/>
+          </a:prstGeom>
+          <a:noFill/>
+        </p:spPr>
+        <p:txBody>
+          <a:bodyPr wrap="square" anchor="ctr" lIns="0" rIns="0" tIns="0" bIns="0">
+            <a:spAutoFit/>
+          </a:bodyPr>
+          <a:lstStyle/>
+          <a:p>
+            <a:pPr algn="ctr"/>
+            <a:r>
+              <a:rPr sz="1296" b="1" i="0">
+                <a:solidFill>
+                  <a:srgbClr val="232F3E">
+                    <a:alpha val="100000"/>
+                  </a:srgbClr>
+                </a:solidFill>
+                <a:latin typeface="Arial"/>
+                <a:ea typeface="Arial"/>
+                <a:cs typeface="Arial"/>
+              </a:rPr>
+              <a:t>Transcribe</a:t>
+            </a:r>
+          </a:p>
+          <a:p>
+            <a:pPr algn="ctr"/>
+            <a:r>
+              <a:rPr sz="1296" b="1" i="0">
+                <a:solidFill>
+                  <a:srgbClr val="232F3E">
+                    <a:alpha val="100000"/>
+                  </a:srgbClr>
+                </a:solidFill>
+                <a:latin typeface="Arial"/>
+                <a:ea typeface="Arial"/>
+                <a:cs typeface="Arial"/>
+              </a:rPr>
+              <a:t>Streaming</a:t>
+            </a:r>
+          </a:p>
+        </p:txBody>
+      </p:sp>
+      <p:sp>
+        <p:nvSpPr>
+          <p:cNvPr id="14" name="TextBox 13"/>
+          <p:cNvSpPr txBox="1"/>
+          <p:nvPr/>
+        </p:nvSpPr>
+        <p:spPr>
+          <a:xfrm>
+            <a:off x="7436933" y="3703320"/>
+            <a:ext cx="1584920" cy="411480"/>
+          </a:xfrm>
+          <a:prstGeom prst="rect">
+            <a:avLst/>
+          </a:prstGeom>
+          <a:noFill/>
+        </p:spPr>
+        <p:txBody>
+          <a:bodyPr wrap="square" anchor="ctr" lIns="0" rIns="0" tIns="0" bIns="0">
+            <a:spAutoFit/>
+          </a:bodyPr>
+          <a:lstStyle/>
+          <a:p>
+            <a:pPr algn="ctr"/>
+            <a:r>
+              <a:rPr sz="1296" b="1" i="0">
+                <a:solidFill>
+                  <a:srgbClr val="232F3E">
+                    <a:alpha val="100000"/>
+                  </a:srgbClr>
+                </a:solidFill>
+                <a:latin typeface="Arial"/>
+                <a:ea typeface="Arial"/>
+                <a:cs typeface="Arial"/>
+              </a:rPr>
+              <a:t>Bedrock</a:t>
+            </a:r>
+          </a:p>
+          <a:p>
+            <a:pPr algn="ctr"/>
+            <a:r>
+              <a:rPr sz="1296" b="1" i="0">
+                <a:solidFill>
+                  <a:srgbClr val="232F3E">
+                    <a:alpha val="100000"/>
+                  </a:srgbClr>
+                </a:solidFill>
+                <a:latin typeface="Arial"/>
+                <a:ea typeface="Arial"/>
+                <a:cs typeface="Arial"/>
+              </a:rPr>
+              <a:t>KB + Claude</a:t>
+            </a:r>
+          </a:p>
+        </p:txBody>
+      </p:sp>
+      <p:sp>
+        <p:nvSpPr>
+          <p:cNvPr id="15" name="TextBox 14"/>
+          <p:cNvSpPr txBox="1"/>
+          <p:nvPr/>
+        </p:nvSpPr>
+        <p:spPr>
+          <a:xfrm>
+            <a:off x="9509522" y="3703320"/>
+            <a:ext cx="1584920" cy="411480"/>
+          </a:xfrm>
+          <a:prstGeom prst="rect">
+            <a:avLst/>
+          </a:prstGeom>
+          <a:noFill/>
+        </p:spPr>
+        <p:txBody>
+          <a:bodyPr wrap="square" anchor="ctr" lIns="0" rIns="0" tIns="0" bIns="0">
+            <a:spAutoFit/>
+          </a:bodyPr>
+          <a:lstStyle/>
+          <a:p>
+            <a:pPr algn="ctr"/>
+            <a:r>
+              <a:rPr sz="1296" b="1" i="0">
+                <a:solidFill>
+                  <a:srgbClr val="232F3E">
+                    <a:alpha val="100000"/>
+                  </a:srgbClr>
+                </a:solidFill>
+                <a:latin typeface="Arial"/>
+                <a:ea typeface="Arial"/>
+                <a:cs typeface="Arial"/>
+              </a:rPr>
+              <a:t>Polly</a:t>
+            </a:r>
+          </a:p>
+          <a:p>
+            <a:pPr algn="ctr"/>
+            <a:r>
+              <a:rPr sz="1296" b="1" i="0">
+                <a:solidFill>
+                  <a:srgbClr val="232F3E">
+                    <a:alpha val="100000"/>
+                  </a:srgbClr>
+                </a:solidFill>
+                <a:latin typeface="Arial"/>
+                <a:ea typeface="Arial"/>
+                <a:cs typeface="Arial"/>
+              </a:rPr>
+              <a:t>Zhiyu</a:t>
+            </a:r>
+          </a:p>
+        </p:txBody>
+      </p:sp>
+      <p:sp>
+        <p:nvSpPr>
+          <p:cNvPr id="16" name="TextBox 15"/>
+          <p:cNvSpPr txBox="1"/>
+          <p:nvPr/>
+        </p:nvSpPr>
+        <p:spPr>
+          <a:xfrm>
+            <a:off x="1219169" y="4800600"/>
+            <a:ext cx="4267093" cy="548640"/>
+          </a:xfrm>
+          <a:prstGeom prst="rect">
+            <a:avLst/>
+          </a:prstGeom>
+          <a:noFill/>
+        </p:spPr>
+        <p:txBody>
+          <a:bodyPr wrap="square" anchor="ctr" lIns="0" rIns="0" tIns="0" bIns="0">
+            <a:spAutoFit/>
+          </a:bodyPr>
+          <a:lstStyle/>
+          <a:p>
+            <a:pPr algn="ctr"/>
+            <a:r>
+              <a:rPr sz="1188" b="0" i="0">
+                <a:solidFill>
+                  <a:srgbClr val="232F3E">
+                    <a:alpha val="100000"/>
+                  </a:srgbClr>
+                </a:solidFill>
+                <a:latin typeface="Arial"/>
+                <a:ea typeface="Arial"/>
+                <a:cs typeface="Arial"/>
+              </a:rPr>
+              <a:t>DynamoDB (3 表)</a:t>
+            </a:r>
+          </a:p>
+          <a:p>
+            <a:pPr algn="ctr"/>
+            <a:r>
+              <a:rPr sz="1188" b="0" i="0">
+                <a:solidFill>
+                  <a:srgbClr val="232F3E">
+                    <a:alpha val="100000"/>
+                  </a:srgbClr>
+                </a:solidFill>
+                <a:latin typeface="Arial"/>
+                <a:ea typeface="Arial"/>
+                <a:cs typeface="Arial"/>
+              </a:rPr>
+              <a:t>conversations | elder_profile | elder_memory</a:t>
+            </a:r>
+          </a:p>
+        </p:txBody>
+      </p:sp>
+      <p:sp>
+        <p:nvSpPr>
+          <p:cNvPr id="17" name="TextBox 16"/>
+          <p:cNvSpPr txBox="1"/>
+          <p:nvPr/>
+        </p:nvSpPr>
+        <p:spPr>
+          <a:xfrm>
+            <a:off x="6095847" y="4800600"/>
+            <a:ext cx="2438339" cy="548640"/>
+          </a:xfrm>
+          <a:prstGeom prst="rect">
+            <a:avLst/>
+          </a:prstGeom>
+          <a:noFill/>
+        </p:spPr>
+        <p:txBody>
+          <a:bodyPr wrap="square" anchor="ctr" lIns="0" rIns="0" tIns="0" bIns="0">
+            <a:spAutoFit/>
+          </a:bodyPr>
+          <a:lstStyle/>
+          <a:p>
+            <a:pPr algn="ctr"/>
+            <a:r>
+              <a:rPr sz="1188" b="0" i="0">
+                <a:solidFill>
+                  <a:srgbClr val="232F3E">
+                    <a:alpha val="100000"/>
+                  </a:srgbClr>
+                </a:solidFill>
+                <a:latin typeface="Arial"/>
+                <a:ea typeface="Arial"/>
+                <a:cs typeface="Arial"/>
+              </a:rPr>
+              <a:t>S3 Vectors</a:t>
+            </a:r>
+          </a:p>
+          <a:p>
+            <a:pPr algn="ctr"/>
+            <a:r>
+              <a:rPr sz="1188" b="0" i="0">
+                <a:solidFill>
+                  <a:srgbClr val="232F3E">
+                    <a:alpha val="100000"/>
+                  </a:srgbClr>
+                </a:solidFill>
+                <a:latin typeface="Arial"/>
+                <a:ea typeface="Arial"/>
+                <a:cs typeface="Arial"/>
+              </a:rPr>
+              <a:t>+ Audio Bucket</a:t>
+            </a:r>
+          </a:p>
+        </p:txBody>
+      </p:sp>
+      <p:sp>
+        <p:nvSpPr>
+          <p:cNvPr id="18" name="TextBox 17"/>
+          <p:cNvSpPr txBox="1"/>
+          <p:nvPr/>
+        </p:nvSpPr>
+        <p:spPr>
+          <a:xfrm>
+            <a:off x="9143771" y="4800600"/>
+            <a:ext cx="1950671" cy="548640"/>
+          </a:xfrm>
+          <a:prstGeom prst="rect">
+            <a:avLst/>
+          </a:prstGeom>
+          <a:noFill/>
+        </p:spPr>
+        <p:txBody>
+          <a:bodyPr wrap="square" anchor="ctr" lIns="0" rIns="0" tIns="0" bIns="0">
+            <a:spAutoFit/>
+          </a:bodyPr>
+          <a:lstStyle/>
+          <a:p>
+            <a:pPr algn="ctr"/>
+            <a:r>
+              <a:rPr sz="1188" b="0" i="0">
+                <a:solidFill>
+                  <a:srgbClr val="232F3E">
+                    <a:alpha val="100000"/>
+                  </a:srgbClr>
+                </a:solidFill>
+                <a:latin typeface="Arial"/>
+                <a:ea typeface="Arial"/>
+                <a:cs typeface="Arial"/>
+              </a:rPr>
+              <a:t>Lambda 函數</a:t>
+            </a:r>
+          </a:p>
+          <a:p>
+            <a:pPr algn="ctr"/>
+            <a:r>
+              <a:rPr sz="1188" b="0" i="0">
+                <a:solidFill>
+                  <a:srgbClr val="232F3E">
+                    <a:alpha val="100000"/>
+                  </a:srgbClr>
+                </a:solidFill>
+                <a:latin typeface="Arial"/>
+                <a:ea typeface="Arial"/>
+                <a:cs typeface="Arial"/>
+              </a:rPr>
+              <a:t>(5 functions)</a:t>
+            </a:r>
+          </a:p>
+        </p:txBody>
+      </p:sp>
+      <p:sp>
+        <p:nvSpPr>
+          <p:cNvPr id="19" name="TextBox 18"/>
+          <p:cNvSpPr txBox="1"/>
+          <p:nvPr/>
+        </p:nvSpPr>
+        <p:spPr>
+          <a:xfrm>
+            <a:off x="1828754" y="3223260"/>
+            <a:ext cx="1219169" cy="205740"/>
+          </a:xfrm>
+          <a:prstGeom prst="rect">
+            <a:avLst/>
+          </a:prstGeom>
+          <a:noFill/>
+        </p:spPr>
+        <p:txBody>
+          <a:bodyPr wrap="square" anchor="ctr" lIns="0" rIns="0" tIns="0" bIns="0">
+            <a:spAutoFit/>
+          </a:bodyPr>
+          <a:lstStyle/>
+          <a:p>
+            <a:pPr algn="ctr"/>
+            <a:r>
+              <a:rPr sz="1080" b="1" i="0">
+                <a:solidFill>
+                  <a:srgbClr val="16A34A">
+                    <a:alpha val="100000"/>
+                  </a:srgbClr>
+                </a:solidFill>
+                <a:latin typeface="Arial"/>
+                <a:ea typeface="Arial"/>
+                <a:cs typeface="Arial"/>
+              </a:rPr>
+              <a:t>/* → S3</a:t>
+            </a:r>
+          </a:p>
+        </p:txBody>
+      </p:sp>
+      <p:sp>
+        <p:nvSpPr>
+          <p:cNvPr id="20" name="TextBox 19"/>
+          <p:cNvSpPr txBox="1"/>
+          <p:nvPr/>
+        </p:nvSpPr>
+        <p:spPr>
+          <a:xfrm>
+            <a:off x="7315017" y="3223260"/>
+            <a:ext cx="1463003" cy="205740"/>
+          </a:xfrm>
+          <a:prstGeom prst="rect">
+            <a:avLst/>
+          </a:prstGeom>
+          <a:noFill/>
+        </p:spPr>
+        <p:txBody>
+          <a:bodyPr wrap="square" anchor="ctr" lIns="0" rIns="0" tIns="0" bIns="0">
+            <a:spAutoFit/>
+          </a:bodyPr>
+          <a:lstStyle/>
+          <a:p>
+            <a:pPr algn="ctr"/>
+            <a:r>
+              <a:rPr sz="1080" b="1" i="0">
+                <a:solidFill>
                   <a:srgbClr val="2563EB">
                     <a:alpha val="100000"/>
                   </a:srgbClr>
@@ -6152,7 +6362,46 @@
                 <a:ea typeface="Arial"/>
                 <a:cs typeface="Arial"/>
               </a:rPr>
-              <a:t>部署位置: EC2 t3.micro (Python 3.12 FastAPI) | /ws/* WebSocket 端點</a:t>
+              <a:t>/ws/* → EC2</a:t>
+            </a:r>
+          </a:p>
+        </p:txBody>
+      </p:sp>
+      <p:sp>
+        <p:nvSpPr>
+          <p:cNvPr id="21" name="TextBox 20"/>
+          <p:cNvSpPr txBox="1"/>
+          <p:nvPr/>
+        </p:nvSpPr>
+        <p:spPr>
+          <a:xfrm>
+            <a:off x="5730096" y="2125980"/>
+            <a:ext cx="731501" cy="137160"/>
+          </a:xfrm>
+          <a:prstGeom prst="rect">
+            <a:avLst/>
+          </a:prstGeom>
+          <a:noFill/>
+        </p:spPr>
+        <p:txBody>
+          <a:bodyPr wrap="square" anchor="ctr" lIns="0" rIns="0" tIns="0" bIns="0">
+            <a:spAutoFit/>
+          </a:bodyPr>
+          <a:lstStyle/>
+          <a:p>
+            <a:pPr algn="ctr"/>
+            <a:r>
+              <a:rPr sz="971" b="0" i="0">
+                <a:solidFill>
+                  <a:srgbClr val="545B64">
+                    <a:alpha val="100000"/>
+                  </a:srgbClr>
+                </a:solidFill>
+                <a:latin typeface="Arial"/>
+                <a:ea typeface="Arial"/>
+                <a:cs typeface="Arial"/>
+              </a:rPr>
+              <a:t>HTTPS</a:t>
             </a:r>
           </a:p>
         </p:txBody>
@@ -6190,7 +6439,7 @@
             <a:avLst/>
           </a:prstGeom>
           <a:solidFill>
-            <a:srgbClr val="FFFFFF"/>
+            <a:srgbClr val="F8F9FA"/>
           </a:solidFill>
           <a:ln>
             <a:noFill/>
@@ -6221,7 +6470,99 @@
       </p:sp>
       <p:sp>
         <p:nvSpPr>
-          <p:cNvPr id="3" name="TextBox 2"/>
+          <p:cNvPr id="3" name="Rounded Rectangle 2"/>
+          <p:cNvSpPr/>
+          <p:nvPr/>
+        </p:nvSpPr>
+        <p:spPr>
+          <a:xfrm>
+            <a:off x="975335" y="1714500"/>
+            <a:ext cx="4632844" cy="480060"/>
+          </a:xfrm>
+          <a:prstGeom prst="roundRect">
+            <a:avLst>
+              <a:gd name="adj" fmla="val 3000"/>
+            </a:avLst>
+          </a:prstGeom>
+          <a:solidFill>
+            <a:srgbClr val="DC2626"/>
+          </a:solidFill>
+          <a:ln>
+            <a:noFill/>
+          </a:ln>
+          <a:effectLst/>
+        </p:spPr>
+        <p:style>
+          <a:lnRef idx="1">
+            <a:schemeClr val="accent1"/>
+          </a:lnRef>
+          <a:fillRef idx="3">
+            <a:schemeClr val="accent1"/>
+          </a:fillRef>
+          <a:effectRef idx="2">
+            <a:schemeClr val="accent1"/>
+          </a:effectRef>
+          <a:fontRef idx="minor">
+            <a:schemeClr val="lt1"/>
+          </a:fontRef>
+        </p:style>
+        <p:txBody>
+          <a:bodyPr rtlCol="0" anchor="ctr"/>
+          <a:lstStyle/>
+          <a:p>
+            <a:pPr algn="ctr"/>
+          </a:p>
+        </p:txBody>
+      </p:sp>
+      <p:sp>
+        <p:nvSpPr>
+          <p:cNvPr id="4" name="Rounded Rectangle 3"/>
+          <p:cNvSpPr/>
+          <p:nvPr/>
+        </p:nvSpPr>
+        <p:spPr>
+          <a:xfrm>
+            <a:off x="6583515" y="1714500"/>
+            <a:ext cx="4632844" cy="480060"/>
+          </a:xfrm>
+          <a:prstGeom prst="roundRect">
+            <a:avLst>
+              <a:gd name="adj" fmla="val 3000"/>
+            </a:avLst>
+          </a:prstGeom>
+          <a:solidFill>
+            <a:srgbClr val="16A34A"/>
+          </a:solidFill>
+          <a:ln>
+            <a:noFill/>
+          </a:ln>
+          <a:effectLst/>
+        </p:spPr>
+        <p:style>
+          <a:lnRef idx="1">
+            <a:schemeClr val="accent1"/>
+          </a:lnRef>
+          <a:fillRef idx="3">
+            <a:schemeClr val="accent1"/>
+          </a:fillRef>
+          <a:effectRef idx="2">
+            <a:schemeClr val="accent1"/>
+          </a:effectRef>
+          <a:fontRef idx="minor">
+            <a:schemeClr val="lt1"/>
+          </a:fontRef>
+        </p:style>
+        <p:txBody>
+          <a:bodyPr rtlCol="0" anchor="ctr"/>
+          <a:lstStyle/>
+          <a:p>
+            <a:pPr algn="ctr"/>
+          </a:p>
+        </p:txBody>
+      </p:sp>
+      <p:sp>
+        <p:nvSpPr>
+          <p:cNvPr id="5" name="TextBox 4"/>
           <p:cNvSpPr txBox="1"/>
           <p:nvPr/>
         </p:nvSpPr>
@@ -6253,14 +6594,14 @@
                 <a:ea typeface="Arial"/>
                 <a:cs typeface="Arial"/>
               </a:rPr>
-              <a:t>v1 → v2 架構演進</a:t>
-            </a:r>
-          </a:p>
-        </p:txBody>
-      </p:sp>
-      <p:sp>
-        <p:nvSpPr>
-          <p:cNvPr id="4" name="TextBox 3"/>
+              <a:t>LiveCaption 語音辨識層</a:t>
+            </a:r>
+          </a:p>
+        </p:txBody>
+      </p:sp>
+      <p:sp>
+        <p:nvSpPr>
+          <p:cNvPr id="6" name="TextBox 5"/>
           <p:cNvSpPr txBox="1"/>
           <p:nvPr/>
         </p:nvSpPr>
@@ -6284,29 +6625,29 @@
             <a:r>
               <a:rPr sz="1512" b="1" i="0">
                 <a:solidFill>
-                  <a:srgbClr val="16A34A">
-                    <a:alpha val="100000"/>
-                  </a:srgbClr>
-                </a:solidFill>
-                <a:latin typeface="Arial"/>
-                <a:ea typeface="Arial"/>
-                <a:cs typeface="Arial"/>
-              </a:rPr>
-              <a:t>24 小時 MVP | 最少服務數 | 最低固定成本</a:t>
-            </a:r>
-          </a:p>
-        </p:txBody>
-      </p:sp>
-      <p:sp>
-        <p:nvSpPr>
-          <p:cNvPr id="5" name="TextBox 4"/>
+                  <a:srgbClr val="FF9900">
+                    <a:alpha val="100000"/>
+                  </a:srgbClr>
+                </a:solidFill>
+                <a:latin typeface="Arial"/>
+                <a:ea typeface="Arial"/>
+                <a:cs typeface="Arial"/>
+              </a:rPr>
+              <a:t>Amazon Transcribe Streaming 封裝 | 專為長照現場優化</a:t>
+            </a:r>
+          </a:p>
+        </p:txBody>
+      </p:sp>
+      <p:sp>
+        <p:nvSpPr>
+          <p:cNvPr id="7" name="TextBox 6"/>
           <p:cNvSpPr txBox="1"/>
           <p:nvPr/>
         </p:nvSpPr>
         <p:spPr>
           <a:xfrm>
-            <a:off x="1219169" y="1920240"/>
-            <a:ext cx="9753356" cy="342900"/>
+            <a:off x="975335" y="1851660"/>
+            <a:ext cx="4632844" cy="342900"/>
           </a:xfrm>
           <a:prstGeom prst="rect">
             <a:avLst/>
@@ -6319,33 +6660,72 @@
           </a:bodyPr>
           <a:lstStyle/>
           <a:p>
-            <a:pPr algn="l"/>
+            <a:pPr algn="ctr"/>
             <a:r>
               <a:rPr sz="1728" b="1" i="0">
                 <a:solidFill>
-                  <a:srgbClr val="DC2626">
-                    <a:alpha val="100000"/>
-                  </a:srgbClr>
-                </a:solidFill>
-                <a:latin typeface="Arial"/>
-                <a:ea typeface="Arial"/>
-                <a:cs typeface="Arial"/>
-              </a:rPr>
-              <a:t>❌ 移除 API Gateway + Lambda</a:t>
-            </a:r>
-          </a:p>
-        </p:txBody>
-      </p:sp>
-      <p:sp>
-        <p:nvSpPr>
-          <p:cNvPr id="6" name="TextBox 5"/>
+                  <a:srgbClr val="FFFFFF">
+                    <a:alpha val="100000"/>
+                  </a:srgbClr>
+                </a:solidFill>
+                <a:latin typeface="Arial"/>
+                <a:ea typeface="Arial"/>
+                <a:cs typeface="Arial"/>
+              </a:rPr>
+              <a:t>長照現場問題</a:t>
+            </a:r>
+          </a:p>
+        </p:txBody>
+      </p:sp>
+      <p:sp>
+        <p:nvSpPr>
+          <p:cNvPr id="8" name="TextBox 7"/>
           <p:cNvSpPr txBox="1"/>
           <p:nvPr/>
         </p:nvSpPr>
         <p:spPr>
           <a:xfrm>
-            <a:off x="1463003" y="2331720"/>
-            <a:ext cx="9509522" cy="754380"/>
+            <a:off x="6583515" y="1851660"/>
+            <a:ext cx="4632844" cy="342900"/>
+          </a:xfrm>
+          <a:prstGeom prst="rect">
+            <a:avLst/>
+          </a:prstGeom>
+          <a:noFill/>
+        </p:spPr>
+        <p:txBody>
+          <a:bodyPr wrap="square" anchor="ctr" lIns="0" rIns="0" tIns="0" bIns="0">
+            <a:spAutoFit/>
+          </a:bodyPr>
+          <a:lstStyle/>
+          <a:p>
+            <a:pPr algn="ctr"/>
+            <a:r>
+              <a:rPr sz="1728" b="1" i="0">
+                <a:solidFill>
+                  <a:srgbClr val="FFFFFF">
+                    <a:alpha val="100000"/>
+                  </a:srgbClr>
+                </a:solidFill>
+                <a:latin typeface="Arial"/>
+                <a:ea typeface="Arial"/>
+                <a:cs typeface="Arial"/>
+              </a:rPr>
+              <a:t>LiveCaption 解決方案</a:t>
+            </a:r>
+          </a:p>
+        </p:txBody>
+      </p:sp>
+      <p:sp>
+        <p:nvSpPr>
+          <p:cNvPr id="9" name="TextBox 8"/>
+          <p:cNvSpPr txBox="1"/>
+          <p:nvPr/>
+        </p:nvSpPr>
+        <p:spPr>
+          <a:xfrm>
+            <a:off x="975335" y="2331720"/>
+            <a:ext cx="4632844" cy="548640"/>
           </a:xfrm>
           <a:prstGeom prst="rect">
             <a:avLst/>
@@ -6360,62 +6740,431 @@
           <a:p>
             <a:pPr algn="l"/>
             <a:r>
-              <a:rPr sz="1404" b="0" i="0">
-                <a:solidFill>
-                  <a:srgbClr val="232F3E">
-                    <a:alpha val="100000"/>
-                  </a:srgbClr>
-                </a:solidFill>
-                <a:latin typeface="Arial"/>
-                <a:ea typeface="Arial"/>
-                <a:cs typeface="Arial"/>
-              </a:rPr>
-              <a:t>• v1: API Gateway + Lambda 中介層</a:t>
-            </a:r>
-          </a:p>
-          <a:p>
-            <a:pPr algn="l"/>
-            <a:r>
-              <a:rPr sz="1404" b="0" i="0">
-                <a:solidFill>
-                  <a:srgbClr val="232F3E">
-                    <a:alpha val="100000"/>
-                  </a:srgbClr>
-                </a:solidFill>
-                <a:latin typeface="Arial"/>
-                <a:ea typeface="Arial"/>
-                <a:cs typeface="Arial"/>
-              </a:rPr>
-              <a:t>• v2: 前端直接呼叫 AWS SDK</a:t>
-            </a:r>
-          </a:p>
-          <a:p>
-            <a:pPr algn="l"/>
-            <a:r>
-              <a:rPr sz="1404" b="0" i="0">
-                <a:solidFill>
-                  <a:srgbClr val="232F3E">
-                    <a:alpha val="100000"/>
-                  </a:srgbClr>
-                </a:solidFill>
-                <a:latin typeface="Arial"/>
-                <a:ea typeface="Arial"/>
-                <a:cs typeface="Arial"/>
-              </a:rPr>
-              <a:t>→ 少一層部署與除錯，24h 內最省時間</a:t>
-            </a:r>
-          </a:p>
-        </p:txBody>
-      </p:sp>
-      <p:sp>
-        <p:nvSpPr>
-          <p:cNvPr id="7" name="TextBox 6"/>
+              <a:rPr sz="1296" b="0" i="0">
+                <a:solidFill>
+                  <a:srgbClr val="232F3E">
+                    <a:alpha val="100000"/>
+                  </a:srgbClr>
+                </a:solidFill>
+                <a:latin typeface="Arial"/>
+                <a:ea typeface="Arial"/>
+                <a:cs typeface="Arial"/>
+              </a:rPr>
+              <a:t>長者講話慢、停頓長 (數十秒)</a:t>
+            </a:r>
+          </a:p>
+          <a:p>
+            <a:pPr algn="l"/>
+            <a:r>
+              <a:rPr sz="1296" b="0" i="0">
+                <a:solidFill>
+                  <a:srgbClr val="232F3E">
+                    <a:alpha val="100000"/>
+                  </a:srgbClr>
+                </a:solidFill>
+                <a:latin typeface="Arial"/>
+                <a:ea typeface="Arial"/>
+                <a:cs typeface="Arial"/>
+              </a:rPr>
+              <a:t>→ Transcribe 收不到音訊就斷線</a:t>
+            </a:r>
+          </a:p>
+        </p:txBody>
+      </p:sp>
+      <p:sp>
+        <p:nvSpPr>
+          <p:cNvPr id="10" name="TextBox 9"/>
           <p:cNvSpPr txBox="1"/>
           <p:nvPr/>
         </p:nvSpPr>
         <p:spPr>
           <a:xfrm>
-            <a:off x="1219169" y="3291840"/>
+            <a:off x="6583515" y="2331720"/>
+            <a:ext cx="4632844" cy="548640"/>
+          </a:xfrm>
+          <a:prstGeom prst="rect">
+            <a:avLst/>
+          </a:prstGeom>
+          <a:noFill/>
+        </p:spPr>
+        <p:txBody>
+          <a:bodyPr wrap="square" anchor="t" lIns="0" rIns="0" tIns="0" bIns="0">
+            <a:spAutoFit/>
+          </a:bodyPr>
+          <a:lstStyle/>
+          <a:p>
+            <a:pPr algn="l"/>
+            <a:r>
+              <a:rPr sz="1296" b="1" i="0">
+                <a:solidFill>
+                  <a:srgbClr val="16A34A">
+                    <a:alpha val="100000"/>
+                  </a:srgbClr>
+                </a:solidFill>
+                <a:latin typeface="Arial"/>
+                <a:ea typeface="Arial"/>
+                <a:cs typeface="Arial"/>
+              </a:rPr>
+              <a:t>silence_keepalive</a:t>
+            </a:r>
+          </a:p>
+          <a:p>
+            <a:pPr algn="l"/>
+            <a:r>
+              <a:rPr sz="1296" b="1" i="0">
+                <a:solidFill>
+                  <a:srgbClr val="16A34A">
+                    <a:alpha val="100000"/>
+                  </a:srgbClr>
+                </a:solidFill>
+                <a:latin typeface="Arial"/>
+                <a:ea typeface="Arial"/>
+                <a:cs typeface="Arial"/>
+              </a:rPr>
+              <a:t>閒置 3 秒自動補靜音幀維持連線</a:t>
+            </a:r>
+          </a:p>
+        </p:txBody>
+      </p:sp>
+      <p:sp>
+        <p:nvSpPr>
+          <p:cNvPr id="11" name="TextBox 10"/>
+          <p:cNvSpPr txBox="1"/>
+          <p:nvPr/>
+        </p:nvSpPr>
+        <p:spPr>
+          <a:xfrm>
+            <a:off x="975335" y="3017520"/>
+            <a:ext cx="4632844" cy="548640"/>
+          </a:xfrm>
+          <a:prstGeom prst="rect">
+            <a:avLst/>
+          </a:prstGeom>
+          <a:noFill/>
+        </p:spPr>
+        <p:txBody>
+          <a:bodyPr wrap="square" anchor="t" lIns="0" rIns="0" tIns="0" bIns="0">
+            <a:spAutoFit/>
+          </a:bodyPr>
+          <a:lstStyle/>
+          <a:p>
+            <a:pPr algn="l"/>
+            <a:r>
+              <a:rPr sz="1296" b="0" i="0">
+                <a:solidFill>
+                  <a:srgbClr val="232F3E">
+                    <a:alpha val="100000"/>
+                  </a:srgbClr>
+                </a:solidFill>
+                <a:latin typeface="Arial"/>
+                <a:ea typeface="Arial"/>
+                <a:cs typeface="Arial"/>
+              </a:rPr>
+              <a:t>partial 結果反覆改寫</a:t>
+            </a:r>
+          </a:p>
+          <a:p>
+            <a:pPr algn="l"/>
+            <a:r>
+              <a:rPr sz="1296" b="0" i="0">
+                <a:solidFill>
+                  <a:srgbClr val="232F3E">
+                    <a:alpha val="100000"/>
+                  </a:srgbClr>
+                </a:solidFill>
+                <a:latin typeface="Arial"/>
+                <a:ea typeface="Arial"/>
+                <a:cs typeface="Arial"/>
+              </a:rPr>
+              <a:t>→ 字幕在螢幕上跳動，長者讀不完</a:t>
+            </a:r>
+          </a:p>
+        </p:txBody>
+      </p:sp>
+      <p:sp>
+        <p:nvSpPr>
+          <p:cNvPr id="12" name="TextBox 11"/>
+          <p:cNvSpPr txBox="1"/>
+          <p:nvPr/>
+        </p:nvSpPr>
+        <p:spPr>
+          <a:xfrm>
+            <a:off x="6583515" y="3017520"/>
+            <a:ext cx="4632844" cy="548640"/>
+          </a:xfrm>
+          <a:prstGeom prst="rect">
+            <a:avLst/>
+          </a:prstGeom>
+          <a:noFill/>
+        </p:spPr>
+        <p:txBody>
+          <a:bodyPr wrap="square" anchor="t" lIns="0" rIns="0" tIns="0" bIns="0">
+            <a:spAutoFit/>
+          </a:bodyPr>
+          <a:lstStyle/>
+          <a:p>
+            <a:pPr algn="l"/>
+            <a:r>
+              <a:rPr sz="1296" b="1" i="0">
+                <a:solidFill>
+                  <a:srgbClr val="16A34A">
+                    <a:alpha val="100000"/>
+                  </a:srgbClr>
+                </a:solidFill>
+                <a:latin typeface="Arial"/>
+                <a:ea typeface="Arial"/>
+                <a:cs typeface="Arial"/>
+              </a:rPr>
+              <a:t>enable_partial_results_stabilization=high</a:t>
+            </a:r>
+          </a:p>
+          <a:p>
+            <a:pPr algn="l"/>
+            <a:r>
+              <a:rPr sz="1296" b="1" i="0">
+                <a:solidFill>
+                  <a:srgbClr val="16A34A">
+                    <a:alpha val="100000"/>
+                  </a:srgbClr>
+                </a:solidFill>
+                <a:latin typeface="Arial"/>
+                <a:ea typeface="Arial"/>
+                <a:cs typeface="Arial"/>
+              </a:rPr>
+              <a:t>已辨識的字不再變動</a:t>
+            </a:r>
+          </a:p>
+        </p:txBody>
+      </p:sp>
+      <p:sp>
+        <p:nvSpPr>
+          <p:cNvPr id="13" name="TextBox 12"/>
+          <p:cNvSpPr txBox="1"/>
+          <p:nvPr/>
+        </p:nvSpPr>
+        <p:spPr>
+          <a:xfrm>
+            <a:off x="975335" y="3703320"/>
+            <a:ext cx="4632844" cy="548640"/>
+          </a:xfrm>
+          <a:prstGeom prst="rect">
+            <a:avLst/>
+          </a:prstGeom>
+          <a:noFill/>
+        </p:spPr>
+        <p:txBody>
+          <a:bodyPr wrap="square" anchor="t" lIns="0" rIns="0" tIns="0" bIns="0">
+            <a:spAutoFit/>
+          </a:bodyPr>
+          <a:lstStyle/>
+          <a:p>
+            <a:pPr algn="l"/>
+            <a:r>
+              <a:rPr sz="1296" b="0" i="0">
+                <a:solidFill>
+                  <a:srgbClr val="232F3E">
+                    <a:alpha val="100000"/>
+                  </a:srgbClr>
+                </a:solidFill>
+                <a:latin typeface="Arial"/>
+                <a:ea typeface="Arial"/>
+                <a:cs typeface="Arial"/>
+              </a:rPr>
+              <a:t>印尼/越南籍照服員與長者混講</a:t>
+            </a:r>
+          </a:p>
+          <a:p>
+            <a:pPr algn="l"/>
+            <a:r>
+              <a:rPr sz="1296" b="0" i="0">
+                <a:solidFill>
+                  <a:srgbClr val="232F3E">
+                    <a:alpha val="100000"/>
+                  </a:srgbClr>
+                </a:solidFill>
+                <a:latin typeface="Arial"/>
+                <a:ea typeface="Arial"/>
+                <a:cs typeface="Arial"/>
+              </a:rPr>
+              <a:t>→ 無法事先指定語言</a:t>
+            </a:r>
+          </a:p>
+        </p:txBody>
+      </p:sp>
+      <p:sp>
+        <p:nvSpPr>
+          <p:cNvPr id="14" name="TextBox 13"/>
+          <p:cNvSpPr txBox="1"/>
+          <p:nvPr/>
+        </p:nvSpPr>
+        <p:spPr>
+          <a:xfrm>
+            <a:off x="6583515" y="3703320"/>
+            <a:ext cx="4632844" cy="548640"/>
+          </a:xfrm>
+          <a:prstGeom prst="rect">
+            <a:avLst/>
+          </a:prstGeom>
+          <a:noFill/>
+        </p:spPr>
+        <p:txBody>
+          <a:bodyPr wrap="square" anchor="t" lIns="0" rIns="0" tIns="0" bIns="0">
+            <a:spAutoFit/>
+          </a:bodyPr>
+          <a:lstStyle/>
+          <a:p>
+            <a:pPr algn="l"/>
+            <a:r>
+              <a:rPr sz="1296" b="1" i="0">
+                <a:solidFill>
+                  <a:srgbClr val="16A34A">
+                    <a:alpha val="100000"/>
+                  </a:srgbClr>
+                </a:solidFill>
+                <a:latin typeface="Arial"/>
+                <a:ea typeface="Arial"/>
+                <a:cs typeface="Arial"/>
+              </a:rPr>
+              <a:t>identify_language 自動判定</a:t>
+            </a:r>
+          </a:p>
+          <a:p>
+            <a:pPr algn="l"/>
+            <a:r>
+              <a:rPr sz="1296" b="1" i="0">
+                <a:solidFill>
+                  <a:srgbClr val="16A34A">
+                    <a:alpha val="100000"/>
+                  </a:srgbClr>
+                </a:solidFill>
+                <a:latin typeface="Arial"/>
+                <a:ea typeface="Arial"/>
+                <a:cs typeface="Arial"/>
+              </a:rPr>
+              <a:t>zh-TW/id-ID/vi-VN/en/ja/th</a:t>
+            </a:r>
+          </a:p>
+        </p:txBody>
+      </p:sp>
+      <p:sp>
+        <p:nvSpPr>
+          <p:cNvPr id="15" name="TextBox 14"/>
+          <p:cNvSpPr txBox="1"/>
+          <p:nvPr/>
+        </p:nvSpPr>
+        <p:spPr>
+          <a:xfrm>
+            <a:off x="975335" y="4389120"/>
+            <a:ext cx="4632844" cy="548640"/>
+          </a:xfrm>
+          <a:prstGeom prst="rect">
+            <a:avLst/>
+          </a:prstGeom>
+          <a:noFill/>
+        </p:spPr>
+        <p:txBody>
+          <a:bodyPr wrap="square" anchor="t" lIns="0" rIns="0" tIns="0" bIns="0">
+            <a:spAutoFit/>
+          </a:bodyPr>
+          <a:lstStyle/>
+          <a:p>
+            <a:pPr algn="l"/>
+            <a:r>
+              <a:rPr sz="1296" b="0" i="0">
+                <a:solidFill>
+                  <a:srgbClr val="232F3E">
+                    <a:alpha val="100000"/>
+                  </a:srgbClr>
+                </a:solidFill>
+                <a:latin typeface="Arial"/>
+                <a:ea typeface="Arial"/>
+                <a:cs typeface="Arial"/>
+              </a:rPr>
+              <a:t>需分辨「照服員說的」vs「長者說的」</a:t>
+            </a:r>
+          </a:p>
+          <a:p>
+            <a:pPr algn="l"/>
+            <a:r>
+              <a:rPr sz="1296" b="0" i="0">
+                <a:solidFill>
+                  <a:srgbClr val="232F3E">
+                    <a:alpha val="100000"/>
+                  </a:srgbClr>
+                </a:solidFill>
+                <a:latin typeface="Arial"/>
+                <a:ea typeface="Arial"/>
+                <a:cs typeface="Arial"/>
+              </a:rPr>
+              <a:t>→ 交班記錄需要語者標示</a:t>
+            </a:r>
+          </a:p>
+        </p:txBody>
+      </p:sp>
+      <p:sp>
+        <p:nvSpPr>
+          <p:cNvPr id="16" name="TextBox 15"/>
+          <p:cNvSpPr txBox="1"/>
+          <p:nvPr/>
+        </p:nvSpPr>
+        <p:spPr>
+          <a:xfrm>
+            <a:off x="6583515" y="4389120"/>
+            <a:ext cx="4632844" cy="548640"/>
+          </a:xfrm>
+          <a:prstGeom prst="rect">
+            <a:avLst/>
+          </a:prstGeom>
+          <a:noFill/>
+        </p:spPr>
+        <p:txBody>
+          <a:bodyPr wrap="square" anchor="t" lIns="0" rIns="0" tIns="0" bIns="0">
+            <a:spAutoFit/>
+          </a:bodyPr>
+          <a:lstStyle/>
+          <a:p>
+            <a:pPr algn="l"/>
+            <a:r>
+              <a:rPr sz="1296" b="1" i="0">
+                <a:solidFill>
+                  <a:srgbClr val="16A34A">
+                    <a:alpha val="100000"/>
+                  </a:srgbClr>
+                </a:solidFill>
+                <a:latin typeface="Arial"/>
+                <a:ea typeface="Arial"/>
+                <a:cs typeface="Arial"/>
+              </a:rPr>
+              <a:t>show_speaker_label</a:t>
+            </a:r>
+          </a:p>
+          <a:p>
+            <a:pPr algn="l"/>
+            <a:r>
+              <a:rPr sz="1296" b="1" i="0">
+                <a:solidFill>
+                  <a:srgbClr val="16A34A">
+                    <a:alpha val="100000"/>
+                  </a:srgbClr>
+                </a:solidFill>
+                <a:latin typeface="Arial"/>
+                <a:ea typeface="Arial"/>
+                <a:cs typeface="Arial"/>
+              </a:rPr>
+              <a:t>產生語者標籤寫入 segment.speakers</a:t>
+            </a:r>
+          </a:p>
+        </p:txBody>
+      </p:sp>
+      <p:sp>
+        <p:nvSpPr>
+          <p:cNvPr id="17" name="TextBox 16"/>
+          <p:cNvSpPr txBox="1"/>
+          <p:nvPr/>
+        </p:nvSpPr>
+        <p:spPr>
+          <a:xfrm>
+            <a:off x="1219169" y="5486400"/>
             <a:ext cx="9753356" cy="342900"/>
           </a:xfrm>
           <a:prstGeom prst="rect">
@@ -6429,119 +7178,9 @@
           </a:bodyPr>
           <a:lstStyle/>
           <a:p>
-            <a:pPr algn="l"/>
-            <a:r>
-              <a:rPr sz="1728" b="1" i="0">
-                <a:solidFill>
-                  <a:srgbClr val="16A34A">
-                    <a:alpha val="100000"/>
-                  </a:srgbClr>
-                </a:solidFill>
-                <a:latin typeface="Arial"/>
-                <a:ea typeface="Arial"/>
-                <a:cs typeface="Arial"/>
-              </a:rPr>
-              <a:t>✅ 成本優化 90%: S3 Vectors</a:t>
-            </a:r>
-          </a:p>
-        </p:txBody>
-      </p:sp>
-      <p:sp>
-        <p:nvSpPr>
-          <p:cNvPr id="8" name="TextBox 7"/>
-          <p:cNvSpPr txBox="1"/>
-          <p:nvPr/>
-        </p:nvSpPr>
-        <p:spPr>
-          <a:xfrm>
-            <a:off x="1463003" y="3703320"/>
-            <a:ext cx="9509522" cy="754380"/>
-          </a:xfrm>
-          <a:prstGeom prst="rect">
-            <a:avLst/>
-          </a:prstGeom>
-          <a:noFill/>
-        </p:spPr>
-        <p:txBody>
-          <a:bodyPr wrap="square" anchor="t" lIns="0" rIns="0" tIns="0" bIns="0">
-            <a:spAutoFit/>
-          </a:bodyPr>
-          <a:lstStyle/>
-          <a:p>
-            <a:pPr algn="l"/>
-            <a:r>
-              <a:rPr sz="1404" b="0" i="0">
-                <a:solidFill>
-                  <a:srgbClr val="232F3E">
-                    <a:alpha val="100000"/>
-                  </a:srgbClr>
-                </a:solidFill>
-                <a:latin typeface="Arial"/>
-                <a:ea typeface="Arial"/>
-                <a:cs typeface="Arial"/>
-              </a:rPr>
-              <a:t>• v1: OpenSearch Serverless (昂貴)</a:t>
-            </a:r>
-          </a:p>
-          <a:p>
-            <a:pPr algn="l"/>
-            <a:r>
-              <a:rPr sz="1404" b="0" i="0">
-                <a:solidFill>
-                  <a:srgbClr val="232F3E">
-                    <a:alpha val="100000"/>
-                  </a:srgbClr>
-                </a:solidFill>
-                <a:latin typeface="Arial"/>
-                <a:ea typeface="Arial"/>
-                <a:cs typeface="Arial"/>
-              </a:rPr>
-              <a:t>• v2: S3 Vectors (2025/12 GA)</a:t>
-            </a:r>
-          </a:p>
-          <a:p>
-            <a:pPr algn="l"/>
-            <a:r>
-              <a:rPr sz="1404" b="0" i="0">
-                <a:solidFill>
-                  <a:srgbClr val="232F3E">
-                    <a:alpha val="100000"/>
-                  </a:srgbClr>
-                </a:solidFill>
-                <a:latin typeface="Arial"/>
-                <a:ea typeface="Arial"/>
-                <a:cs typeface="Arial"/>
-              </a:rPr>
-              <a:t>→ 成本降約 90%，無需管理 collection</a:t>
-            </a:r>
-          </a:p>
-        </p:txBody>
-      </p:sp>
-      <p:sp>
-        <p:nvSpPr>
-          <p:cNvPr id="9" name="TextBox 8"/>
-          <p:cNvSpPr txBox="1"/>
-          <p:nvPr/>
-        </p:nvSpPr>
-        <p:spPr>
-          <a:xfrm>
-            <a:off x="1219169" y="4663440"/>
-            <a:ext cx="9753356" cy="342900"/>
-          </a:xfrm>
-          <a:prstGeom prst="rect">
-            <a:avLst/>
-          </a:prstGeom>
-          <a:noFill/>
-        </p:spPr>
-        <p:txBody>
-          <a:bodyPr wrap="square" anchor="ctr" lIns="0" rIns="0" tIns="0" bIns="0">
-            <a:spAutoFit/>
-          </a:bodyPr>
-          <a:lstStyle/>
-          <a:p>
-            <a:pPr algn="l"/>
-            <a:r>
-              <a:rPr sz="1728" b="1" i="0">
+            <a:pPr algn="ctr"/>
+            <a:r>
+              <a:rPr sz="1404" b="1" i="0">
                 <a:solidFill>
                   <a:srgbClr val="2563EB">
                     <a:alpha val="100000"/>
@@ -6551,78 +7190,7 @@
                 <a:ea typeface="Arial"/>
                 <a:cs typeface="Arial"/>
               </a:rPr>
-              <a:t>✅ AI 服務升級</a:t>
-            </a:r>
-          </a:p>
-        </p:txBody>
-      </p:sp>
-      <p:sp>
-        <p:nvSpPr>
-          <p:cNvPr id="10" name="TextBox 9"/>
-          <p:cNvSpPr txBox="1"/>
-          <p:nvPr/>
-        </p:nvSpPr>
-        <p:spPr>
-          <a:xfrm>
-            <a:off x="1463003" y="5074920"/>
-            <a:ext cx="9509522" cy="891540"/>
-          </a:xfrm>
-          <a:prstGeom prst="rect">
-            <a:avLst/>
-          </a:prstGeom>
-          <a:noFill/>
-        </p:spPr>
-        <p:txBody>
-          <a:bodyPr wrap="square" anchor="t" lIns="0" rIns="0" tIns="0" bIns="0">
-            <a:spAutoFit/>
-          </a:bodyPr>
-          <a:lstStyle/>
-          <a:p>
-            <a:pPr algn="l"/>
-            <a:r>
-              <a:rPr sz="1404" b="0" i="0">
-                <a:solidFill>
-                  <a:srgbClr val="232F3E">
-                    <a:alpha val="100000"/>
-                  </a:srgbClr>
-                </a:solidFill>
-                <a:latin typeface="Arial"/>
-                <a:ea typeface="Arial"/>
-                <a:cs typeface="Arial"/>
-              </a:rPr>
-              <a:t>• LLM: Claude 3 Sonnet → Claude Sonnet 4 (高性能推理)</a:t>
-            </a:r>
-          </a:p>
-          <a:p>
-            <a:pPr algn="l"/>
-            <a:r>
-              <a:rPr sz="1404" b="0" i="0">
-                <a:solidFill>
-                  <a:srgbClr val="232F3E">
-                    <a:alpha val="100000"/>
-                  </a:srgbClr>
-                </a:solidFill>
-                <a:latin typeface="Arial"/>
-                <a:ea typeface="Arial"/>
-                <a:cs typeface="Arial"/>
-              </a:rPr>
-              <a:t>• RAG: 自建 (向量查詢+摘要) → Bedrock RetrieveAndGenerate (一個 API)</a:t>
-            </a:r>
-          </a:p>
-          <a:p>
-            <a:pPr algn="l"/>
-            <a:r>
-              <a:rPr sz="1404" b="0" i="0">
-                <a:solidFill>
-                  <a:srgbClr val="232F3E">
-                    <a:alpha val="100000"/>
-                  </a:srgbClr>
-                </a:solidFill>
-                <a:latin typeface="Arial"/>
-                <a:ea typeface="Arial"/>
-                <a:cs typeface="Arial"/>
-              </a:rPr>
-              <a:t>• 分類: Amazon Comprehend → Claude structured output (省一次網路往返)</a:t>
+              <a:t>部署位置: EC2 t3.micro (Python 3.12 FastAPI) | /ws/* WebSocket 端點</a:t>
             </a:r>
           </a:p>
         </p:txBody>
@@ -6660,7 +7228,7 @@
             <a:avLst/>
           </a:prstGeom>
           <a:solidFill>
-            <a:srgbClr val="F8F9FA"/>
+            <a:srgbClr val="FFFFFF"/>
           </a:solidFill>
           <a:ln>
             <a:noFill/>
@@ -6691,45 +7259,40 @@
       </p:sp>
       <p:sp>
         <p:nvSpPr>
-          <p:cNvPr id="3" name="Rectangle 2"/>
-          <p:cNvSpPr/>
-          <p:nvPr/>
-        </p:nvSpPr>
-        <p:spPr>
-          <a:xfrm>
-            <a:off x="0" y="0"/>
-            <a:ext cx="12191695" cy="411480"/>
-          </a:xfrm>
-          <a:prstGeom prst="rect">
-            <a:avLst/>
-          </a:prstGeom>
-          <a:solidFill>
-            <a:srgbClr val="FF9900"/>
-          </a:solidFill>
-          <a:ln>
-            <a:noFill/>
-          </a:ln>
-          <a:effectLst/>
-        </p:spPr>
-        <p:style>
-          <a:lnRef idx="1">
-            <a:schemeClr val="accent1"/>
-          </a:lnRef>
-          <a:fillRef idx="3">
-            <a:schemeClr val="accent1"/>
-          </a:fillRef>
-          <a:effectRef idx="2">
-            <a:schemeClr val="accent1"/>
-          </a:effectRef>
-          <a:fontRef idx="minor">
-            <a:schemeClr val="lt1"/>
-          </a:fontRef>
-        </p:style>
-        <p:txBody>
-          <a:bodyPr rtlCol="0" anchor="ctr"/>
+          <p:cNvPr id="3" name="TextBox 2"/>
+          <p:cNvSpPr txBox="1"/>
+          <p:nvPr/>
+        </p:nvSpPr>
+        <p:spPr>
+          <a:xfrm>
+            <a:off x="1219169" y="548640"/>
+            <a:ext cx="9753356" cy="548640"/>
+          </a:xfrm>
+          <a:prstGeom prst="rect">
+            <a:avLst/>
+          </a:prstGeom>
+          <a:noFill/>
+        </p:spPr>
+        <p:txBody>
+          <a:bodyPr wrap="square" anchor="t" lIns="0" rIns="0" tIns="0" bIns="0">
+            <a:spAutoFit/>
+          </a:bodyPr>
           <a:lstStyle/>
           <a:p>
             <a:pPr algn="ctr"/>
+            <a:r>
+              <a:rPr sz="3240" b="1" i="0">
+                <a:solidFill>
+                  <a:srgbClr val="232F3E">
+                    <a:alpha val="100000"/>
+                  </a:srgbClr>
+                </a:solidFill>
+                <a:latin typeface="Arial"/>
+                <a:ea typeface="Arial"/>
+                <a:cs typeface="Arial"/>
+              </a:rPr>
+              <a:t>v1 → v2 架構演進</a:t>
+            </a:r>
           </a:p>
         </p:txBody>
       </p:sp>
@@ -6741,8 +7304,8 @@
         </p:nvSpPr>
         <p:spPr>
           <a:xfrm>
-            <a:off x="1219169" y="822960"/>
-            <a:ext cx="9753356" cy="685800"/>
+            <a:off x="1219169" y="1234440"/>
+            <a:ext cx="9753356" cy="274320"/>
           </a:xfrm>
           <a:prstGeom prst="rect">
             <a:avLst/>
@@ -6757,17 +7320,17 @@
           <a:p>
             <a:pPr algn="ctr"/>
             <a:r>
-              <a:rPr sz="3510" b="1" i="0">
-                <a:solidFill>
-                  <a:srgbClr val="232F3E">
-                    <a:alpha val="100000"/>
-                  </a:srgbClr>
-                </a:solidFill>
-                <a:latin typeface="Arial"/>
-                <a:ea typeface="Arial"/>
-                <a:cs typeface="Arial"/>
-              </a:rPr>
-              <a:t>為什麼不用 Amazon Nova Sonic?</a:t>
+              <a:rPr sz="1512" b="1" i="0">
+                <a:solidFill>
+                  <a:srgbClr val="16A34A">
+                    <a:alpha val="100000"/>
+                  </a:srgbClr>
+                </a:solidFill>
+                <a:latin typeface="Arial"/>
+                <a:ea typeface="Arial"/>
+                <a:cs typeface="Arial"/>
+              </a:rPr>
+              <a:t>24 小時 MVP | 最少服務數 | 最低固定成本</a:t>
             </a:r>
           </a:p>
         </p:txBody>
@@ -6780,8 +7343,8 @@
         </p:nvSpPr>
         <p:spPr>
           <a:xfrm>
-            <a:off x="1219169" y="1783080"/>
-            <a:ext cx="9753356" cy="411480"/>
+            <a:off x="1219169" y="1920240"/>
+            <a:ext cx="9753356" cy="342900"/>
           </a:xfrm>
           <a:prstGeom prst="rect">
             <a:avLst/>
@@ -6794,19 +7357,19 @@
           </a:bodyPr>
           <a:lstStyle/>
           <a:p>
-            <a:pPr algn="ctr"/>
-            <a:r>
-              <a:rPr sz="2052" b="1" i="0">
-                <a:solidFill>
-                  <a:srgbClr val="FF9900">
-                    <a:alpha val="100000"/>
-                  </a:srgbClr>
-                </a:solidFill>
-                <a:latin typeface="Arial"/>
-                <a:ea typeface="Arial"/>
-                <a:cs typeface="Arial"/>
-              </a:rPr>
-              <a:t>Nova Sonic = Speech-to-Speech 一體化模型</a:t>
+            <a:pPr algn="l"/>
+            <a:r>
+              <a:rPr sz="1728" b="1" i="0">
+                <a:solidFill>
+                  <a:srgbClr val="DC2626">
+                    <a:alpha val="100000"/>
+                  </a:srgbClr>
+                </a:solidFill>
+                <a:latin typeface="Arial"/>
+                <a:ea typeface="Arial"/>
+                <a:cs typeface="Arial"/>
+              </a:rPr>
+              <a:t>❌ 移除 API Gateway + Lambda</a:t>
             </a:r>
           </a:p>
         </p:txBody>
@@ -6819,8 +7382,79 @@
         </p:nvSpPr>
         <p:spPr>
           <a:xfrm>
-            <a:off x="1828754" y="2468880"/>
-            <a:ext cx="8534186" cy="342900"/>
+            <a:off x="1463003" y="2331720"/>
+            <a:ext cx="9509522" cy="754380"/>
+          </a:xfrm>
+          <a:prstGeom prst="rect">
+            <a:avLst/>
+          </a:prstGeom>
+          <a:noFill/>
+        </p:spPr>
+        <p:txBody>
+          <a:bodyPr wrap="square" anchor="t" lIns="0" rIns="0" tIns="0" bIns="0">
+            <a:spAutoFit/>
+          </a:bodyPr>
+          <a:lstStyle/>
+          <a:p>
+            <a:pPr algn="l"/>
+            <a:r>
+              <a:rPr sz="1404" b="0" i="0">
+                <a:solidFill>
+                  <a:srgbClr val="232F3E">
+                    <a:alpha val="100000"/>
+                  </a:srgbClr>
+                </a:solidFill>
+                <a:latin typeface="Arial"/>
+                <a:ea typeface="Arial"/>
+                <a:cs typeface="Arial"/>
+              </a:rPr>
+              <a:t>• v1: API Gateway + Lambda 中介層</a:t>
+            </a:r>
+          </a:p>
+          <a:p>
+            <a:pPr algn="l"/>
+            <a:r>
+              <a:rPr sz="1404" b="0" i="0">
+                <a:solidFill>
+                  <a:srgbClr val="232F3E">
+                    <a:alpha val="100000"/>
+                  </a:srgbClr>
+                </a:solidFill>
+                <a:latin typeface="Arial"/>
+                <a:ea typeface="Arial"/>
+                <a:cs typeface="Arial"/>
+              </a:rPr>
+              <a:t>• v2: 前端直接呼叫 AWS SDK</a:t>
+            </a:r>
+          </a:p>
+          <a:p>
+            <a:pPr algn="l"/>
+            <a:r>
+              <a:rPr sz="1404" b="0" i="0">
+                <a:solidFill>
+                  <a:srgbClr val="232F3E">
+                    <a:alpha val="100000"/>
+                  </a:srgbClr>
+                </a:solidFill>
+                <a:latin typeface="Arial"/>
+                <a:ea typeface="Arial"/>
+                <a:cs typeface="Arial"/>
+              </a:rPr>
+              <a:t>→ 少一層部署與除錯，24h 內最省時間</a:t>
+            </a:r>
+          </a:p>
+        </p:txBody>
+      </p:sp>
+      <p:sp>
+        <p:nvSpPr>
+          <p:cNvPr id="7" name="TextBox 6"/>
+          <p:cNvSpPr txBox="1"/>
+          <p:nvPr/>
+        </p:nvSpPr>
+        <p:spPr>
+          <a:xfrm>
+            <a:off x="1219169" y="3291840"/>
+            <a:ext cx="9753356" cy="342900"/>
           </a:xfrm>
           <a:prstGeom prst="rect">
             <a:avLst/>
@@ -6833,33 +7467,33 @@
           </a:bodyPr>
           <a:lstStyle/>
           <a:p>
-            <a:pPr algn="ctr"/>
+            <a:pPr algn="l"/>
             <a:r>
               <a:rPr sz="1728" b="1" i="0">
                 <a:solidFill>
-                  <a:srgbClr val="545B64">
-                    <a:alpha val="100000"/>
-                  </a:srgbClr>
-                </a:solidFill>
-                <a:latin typeface="Arial"/>
-                <a:ea typeface="Arial"/>
-                <a:cs typeface="Arial"/>
-              </a:rPr>
-              <a:t>一個模型即可取代:</a:t>
-            </a:r>
-          </a:p>
-        </p:txBody>
-      </p:sp>
-      <p:sp>
-        <p:nvSpPr>
-          <p:cNvPr id="7" name="TextBox 6"/>
+                  <a:srgbClr val="16A34A">
+                    <a:alpha val="100000"/>
+                  </a:srgbClr>
+                </a:solidFill>
+                <a:latin typeface="Arial"/>
+                <a:ea typeface="Arial"/>
+                <a:cs typeface="Arial"/>
+              </a:rPr>
+              <a:t>✅ 成本優化 90%: S3 Vectors</a:t>
+            </a:r>
+          </a:p>
+        </p:txBody>
+      </p:sp>
+      <p:sp>
+        <p:nvSpPr>
+          <p:cNvPr id="8" name="TextBox 7"/>
           <p:cNvSpPr txBox="1"/>
           <p:nvPr/>
         </p:nvSpPr>
         <p:spPr>
           <a:xfrm>
-            <a:off x="2438339" y="2880360"/>
-            <a:ext cx="7315017" cy="960120"/>
+            <a:off x="1463003" y="3703320"/>
+            <a:ext cx="9509522" cy="754380"/>
           </a:xfrm>
           <a:prstGeom prst="rect">
             <a:avLst/>
@@ -6874,62 +7508,62 @@
           <a:p>
             <a:pPr algn="l"/>
             <a:r>
-              <a:rPr sz="1620" b="0" i="0">
-                <a:solidFill>
-                  <a:srgbClr val="16A34A">
-                    <a:alpha val="100000"/>
-                  </a:srgbClr>
-                </a:solidFill>
-                <a:latin typeface="Arial"/>
-                <a:ea typeface="Arial"/>
-                <a:cs typeface="Arial"/>
-              </a:rPr>
-              <a:t>✓ Transcribe (語音 → 文字)</a:t>
-            </a:r>
-          </a:p>
-          <a:p>
-            <a:pPr algn="l"/>
-            <a:r>
-              <a:rPr sz="1620" b="0" i="0">
-                <a:solidFill>
-                  <a:srgbClr val="16A34A">
-                    <a:alpha val="100000"/>
-                  </a:srgbClr>
-                </a:solidFill>
-                <a:latin typeface="Arial"/>
-                <a:ea typeface="Arial"/>
-                <a:cs typeface="Arial"/>
-              </a:rPr>
-              <a:t>✓ Claude (理解與生成)</a:t>
-            </a:r>
-          </a:p>
-          <a:p>
-            <a:pPr algn="l"/>
-            <a:r>
-              <a:rPr sz="1620" b="0" i="0">
-                <a:solidFill>
-                  <a:srgbClr val="16A34A">
-                    <a:alpha val="100000"/>
-                  </a:srgbClr>
-                </a:solidFill>
-                <a:latin typeface="Arial"/>
-                <a:ea typeface="Arial"/>
-                <a:cs typeface="Arial"/>
-              </a:rPr>
-              <a:t>✓ Polly (文字 → 語音)</a:t>
-            </a:r>
-          </a:p>
-        </p:txBody>
-      </p:sp>
-      <p:sp>
-        <p:nvSpPr>
-          <p:cNvPr id="8" name="TextBox 7"/>
+              <a:rPr sz="1404" b="0" i="0">
+                <a:solidFill>
+                  <a:srgbClr val="232F3E">
+                    <a:alpha val="100000"/>
+                  </a:srgbClr>
+                </a:solidFill>
+                <a:latin typeface="Arial"/>
+                <a:ea typeface="Arial"/>
+                <a:cs typeface="Arial"/>
+              </a:rPr>
+              <a:t>• v1: OpenSearch Serverless (昂貴)</a:t>
+            </a:r>
+          </a:p>
+          <a:p>
+            <a:pPr algn="l"/>
+            <a:r>
+              <a:rPr sz="1404" b="0" i="0">
+                <a:solidFill>
+                  <a:srgbClr val="232F3E">
+                    <a:alpha val="100000"/>
+                  </a:srgbClr>
+                </a:solidFill>
+                <a:latin typeface="Arial"/>
+                <a:ea typeface="Arial"/>
+                <a:cs typeface="Arial"/>
+              </a:rPr>
+              <a:t>• v2: S3 Vectors (2025/12 GA)</a:t>
+            </a:r>
+          </a:p>
+          <a:p>
+            <a:pPr algn="l"/>
+            <a:r>
+              <a:rPr sz="1404" b="0" i="0">
+                <a:solidFill>
+                  <a:srgbClr val="232F3E">
+                    <a:alpha val="100000"/>
+                  </a:srgbClr>
+                </a:solidFill>
+                <a:latin typeface="Arial"/>
+                <a:ea typeface="Arial"/>
+                <a:cs typeface="Arial"/>
+              </a:rPr>
+              <a:t>→ 成本降約 90%，無需管理 collection</a:t>
+            </a:r>
+          </a:p>
+        </p:txBody>
+      </p:sp>
+      <p:sp>
+        <p:nvSpPr>
+          <p:cNvPr id="9" name="TextBox 8"/>
           <p:cNvSpPr txBox="1"/>
           <p:nvPr/>
         </p:nvSpPr>
         <p:spPr>
           <a:xfrm>
-            <a:off x="1219169" y="4046220"/>
+            <a:off x="1219169" y="4663440"/>
             <a:ext cx="9753356" cy="342900"/>
           </a:xfrm>
           <a:prstGeom prst="rect">
@@ -6943,33 +7577,33 @@
           </a:bodyPr>
           <a:lstStyle/>
           <a:p>
-            <a:pPr algn="ctr"/>
-            <a:r>
-              <a:rPr sz="2160" b="1" i="0">
-                <a:solidFill>
-                  <a:srgbClr val="DC2626">
-                    <a:alpha val="100000"/>
-                  </a:srgbClr>
-                </a:solidFill>
-                <a:latin typeface="Arial"/>
-                <a:ea typeface="Arial"/>
-                <a:cs typeface="Arial"/>
-              </a:rPr>
-              <a:t>⚠️ 但是...</a:t>
-            </a:r>
-          </a:p>
-        </p:txBody>
-      </p:sp>
-      <p:sp>
-        <p:nvSpPr>
-          <p:cNvPr id="9" name="TextBox 8"/>
+            <a:pPr algn="l"/>
+            <a:r>
+              <a:rPr sz="1728" b="1" i="0">
+                <a:solidFill>
+                  <a:srgbClr val="2563EB">
+                    <a:alpha val="100000"/>
+                  </a:srgbClr>
+                </a:solidFill>
+                <a:latin typeface="Arial"/>
+                <a:ea typeface="Arial"/>
+                <a:cs typeface="Arial"/>
+              </a:rPr>
+              <a:t>✅ AI 服務升級</a:t>
+            </a:r>
+          </a:p>
+        </p:txBody>
+      </p:sp>
+      <p:sp>
+        <p:nvSpPr>
+          <p:cNvPr id="10" name="TextBox 9"/>
           <p:cNvSpPr txBox="1"/>
           <p:nvPr/>
         </p:nvSpPr>
         <p:spPr>
           <a:xfrm>
-            <a:off x="1828754" y="4526280"/>
-            <a:ext cx="8534186" cy="548640"/>
+            <a:off x="1463003" y="5074920"/>
+            <a:ext cx="9509522" cy="891540"/>
           </a:xfrm>
           <a:prstGeom prst="rect">
             <a:avLst/>
@@ -6982,113 +7616,51 @@
           </a:bodyPr>
           <a:lstStyle/>
           <a:p>
-            <a:pPr algn="ctr"/>
-            <a:r>
-              <a:rPr sz="1512" b="0" i="0">
-                <a:solidFill>
-                  <a:srgbClr val="232F3E">
-                    <a:alpha val="100000"/>
-                  </a:srgbClr>
-                </a:solidFill>
-                <a:latin typeface="Arial"/>
-                <a:ea typeface="Arial"/>
-                <a:cs typeface="Arial"/>
-              </a:rPr>
-              <a:t>Nova Sonic 支援中文，但帶有明顯 ABC 腔調</a:t>
-            </a:r>
-          </a:p>
-          <a:p>
-            <a:pPr algn="ctr"/>
-            <a:r>
-              <a:rPr sz="1512" b="0" i="0">
-                <a:solidFill>
-                  <a:srgbClr val="232F3E">
-                    <a:alpha val="100000"/>
-                  </a:srgbClr>
-                </a:solidFill>
-                <a:latin typeface="Arial"/>
-                <a:ea typeface="Arial"/>
-                <a:cs typeface="Arial"/>
-              </a:rPr>
-              <a:t>(美式華語)</a:t>
-            </a:r>
-          </a:p>
-        </p:txBody>
-      </p:sp>
-      <p:sp>
-        <p:nvSpPr>
-          <p:cNvPr id="10" name="TextBox 9"/>
-          <p:cNvSpPr txBox="1"/>
-          <p:nvPr/>
-        </p:nvSpPr>
-        <p:spPr>
-          <a:xfrm>
-            <a:off x="1219169" y="5212080"/>
-            <a:ext cx="9753356" cy="411480"/>
-          </a:xfrm>
-          <a:prstGeom prst="rect">
-            <a:avLst/>
-          </a:prstGeom>
-          <a:noFill/>
-        </p:spPr>
-        <p:txBody>
-          <a:bodyPr wrap="square" anchor="ctr" lIns="0" rIns="0" tIns="0" bIns="0">
-            <a:spAutoFit/>
-          </a:bodyPr>
-          <a:lstStyle/>
-          <a:p>
-            <a:pPr algn="ctr"/>
-            <a:r>
-              <a:rPr sz="2052" b="1" i="0">
-                <a:solidFill>
-                  <a:srgbClr val="DC2626">
-                    <a:alpha val="100000"/>
-                  </a:srgbClr>
-                </a:solidFill>
-                <a:latin typeface="Arial"/>
-                <a:ea typeface="Arial"/>
-                <a:cs typeface="Arial"/>
-              </a:rPr>
-              <a:t>❌ 不適合台灣長照現場</a:t>
-            </a:r>
-          </a:p>
-        </p:txBody>
-      </p:sp>
-      <p:sp>
-        <p:nvSpPr>
-          <p:cNvPr id="11" name="TextBox 10"/>
-          <p:cNvSpPr txBox="1"/>
-          <p:nvPr/>
-        </p:nvSpPr>
-        <p:spPr>
-          <a:xfrm>
-            <a:off x="1219169" y="5692140"/>
-            <a:ext cx="9753356" cy="274320"/>
-          </a:xfrm>
-          <a:prstGeom prst="rect">
-            <a:avLst/>
-          </a:prstGeom>
-          <a:noFill/>
-        </p:spPr>
-        <p:txBody>
-          <a:bodyPr wrap="square" anchor="ctr" lIns="0" rIns="0" tIns="0" bIns="0">
-            <a:spAutoFit/>
-          </a:bodyPr>
-          <a:lstStyle/>
-          <a:p>
-            <a:pPr algn="ctr"/>
+            <a:pPr algn="l"/>
             <a:r>
               <a:rPr sz="1404" b="0" i="0">
                 <a:solidFill>
-                  <a:srgbClr val="545B64">
-                    <a:alpha val="100000"/>
-                  </a:srgbClr>
-                </a:solidFill>
-                <a:latin typeface="Arial"/>
-                <a:ea typeface="Arial"/>
-                <a:cs typeface="Arial"/>
-              </a:rPr>
-              <a:t>長者與照服員主要使用台灣國語與台語</a:t>
+                  <a:srgbClr val="232F3E">
+                    <a:alpha val="100000"/>
+                  </a:srgbClr>
+                </a:solidFill>
+                <a:latin typeface="Arial"/>
+                <a:ea typeface="Arial"/>
+                <a:cs typeface="Arial"/>
+              </a:rPr>
+              <a:t>• LLM: Claude 3 Sonnet → Claude Sonnet 4 (高性能推理)</a:t>
+            </a:r>
+          </a:p>
+          <a:p>
+            <a:pPr algn="l"/>
+            <a:r>
+              <a:rPr sz="1404" b="0" i="0">
+                <a:solidFill>
+                  <a:srgbClr val="232F3E">
+                    <a:alpha val="100000"/>
+                  </a:srgbClr>
+                </a:solidFill>
+                <a:latin typeface="Arial"/>
+                <a:ea typeface="Arial"/>
+                <a:cs typeface="Arial"/>
+              </a:rPr>
+              <a:t>• RAG: 自建 (向量查詢+摘要) → Bedrock RetrieveAndGenerate (一個 API)</a:t>
+            </a:r>
+          </a:p>
+          <a:p>
+            <a:pPr algn="l"/>
+            <a:r>
+              <a:rPr sz="1404" b="0" i="0">
+                <a:solidFill>
+                  <a:srgbClr val="232F3E">
+                    <a:alpha val="100000"/>
+                  </a:srgbClr>
+                </a:solidFill>
+                <a:latin typeface="Arial"/>
+                <a:ea typeface="Arial"/>
+                <a:cs typeface="Arial"/>
+              </a:rPr>
+              <a:t>• 分類: Amazon Comprehend → Claude structured output (省一次網路往返)</a:t>
             </a:r>
           </a:p>
         </p:txBody>
@@ -7126,7 +7698,7 @@
             <a:avLst/>
           </a:prstGeom>
           <a:solidFill>
-            <a:srgbClr val="FFFFFF"/>
+            <a:srgbClr val="F8F9FA"/>
           </a:solidFill>
           <a:ln>
             <a:noFill/>
@@ -7157,22 +7729,20 @@
       </p:sp>
       <p:sp>
         <p:nvSpPr>
-          <p:cNvPr id="3" name="Rounded Rectangle 2"/>
+          <p:cNvPr id="3" name="Rectangle 2"/>
           <p:cNvSpPr/>
           <p:nvPr/>
         </p:nvSpPr>
         <p:spPr>
           <a:xfrm>
-            <a:off x="975335" y="1234440"/>
-            <a:ext cx="3047923" cy="1783080"/>
-          </a:xfrm>
-          <a:prstGeom prst="roundRect">
-            <a:avLst>
-              <a:gd name="adj" fmla="val 3000"/>
-            </a:avLst>
+            <a:off x="0" y="0"/>
+            <a:ext cx="12191695" cy="411480"/>
+          </a:xfrm>
+          <a:prstGeom prst="rect">
+            <a:avLst/>
           </a:prstGeom>
           <a:solidFill>
-            <a:srgbClr val="2563EB"/>
+            <a:srgbClr val="FF9900"/>
           </a:solidFill>
           <a:ln>
             <a:noFill/>
@@ -7203,22 +7773,398 @@
       </p:sp>
       <p:sp>
         <p:nvSpPr>
-          <p:cNvPr id="4" name="Rounded Rectangle 3"/>
+          <p:cNvPr id="4" name="TextBox 3"/>
+          <p:cNvSpPr txBox="1"/>
+          <p:nvPr/>
+        </p:nvSpPr>
+        <p:spPr>
+          <a:xfrm>
+            <a:off x="1219169" y="822960"/>
+            <a:ext cx="9753356" cy="685800"/>
+          </a:xfrm>
+          <a:prstGeom prst="rect">
+            <a:avLst/>
+          </a:prstGeom>
+          <a:noFill/>
+        </p:spPr>
+        <p:txBody>
+          <a:bodyPr wrap="square" anchor="ctr" lIns="0" rIns="0" tIns="0" bIns="0">
+            <a:spAutoFit/>
+          </a:bodyPr>
+          <a:lstStyle/>
+          <a:p>
+            <a:pPr algn="ctr"/>
+            <a:r>
+              <a:rPr sz="3510" b="1" i="0">
+                <a:solidFill>
+                  <a:srgbClr val="232F3E">
+                    <a:alpha val="100000"/>
+                  </a:srgbClr>
+                </a:solidFill>
+                <a:latin typeface="Arial"/>
+                <a:ea typeface="Arial"/>
+                <a:cs typeface="Arial"/>
+              </a:rPr>
+              <a:t>為什麼不用 Amazon Nova Sonic?</a:t>
+            </a:r>
+          </a:p>
+        </p:txBody>
+      </p:sp>
+      <p:sp>
+        <p:nvSpPr>
+          <p:cNvPr id="5" name="TextBox 4"/>
+          <p:cNvSpPr txBox="1"/>
+          <p:nvPr/>
+        </p:nvSpPr>
+        <p:spPr>
+          <a:xfrm>
+            <a:off x="1219169" y="1783080"/>
+            <a:ext cx="9753356" cy="411480"/>
+          </a:xfrm>
+          <a:prstGeom prst="rect">
+            <a:avLst/>
+          </a:prstGeom>
+          <a:noFill/>
+        </p:spPr>
+        <p:txBody>
+          <a:bodyPr wrap="square" anchor="ctr" lIns="0" rIns="0" tIns="0" bIns="0">
+            <a:spAutoFit/>
+          </a:bodyPr>
+          <a:lstStyle/>
+          <a:p>
+            <a:pPr algn="ctr"/>
+            <a:r>
+              <a:rPr sz="2052" b="1" i="0">
+                <a:solidFill>
+                  <a:srgbClr val="FF9900">
+                    <a:alpha val="100000"/>
+                  </a:srgbClr>
+                </a:solidFill>
+                <a:latin typeface="Arial"/>
+                <a:ea typeface="Arial"/>
+                <a:cs typeface="Arial"/>
+              </a:rPr>
+              <a:t>Nova Sonic = Speech-to-Speech 一體化模型</a:t>
+            </a:r>
+          </a:p>
+        </p:txBody>
+      </p:sp>
+      <p:sp>
+        <p:nvSpPr>
+          <p:cNvPr id="6" name="TextBox 5"/>
+          <p:cNvSpPr txBox="1"/>
+          <p:nvPr/>
+        </p:nvSpPr>
+        <p:spPr>
+          <a:xfrm>
+            <a:off x="1828754" y="2468880"/>
+            <a:ext cx="8534186" cy="342900"/>
+          </a:xfrm>
+          <a:prstGeom prst="rect">
+            <a:avLst/>
+          </a:prstGeom>
+          <a:noFill/>
+        </p:spPr>
+        <p:txBody>
+          <a:bodyPr wrap="square" anchor="ctr" lIns="0" rIns="0" tIns="0" bIns="0">
+            <a:spAutoFit/>
+          </a:bodyPr>
+          <a:lstStyle/>
+          <a:p>
+            <a:pPr algn="ctr"/>
+            <a:r>
+              <a:rPr sz="1728" b="1" i="0">
+                <a:solidFill>
+                  <a:srgbClr val="545B64">
+                    <a:alpha val="100000"/>
+                  </a:srgbClr>
+                </a:solidFill>
+                <a:latin typeface="Arial"/>
+                <a:ea typeface="Arial"/>
+                <a:cs typeface="Arial"/>
+              </a:rPr>
+              <a:t>一個模型即可取代:</a:t>
+            </a:r>
+          </a:p>
+        </p:txBody>
+      </p:sp>
+      <p:sp>
+        <p:nvSpPr>
+          <p:cNvPr id="7" name="TextBox 6"/>
+          <p:cNvSpPr txBox="1"/>
+          <p:nvPr/>
+        </p:nvSpPr>
+        <p:spPr>
+          <a:xfrm>
+            <a:off x="2438339" y="2880360"/>
+            <a:ext cx="7315017" cy="960120"/>
+          </a:xfrm>
+          <a:prstGeom prst="rect">
+            <a:avLst/>
+          </a:prstGeom>
+          <a:noFill/>
+        </p:spPr>
+        <p:txBody>
+          <a:bodyPr wrap="square" anchor="t" lIns="0" rIns="0" tIns="0" bIns="0">
+            <a:spAutoFit/>
+          </a:bodyPr>
+          <a:lstStyle/>
+          <a:p>
+            <a:pPr algn="l"/>
+            <a:r>
+              <a:rPr sz="1620" b="0" i="0">
+                <a:solidFill>
+                  <a:srgbClr val="16A34A">
+                    <a:alpha val="100000"/>
+                  </a:srgbClr>
+                </a:solidFill>
+                <a:latin typeface="Arial"/>
+                <a:ea typeface="Arial"/>
+                <a:cs typeface="Arial"/>
+              </a:rPr>
+              <a:t>✓ Transcribe (語音 → 文字)</a:t>
+            </a:r>
+          </a:p>
+          <a:p>
+            <a:pPr algn="l"/>
+            <a:r>
+              <a:rPr sz="1620" b="0" i="0">
+                <a:solidFill>
+                  <a:srgbClr val="16A34A">
+                    <a:alpha val="100000"/>
+                  </a:srgbClr>
+                </a:solidFill>
+                <a:latin typeface="Arial"/>
+                <a:ea typeface="Arial"/>
+                <a:cs typeface="Arial"/>
+              </a:rPr>
+              <a:t>✓ Claude (理解與生成)</a:t>
+            </a:r>
+          </a:p>
+          <a:p>
+            <a:pPr algn="l"/>
+            <a:r>
+              <a:rPr sz="1620" b="0" i="0">
+                <a:solidFill>
+                  <a:srgbClr val="16A34A">
+                    <a:alpha val="100000"/>
+                  </a:srgbClr>
+                </a:solidFill>
+                <a:latin typeface="Arial"/>
+                <a:ea typeface="Arial"/>
+                <a:cs typeface="Arial"/>
+              </a:rPr>
+              <a:t>✓ Polly (文字 → 語音)</a:t>
+            </a:r>
+          </a:p>
+        </p:txBody>
+      </p:sp>
+      <p:sp>
+        <p:nvSpPr>
+          <p:cNvPr id="8" name="TextBox 7"/>
+          <p:cNvSpPr txBox="1"/>
+          <p:nvPr/>
+        </p:nvSpPr>
+        <p:spPr>
+          <a:xfrm>
+            <a:off x="1219169" y="4046220"/>
+            <a:ext cx="9753356" cy="342900"/>
+          </a:xfrm>
+          <a:prstGeom prst="rect">
+            <a:avLst/>
+          </a:prstGeom>
+          <a:noFill/>
+        </p:spPr>
+        <p:txBody>
+          <a:bodyPr wrap="square" anchor="ctr" lIns="0" rIns="0" tIns="0" bIns="0">
+            <a:spAutoFit/>
+          </a:bodyPr>
+          <a:lstStyle/>
+          <a:p>
+            <a:pPr algn="ctr"/>
+            <a:r>
+              <a:rPr sz="2160" b="1" i="0">
+                <a:solidFill>
+                  <a:srgbClr val="DC2626">
+                    <a:alpha val="100000"/>
+                  </a:srgbClr>
+                </a:solidFill>
+                <a:latin typeface="Arial"/>
+                <a:ea typeface="Arial"/>
+                <a:cs typeface="Arial"/>
+              </a:rPr>
+              <a:t>⚠️ 但是...</a:t>
+            </a:r>
+          </a:p>
+        </p:txBody>
+      </p:sp>
+      <p:sp>
+        <p:nvSpPr>
+          <p:cNvPr id="9" name="TextBox 8"/>
+          <p:cNvSpPr txBox="1"/>
+          <p:nvPr/>
+        </p:nvSpPr>
+        <p:spPr>
+          <a:xfrm>
+            <a:off x="1828754" y="4526280"/>
+            <a:ext cx="8534186" cy="548640"/>
+          </a:xfrm>
+          <a:prstGeom prst="rect">
+            <a:avLst/>
+          </a:prstGeom>
+          <a:noFill/>
+        </p:spPr>
+        <p:txBody>
+          <a:bodyPr wrap="square" anchor="t" lIns="0" rIns="0" tIns="0" bIns="0">
+            <a:spAutoFit/>
+          </a:bodyPr>
+          <a:lstStyle/>
+          <a:p>
+            <a:pPr algn="ctr"/>
+            <a:r>
+              <a:rPr sz="1512" b="0" i="0">
+                <a:solidFill>
+                  <a:srgbClr val="232F3E">
+                    <a:alpha val="100000"/>
+                  </a:srgbClr>
+                </a:solidFill>
+                <a:latin typeface="Arial"/>
+                <a:ea typeface="Arial"/>
+                <a:cs typeface="Arial"/>
+              </a:rPr>
+              <a:t>Nova Sonic 支援中文，但帶有明顯 ABC 腔調</a:t>
+            </a:r>
+          </a:p>
+          <a:p>
+            <a:pPr algn="ctr"/>
+            <a:r>
+              <a:rPr sz="1512" b="0" i="0">
+                <a:solidFill>
+                  <a:srgbClr val="232F3E">
+                    <a:alpha val="100000"/>
+                  </a:srgbClr>
+                </a:solidFill>
+                <a:latin typeface="Arial"/>
+                <a:ea typeface="Arial"/>
+                <a:cs typeface="Arial"/>
+              </a:rPr>
+              <a:t>(美式華語)</a:t>
+            </a:r>
+          </a:p>
+        </p:txBody>
+      </p:sp>
+      <p:sp>
+        <p:nvSpPr>
+          <p:cNvPr id="10" name="TextBox 9"/>
+          <p:cNvSpPr txBox="1"/>
+          <p:nvPr/>
+        </p:nvSpPr>
+        <p:spPr>
+          <a:xfrm>
+            <a:off x="1219169" y="5212080"/>
+            <a:ext cx="9753356" cy="411480"/>
+          </a:xfrm>
+          <a:prstGeom prst="rect">
+            <a:avLst/>
+          </a:prstGeom>
+          <a:noFill/>
+        </p:spPr>
+        <p:txBody>
+          <a:bodyPr wrap="square" anchor="ctr" lIns="0" rIns="0" tIns="0" bIns="0">
+            <a:spAutoFit/>
+          </a:bodyPr>
+          <a:lstStyle/>
+          <a:p>
+            <a:pPr algn="ctr"/>
+            <a:r>
+              <a:rPr sz="2052" b="1" i="0">
+                <a:solidFill>
+                  <a:srgbClr val="DC2626">
+                    <a:alpha val="100000"/>
+                  </a:srgbClr>
+                </a:solidFill>
+                <a:latin typeface="Arial"/>
+                <a:ea typeface="Arial"/>
+                <a:cs typeface="Arial"/>
+              </a:rPr>
+              <a:t>❌ 不適合台灣長照現場</a:t>
+            </a:r>
+          </a:p>
+        </p:txBody>
+      </p:sp>
+      <p:sp>
+        <p:nvSpPr>
+          <p:cNvPr id="11" name="TextBox 10"/>
+          <p:cNvSpPr txBox="1"/>
+          <p:nvPr/>
+        </p:nvSpPr>
+        <p:spPr>
+          <a:xfrm>
+            <a:off x="1219169" y="5692140"/>
+            <a:ext cx="9753356" cy="274320"/>
+          </a:xfrm>
+          <a:prstGeom prst="rect">
+            <a:avLst/>
+          </a:prstGeom>
+          <a:noFill/>
+        </p:spPr>
+        <p:txBody>
+          <a:bodyPr wrap="square" anchor="ctr" lIns="0" rIns="0" tIns="0" bIns="0">
+            <a:spAutoFit/>
+          </a:bodyPr>
+          <a:lstStyle/>
+          <a:p>
+            <a:pPr algn="ctr"/>
+            <a:r>
+              <a:rPr sz="1404" b="0" i="0">
+                <a:solidFill>
+                  <a:srgbClr val="545B64">
+                    <a:alpha val="100000"/>
+                  </a:srgbClr>
+                </a:solidFill>
+                <a:latin typeface="Arial"/>
+                <a:ea typeface="Arial"/>
+                <a:cs typeface="Arial"/>
+              </a:rPr>
+              <a:t>長者與照服員主要使用台灣國語與台語</a:t>
+            </a:r>
+          </a:p>
+        </p:txBody>
+      </p:sp>
+    </p:spTree>
+  </p:cSld>
+  <p:clrMapOvr>
+    <a:masterClrMapping/>
+  </p:clrMapOvr>
+</p:sld>
+</file>
+
+<file path=ppt/slides/slide8.xml><?xml version="1.0" encoding="utf-8"?>
+<p:sld xmlns:a="http://schemas.openxmlformats.org/drawingml/2006/main" xmlns:p="http://schemas.openxmlformats.org/presentationml/2006/main" xmlns:r="http://schemas.openxmlformats.org/officeDocument/2006/relationships">
+  <p:cSld>
+    <p:spTree>
+      <p:nvGrpSpPr>
+        <p:cNvPr id="1" name=""/>
+        <p:cNvGrpSpPr/>
+        <p:nvPr/>
+      </p:nvGrpSpPr>
+      <p:grpSpPr/>
+      <p:sp>
+        <p:nvSpPr>
+          <p:cNvPr id="2" name="Rectangle 1"/>
           <p:cNvSpPr/>
           <p:nvPr/>
         </p:nvSpPr>
         <p:spPr>
           <a:xfrm>
-            <a:off x="4571885" y="1234440"/>
-            <a:ext cx="3047923" cy="1783080"/>
-          </a:xfrm>
-          <a:prstGeom prst="roundRect">
-            <a:avLst>
-              <a:gd name="adj" fmla="val 3000"/>
-            </a:avLst>
+            <a:off x="0" y="0"/>
+            <a:ext cx="12191695" cy="6858000"/>
+          </a:xfrm>
+          <a:prstGeom prst="rect">
+            <a:avLst/>
           </a:prstGeom>
           <a:solidFill>
-            <a:srgbClr val="DC2626"/>
+            <a:srgbClr val="FFFFFF"/>
           </a:solidFill>
           <a:ln>
             <a:noFill/>
@@ -7249,13 +8195,13 @@
       </p:sp>
       <p:sp>
         <p:nvSpPr>
-          <p:cNvPr id="5" name="Rounded Rectangle 4"/>
+          <p:cNvPr id="3" name="Rounded Rectangle 2"/>
           <p:cNvSpPr/>
           <p:nvPr/>
         </p:nvSpPr>
         <p:spPr>
           <a:xfrm>
-            <a:off x="8168435" y="1234440"/>
+            <a:off x="975335" y="1234440"/>
             <a:ext cx="3047923" cy="1783080"/>
           </a:xfrm>
           <a:prstGeom prst="roundRect">
@@ -7264,7 +8210,7 @@
             </a:avLst>
           </a:prstGeom>
           <a:solidFill>
-            <a:srgbClr val="16A34A"/>
+            <a:srgbClr val="2563EB"/>
           </a:solidFill>
           <a:ln>
             <a:noFill/>
@@ -7295,13 +8241,13 @@
       </p:sp>
       <p:sp>
         <p:nvSpPr>
-          <p:cNvPr id="6" name="Rounded Rectangle 5"/>
+          <p:cNvPr id="4" name="Rounded Rectangle 3"/>
           <p:cNvSpPr/>
           <p:nvPr/>
         </p:nvSpPr>
         <p:spPr>
           <a:xfrm>
-            <a:off x="975335" y="3154680"/>
+            <a:off x="4571885" y="1234440"/>
             <a:ext cx="3047923" cy="1783080"/>
           </a:xfrm>
           <a:prstGeom prst="roundRect">
@@ -7310,7 +8256,7 @@
             </a:avLst>
           </a:prstGeom>
           <a:solidFill>
-            <a:srgbClr val="FF9900"/>
+            <a:srgbClr val="DC2626"/>
           </a:solidFill>
           <a:ln>
             <a:noFill/>
@@ -7341,13 +8287,13 @@
       </p:sp>
       <p:sp>
         <p:nvSpPr>
-          <p:cNvPr id="7" name="Rounded Rectangle 6"/>
+          <p:cNvPr id="5" name="Rounded Rectangle 4"/>
           <p:cNvSpPr/>
           <p:nvPr/>
         </p:nvSpPr>
         <p:spPr>
           <a:xfrm>
-            <a:off x="4571885" y="3154680"/>
+            <a:off x="8168435" y="1234440"/>
             <a:ext cx="3047923" cy="1783080"/>
           </a:xfrm>
           <a:prstGeom prst="roundRect">
@@ -7356,7 +8302,7 @@
             </a:avLst>
           </a:prstGeom>
           <a:solidFill>
-            <a:srgbClr val="7C3AED"/>
+            <a:srgbClr val="16A34A"/>
           </a:solidFill>
           <a:ln>
             <a:noFill/>
@@ -7387,13 +8333,13 @@
       </p:sp>
       <p:sp>
         <p:nvSpPr>
-          <p:cNvPr id="8" name="Rounded Rectangle 7"/>
+          <p:cNvPr id="6" name="Rounded Rectangle 5"/>
           <p:cNvSpPr/>
           <p:nvPr/>
         </p:nvSpPr>
         <p:spPr>
           <a:xfrm>
-            <a:off x="8168435" y="3154680"/>
+            <a:off x="975335" y="3154680"/>
             <a:ext cx="3047923" cy="1783080"/>
           </a:xfrm>
           <a:prstGeom prst="roundRect">
@@ -7402,7 +8348,7 @@
             </a:avLst>
           </a:prstGeom>
           <a:solidFill>
-            <a:srgbClr val="EA580C"/>
+            <a:srgbClr val="FF9900"/>
           </a:solidFill>
           <a:ln>
             <a:noFill/>
@@ -7433,6 +8379,98 @@
       </p:sp>
       <p:sp>
         <p:nvSpPr>
+          <p:cNvPr id="7" name="Rounded Rectangle 6"/>
+          <p:cNvSpPr/>
+          <p:nvPr/>
+        </p:nvSpPr>
+        <p:spPr>
+          <a:xfrm>
+            <a:off x="4571885" y="3154680"/>
+            <a:ext cx="3047923" cy="1783080"/>
+          </a:xfrm>
+          <a:prstGeom prst="roundRect">
+            <a:avLst>
+              <a:gd name="adj" fmla="val 3000"/>
+            </a:avLst>
+          </a:prstGeom>
+          <a:solidFill>
+            <a:srgbClr val="7C3AED"/>
+          </a:solidFill>
+          <a:ln>
+            <a:noFill/>
+          </a:ln>
+          <a:effectLst/>
+        </p:spPr>
+        <p:style>
+          <a:lnRef idx="1">
+            <a:schemeClr val="accent1"/>
+          </a:lnRef>
+          <a:fillRef idx="3">
+            <a:schemeClr val="accent1"/>
+          </a:fillRef>
+          <a:effectRef idx="2">
+            <a:schemeClr val="accent1"/>
+          </a:effectRef>
+          <a:fontRef idx="minor">
+            <a:schemeClr val="lt1"/>
+          </a:fontRef>
+        </p:style>
+        <p:txBody>
+          <a:bodyPr rtlCol="0" anchor="ctr"/>
+          <a:lstStyle/>
+          <a:p>
+            <a:pPr algn="ctr"/>
+          </a:p>
+        </p:txBody>
+      </p:sp>
+      <p:sp>
+        <p:nvSpPr>
+          <p:cNvPr id="8" name="Rounded Rectangle 7"/>
+          <p:cNvSpPr/>
+          <p:nvPr/>
+        </p:nvSpPr>
+        <p:spPr>
+          <a:xfrm>
+            <a:off x="8168435" y="3154680"/>
+            <a:ext cx="3047923" cy="1783080"/>
+          </a:xfrm>
+          <a:prstGeom prst="roundRect">
+            <a:avLst>
+              <a:gd name="adj" fmla="val 3000"/>
+            </a:avLst>
+          </a:prstGeom>
+          <a:solidFill>
+            <a:srgbClr val="EA580C"/>
+          </a:solidFill>
+          <a:ln>
+            <a:noFill/>
+          </a:ln>
+          <a:effectLst/>
+        </p:spPr>
+        <p:style>
+          <a:lnRef idx="1">
+            <a:schemeClr val="accent1"/>
+          </a:lnRef>
+          <a:fillRef idx="3">
+            <a:schemeClr val="accent1"/>
+          </a:fillRef>
+          <a:effectRef idx="2">
+            <a:schemeClr val="accent1"/>
+          </a:effectRef>
+          <a:fontRef idx="minor">
+            <a:schemeClr val="lt1"/>
+          </a:fontRef>
+        </p:style>
+        <p:txBody>
+          <a:bodyPr rtlCol="0" anchor="ctr"/>
+          <a:lstStyle/>
+          <a:p>
+            <a:pPr algn="ctr"/>
+          </a:p>
+        </p:txBody>
+      </p:sp>
+      <p:sp>
+        <p:nvSpPr>
           <p:cNvPr id="9" name="TextBox 8"/>
           <p:cNvSpPr txBox="1"/>
           <p:nvPr/>
@@ -8273,7 +9311,7 @@
 </p:sld>
 </file>
 
-<file path=ppt/slides/slide8.xml><?xml version="1.0" encoding="utf-8"?>
+<file path=ppt/slides/slide9.xml><?xml version="1.0" encoding="utf-8"?>
 <p:sld xmlns:a="http://schemas.openxmlformats.org/drawingml/2006/main" xmlns:p="http://schemas.openxmlformats.org/presentationml/2006/main" xmlns:r="http://schemas.openxmlformats.org/officeDocument/2006/relationships">
   <p:cSld>
     <p:spTree>

--- a/docs/architecture-verification/Profit-Prophet-完整驗證.pptx
+++ b/docs/architecture-verification/Profit-Prophet-完整驗證.pptx
@@ -5,21 +5,23 @@
     <p:sldMasterId id="2147483648" r:id="rId1"/>
   </p:sldMasterIdLst>
   <p:notesMasterIdLst>
-    <p:notesMasterId r:id="rId14"/>
+    <p:notesMasterId r:id="rId16"/>
   </p:notesMasterIdLst>
   <p:sldIdLst>
     <p:sldId id="256" r:id="rId2"/>
     <p:sldId id="257" r:id="rId3"/>
     <p:sldId id="265" r:id="rId4"/>
     <p:sldId id="268" r:id="rId5"/>
-    <p:sldId id="267" r:id="rId6"/>
-    <p:sldId id="258" r:id="rId7"/>
-    <p:sldId id="259" r:id="rId8"/>
-    <p:sldId id="260" r:id="rId9"/>
-    <p:sldId id="261" r:id="rId10"/>
-    <p:sldId id="262" r:id="rId11"/>
-    <p:sldId id="263" r:id="rId12"/>
-    <p:sldId id="264" r:id="rId13"/>
+    <p:sldId id="269" r:id="rId6"/>
+    <p:sldId id="267" r:id="rId7"/>
+    <p:sldId id="258" r:id="rId8"/>
+    <p:sldId id="259" r:id="rId9"/>
+    <p:sldId id="260" r:id="rId10"/>
+    <p:sldId id="261" r:id="rId11"/>
+    <p:sldId id="262" r:id="rId12"/>
+    <p:sldId id="263" r:id="rId13"/>
+    <p:sldId id="270" r:id="rId14"/>
+    <p:sldId id="264" r:id="rId15"/>
   </p:sldIdLst>
   <p:sldSz cx="12192000" cy="6858000"/>
   <p:notesSz cx="6858000" cy="9144000"/>
@@ -551,7 +553,7 @@
           <a:p>
             <a:fld id="{F7021451-1387-4CA6-816F-3879F97B5CBC}" type="slidenum">
               <a:rPr lang="en-US"/>
-              <a:t>5</a:t>
+              <a:t>6</a:t>
             </a:fld>
             <a:endParaRPr lang="en-US"/>
           </a:p>
@@ -3897,6 +3899,36 @@
           </a:p>
         </p:txBody>
       </p:sp>
+      <p:pic>
+        <p:nvPicPr>
+          <p:cNvPr id="11" name="圖片 10">
+            <a:extLst>
+              <a:ext uri="{FF2B5EF4-FFF2-40B4-BE49-F238E27FC236}">
+                <a16:creationId xmlns:a16="http://schemas.microsoft.com/office/drawing/2014/main" id="{AFE9F487-E34E-FD32-6173-7FD9C927D36C}"/>
+              </a:ext>
+            </a:extLst>
+          </p:cNvPr>
+          <p:cNvPicPr>
+            <a:picLocks noChangeAspect="1"/>
+          </p:cNvPicPr>
+          <p:nvPr/>
+        </p:nvPicPr>
+        <p:blipFill>
+          <a:blip r:embed="rId2"/>
+          <a:stretch>
+            <a:fillRect/>
+          </a:stretch>
+        </p:blipFill>
+        <p:spPr>
+          <a:xfrm>
+            <a:off x="1160052" y="2828832"/>
+            <a:ext cx="2314668" cy="2314668"/>
+          </a:xfrm>
+          <a:prstGeom prst="rect">
+            <a:avLst/>
+          </a:prstGeom>
+        </p:spPr>
+      </p:pic>
     </p:spTree>
   </p:cSld>
   <p:clrMapOvr>
@@ -3937,7 +3969,7 @@
             <a:avLst/>
           </a:prstGeom>
           <a:solidFill>
-            <a:srgbClr val="F8F9FA"/>
+            <a:srgbClr val="FFFFFF"/>
           </a:solidFill>
           <a:ln>
             <a:noFill/>
@@ -3969,46 +4001,40 @@
       </p:sp>
       <p:sp>
         <p:nvSpPr>
-          <p:cNvPr id="3" name="Rectangle 2"/>
-          <p:cNvSpPr/>
-          <p:nvPr/>
-        </p:nvSpPr>
-        <p:spPr>
-          <a:xfrm>
-            <a:off x="0" y="0"/>
-            <a:ext cx="12191695" cy="411480"/>
-          </a:xfrm>
-          <a:prstGeom prst="rect">
-            <a:avLst/>
-          </a:prstGeom>
-          <a:solidFill>
-            <a:srgbClr val="FF9900"/>
-          </a:solidFill>
-          <a:ln>
-            <a:noFill/>
-          </a:ln>
-          <a:effectLst/>
-        </p:spPr>
-        <p:style>
-          <a:lnRef idx="1">
-            <a:schemeClr val="accent1"/>
-          </a:lnRef>
-          <a:fillRef idx="3">
-            <a:schemeClr val="accent1"/>
-          </a:fillRef>
-          <a:effectRef idx="2">
-            <a:schemeClr val="accent1"/>
-          </a:effectRef>
-          <a:fontRef idx="minor">
-            <a:schemeClr val="lt1"/>
-          </a:fontRef>
-        </p:style>
-        <p:txBody>
-          <a:bodyPr rtlCol="0" anchor="ctr"/>
+          <p:cNvPr id="3" name="TextBox 2"/>
+          <p:cNvSpPr txBox="1"/>
+          <p:nvPr/>
+        </p:nvSpPr>
+        <p:spPr>
+          <a:xfrm>
+            <a:off x="1219169" y="548640"/>
+            <a:ext cx="9753356" cy="548640"/>
+          </a:xfrm>
+          <a:prstGeom prst="rect">
+            <a:avLst/>
+          </a:prstGeom>
+          <a:noFill/>
+        </p:spPr>
+        <p:txBody>
+          <a:bodyPr wrap="square" lIns="0" tIns="0" rIns="0" bIns="0" anchor="t">
+            <a:spAutoFit/>
+          </a:bodyPr>
           <a:lstStyle/>
           <a:p>
             <a:pPr algn="ctr"/>
-            <a:endParaRPr/>
+            <a:r>
+              <a:rPr sz="3240" b="1" i="0">
+                <a:solidFill>
+                  <a:srgbClr val="232F3E">
+                    <a:alpha val="100000"/>
+                  </a:srgbClr>
+                </a:solidFill>
+                <a:latin typeface="Arial"/>
+                <a:ea typeface="Arial"/>
+                <a:cs typeface="Arial"/>
+              </a:rPr>
+              <a:t>v1 → v2 架構演進</a:t>
+            </a:r>
           </a:p>
         </p:txBody>
       </p:sp>
@@ -4020,8 +4046,8 @@
         </p:nvSpPr>
         <p:spPr>
           <a:xfrm>
-            <a:off x="1219169" y="822960"/>
-            <a:ext cx="9753356" cy="685800"/>
+            <a:off x="1219169" y="1234440"/>
+            <a:ext cx="9753356" cy="274320"/>
           </a:xfrm>
           <a:prstGeom prst="rect">
             <a:avLst/>
@@ -4036,17 +4062,17 @@
           <a:p>
             <a:pPr algn="ctr"/>
             <a:r>
-              <a:rPr sz="3510" b="1" i="0">
-                <a:solidFill>
-                  <a:srgbClr val="232F3E">
-                    <a:alpha val="100000"/>
-                  </a:srgbClr>
-                </a:solidFill>
-                <a:latin typeface="Arial"/>
-                <a:ea typeface="Arial"/>
-                <a:cs typeface="Arial"/>
-              </a:rPr>
-              <a:t>為什麼不用 Amazon Nova Sonic?</a:t>
+              <a:rPr sz="1512" b="1" i="0">
+                <a:solidFill>
+                  <a:srgbClr val="16A34A">
+                    <a:alpha val="100000"/>
+                  </a:srgbClr>
+                </a:solidFill>
+                <a:latin typeface="Arial"/>
+                <a:ea typeface="Arial"/>
+                <a:cs typeface="Arial"/>
+              </a:rPr>
+              <a:t>24 小時 MVP | 最少服務數 | 最低固定成本</a:t>
             </a:r>
           </a:p>
         </p:txBody>
@@ -4059,8 +4085,8 @@
         </p:nvSpPr>
         <p:spPr>
           <a:xfrm>
-            <a:off x="1219169" y="1783080"/>
-            <a:ext cx="9753356" cy="411480"/>
+            <a:off x="1219169" y="1920240"/>
+            <a:ext cx="9753356" cy="342900"/>
           </a:xfrm>
           <a:prstGeom prst="rect">
             <a:avLst/>
@@ -4073,19 +4099,19 @@
           </a:bodyPr>
           <a:lstStyle/>
           <a:p>
-            <a:pPr algn="ctr"/>
-            <a:r>
-              <a:rPr sz="2052" b="1" i="0">
-                <a:solidFill>
-                  <a:srgbClr val="FF9900">
-                    <a:alpha val="100000"/>
-                  </a:srgbClr>
-                </a:solidFill>
-                <a:latin typeface="Arial"/>
-                <a:ea typeface="Arial"/>
-                <a:cs typeface="Arial"/>
-              </a:rPr>
-              <a:t>Nova Sonic = Speech-to-Speech 一體化模型</a:t>
+            <a:pPr algn="l"/>
+            <a:r>
+              <a:rPr sz="1728" b="1" i="0">
+                <a:solidFill>
+                  <a:srgbClr val="DC2626">
+                    <a:alpha val="100000"/>
+                  </a:srgbClr>
+                </a:solidFill>
+                <a:latin typeface="Arial"/>
+                <a:ea typeface="Arial"/>
+                <a:cs typeface="Arial"/>
+              </a:rPr>
+              <a:t>❌ 移除 API Gateway + Lambda</a:t>
             </a:r>
           </a:p>
         </p:txBody>
@@ -4098,8 +4124,79 @@
         </p:nvSpPr>
         <p:spPr>
           <a:xfrm>
-            <a:off x="1828754" y="2468880"/>
-            <a:ext cx="8534186" cy="342900"/>
+            <a:off x="1463003" y="2331720"/>
+            <a:ext cx="9509522" cy="754380"/>
+          </a:xfrm>
+          <a:prstGeom prst="rect">
+            <a:avLst/>
+          </a:prstGeom>
+          <a:noFill/>
+        </p:spPr>
+        <p:txBody>
+          <a:bodyPr wrap="square" lIns="0" tIns="0" rIns="0" bIns="0" anchor="t">
+            <a:spAutoFit/>
+          </a:bodyPr>
+          <a:lstStyle/>
+          <a:p>
+            <a:pPr algn="l"/>
+            <a:r>
+              <a:rPr sz="1404" b="0" i="0">
+                <a:solidFill>
+                  <a:srgbClr val="232F3E">
+                    <a:alpha val="100000"/>
+                  </a:srgbClr>
+                </a:solidFill>
+                <a:latin typeface="Arial"/>
+                <a:ea typeface="Arial"/>
+                <a:cs typeface="Arial"/>
+              </a:rPr>
+              <a:t>• v1: API Gateway + Lambda 中介層</a:t>
+            </a:r>
+          </a:p>
+          <a:p>
+            <a:pPr algn="l"/>
+            <a:r>
+              <a:rPr sz="1404" b="0" i="0">
+                <a:solidFill>
+                  <a:srgbClr val="232F3E">
+                    <a:alpha val="100000"/>
+                  </a:srgbClr>
+                </a:solidFill>
+                <a:latin typeface="Arial"/>
+                <a:ea typeface="Arial"/>
+                <a:cs typeface="Arial"/>
+              </a:rPr>
+              <a:t>• v2: 前端直接呼叫 AWS SDK</a:t>
+            </a:r>
+          </a:p>
+          <a:p>
+            <a:pPr algn="l"/>
+            <a:r>
+              <a:rPr sz="1404" b="0" i="0">
+                <a:solidFill>
+                  <a:srgbClr val="232F3E">
+                    <a:alpha val="100000"/>
+                  </a:srgbClr>
+                </a:solidFill>
+                <a:latin typeface="Arial"/>
+                <a:ea typeface="Arial"/>
+                <a:cs typeface="Arial"/>
+              </a:rPr>
+              <a:t>→ 少一層部署與除錯，24h 內最省時間</a:t>
+            </a:r>
+          </a:p>
+        </p:txBody>
+      </p:sp>
+      <p:sp>
+        <p:nvSpPr>
+          <p:cNvPr id="7" name="TextBox 6"/>
+          <p:cNvSpPr txBox="1"/>
+          <p:nvPr/>
+        </p:nvSpPr>
+        <p:spPr>
+          <a:xfrm>
+            <a:off x="1219169" y="3291840"/>
+            <a:ext cx="9753356" cy="342900"/>
           </a:xfrm>
           <a:prstGeom prst="rect">
             <a:avLst/>
@@ -4112,33 +4209,33 @@
           </a:bodyPr>
           <a:lstStyle/>
           <a:p>
-            <a:pPr algn="ctr"/>
+            <a:pPr algn="l"/>
             <a:r>
               <a:rPr sz="1728" b="1" i="0">
                 <a:solidFill>
-                  <a:srgbClr val="545B64">
-                    <a:alpha val="100000"/>
-                  </a:srgbClr>
-                </a:solidFill>
-                <a:latin typeface="Arial"/>
-                <a:ea typeface="Arial"/>
-                <a:cs typeface="Arial"/>
-              </a:rPr>
-              <a:t>一個模型即可取代:</a:t>
-            </a:r>
-          </a:p>
-        </p:txBody>
-      </p:sp>
-      <p:sp>
-        <p:nvSpPr>
-          <p:cNvPr id="7" name="TextBox 6"/>
+                  <a:srgbClr val="16A34A">
+                    <a:alpha val="100000"/>
+                  </a:srgbClr>
+                </a:solidFill>
+                <a:latin typeface="Arial"/>
+                <a:ea typeface="Arial"/>
+                <a:cs typeface="Arial"/>
+              </a:rPr>
+              <a:t>✅ 成本優化 90%: S3 Vectors</a:t>
+            </a:r>
+          </a:p>
+        </p:txBody>
+      </p:sp>
+      <p:sp>
+        <p:nvSpPr>
+          <p:cNvPr id="8" name="TextBox 7"/>
           <p:cNvSpPr txBox="1"/>
           <p:nvPr/>
         </p:nvSpPr>
         <p:spPr>
           <a:xfrm>
-            <a:off x="2438339" y="2880360"/>
-            <a:ext cx="7315017" cy="960120"/>
+            <a:off x="1463003" y="3703320"/>
+            <a:ext cx="9509522" cy="754380"/>
           </a:xfrm>
           <a:prstGeom prst="rect">
             <a:avLst/>
@@ -4153,62 +4250,62 @@
           <a:p>
             <a:pPr algn="l"/>
             <a:r>
-              <a:rPr sz="1620" b="0" i="0">
-                <a:solidFill>
-                  <a:srgbClr val="16A34A">
-                    <a:alpha val="100000"/>
-                  </a:srgbClr>
-                </a:solidFill>
-                <a:latin typeface="Arial"/>
-                <a:ea typeface="Arial"/>
-                <a:cs typeface="Arial"/>
-              </a:rPr>
-              <a:t>✓ Transcribe (語音 → 文字)</a:t>
+              <a:rPr sz="1404" b="0" i="0">
+                <a:solidFill>
+                  <a:srgbClr val="232F3E">
+                    <a:alpha val="100000"/>
+                  </a:srgbClr>
+                </a:solidFill>
+                <a:latin typeface="Arial"/>
+                <a:ea typeface="Arial"/>
+                <a:cs typeface="Arial"/>
+              </a:rPr>
+              <a:t>• v1: OpenSearch Serverless (昂貴)</a:t>
             </a:r>
           </a:p>
           <a:p>
             <a:pPr algn="l"/>
             <a:r>
-              <a:rPr sz="1620" b="0" i="0">
-                <a:solidFill>
-                  <a:srgbClr val="16A34A">
-                    <a:alpha val="100000"/>
-                  </a:srgbClr>
-                </a:solidFill>
-                <a:latin typeface="Arial"/>
-                <a:ea typeface="Arial"/>
-                <a:cs typeface="Arial"/>
-              </a:rPr>
-              <a:t>✓ Claude (理解與生成)</a:t>
+              <a:rPr sz="1404" b="0" i="0">
+                <a:solidFill>
+                  <a:srgbClr val="232F3E">
+                    <a:alpha val="100000"/>
+                  </a:srgbClr>
+                </a:solidFill>
+                <a:latin typeface="Arial"/>
+                <a:ea typeface="Arial"/>
+                <a:cs typeface="Arial"/>
+              </a:rPr>
+              <a:t>• v2: S3 Vectors (2025/12 GA)</a:t>
             </a:r>
           </a:p>
           <a:p>
             <a:pPr algn="l"/>
             <a:r>
-              <a:rPr sz="1620" b="0" i="0">
-                <a:solidFill>
-                  <a:srgbClr val="16A34A">
-                    <a:alpha val="100000"/>
-                  </a:srgbClr>
-                </a:solidFill>
-                <a:latin typeface="Arial"/>
-                <a:ea typeface="Arial"/>
-                <a:cs typeface="Arial"/>
-              </a:rPr>
-              <a:t>✓ Polly (文字 → 語音)</a:t>
-            </a:r>
-          </a:p>
-        </p:txBody>
-      </p:sp>
-      <p:sp>
-        <p:nvSpPr>
-          <p:cNvPr id="8" name="TextBox 7"/>
+              <a:rPr sz="1404" b="0" i="0">
+                <a:solidFill>
+                  <a:srgbClr val="232F3E">
+                    <a:alpha val="100000"/>
+                  </a:srgbClr>
+                </a:solidFill>
+                <a:latin typeface="Arial"/>
+                <a:ea typeface="Arial"/>
+                <a:cs typeface="Arial"/>
+              </a:rPr>
+              <a:t>→ 成本降約 90%，無需管理 collection</a:t>
+            </a:r>
+          </a:p>
+        </p:txBody>
+      </p:sp>
+      <p:sp>
+        <p:nvSpPr>
+          <p:cNvPr id="9" name="TextBox 8"/>
           <p:cNvSpPr txBox="1"/>
           <p:nvPr/>
         </p:nvSpPr>
         <p:spPr>
           <a:xfrm>
-            <a:off x="1219169" y="4046220"/>
+            <a:off x="1219169" y="4663440"/>
             <a:ext cx="9753356" cy="342900"/>
           </a:xfrm>
           <a:prstGeom prst="rect">
@@ -4222,33 +4319,33 @@
           </a:bodyPr>
           <a:lstStyle/>
           <a:p>
-            <a:pPr algn="ctr"/>
-            <a:r>
-              <a:rPr sz="2160" b="1" i="0">
-                <a:solidFill>
-                  <a:srgbClr val="DC2626">
-                    <a:alpha val="100000"/>
-                  </a:srgbClr>
-                </a:solidFill>
-                <a:latin typeface="Arial"/>
-                <a:ea typeface="Arial"/>
-                <a:cs typeface="Arial"/>
-              </a:rPr>
-              <a:t>⚠️ 但是...</a:t>
-            </a:r>
-          </a:p>
-        </p:txBody>
-      </p:sp>
-      <p:sp>
-        <p:nvSpPr>
-          <p:cNvPr id="9" name="TextBox 8"/>
+            <a:pPr algn="l"/>
+            <a:r>
+              <a:rPr sz="1728" b="1" i="0">
+                <a:solidFill>
+                  <a:srgbClr val="2563EB">
+                    <a:alpha val="100000"/>
+                  </a:srgbClr>
+                </a:solidFill>
+                <a:latin typeface="Arial"/>
+                <a:ea typeface="Arial"/>
+                <a:cs typeface="Arial"/>
+              </a:rPr>
+              <a:t>✅ AI 服務升級</a:t>
+            </a:r>
+          </a:p>
+        </p:txBody>
+      </p:sp>
+      <p:sp>
+        <p:nvSpPr>
+          <p:cNvPr id="10" name="TextBox 9"/>
           <p:cNvSpPr txBox="1"/>
           <p:nvPr/>
         </p:nvSpPr>
         <p:spPr>
           <a:xfrm>
-            <a:off x="1828754" y="4526280"/>
-            <a:ext cx="8534186" cy="548640"/>
+            <a:off x="1463003" y="5074920"/>
+            <a:ext cx="9509522" cy="891540"/>
           </a:xfrm>
           <a:prstGeom prst="rect">
             <a:avLst/>
@@ -4261,9 +4358,9 @@
           </a:bodyPr>
           <a:lstStyle/>
           <a:p>
-            <a:pPr algn="ctr"/>
-            <a:r>
-              <a:rPr sz="1512" b="0" i="0">
+            <a:pPr algn="l"/>
+            <a:r>
+              <a:rPr sz="1404" b="0" i="0">
                 <a:solidFill>
                   <a:srgbClr val="232F3E">
                     <a:alpha val="100000"/>
@@ -4273,13 +4370,13 @@
                 <a:ea typeface="Arial"/>
                 <a:cs typeface="Arial"/>
               </a:rPr>
-              <a:t>Nova Sonic 支援中文，但帶有明顯 ABC 腔調</a:t>
-            </a:r>
-          </a:p>
-          <a:p>
-            <a:pPr algn="ctr"/>
-            <a:r>
-              <a:rPr sz="1512" b="0" i="0">
+              <a:t>• LLM: Claude 3 Sonnet → Claude Sonnet 4 (高性能推理)</a:t>
+            </a:r>
+          </a:p>
+          <a:p>
+            <a:pPr algn="l"/>
+            <a:r>
+              <a:rPr sz="1404" b="0" i="0">
                 <a:solidFill>
                   <a:srgbClr val="232F3E">
                     <a:alpha val="100000"/>
@@ -4289,85 +4386,23 @@
                 <a:ea typeface="Arial"/>
                 <a:cs typeface="Arial"/>
               </a:rPr>
-              <a:t>(美式華語)</a:t>
-            </a:r>
-          </a:p>
-        </p:txBody>
-      </p:sp>
-      <p:sp>
-        <p:nvSpPr>
-          <p:cNvPr id="10" name="TextBox 9"/>
-          <p:cNvSpPr txBox="1"/>
-          <p:nvPr/>
-        </p:nvSpPr>
-        <p:spPr>
-          <a:xfrm>
-            <a:off x="1219169" y="5212080"/>
-            <a:ext cx="9753356" cy="411480"/>
-          </a:xfrm>
-          <a:prstGeom prst="rect">
-            <a:avLst/>
-          </a:prstGeom>
-          <a:noFill/>
-        </p:spPr>
-        <p:txBody>
-          <a:bodyPr wrap="square" lIns="0" tIns="0" rIns="0" bIns="0" anchor="ctr">
-            <a:spAutoFit/>
-          </a:bodyPr>
-          <a:lstStyle/>
-          <a:p>
-            <a:pPr algn="ctr"/>
-            <a:r>
-              <a:rPr sz="2052" b="1" i="0">
-                <a:solidFill>
-                  <a:srgbClr val="DC2626">
-                    <a:alpha val="100000"/>
-                  </a:srgbClr>
-                </a:solidFill>
-                <a:latin typeface="Arial"/>
-                <a:ea typeface="Arial"/>
-                <a:cs typeface="Arial"/>
-              </a:rPr>
-              <a:t>❌ 不適合台灣長照現場</a:t>
-            </a:r>
-          </a:p>
-        </p:txBody>
-      </p:sp>
-      <p:sp>
-        <p:nvSpPr>
-          <p:cNvPr id="11" name="TextBox 10"/>
-          <p:cNvSpPr txBox="1"/>
-          <p:nvPr/>
-        </p:nvSpPr>
-        <p:spPr>
-          <a:xfrm>
-            <a:off x="1219169" y="5692140"/>
-            <a:ext cx="9753356" cy="274320"/>
-          </a:xfrm>
-          <a:prstGeom prst="rect">
-            <a:avLst/>
-          </a:prstGeom>
-          <a:noFill/>
-        </p:spPr>
-        <p:txBody>
-          <a:bodyPr wrap="square" lIns="0" tIns="0" rIns="0" bIns="0" anchor="ctr">
-            <a:spAutoFit/>
-          </a:bodyPr>
-          <a:lstStyle/>
-          <a:p>
-            <a:pPr algn="ctr"/>
+              <a:t>• RAG: 自建 (向量查詢+摘要) → Bedrock RetrieveAndGenerate (一個 API)</a:t>
+            </a:r>
+          </a:p>
+          <a:p>
+            <a:pPr algn="l"/>
             <a:r>
               <a:rPr sz="1404" b="0" i="0">
                 <a:solidFill>
-                  <a:srgbClr val="545B64">
-                    <a:alpha val="100000"/>
-                  </a:srgbClr>
-                </a:solidFill>
-                <a:latin typeface="Arial"/>
-                <a:ea typeface="Arial"/>
-                <a:cs typeface="Arial"/>
-              </a:rPr>
-              <a:t>長者與照服員主要使用台灣國語與台語</a:t>
+                  <a:srgbClr val="232F3E">
+                    <a:alpha val="100000"/>
+                  </a:srgbClr>
+                </a:solidFill>
+                <a:latin typeface="Arial"/>
+                <a:ea typeface="Arial"/>
+                <a:cs typeface="Arial"/>
+              </a:rPr>
+              <a:t>• 分類: Amazon Comprehend → Claude structured output (省一次網路往返)</a:t>
             </a:r>
           </a:p>
         </p:txBody>
@@ -4412,7 +4447,7 @@
             <a:avLst/>
           </a:prstGeom>
           <a:solidFill>
-            <a:srgbClr val="FFFFFF"/>
+            <a:srgbClr val="F8F9FA"/>
           </a:solidFill>
           <a:ln>
             <a:noFill/>
@@ -4444,22 +4479,20 @@
       </p:sp>
       <p:sp>
         <p:nvSpPr>
-          <p:cNvPr id="3" name="Rounded Rectangle 2"/>
+          <p:cNvPr id="3" name="Rectangle 2"/>
           <p:cNvSpPr/>
           <p:nvPr/>
         </p:nvSpPr>
         <p:spPr>
           <a:xfrm>
-            <a:off x="975335" y="1234440"/>
-            <a:ext cx="3047923" cy="1783080"/>
-          </a:xfrm>
-          <a:prstGeom prst="roundRect">
-            <a:avLst>
-              <a:gd name="adj" fmla="val 3000"/>
-            </a:avLst>
+            <a:off x="0" y="0"/>
+            <a:ext cx="12191695" cy="411480"/>
+          </a:xfrm>
+          <a:prstGeom prst="rect">
+            <a:avLst/>
           </a:prstGeom>
           <a:solidFill>
-            <a:srgbClr val="2563EB"/>
+            <a:srgbClr val="FF9900"/>
           </a:solidFill>
           <a:ln>
             <a:noFill/>
@@ -4491,22 +4524,405 @@
       </p:sp>
       <p:sp>
         <p:nvSpPr>
-          <p:cNvPr id="4" name="Rounded Rectangle 3"/>
+          <p:cNvPr id="4" name="TextBox 3"/>
+          <p:cNvSpPr txBox="1"/>
+          <p:nvPr/>
+        </p:nvSpPr>
+        <p:spPr>
+          <a:xfrm>
+            <a:off x="1219169" y="822960"/>
+            <a:ext cx="9753356" cy="685800"/>
+          </a:xfrm>
+          <a:prstGeom prst="rect">
+            <a:avLst/>
+          </a:prstGeom>
+          <a:noFill/>
+        </p:spPr>
+        <p:txBody>
+          <a:bodyPr wrap="square" lIns="0" tIns="0" rIns="0" bIns="0" anchor="ctr">
+            <a:spAutoFit/>
+          </a:bodyPr>
+          <a:lstStyle/>
+          <a:p>
+            <a:pPr algn="ctr"/>
+            <a:r>
+              <a:rPr sz="3510" b="1" i="0">
+                <a:solidFill>
+                  <a:srgbClr val="232F3E">
+                    <a:alpha val="100000"/>
+                  </a:srgbClr>
+                </a:solidFill>
+                <a:latin typeface="Arial"/>
+                <a:ea typeface="Arial"/>
+                <a:cs typeface="Arial"/>
+              </a:rPr>
+              <a:t>為什麼不用 Amazon Nova Sonic?</a:t>
+            </a:r>
+          </a:p>
+        </p:txBody>
+      </p:sp>
+      <p:sp>
+        <p:nvSpPr>
+          <p:cNvPr id="5" name="TextBox 4"/>
+          <p:cNvSpPr txBox="1"/>
+          <p:nvPr/>
+        </p:nvSpPr>
+        <p:spPr>
+          <a:xfrm>
+            <a:off x="1219169" y="1783080"/>
+            <a:ext cx="9753356" cy="411480"/>
+          </a:xfrm>
+          <a:prstGeom prst="rect">
+            <a:avLst/>
+          </a:prstGeom>
+          <a:noFill/>
+        </p:spPr>
+        <p:txBody>
+          <a:bodyPr wrap="square" lIns="0" tIns="0" rIns="0" bIns="0" anchor="ctr">
+            <a:spAutoFit/>
+          </a:bodyPr>
+          <a:lstStyle/>
+          <a:p>
+            <a:pPr algn="ctr"/>
+            <a:r>
+              <a:rPr sz="2052" b="1" i="0">
+                <a:solidFill>
+                  <a:srgbClr val="FF9900">
+                    <a:alpha val="100000"/>
+                  </a:srgbClr>
+                </a:solidFill>
+                <a:latin typeface="Arial"/>
+                <a:ea typeface="Arial"/>
+                <a:cs typeface="Arial"/>
+              </a:rPr>
+              <a:t>Nova Sonic = Speech-to-Speech 一體化模型</a:t>
+            </a:r>
+          </a:p>
+        </p:txBody>
+      </p:sp>
+      <p:sp>
+        <p:nvSpPr>
+          <p:cNvPr id="6" name="TextBox 5"/>
+          <p:cNvSpPr txBox="1"/>
+          <p:nvPr/>
+        </p:nvSpPr>
+        <p:spPr>
+          <a:xfrm>
+            <a:off x="1828754" y="2468880"/>
+            <a:ext cx="8534186" cy="342900"/>
+          </a:xfrm>
+          <a:prstGeom prst="rect">
+            <a:avLst/>
+          </a:prstGeom>
+          <a:noFill/>
+        </p:spPr>
+        <p:txBody>
+          <a:bodyPr wrap="square" lIns="0" tIns="0" rIns="0" bIns="0" anchor="ctr">
+            <a:spAutoFit/>
+          </a:bodyPr>
+          <a:lstStyle/>
+          <a:p>
+            <a:pPr algn="ctr"/>
+            <a:r>
+              <a:rPr sz="1728" b="1" i="0">
+                <a:solidFill>
+                  <a:srgbClr val="545B64">
+                    <a:alpha val="100000"/>
+                  </a:srgbClr>
+                </a:solidFill>
+                <a:latin typeface="Arial"/>
+                <a:ea typeface="Arial"/>
+                <a:cs typeface="Arial"/>
+              </a:rPr>
+              <a:t>一個模型即可取代:</a:t>
+            </a:r>
+          </a:p>
+        </p:txBody>
+      </p:sp>
+      <p:sp>
+        <p:nvSpPr>
+          <p:cNvPr id="7" name="TextBox 6"/>
+          <p:cNvSpPr txBox="1"/>
+          <p:nvPr/>
+        </p:nvSpPr>
+        <p:spPr>
+          <a:xfrm>
+            <a:off x="2438339" y="2880360"/>
+            <a:ext cx="7315017" cy="960120"/>
+          </a:xfrm>
+          <a:prstGeom prst="rect">
+            <a:avLst/>
+          </a:prstGeom>
+          <a:noFill/>
+        </p:spPr>
+        <p:txBody>
+          <a:bodyPr wrap="square" lIns="0" tIns="0" rIns="0" bIns="0" anchor="t">
+            <a:spAutoFit/>
+          </a:bodyPr>
+          <a:lstStyle/>
+          <a:p>
+            <a:pPr algn="l"/>
+            <a:r>
+              <a:rPr sz="1620" b="0" i="0">
+                <a:solidFill>
+                  <a:srgbClr val="16A34A">
+                    <a:alpha val="100000"/>
+                  </a:srgbClr>
+                </a:solidFill>
+                <a:latin typeface="Arial"/>
+                <a:ea typeface="Arial"/>
+                <a:cs typeface="Arial"/>
+              </a:rPr>
+              <a:t>✓ Transcribe (語音 → 文字)</a:t>
+            </a:r>
+          </a:p>
+          <a:p>
+            <a:pPr algn="l"/>
+            <a:r>
+              <a:rPr sz="1620" b="0" i="0">
+                <a:solidFill>
+                  <a:srgbClr val="16A34A">
+                    <a:alpha val="100000"/>
+                  </a:srgbClr>
+                </a:solidFill>
+                <a:latin typeface="Arial"/>
+                <a:ea typeface="Arial"/>
+                <a:cs typeface="Arial"/>
+              </a:rPr>
+              <a:t>✓ Claude (理解與生成)</a:t>
+            </a:r>
+          </a:p>
+          <a:p>
+            <a:pPr algn="l"/>
+            <a:r>
+              <a:rPr sz="1620" b="0" i="0">
+                <a:solidFill>
+                  <a:srgbClr val="16A34A">
+                    <a:alpha val="100000"/>
+                  </a:srgbClr>
+                </a:solidFill>
+                <a:latin typeface="Arial"/>
+                <a:ea typeface="Arial"/>
+                <a:cs typeface="Arial"/>
+              </a:rPr>
+              <a:t>✓ Polly (文字 → 語音)</a:t>
+            </a:r>
+          </a:p>
+        </p:txBody>
+      </p:sp>
+      <p:sp>
+        <p:nvSpPr>
+          <p:cNvPr id="8" name="TextBox 7"/>
+          <p:cNvSpPr txBox="1"/>
+          <p:nvPr/>
+        </p:nvSpPr>
+        <p:spPr>
+          <a:xfrm>
+            <a:off x="1219169" y="4046220"/>
+            <a:ext cx="9753356" cy="342900"/>
+          </a:xfrm>
+          <a:prstGeom prst="rect">
+            <a:avLst/>
+          </a:prstGeom>
+          <a:noFill/>
+        </p:spPr>
+        <p:txBody>
+          <a:bodyPr wrap="square" lIns="0" tIns="0" rIns="0" bIns="0" anchor="ctr">
+            <a:spAutoFit/>
+          </a:bodyPr>
+          <a:lstStyle/>
+          <a:p>
+            <a:pPr algn="ctr"/>
+            <a:r>
+              <a:rPr sz="2160" b="1" i="0">
+                <a:solidFill>
+                  <a:srgbClr val="DC2626">
+                    <a:alpha val="100000"/>
+                  </a:srgbClr>
+                </a:solidFill>
+                <a:latin typeface="Arial"/>
+                <a:ea typeface="Arial"/>
+                <a:cs typeface="Arial"/>
+              </a:rPr>
+              <a:t>⚠️ 但是...</a:t>
+            </a:r>
+          </a:p>
+        </p:txBody>
+      </p:sp>
+      <p:sp>
+        <p:nvSpPr>
+          <p:cNvPr id="9" name="TextBox 8"/>
+          <p:cNvSpPr txBox="1"/>
+          <p:nvPr/>
+        </p:nvSpPr>
+        <p:spPr>
+          <a:xfrm>
+            <a:off x="1828754" y="4526280"/>
+            <a:ext cx="8534186" cy="548640"/>
+          </a:xfrm>
+          <a:prstGeom prst="rect">
+            <a:avLst/>
+          </a:prstGeom>
+          <a:noFill/>
+        </p:spPr>
+        <p:txBody>
+          <a:bodyPr wrap="square" lIns="0" tIns="0" rIns="0" bIns="0" anchor="t">
+            <a:spAutoFit/>
+          </a:bodyPr>
+          <a:lstStyle/>
+          <a:p>
+            <a:pPr algn="ctr"/>
+            <a:r>
+              <a:rPr sz="1512" b="0" i="0">
+                <a:solidFill>
+                  <a:srgbClr val="232F3E">
+                    <a:alpha val="100000"/>
+                  </a:srgbClr>
+                </a:solidFill>
+                <a:latin typeface="Arial"/>
+                <a:ea typeface="Arial"/>
+                <a:cs typeface="Arial"/>
+              </a:rPr>
+              <a:t>Nova Sonic 支援中文，但帶有明顯 ABC 腔調</a:t>
+            </a:r>
+          </a:p>
+          <a:p>
+            <a:pPr algn="ctr"/>
+            <a:r>
+              <a:rPr sz="1512" b="0" i="0">
+                <a:solidFill>
+                  <a:srgbClr val="232F3E">
+                    <a:alpha val="100000"/>
+                  </a:srgbClr>
+                </a:solidFill>
+                <a:latin typeface="Arial"/>
+                <a:ea typeface="Arial"/>
+                <a:cs typeface="Arial"/>
+              </a:rPr>
+              <a:t>(美式華語)</a:t>
+            </a:r>
+          </a:p>
+        </p:txBody>
+      </p:sp>
+      <p:sp>
+        <p:nvSpPr>
+          <p:cNvPr id="10" name="TextBox 9"/>
+          <p:cNvSpPr txBox="1"/>
+          <p:nvPr/>
+        </p:nvSpPr>
+        <p:spPr>
+          <a:xfrm>
+            <a:off x="1219169" y="5212080"/>
+            <a:ext cx="9753356" cy="411480"/>
+          </a:xfrm>
+          <a:prstGeom prst="rect">
+            <a:avLst/>
+          </a:prstGeom>
+          <a:noFill/>
+        </p:spPr>
+        <p:txBody>
+          <a:bodyPr wrap="square" lIns="0" tIns="0" rIns="0" bIns="0" anchor="ctr">
+            <a:spAutoFit/>
+          </a:bodyPr>
+          <a:lstStyle/>
+          <a:p>
+            <a:pPr algn="ctr"/>
+            <a:r>
+              <a:rPr sz="2052" b="1" i="0">
+                <a:solidFill>
+                  <a:srgbClr val="DC2626">
+                    <a:alpha val="100000"/>
+                  </a:srgbClr>
+                </a:solidFill>
+                <a:latin typeface="Arial"/>
+                <a:ea typeface="Arial"/>
+                <a:cs typeface="Arial"/>
+              </a:rPr>
+              <a:t>❌ 不適合台灣長照現場</a:t>
+            </a:r>
+          </a:p>
+        </p:txBody>
+      </p:sp>
+      <p:sp>
+        <p:nvSpPr>
+          <p:cNvPr id="11" name="TextBox 10"/>
+          <p:cNvSpPr txBox="1"/>
+          <p:nvPr/>
+        </p:nvSpPr>
+        <p:spPr>
+          <a:xfrm>
+            <a:off x="1219169" y="5692140"/>
+            <a:ext cx="9753356" cy="274320"/>
+          </a:xfrm>
+          <a:prstGeom prst="rect">
+            <a:avLst/>
+          </a:prstGeom>
+          <a:noFill/>
+        </p:spPr>
+        <p:txBody>
+          <a:bodyPr wrap="square" lIns="0" tIns="0" rIns="0" bIns="0" anchor="ctr">
+            <a:spAutoFit/>
+          </a:bodyPr>
+          <a:lstStyle/>
+          <a:p>
+            <a:pPr algn="ctr"/>
+            <a:r>
+              <a:rPr sz="1404" b="0" i="0">
+                <a:solidFill>
+                  <a:srgbClr val="545B64">
+                    <a:alpha val="100000"/>
+                  </a:srgbClr>
+                </a:solidFill>
+                <a:latin typeface="Arial"/>
+                <a:ea typeface="Arial"/>
+                <a:cs typeface="Arial"/>
+              </a:rPr>
+              <a:t>長者與照服員主要使用台灣國語與台語</a:t>
+            </a:r>
+          </a:p>
+        </p:txBody>
+      </p:sp>
+    </p:spTree>
+  </p:cSld>
+  <p:clrMapOvr>
+    <a:masterClrMapping/>
+  </p:clrMapOvr>
+</p:sld>
+</file>
+
+<file path=ppt/slides/slide12.xml><?xml version="1.0" encoding="utf-8"?>
+<p:sld xmlns:a="http://schemas.openxmlformats.org/drawingml/2006/main" xmlns:r="http://schemas.openxmlformats.org/officeDocument/2006/relationships" xmlns:p="http://schemas.openxmlformats.org/presentationml/2006/main">
+  <p:cSld>
+    <p:spTree>
+      <p:nvGrpSpPr>
+        <p:cNvPr id="1" name=""/>
+        <p:cNvGrpSpPr/>
+        <p:nvPr/>
+      </p:nvGrpSpPr>
+      <p:grpSpPr>
+        <a:xfrm>
+          <a:off x="0" y="0"/>
+          <a:ext cx="0" cy="0"/>
+          <a:chOff x="0" y="0"/>
+          <a:chExt cx="0" cy="0"/>
+        </a:xfrm>
+      </p:grpSpPr>
+      <p:sp>
+        <p:nvSpPr>
+          <p:cNvPr id="2" name="Rectangle 1"/>
           <p:cNvSpPr/>
           <p:nvPr/>
         </p:nvSpPr>
         <p:spPr>
           <a:xfrm>
-            <a:off x="4571885" y="1234440"/>
-            <a:ext cx="3047923" cy="1783080"/>
-          </a:xfrm>
-          <a:prstGeom prst="roundRect">
-            <a:avLst>
-              <a:gd name="adj" fmla="val 3000"/>
-            </a:avLst>
+            <a:off x="0" y="0"/>
+            <a:ext cx="12191695" cy="6858000"/>
+          </a:xfrm>
+          <a:prstGeom prst="rect">
+            <a:avLst/>
           </a:prstGeom>
           <a:solidFill>
-            <a:srgbClr val="DC2626"/>
+            <a:srgbClr val="FFFFFF"/>
           </a:solidFill>
           <a:ln>
             <a:noFill/>
@@ -4538,13 +4954,13 @@
       </p:sp>
       <p:sp>
         <p:nvSpPr>
-          <p:cNvPr id="5" name="Rounded Rectangle 4"/>
+          <p:cNvPr id="3" name="Rounded Rectangle 2"/>
           <p:cNvSpPr/>
           <p:nvPr/>
         </p:nvSpPr>
         <p:spPr>
           <a:xfrm>
-            <a:off x="8168435" y="1234440"/>
+            <a:off x="975335" y="1234440"/>
             <a:ext cx="3047923" cy="1783080"/>
           </a:xfrm>
           <a:prstGeom prst="roundRect">
@@ -4553,7 +4969,7 @@
             </a:avLst>
           </a:prstGeom>
           <a:solidFill>
-            <a:srgbClr val="16A34A"/>
+            <a:srgbClr val="2563EB"/>
           </a:solidFill>
           <a:ln>
             <a:noFill/>
@@ -4585,13 +5001,13 @@
       </p:sp>
       <p:sp>
         <p:nvSpPr>
-          <p:cNvPr id="6" name="Rounded Rectangle 5"/>
+          <p:cNvPr id="4" name="Rounded Rectangle 3"/>
           <p:cNvSpPr/>
           <p:nvPr/>
         </p:nvSpPr>
         <p:spPr>
           <a:xfrm>
-            <a:off x="975335" y="3154680"/>
+            <a:off x="4571885" y="1234440"/>
             <a:ext cx="3047923" cy="1783080"/>
           </a:xfrm>
           <a:prstGeom prst="roundRect">
@@ -4600,7 +5016,7 @@
             </a:avLst>
           </a:prstGeom>
           <a:solidFill>
-            <a:srgbClr val="FF9900"/>
+            <a:srgbClr val="DC2626"/>
           </a:solidFill>
           <a:ln>
             <a:noFill/>
@@ -4632,13 +5048,13 @@
       </p:sp>
       <p:sp>
         <p:nvSpPr>
-          <p:cNvPr id="7" name="Rounded Rectangle 6"/>
+          <p:cNvPr id="5" name="Rounded Rectangle 4"/>
           <p:cNvSpPr/>
           <p:nvPr/>
         </p:nvSpPr>
         <p:spPr>
           <a:xfrm>
-            <a:off x="4571885" y="3154680"/>
+            <a:off x="8168435" y="1234440"/>
             <a:ext cx="3047923" cy="1783080"/>
           </a:xfrm>
           <a:prstGeom prst="roundRect">
@@ -4647,7 +5063,7 @@
             </a:avLst>
           </a:prstGeom>
           <a:solidFill>
-            <a:srgbClr val="7C3AED"/>
+            <a:srgbClr val="16A34A"/>
           </a:solidFill>
           <a:ln>
             <a:noFill/>
@@ -4679,13 +5095,13 @@
       </p:sp>
       <p:sp>
         <p:nvSpPr>
-          <p:cNvPr id="8" name="Rounded Rectangle 7"/>
+          <p:cNvPr id="6" name="Rounded Rectangle 5"/>
           <p:cNvSpPr/>
           <p:nvPr/>
         </p:nvSpPr>
         <p:spPr>
           <a:xfrm>
-            <a:off x="8168435" y="3154680"/>
+            <a:off x="975335" y="3154680"/>
             <a:ext cx="3047923" cy="1783080"/>
           </a:xfrm>
           <a:prstGeom prst="roundRect">
@@ -4694,7 +5110,7 @@
             </a:avLst>
           </a:prstGeom>
           <a:solidFill>
-            <a:srgbClr val="EA580C"/>
+            <a:srgbClr val="FF9900"/>
           </a:solidFill>
           <a:ln>
             <a:noFill/>
@@ -4726,6 +5142,100 @@
       </p:sp>
       <p:sp>
         <p:nvSpPr>
+          <p:cNvPr id="7" name="Rounded Rectangle 6"/>
+          <p:cNvSpPr/>
+          <p:nvPr/>
+        </p:nvSpPr>
+        <p:spPr>
+          <a:xfrm>
+            <a:off x="4571885" y="3154680"/>
+            <a:ext cx="3047923" cy="1783080"/>
+          </a:xfrm>
+          <a:prstGeom prst="roundRect">
+            <a:avLst>
+              <a:gd name="adj" fmla="val 3000"/>
+            </a:avLst>
+          </a:prstGeom>
+          <a:solidFill>
+            <a:srgbClr val="7C3AED"/>
+          </a:solidFill>
+          <a:ln>
+            <a:noFill/>
+          </a:ln>
+          <a:effectLst/>
+        </p:spPr>
+        <p:style>
+          <a:lnRef idx="1">
+            <a:schemeClr val="accent1"/>
+          </a:lnRef>
+          <a:fillRef idx="3">
+            <a:schemeClr val="accent1"/>
+          </a:fillRef>
+          <a:effectRef idx="2">
+            <a:schemeClr val="accent1"/>
+          </a:effectRef>
+          <a:fontRef idx="minor">
+            <a:schemeClr val="lt1"/>
+          </a:fontRef>
+        </p:style>
+        <p:txBody>
+          <a:bodyPr rtlCol="0" anchor="ctr"/>
+          <a:lstStyle/>
+          <a:p>
+            <a:pPr algn="ctr"/>
+            <a:endParaRPr/>
+          </a:p>
+        </p:txBody>
+      </p:sp>
+      <p:sp>
+        <p:nvSpPr>
+          <p:cNvPr id="8" name="Rounded Rectangle 7"/>
+          <p:cNvSpPr/>
+          <p:nvPr/>
+        </p:nvSpPr>
+        <p:spPr>
+          <a:xfrm>
+            <a:off x="8168435" y="3154680"/>
+            <a:ext cx="3047923" cy="1783080"/>
+          </a:xfrm>
+          <a:prstGeom prst="roundRect">
+            <a:avLst>
+              <a:gd name="adj" fmla="val 3000"/>
+            </a:avLst>
+          </a:prstGeom>
+          <a:solidFill>
+            <a:srgbClr val="EA580C"/>
+          </a:solidFill>
+          <a:ln>
+            <a:noFill/>
+          </a:ln>
+          <a:effectLst/>
+        </p:spPr>
+        <p:style>
+          <a:lnRef idx="1">
+            <a:schemeClr val="accent1"/>
+          </a:lnRef>
+          <a:fillRef idx="3">
+            <a:schemeClr val="accent1"/>
+          </a:fillRef>
+          <a:effectRef idx="2">
+            <a:schemeClr val="accent1"/>
+          </a:effectRef>
+          <a:fontRef idx="minor">
+            <a:schemeClr val="lt1"/>
+          </a:fontRef>
+        </p:style>
+        <p:txBody>
+          <a:bodyPr rtlCol="0" anchor="ctr"/>
+          <a:lstStyle/>
+          <a:p>
+            <a:pPr algn="ctr"/>
+            <a:endParaRPr/>
+          </a:p>
+        </p:txBody>
+      </p:sp>
+      <p:sp>
+        <p:nvSpPr>
           <p:cNvPr id="9" name="TextBox 8"/>
           <p:cNvSpPr txBox="1"/>
           <p:nvPr/>
@@ -5589,7 +6099,77 @@
 </p:sld>
 </file>
 
-<file path=ppt/slides/slide12.xml><?xml version="1.0" encoding="utf-8"?>
+<file path=ppt/slides/slide13.xml><?xml version="1.0" encoding="utf-8"?>
+<p:sld xmlns:a="http://schemas.openxmlformats.org/drawingml/2006/main" xmlns:r="http://schemas.openxmlformats.org/officeDocument/2006/relationships" xmlns:p="http://schemas.openxmlformats.org/presentationml/2006/main">
+  <p:cSld>
+    <p:spTree>
+      <p:nvGrpSpPr>
+        <p:cNvPr id="1" name=""/>
+        <p:cNvGrpSpPr/>
+        <p:nvPr/>
+      </p:nvGrpSpPr>
+      <p:grpSpPr>
+        <a:xfrm>
+          <a:off x="0" y="0"/>
+          <a:ext cx="0" cy="0"/>
+          <a:chOff x="0" y="0"/>
+          <a:chExt cx="0" cy="0"/>
+        </a:xfrm>
+      </p:grpSpPr>
+      <p:sp>
+        <p:nvSpPr>
+          <p:cNvPr id="3" name="文字方塊 2">
+            <a:extLst>
+              <a:ext uri="{FF2B5EF4-FFF2-40B4-BE49-F238E27FC236}">
+                <a16:creationId xmlns:a16="http://schemas.microsoft.com/office/drawing/2014/main" id="{1B6AEB63-9E7E-4DCC-8A8C-29D1EDF7B3AE}"/>
+              </a:ext>
+            </a:extLst>
+          </p:cNvPr>
+          <p:cNvSpPr txBox="1"/>
+          <p:nvPr/>
+        </p:nvSpPr>
+        <p:spPr>
+          <a:xfrm>
+            <a:off x="3048000" y="3108012"/>
+            <a:ext cx="6096000" cy="646331"/>
+          </a:xfrm>
+          <a:prstGeom prst="rect">
+            <a:avLst/>
+          </a:prstGeom>
+          <a:noFill/>
+        </p:spPr>
+        <p:txBody>
+          <a:bodyPr wrap="square">
+            <a:spAutoFit/>
+          </a:bodyPr>
+          <a:lstStyle/>
+          <a:p>
+            <a:r>
+              <a:rPr lang="zh-TW" altLang="en-US" dirty="0"/>
+              <a:t>https://drive.google.com/file/d/1yXLcT2a0WGSIWXJ0JfJi4lre4k8Z6m6d/view?usp=drive_lin</a:t>
+            </a:r>
+            <a:r>
+              <a:rPr lang="en-US" altLang="zh-TW"/>
+              <a:t>k</a:t>
+            </a:r>
+            <a:endParaRPr lang="zh-TW" altLang="en-US" dirty="0"/>
+          </a:p>
+        </p:txBody>
+      </p:sp>
+    </p:spTree>
+    <p:extLst>
+      <p:ext uri="{BB962C8B-B14F-4D97-AF65-F5344CB8AC3E}">
+        <p14:creationId xmlns:p14="http://schemas.microsoft.com/office/powerpoint/2010/main" val="1830334096"/>
+      </p:ext>
+    </p:extLst>
+  </p:cSld>
+  <p:clrMapOvr>
+    <a:masterClrMapping/>
+  </p:clrMapOvr>
+</p:sld>
+</file>
+
+<file path=ppt/slides/slide14.xml><?xml version="1.0" encoding="utf-8"?>
 <p:sld xmlns:a="http://schemas.openxmlformats.org/drawingml/2006/main" xmlns:r="http://schemas.openxmlformats.org/officeDocument/2006/relationships" xmlns:p="http://schemas.openxmlformats.org/presentationml/2006/main">
   <p:cSld>
     <p:spTree>
@@ -7328,7 +7908,7 @@
         </p:nvSpPr>
         <p:spPr>
           <a:xfrm>
-            <a:off x="1706880" y="1465442"/>
+            <a:off x="539931" y="353459"/>
             <a:ext cx="6096000" cy="1754326"/>
           </a:xfrm>
           <a:prstGeom prst="rect">
@@ -7346,6 +7926,116 @@
               <a:rPr lang="zh-TW" altLang="en-US" dirty="0"/>
               <a:t>https://miro.com/welcomeonboard/UUVTbnlPSlpQN1VsbGlseHhuYnRYV2M2Y080VjRKdnBqdlZ5amx0QTVpM3BGNzJvN1lvbzNVSGs0dWM2TkdPeE5xV05OYk91QStNOWhmVk1QNDdOa3I3NkZRbHdhMmV2T0t6dlp5WklFSXdNeW5ITGcySjNHVStIZzNibmhxRDR3VHhHVHd5UWtSM1BidUtUYmxycDRnPT0hdjE=?share_link_id=526747182258</a:t>
             </a:r>
+          </a:p>
+        </p:txBody>
+      </p:sp>
+      <p:sp>
+        <p:nvSpPr>
+          <p:cNvPr id="3" name="文字方塊 2">
+            <a:extLst>
+              <a:ext uri="{FF2B5EF4-FFF2-40B4-BE49-F238E27FC236}">
+                <a16:creationId xmlns:a16="http://schemas.microsoft.com/office/drawing/2014/main" id="{E411A2C9-268C-C468-925E-396A6EA5A3B0}"/>
+              </a:ext>
+            </a:extLst>
+          </p:cNvPr>
+          <p:cNvSpPr txBox="1"/>
+          <p:nvPr/>
+        </p:nvSpPr>
+        <p:spPr>
+          <a:xfrm>
+            <a:off x="766355" y="4443774"/>
+            <a:ext cx="6096000" cy="1754326"/>
+          </a:xfrm>
+          <a:prstGeom prst="rect">
+            <a:avLst/>
+          </a:prstGeom>
+          <a:noFill/>
+        </p:spPr>
+        <p:txBody>
+          <a:bodyPr wrap="square">
+            <a:spAutoFit/>
+          </a:bodyPr>
+          <a:lstStyle/>
+          <a:p>
+            <a:r>
+              <a:rPr lang="zh-TW" altLang="en-US" dirty="0"/>
+              <a:t>https://miro.com/welcomeonboard/UFhCeGlNSFpySkhzclFUOC84MzkvK2liN2xVQTF3VFBlLzUzMmR2dmtyRGJ2eCtUTFkvcEp2d2NYZTNPRDlrbUUvalhvR25RemtHZU1ZUVJscVZLYWI3NkZRbHdhMmV2T0t6dlp5WklFSXo3WlUyOTQ5UGlhc0h6anprbTVJVVVQdGo1ZEV3bUdPQWRZUHQzSGl6V2NBPT0hdjE=?share_link_id=603434869488</a:t>
+            </a:r>
+          </a:p>
+        </p:txBody>
+      </p:sp>
+      <p:sp>
+        <p:nvSpPr>
+          <p:cNvPr id="2" name="文字方塊 1">
+            <a:extLst>
+              <a:ext uri="{FF2B5EF4-FFF2-40B4-BE49-F238E27FC236}">
+                <a16:creationId xmlns:a16="http://schemas.microsoft.com/office/drawing/2014/main" id="{4552DBD1-088A-C9D0-64DE-5D9F8DBB86DD}"/>
+              </a:ext>
+            </a:extLst>
+          </p:cNvPr>
+          <p:cNvSpPr txBox="1"/>
+          <p:nvPr/>
+        </p:nvSpPr>
+        <p:spPr>
+          <a:xfrm>
+            <a:off x="7437120" y="992777"/>
+            <a:ext cx="2943497" cy="369332"/>
+          </a:xfrm>
+          <a:prstGeom prst="rect">
+            <a:avLst/>
+          </a:prstGeom>
+          <a:noFill/>
+        </p:spPr>
+        <p:txBody>
+          <a:bodyPr wrap="square" rtlCol="0">
+            <a:spAutoFit/>
+          </a:bodyPr>
+          <a:lstStyle/>
+          <a:p>
+            <a:r>
+              <a:rPr lang="zh-TW" altLang="en-US" dirty="0"/>
+              <a:t>設計流程迭代</a:t>
+            </a:r>
+          </a:p>
+        </p:txBody>
+      </p:sp>
+      <p:sp>
+        <p:nvSpPr>
+          <p:cNvPr id="6" name="文字方塊 5">
+            <a:extLst>
+              <a:ext uri="{FF2B5EF4-FFF2-40B4-BE49-F238E27FC236}">
+                <a16:creationId xmlns:a16="http://schemas.microsoft.com/office/drawing/2014/main" id="{1EDAC4AB-9004-3213-5052-67BACBA5A58A}"/>
+              </a:ext>
+            </a:extLst>
+          </p:cNvPr>
+          <p:cNvSpPr txBox="1"/>
+          <p:nvPr/>
+        </p:nvSpPr>
+        <p:spPr>
+          <a:xfrm>
+            <a:off x="7332617" y="4519749"/>
+            <a:ext cx="2542903" cy="369332"/>
+          </a:xfrm>
+          <a:prstGeom prst="rect">
+            <a:avLst/>
+          </a:prstGeom>
+          <a:noFill/>
+        </p:spPr>
+        <p:txBody>
+          <a:bodyPr wrap="square">
+            <a:spAutoFit/>
+          </a:bodyPr>
+          <a:lstStyle/>
+          <a:p>
+            <a:r>
+              <a:rPr lang="zh-TW" altLang="en-US"/>
+              <a:t>現狀更新至左下</a:t>
+            </a:r>
+            <a:r>
+              <a:rPr lang="en-US" altLang="zh-TW" dirty="0"/>
+              <a:t>0802 </a:t>
+            </a:r>
+            <a:endParaRPr lang="zh-TW" altLang="en-US" sz="1800" dirty="0"/>
           </a:p>
         </p:txBody>
       </p:sp>
@@ -7379,910 +8069,42 @@
           <a:chExt cx="0" cy="0"/>
         </a:xfrm>
       </p:grpSpPr>
-      <p:sp>
-        <p:nvSpPr>
-          <p:cNvPr id="3" name="Shape 1"/>
-          <p:cNvSpPr/>
-          <p:nvPr/>
-        </p:nvSpPr>
-        <p:spPr>
-          <a:xfrm>
-            <a:off x="548640" y="457200"/>
-            <a:ext cx="1737360" cy="310896"/>
-          </a:xfrm>
-          <a:prstGeom prst="roundRect">
-            <a:avLst>
-              <a:gd name="adj" fmla="val 50000"/>
-            </a:avLst>
-          </a:prstGeom>
-          <a:solidFill>
-            <a:srgbClr val="0F7C6C"/>
-          </a:solidFill>
-          <a:ln/>
-        </p:spPr>
-      </p:sp>
-      <p:sp>
-        <p:nvSpPr>
-          <p:cNvPr id="4" name="Text 2"/>
-          <p:cNvSpPr/>
-          <p:nvPr/>
-        </p:nvSpPr>
-        <p:spPr>
-          <a:xfrm>
-            <a:off x="548640" y="457200"/>
-            <a:ext cx="1737360" cy="310896"/>
-          </a:xfrm>
-          <a:prstGeom prst="rect">
-            <a:avLst/>
-          </a:prstGeom>
-          <a:noFill/>
-          <a:ln/>
-        </p:spPr>
-        <p:txBody>
-          <a:bodyPr wrap="square" rtlCol="0" anchor="ctr"/>
-          <a:lstStyle/>
-          <a:p>
-            <a:pPr marL="0" indent="0" algn="ctr">
-              <a:buNone/>
-            </a:pPr>
-            <a:r>
-              <a:rPr lang="en-US" sz="1200" b="1" kern="0" spc="100" dirty="0">
-                <a:solidFill>
-                  <a:srgbClr val="FFFFFF"/>
-                </a:solidFill>
-                <a:latin typeface="Calibri" pitchFamily="34" charset="0"/>
-                <a:ea typeface="Calibri" pitchFamily="34" charset="-122"/>
-                <a:cs typeface="Calibri" pitchFamily="34" charset="-120"/>
-              </a:rPr>
-              <a:t>TEAM</a:t>
-            </a:r>
-            <a:endParaRPr lang="en-US" sz="1200" dirty="0"/>
-          </a:p>
-        </p:txBody>
-      </p:sp>
-      <p:sp>
-        <p:nvSpPr>
-          <p:cNvPr id="5" name="Text 3"/>
-          <p:cNvSpPr/>
-          <p:nvPr/>
-        </p:nvSpPr>
-        <p:spPr>
-          <a:xfrm>
-            <a:off x="548640" y="841248"/>
-            <a:ext cx="11094415" cy="548640"/>
-          </a:xfrm>
-          <a:prstGeom prst="rect">
-            <a:avLst/>
-          </a:prstGeom>
-          <a:noFill/>
-          <a:ln/>
-        </p:spPr>
-        <p:txBody>
-          <a:bodyPr wrap="square" rtlCol="0" anchor="ctr"/>
-          <a:lstStyle/>
-          <a:p>
-            <a:pPr marL="0" indent="0">
-              <a:buNone/>
-            </a:pPr>
-            <a:r>
-              <a:rPr lang="en-US" sz="2700" b="1" dirty="0">
-                <a:solidFill>
-                  <a:srgbClr val="FFFFFF"/>
-                </a:solidFill>
-                <a:latin typeface="Cambria" pitchFamily="34" charset="0"/>
-                <a:ea typeface="Cambria" pitchFamily="34" charset="-122"/>
-                <a:cs typeface="Cambria" pitchFamily="34" charset="-120"/>
-              </a:rPr>
-              <a:t>為什麼是我們：一支小團隊，扛起六個角色的紀律</a:t>
-            </a:r>
-            <a:endParaRPr lang="en-US" sz="2700" dirty="0"/>
-          </a:p>
-        </p:txBody>
-      </p:sp>
-      <p:sp>
-        <p:nvSpPr>
-          <p:cNvPr id="6" name="Text 4"/>
-          <p:cNvSpPr/>
-          <p:nvPr/>
-        </p:nvSpPr>
-        <p:spPr>
-          <a:xfrm>
-            <a:off x="548640" y="1426464"/>
-            <a:ext cx="11094415" cy="365760"/>
-          </a:xfrm>
-          <a:prstGeom prst="rect">
-            <a:avLst/>
-          </a:prstGeom>
-          <a:noFill/>
-          <a:ln/>
-        </p:spPr>
-        <p:txBody>
-          <a:bodyPr wrap="square" rtlCol="0" anchor="ctr"/>
-          <a:lstStyle/>
-          <a:p>
-            <a:pPr marL="0" indent="0">
-              <a:buNone/>
-            </a:pPr>
-            <a:r>
-              <a:rPr lang="en-US" sz="2400" dirty="0">
-                <a:solidFill>
-                  <a:schemeClr val="accent2">
-                    <a:lumMod val="75000"/>
-                  </a:schemeClr>
-                </a:solidFill>
-                <a:latin typeface="Calibri" pitchFamily="34" charset="0"/>
-                <a:ea typeface="Calibri" pitchFamily="34" charset="-122"/>
-                <a:cs typeface="Calibri" pitchFamily="34" charset="-120"/>
-              </a:rPr>
-              <a:t>Profit-Prophet 團隊以 Kiro 驅動的多角色協作管線開發，讓小團隊具備大型產品組織的執行力與治理紀律</a:t>
-            </a:r>
-            <a:endParaRPr lang="en-US" sz="2400" dirty="0">
-              <a:solidFill>
-                <a:schemeClr val="accent2">
-                  <a:lumMod val="75000"/>
-                </a:schemeClr>
-              </a:solidFill>
-            </a:endParaRPr>
-          </a:p>
-        </p:txBody>
-      </p:sp>
-      <p:sp>
-        <p:nvSpPr>
-          <p:cNvPr id="7" name="Shape 5"/>
-          <p:cNvSpPr/>
-          <p:nvPr/>
-        </p:nvSpPr>
-        <p:spPr>
-          <a:xfrm>
-            <a:off x="548640" y="2148840"/>
-            <a:ext cx="3429000" cy="1417320"/>
-          </a:xfrm>
-          <a:prstGeom prst="roundRect">
-            <a:avLst>
-              <a:gd name="adj" fmla="val 7742"/>
-            </a:avLst>
-          </a:prstGeom>
-          <a:solidFill>
-            <a:srgbClr val="132A46"/>
-          </a:solidFill>
-          <a:ln/>
-        </p:spPr>
-      </p:sp>
-      <p:sp>
-        <p:nvSpPr>
-          <p:cNvPr id="8" name="Text 6"/>
-          <p:cNvSpPr/>
-          <p:nvPr/>
-        </p:nvSpPr>
-        <p:spPr>
-          <a:xfrm>
-            <a:off x="749808" y="2276856"/>
-            <a:ext cx="3026664" cy="365760"/>
-          </a:xfrm>
-          <a:prstGeom prst="rect">
-            <a:avLst/>
-          </a:prstGeom>
-          <a:noFill/>
-          <a:ln/>
-        </p:spPr>
-        <p:txBody>
-          <a:bodyPr wrap="square" rtlCol="0" anchor="ctr"/>
-          <a:lstStyle/>
-          <a:p>
-            <a:pPr marL="0" indent="0">
-              <a:buNone/>
-            </a:pPr>
-            <a:r>
-              <a:rPr lang="en-US" sz="1450" b="1" dirty="0">
-                <a:solidFill>
-                  <a:srgbClr val="34D399"/>
-                </a:solidFill>
-                <a:latin typeface="Cambria" pitchFamily="34" charset="0"/>
-                <a:ea typeface="Cambria" pitchFamily="34" charset="-122"/>
-                <a:cs typeface="Cambria" pitchFamily="34" charset="-120"/>
-              </a:rPr>
-              <a:t>PM</a:t>
-            </a:r>
-            <a:endParaRPr lang="en-US" sz="1450" dirty="0"/>
-          </a:p>
-        </p:txBody>
-      </p:sp>
-      <p:sp>
-        <p:nvSpPr>
-          <p:cNvPr id="9" name="Text 7"/>
-          <p:cNvSpPr/>
-          <p:nvPr/>
-        </p:nvSpPr>
-        <p:spPr>
-          <a:xfrm>
-            <a:off x="749808" y="2660904"/>
-            <a:ext cx="3026664" cy="777240"/>
-          </a:xfrm>
-          <a:prstGeom prst="rect">
-            <a:avLst/>
-          </a:prstGeom>
-          <a:noFill/>
-          <a:ln/>
-        </p:spPr>
-        <p:txBody>
-          <a:bodyPr wrap="square" rtlCol="0" anchor="t"/>
-          <a:lstStyle/>
-          <a:p>
-            <a:pPr marL="0" indent="0">
-              <a:buNone/>
-            </a:pPr>
-            <a:r>
-              <a:rPr lang="en-US" sz="1050" dirty="0">
-                <a:solidFill>
-                  <a:srgbClr val="DCE9E5"/>
-                </a:solidFill>
-                <a:latin typeface="Calibri" pitchFamily="34" charset="0"/>
-                <a:ea typeface="Calibri" pitchFamily="34" charset="-122"/>
-                <a:cs typeface="Calibri" pitchFamily="34" charset="-120"/>
-              </a:rPr>
-              <a:t>需求定義、使用者故事與驗收標準</a:t>
-            </a:r>
-            <a:endParaRPr lang="en-US" sz="1050" dirty="0"/>
-          </a:p>
-        </p:txBody>
-      </p:sp>
-      <p:sp>
-        <p:nvSpPr>
-          <p:cNvPr id="10" name="Shape 8"/>
-          <p:cNvSpPr/>
-          <p:nvPr/>
-        </p:nvSpPr>
-        <p:spPr>
-          <a:xfrm>
-            <a:off x="4274820" y="2203704"/>
-            <a:ext cx="3429000" cy="1417320"/>
-          </a:xfrm>
-          <a:prstGeom prst="roundRect">
-            <a:avLst>
-              <a:gd name="adj" fmla="val 7742"/>
-            </a:avLst>
-          </a:prstGeom>
-          <a:solidFill>
-            <a:srgbClr val="132A46"/>
-          </a:solidFill>
-          <a:ln/>
-        </p:spPr>
-      </p:sp>
-      <p:sp>
-        <p:nvSpPr>
-          <p:cNvPr id="11" name="Text 9"/>
-          <p:cNvSpPr/>
-          <p:nvPr/>
-        </p:nvSpPr>
-        <p:spPr>
-          <a:xfrm>
-            <a:off x="4361688" y="2276856"/>
-            <a:ext cx="3026664" cy="365760"/>
-          </a:xfrm>
-          <a:prstGeom prst="rect">
-            <a:avLst/>
-          </a:prstGeom>
-          <a:noFill/>
-          <a:ln/>
-        </p:spPr>
-        <p:txBody>
-          <a:bodyPr wrap="square" rtlCol="0" anchor="ctr"/>
-          <a:lstStyle/>
-          <a:p>
-            <a:pPr marL="0" indent="0">
-              <a:buNone/>
-            </a:pPr>
-            <a:r>
-              <a:rPr lang="en-US" sz="1450" b="1" dirty="0">
-                <a:solidFill>
-                  <a:srgbClr val="34D399"/>
-                </a:solidFill>
-                <a:latin typeface="Cambria" pitchFamily="34" charset="0"/>
-                <a:ea typeface="Cambria" pitchFamily="34" charset="-122"/>
-                <a:cs typeface="Cambria" pitchFamily="34" charset="-120"/>
-              </a:rPr>
-              <a:t>Architect</a:t>
-            </a:r>
-            <a:endParaRPr lang="en-US" sz="1450" dirty="0"/>
-          </a:p>
-        </p:txBody>
-      </p:sp>
-      <p:sp>
-        <p:nvSpPr>
-          <p:cNvPr id="12" name="Text 10"/>
-          <p:cNvSpPr/>
-          <p:nvPr/>
-        </p:nvSpPr>
-        <p:spPr>
-          <a:xfrm>
-            <a:off x="4361688" y="2660904"/>
-            <a:ext cx="3026664" cy="777240"/>
-          </a:xfrm>
-          <a:prstGeom prst="rect">
-            <a:avLst/>
-          </a:prstGeom>
-          <a:noFill/>
-          <a:ln/>
-        </p:spPr>
-        <p:txBody>
-          <a:bodyPr wrap="square" rtlCol="0" anchor="t"/>
-          <a:lstStyle/>
-          <a:p>
-            <a:pPr marL="0" indent="0">
-              <a:buNone/>
-            </a:pPr>
-            <a:r>
-              <a:rPr lang="en-US" sz="1050" dirty="0">
-                <a:solidFill>
-                  <a:srgbClr val="DCE9E5"/>
-                </a:solidFill>
-                <a:latin typeface="Calibri" pitchFamily="34" charset="0"/>
-                <a:ea typeface="Calibri" pitchFamily="34" charset="-122"/>
-                <a:cs typeface="Calibri" pitchFamily="34" charset="-120"/>
-              </a:rPr>
-              <a:t>AWS 雲端架構設計與技術取捨（v1→v2 降成本改版）</a:t>
-            </a:r>
-            <a:endParaRPr lang="en-US" sz="1050" dirty="0"/>
-          </a:p>
-        </p:txBody>
-      </p:sp>
-      <p:sp>
-        <p:nvSpPr>
-          <p:cNvPr id="13" name="Shape 11"/>
-          <p:cNvSpPr/>
-          <p:nvPr/>
-        </p:nvSpPr>
-        <p:spPr>
-          <a:xfrm>
-            <a:off x="7772400" y="2148840"/>
-            <a:ext cx="3429000" cy="1417320"/>
-          </a:xfrm>
-          <a:prstGeom prst="roundRect">
-            <a:avLst>
-              <a:gd name="adj" fmla="val 7742"/>
-            </a:avLst>
-          </a:prstGeom>
-          <a:solidFill>
-            <a:srgbClr val="132A46"/>
-          </a:solidFill>
-          <a:ln/>
-        </p:spPr>
-      </p:sp>
-      <p:sp>
-        <p:nvSpPr>
-          <p:cNvPr id="14" name="Text 12"/>
-          <p:cNvSpPr/>
-          <p:nvPr/>
-        </p:nvSpPr>
-        <p:spPr>
-          <a:xfrm>
-            <a:off x="7973568" y="2276856"/>
-            <a:ext cx="3026664" cy="365760"/>
-          </a:xfrm>
-          <a:prstGeom prst="rect">
-            <a:avLst/>
-          </a:prstGeom>
-          <a:noFill/>
-          <a:ln/>
-        </p:spPr>
-        <p:txBody>
-          <a:bodyPr wrap="square" rtlCol="0" anchor="ctr"/>
-          <a:lstStyle/>
-          <a:p>
-            <a:pPr marL="0" indent="0">
-              <a:buNone/>
-            </a:pPr>
-            <a:r>
-              <a:rPr lang="en-US" sz="1450" b="1" dirty="0">
-                <a:solidFill>
-                  <a:srgbClr val="34D399"/>
-                </a:solidFill>
-                <a:latin typeface="Cambria" pitchFamily="34" charset="0"/>
-                <a:ea typeface="Cambria" pitchFamily="34" charset="-122"/>
-                <a:cs typeface="Cambria" pitchFamily="34" charset="-120"/>
-              </a:rPr>
-              <a:t>Full-stack Dev</a:t>
-            </a:r>
-            <a:endParaRPr lang="en-US" sz="1450" dirty="0"/>
-          </a:p>
-        </p:txBody>
-      </p:sp>
-      <p:sp>
-        <p:nvSpPr>
-          <p:cNvPr id="15" name="Text 13"/>
-          <p:cNvSpPr/>
-          <p:nvPr/>
-        </p:nvSpPr>
-        <p:spPr>
-          <a:xfrm>
-            <a:off x="7973568" y="2660904"/>
-            <a:ext cx="3026664" cy="777240"/>
-          </a:xfrm>
-          <a:prstGeom prst="rect">
-            <a:avLst/>
-          </a:prstGeom>
-          <a:noFill/>
-          <a:ln/>
-        </p:spPr>
-        <p:txBody>
-          <a:bodyPr wrap="square" rtlCol="0" anchor="t"/>
-          <a:lstStyle/>
-          <a:p>
-            <a:pPr marL="0" indent="0">
-              <a:buNone/>
-            </a:pPr>
-            <a:r>
-              <a:rPr lang="en-US" sz="1050" dirty="0">
-                <a:solidFill>
-                  <a:srgbClr val="DCE9E5"/>
-                </a:solidFill>
-                <a:latin typeface="Calibri" pitchFamily="34" charset="0"/>
-                <a:ea typeface="Calibri" pitchFamily="34" charset="-122"/>
-                <a:cs typeface="Calibri" pitchFamily="34" charset="-120"/>
-              </a:rPr>
-              <a:t>React 前端、語音串流、Bedrock 整合開發</a:t>
-            </a:r>
-            <a:endParaRPr lang="en-US" sz="1050" dirty="0"/>
-          </a:p>
-        </p:txBody>
-      </p:sp>
-      <p:sp>
-        <p:nvSpPr>
-          <p:cNvPr id="16" name="Shape 14"/>
-          <p:cNvSpPr/>
-          <p:nvPr/>
-        </p:nvSpPr>
-        <p:spPr>
-          <a:xfrm>
-            <a:off x="548640" y="3749040"/>
-            <a:ext cx="3429000" cy="1417320"/>
-          </a:xfrm>
-          <a:prstGeom prst="roundRect">
-            <a:avLst>
-              <a:gd name="adj" fmla="val 7742"/>
-            </a:avLst>
-          </a:prstGeom>
-          <a:solidFill>
-            <a:srgbClr val="132A46"/>
-          </a:solidFill>
-          <a:ln/>
-        </p:spPr>
-      </p:sp>
-      <p:sp>
-        <p:nvSpPr>
-          <p:cNvPr id="17" name="Text 15"/>
-          <p:cNvSpPr/>
-          <p:nvPr/>
-        </p:nvSpPr>
-        <p:spPr>
-          <a:xfrm>
-            <a:off x="749808" y="3877056"/>
-            <a:ext cx="3026664" cy="365760"/>
-          </a:xfrm>
-          <a:prstGeom prst="rect">
-            <a:avLst/>
-          </a:prstGeom>
-          <a:noFill/>
-          <a:ln/>
-        </p:spPr>
-        <p:txBody>
-          <a:bodyPr wrap="square" rtlCol="0" anchor="ctr"/>
-          <a:lstStyle/>
-          <a:p>
-            <a:pPr marL="0" indent="0">
-              <a:buNone/>
-            </a:pPr>
-            <a:r>
-              <a:rPr lang="en-US" sz="1450" b="1" dirty="0">
-                <a:solidFill>
-                  <a:srgbClr val="34D399"/>
-                </a:solidFill>
-                <a:latin typeface="Cambria" pitchFamily="34" charset="0"/>
-                <a:ea typeface="Cambria" pitchFamily="34" charset="-122"/>
-                <a:cs typeface="Cambria" pitchFamily="34" charset="-120"/>
-              </a:rPr>
-              <a:t>QA</a:t>
-            </a:r>
-            <a:endParaRPr lang="en-US" sz="1450" dirty="0"/>
-          </a:p>
-        </p:txBody>
-      </p:sp>
-      <p:sp>
-        <p:nvSpPr>
-          <p:cNvPr id="18" name="Text 16"/>
-          <p:cNvSpPr/>
-          <p:nvPr/>
-        </p:nvSpPr>
-        <p:spPr>
-          <a:xfrm>
-            <a:off x="749808" y="4261104"/>
-            <a:ext cx="3026664" cy="777240"/>
-          </a:xfrm>
-          <a:prstGeom prst="rect">
-            <a:avLst/>
-          </a:prstGeom>
-          <a:noFill/>
-          <a:ln/>
-        </p:spPr>
-        <p:txBody>
-          <a:bodyPr wrap="square" rtlCol="0" anchor="t"/>
-          <a:lstStyle/>
-          <a:p>
-            <a:pPr marL="0" indent="0">
-              <a:buNone/>
-            </a:pPr>
-            <a:r>
-              <a:rPr lang="en-US" sz="1050" dirty="0">
-                <a:solidFill>
-                  <a:srgbClr val="DCE9E5"/>
-                </a:solidFill>
-                <a:latin typeface="Calibri" pitchFamily="34" charset="0"/>
-                <a:ea typeface="Calibri" pitchFamily="34" charset="-122"/>
-                <a:cs typeface="Calibri" pitchFamily="34" charset="-120"/>
-              </a:rPr>
-              <a:t>測試框架、CI 建置與驗收把關</a:t>
-            </a:r>
-            <a:endParaRPr lang="en-US" sz="1050" dirty="0"/>
-          </a:p>
-        </p:txBody>
-      </p:sp>
-      <p:sp>
-        <p:nvSpPr>
-          <p:cNvPr id="19" name="Shape 17"/>
-          <p:cNvSpPr/>
-          <p:nvPr/>
-        </p:nvSpPr>
-        <p:spPr>
-          <a:xfrm>
-            <a:off x="4160520" y="3749040"/>
-            <a:ext cx="3429000" cy="1417320"/>
-          </a:xfrm>
-          <a:prstGeom prst="roundRect">
-            <a:avLst>
-              <a:gd name="adj" fmla="val 7742"/>
-            </a:avLst>
-          </a:prstGeom>
-          <a:solidFill>
-            <a:srgbClr val="132A46"/>
-          </a:solidFill>
-          <a:ln/>
-        </p:spPr>
-      </p:sp>
-      <p:sp>
-        <p:nvSpPr>
-          <p:cNvPr id="20" name="Text 18"/>
-          <p:cNvSpPr/>
-          <p:nvPr/>
-        </p:nvSpPr>
-        <p:spPr>
-          <a:xfrm>
-            <a:off x="4361688" y="3877056"/>
-            <a:ext cx="3026664" cy="365760"/>
-          </a:xfrm>
-          <a:prstGeom prst="rect">
-            <a:avLst/>
-          </a:prstGeom>
-          <a:noFill/>
-          <a:ln/>
-        </p:spPr>
-        <p:txBody>
-          <a:bodyPr wrap="square" rtlCol="0" anchor="ctr"/>
-          <a:lstStyle/>
-          <a:p>
-            <a:pPr marL="0" indent="0">
-              <a:buNone/>
-            </a:pPr>
-            <a:r>
-              <a:rPr lang="en-US" sz="1450" b="1" dirty="0">
-                <a:solidFill>
-                  <a:srgbClr val="34D399"/>
-                </a:solidFill>
-                <a:latin typeface="Cambria" pitchFamily="34" charset="0"/>
-                <a:ea typeface="Cambria" pitchFamily="34" charset="-122"/>
-                <a:cs typeface="Cambria" pitchFamily="34" charset="-120"/>
-              </a:rPr>
-              <a:t>CloudOps</a:t>
-            </a:r>
-            <a:endParaRPr lang="en-US" sz="1450" dirty="0"/>
-          </a:p>
-        </p:txBody>
-      </p:sp>
-      <p:sp>
-        <p:nvSpPr>
-          <p:cNvPr id="21" name="Text 19"/>
-          <p:cNvSpPr/>
-          <p:nvPr/>
-        </p:nvSpPr>
-        <p:spPr>
-          <a:xfrm>
-            <a:off x="4361688" y="4261104"/>
-            <a:ext cx="3026664" cy="777240"/>
-          </a:xfrm>
-          <a:prstGeom prst="rect">
-            <a:avLst/>
-          </a:prstGeom>
-          <a:noFill/>
-          <a:ln/>
-        </p:spPr>
-        <p:txBody>
-          <a:bodyPr wrap="square" rtlCol="0" anchor="t"/>
-          <a:lstStyle/>
-          <a:p>
-            <a:pPr marL="0" indent="0">
-              <a:buNone/>
-            </a:pPr>
-            <a:r>
-              <a:rPr lang="en-US" sz="1050" dirty="0">
-                <a:solidFill>
-                  <a:srgbClr val="DCE9E5"/>
-                </a:solidFill>
-                <a:latin typeface="Calibri" pitchFamily="34" charset="0"/>
-                <a:ea typeface="Calibri" pitchFamily="34" charset="-122"/>
-                <a:cs typeface="Calibri" pitchFamily="34" charset="-120"/>
-              </a:rPr>
-              <a:t>部署、IAM 最小權限與維運手冊</a:t>
-            </a:r>
-            <a:endParaRPr lang="en-US" sz="1050" dirty="0"/>
-          </a:p>
-        </p:txBody>
-      </p:sp>
-      <p:sp>
-        <p:nvSpPr>
-          <p:cNvPr id="22" name="Shape 20"/>
-          <p:cNvSpPr/>
-          <p:nvPr/>
-        </p:nvSpPr>
-        <p:spPr>
-          <a:xfrm>
-            <a:off x="7772400" y="3749040"/>
-            <a:ext cx="3429000" cy="1417320"/>
-          </a:xfrm>
-          <a:prstGeom prst="roundRect">
-            <a:avLst>
-              <a:gd name="adj" fmla="val 7742"/>
-            </a:avLst>
-          </a:prstGeom>
-          <a:solidFill>
-            <a:srgbClr val="132A46"/>
-          </a:solidFill>
-          <a:ln/>
-        </p:spPr>
-      </p:sp>
-      <p:sp>
-        <p:nvSpPr>
-          <p:cNvPr id="23" name="Text 21"/>
-          <p:cNvSpPr/>
-          <p:nvPr/>
-        </p:nvSpPr>
-        <p:spPr>
-          <a:xfrm>
-            <a:off x="7973568" y="3877056"/>
-            <a:ext cx="3026664" cy="365760"/>
-          </a:xfrm>
-          <a:prstGeom prst="rect">
-            <a:avLst/>
-          </a:prstGeom>
-          <a:noFill/>
-          <a:ln/>
-        </p:spPr>
-        <p:txBody>
-          <a:bodyPr wrap="square" rtlCol="0" anchor="ctr"/>
-          <a:lstStyle/>
-          <a:p>
-            <a:pPr marL="0" indent="0">
-              <a:buNone/>
-            </a:pPr>
-            <a:r>
-              <a:rPr lang="en-US" sz="1450" b="1" dirty="0">
-                <a:solidFill>
-                  <a:srgbClr val="34D399"/>
-                </a:solidFill>
-                <a:latin typeface="Cambria" pitchFamily="34" charset="0"/>
-                <a:ea typeface="Cambria" pitchFamily="34" charset="-122"/>
-                <a:cs typeface="Cambria" pitchFamily="34" charset="-120"/>
-              </a:rPr>
-              <a:t>Compliance Auditor</a:t>
-            </a:r>
-            <a:endParaRPr lang="en-US" sz="1450" dirty="0"/>
-          </a:p>
-        </p:txBody>
-      </p:sp>
-      <p:sp>
-        <p:nvSpPr>
-          <p:cNvPr id="24" name="Text 22"/>
-          <p:cNvSpPr/>
-          <p:nvPr/>
-        </p:nvSpPr>
-        <p:spPr>
-          <a:xfrm>
-            <a:off x="7973568" y="4261104"/>
-            <a:ext cx="3026664" cy="777240"/>
-          </a:xfrm>
-          <a:prstGeom prst="rect">
-            <a:avLst/>
-          </a:prstGeom>
-          <a:noFill/>
-          <a:ln/>
-        </p:spPr>
-        <p:txBody>
-          <a:bodyPr wrap="square" rtlCol="0" anchor="t"/>
-          <a:lstStyle/>
-          <a:p>
-            <a:pPr marL="0" indent="0">
-              <a:buNone/>
-            </a:pPr>
-            <a:r>
-              <a:rPr lang="en-US" sz="1050" dirty="0">
-                <a:solidFill>
-                  <a:srgbClr val="DCE9E5"/>
-                </a:solidFill>
-                <a:latin typeface="Calibri" pitchFamily="34" charset="0"/>
-                <a:ea typeface="Calibri" pitchFamily="34" charset="-122"/>
-                <a:cs typeface="Calibri" pitchFamily="34" charset="-120"/>
-              </a:rPr>
-              <a:t>資安與個資稽核，產出正式稽核報告</a:t>
-            </a:r>
-            <a:endParaRPr lang="en-US" sz="1050" dirty="0"/>
-          </a:p>
-        </p:txBody>
-      </p:sp>
-      <p:sp>
-        <p:nvSpPr>
-          <p:cNvPr id="25" name="Text 23"/>
-          <p:cNvSpPr/>
-          <p:nvPr/>
-        </p:nvSpPr>
-        <p:spPr>
-          <a:xfrm>
-            <a:off x="548640" y="6080760"/>
-            <a:ext cx="10881360" cy="320040"/>
-          </a:xfrm>
-          <a:prstGeom prst="rect">
-            <a:avLst/>
-          </a:prstGeom>
-          <a:noFill/>
-          <a:ln/>
-        </p:spPr>
-        <p:txBody>
-          <a:bodyPr wrap="square" rtlCol="0" anchor="ctr"/>
-          <a:lstStyle/>
-          <a:p>
-            <a:pPr marL="0" indent="0" algn="ctr">
-              <a:buNone/>
-            </a:pPr>
-            <a:r>
-              <a:rPr lang="en-US" sz="1050" dirty="0">
-                <a:solidFill>
-                  <a:srgbClr val="9FB3C8"/>
-                </a:solidFill>
-                <a:latin typeface="Calibri" pitchFamily="34" charset="0"/>
-                <a:ea typeface="Calibri" pitchFamily="34" charset="-122"/>
-                <a:cs typeface="Calibri" pitchFamily="34" charset="-120"/>
-              </a:rPr>
-              <a:t>團隊主理：linjinhsien　｜　GitHub：github.com/linjinhsien/Profit-Prophet　｜　協作工具：AWS Kiro（含 6 支 steering / agent 規範文件）</a:t>
-            </a:r>
-            <a:endParaRPr lang="en-US" sz="1050" dirty="0"/>
-          </a:p>
-        </p:txBody>
-      </p:sp>
-      <p:sp>
-        <p:nvSpPr>
-          <p:cNvPr id="26" name="Text 24"/>
-          <p:cNvSpPr/>
-          <p:nvPr/>
-        </p:nvSpPr>
-        <p:spPr>
-          <a:xfrm>
-            <a:off x="457200" y="6473952"/>
-            <a:ext cx="3657600" cy="274320"/>
-          </a:xfrm>
-          <a:prstGeom prst="rect">
-            <a:avLst/>
-          </a:prstGeom>
-          <a:noFill/>
-          <a:ln/>
-        </p:spPr>
-        <p:txBody>
-          <a:bodyPr wrap="square" rtlCol="0" anchor="ctr"/>
-          <a:lstStyle/>
-          <a:p>
-            <a:pPr marL="0" indent="0">
-              <a:buNone/>
-            </a:pPr>
-            <a:r>
-              <a:rPr lang="en-US" sz="900" b="1" kern="0" spc="200" dirty="0">
-                <a:solidFill>
-                  <a:srgbClr val="9FB3C8"/>
-                </a:solidFill>
-                <a:latin typeface="Calibri" pitchFamily="34" charset="0"/>
-                <a:ea typeface="Calibri" pitchFamily="34" charset="-122"/>
-                <a:cs typeface="Calibri" pitchFamily="34" charset="-120"/>
-              </a:rPr>
-              <a:t>PROFIT-PROPHET</a:t>
-            </a:r>
-            <a:endParaRPr lang="en-US" sz="900" dirty="0"/>
-          </a:p>
-        </p:txBody>
-      </p:sp>
-      <p:sp>
-        <p:nvSpPr>
-          <p:cNvPr id="27" name="Text 25"/>
-          <p:cNvSpPr/>
-          <p:nvPr/>
-        </p:nvSpPr>
-        <p:spPr>
-          <a:xfrm>
-            <a:off x="4114800" y="6473952"/>
-            <a:ext cx="3962095" cy="274320"/>
-          </a:xfrm>
-          <a:prstGeom prst="rect">
-            <a:avLst/>
-          </a:prstGeom>
-          <a:noFill/>
-          <a:ln/>
-        </p:spPr>
-        <p:txBody>
-          <a:bodyPr wrap="square" rtlCol="0" anchor="ctr"/>
-          <a:lstStyle/>
-          <a:p>
-            <a:pPr marL="0" indent="0" algn="ctr">
-              <a:buNone/>
-            </a:pPr>
-            <a:r>
-              <a:rPr lang="en-US" sz="900" dirty="0">
-                <a:solidFill>
-                  <a:srgbClr val="9FB3C8"/>
-                </a:solidFill>
-                <a:latin typeface="Calibri" pitchFamily="34" charset="0"/>
-                <a:ea typeface="Calibri" pitchFamily="34" charset="-122"/>
-                <a:cs typeface="Calibri" pitchFamily="34" charset="-120"/>
-              </a:rPr>
-              <a:t>團隊介紹</a:t>
-            </a:r>
-            <a:endParaRPr lang="en-US" sz="900" dirty="0"/>
-          </a:p>
-        </p:txBody>
-      </p:sp>
-      <p:sp>
-        <p:nvSpPr>
-          <p:cNvPr id="28" name="Text 26"/>
-          <p:cNvSpPr/>
-          <p:nvPr/>
-        </p:nvSpPr>
-        <p:spPr>
-          <a:xfrm>
-            <a:off x="10911535" y="6473952"/>
-            <a:ext cx="822960" cy="274320"/>
-          </a:xfrm>
-          <a:prstGeom prst="rect">
-            <a:avLst/>
-          </a:prstGeom>
-          <a:noFill/>
-          <a:ln/>
-        </p:spPr>
-        <p:txBody>
-          <a:bodyPr wrap="square" rtlCol="0" anchor="ctr"/>
-          <a:lstStyle/>
-          <a:p>
-            <a:pPr marL="0" indent="0" algn="r">
-              <a:buNone/>
-            </a:pPr>
-            <a:r>
-              <a:rPr lang="en-US" sz="900" dirty="0">
-                <a:solidFill>
-                  <a:srgbClr val="9FB3C8"/>
-                </a:solidFill>
-                <a:latin typeface="Calibri" pitchFamily="34" charset="0"/>
-                <a:ea typeface="Calibri" pitchFamily="34" charset="-122"/>
-                <a:cs typeface="Calibri" pitchFamily="34" charset="-120"/>
-              </a:rPr>
-              <a:t>09 / 10</a:t>
-            </a:r>
-            <a:endParaRPr lang="en-US" sz="900" dirty="0"/>
-          </a:p>
-        </p:txBody>
-      </p:sp>
+      <p:pic>
+        <p:nvPicPr>
+          <p:cNvPr id="3" name="圖片 2">
+            <a:extLst>
+              <a:ext uri="{FF2B5EF4-FFF2-40B4-BE49-F238E27FC236}">
+                <a16:creationId xmlns:a16="http://schemas.microsoft.com/office/drawing/2014/main" id="{F393B55A-01BB-3123-AA8B-E3337C6D45B1}"/>
+              </a:ext>
+            </a:extLst>
+          </p:cNvPr>
+          <p:cNvPicPr>
+            <a:picLocks noChangeAspect="1"/>
+          </p:cNvPicPr>
+          <p:nvPr/>
+        </p:nvPicPr>
+        <p:blipFill>
+          <a:blip r:embed="rId2"/>
+          <a:stretch>
+            <a:fillRect/>
+          </a:stretch>
+        </p:blipFill>
+        <p:spPr>
+          <a:xfrm>
+            <a:off x="0" y="930639"/>
+            <a:ext cx="12192000" cy="4996721"/>
+          </a:xfrm>
+          <a:prstGeom prst="rect">
+            <a:avLst/>
+          </a:prstGeom>
+        </p:spPr>
+      </p:pic>
     </p:spTree>
+    <p:extLst>
+      <p:ext uri="{BB962C8B-B14F-4D97-AF65-F5344CB8AC3E}">
+        <p14:creationId xmlns:p14="http://schemas.microsoft.com/office/powerpoint/2010/main" val="1447070604"/>
+      </p:ext>
+    </p:extLst>
   </p:cSld>
   <p:clrMapOvr>
     <a:masterClrMapping/>
@@ -8309,919 +8131,904 @@
       </p:grpSpPr>
       <p:sp>
         <p:nvSpPr>
-          <p:cNvPr id="2" name="Rectangle 1"/>
+          <p:cNvPr id="3" name="Shape 1"/>
           <p:cNvSpPr/>
           <p:nvPr/>
         </p:nvSpPr>
         <p:spPr>
           <a:xfrm>
-            <a:off x="0" y="0"/>
-            <a:ext cx="12191695" cy="6858000"/>
-          </a:xfrm>
-          <a:prstGeom prst="rect">
-            <a:avLst/>
+            <a:off x="548640" y="457200"/>
+            <a:ext cx="1737360" cy="310896"/>
+          </a:xfrm>
+          <a:prstGeom prst="roundRect">
+            <a:avLst>
+              <a:gd name="adj" fmla="val 50000"/>
+            </a:avLst>
           </a:prstGeom>
           <a:solidFill>
-            <a:srgbClr val="F8F9FA"/>
+            <a:srgbClr val="0F7C6C"/>
           </a:solidFill>
-          <a:ln>
-            <a:noFill/>
-          </a:ln>
-          <a:effectLst/>
-        </p:spPr>
-        <p:style>
-          <a:lnRef idx="1">
-            <a:schemeClr val="accent1"/>
-          </a:lnRef>
-          <a:fillRef idx="3">
-            <a:schemeClr val="accent1"/>
-          </a:fillRef>
-          <a:effectRef idx="2">
-            <a:schemeClr val="accent1"/>
-          </a:effectRef>
-          <a:fontRef idx="minor">
-            <a:schemeClr val="lt1"/>
-          </a:fontRef>
-        </p:style>
-        <p:txBody>
-          <a:bodyPr rtlCol="0" anchor="ctr"/>
-          <a:lstStyle/>
-          <a:p>
-            <a:pPr algn="ctr"/>
-            <a:endParaRPr/>
-          </a:p>
-        </p:txBody>
-      </p:sp>
-      <p:sp>
-        <p:nvSpPr>
-          <p:cNvPr id="3" name="TextBox 2"/>
-          <p:cNvSpPr txBox="1"/>
-          <p:nvPr/>
-        </p:nvSpPr>
-        <p:spPr>
-          <a:xfrm>
-            <a:off x="1219169" y="548640"/>
-            <a:ext cx="9753356" cy="548640"/>
+          <a:ln/>
+        </p:spPr>
+      </p:sp>
+      <p:sp>
+        <p:nvSpPr>
+          <p:cNvPr id="4" name="Text 2"/>
+          <p:cNvSpPr/>
+          <p:nvPr/>
+        </p:nvSpPr>
+        <p:spPr>
+          <a:xfrm>
+            <a:off x="548640" y="457200"/>
+            <a:ext cx="1737360" cy="310896"/>
           </a:xfrm>
           <a:prstGeom prst="rect">
             <a:avLst/>
           </a:prstGeom>
           <a:noFill/>
-        </p:spPr>
-        <p:txBody>
-          <a:bodyPr wrap="square" lIns="0" tIns="0" rIns="0" bIns="0" anchor="t">
-            <a:spAutoFit/>
-          </a:bodyPr>
-          <a:lstStyle/>
-          <a:p>
-            <a:pPr algn="ctr"/>
-            <a:r>
-              <a:rPr sz="3240" b="1" i="0">
-                <a:solidFill>
-                  <a:srgbClr val="232F3E">
-                    <a:alpha val="100000"/>
-                  </a:srgbClr>
-                </a:solidFill>
-                <a:latin typeface="Arial"/>
-                <a:ea typeface="Arial"/>
-                <a:cs typeface="Arial"/>
-              </a:rPr>
-              <a:t>完整驗證結果</a:t>
-            </a:r>
-          </a:p>
-        </p:txBody>
-      </p:sp>
-      <p:sp>
-        <p:nvSpPr>
-          <p:cNvPr id="4" name="TextBox 3"/>
-          <p:cNvSpPr txBox="1"/>
-          <p:nvPr/>
-        </p:nvSpPr>
-        <p:spPr>
-          <a:xfrm>
-            <a:off x="1219169" y="1234440"/>
-            <a:ext cx="9753356" cy="342900"/>
+          <a:ln/>
+        </p:spPr>
+        <p:txBody>
+          <a:bodyPr wrap="square" rtlCol="0" anchor="ctr"/>
+          <a:lstStyle/>
+          <a:p>
+            <a:pPr marL="0" indent="0" algn="ctr">
+              <a:buNone/>
+            </a:pPr>
+            <a:r>
+              <a:rPr lang="en-US" sz="1200" b="1" kern="0" spc="100" dirty="0">
+                <a:solidFill>
+                  <a:srgbClr val="FFFFFF"/>
+                </a:solidFill>
+                <a:latin typeface="Calibri" pitchFamily="34" charset="0"/>
+                <a:ea typeface="Calibri" pitchFamily="34" charset="-122"/>
+                <a:cs typeface="Calibri" pitchFamily="34" charset="-120"/>
+              </a:rPr>
+              <a:t>TEAM</a:t>
+            </a:r>
+            <a:endParaRPr lang="en-US" sz="1200" dirty="0"/>
+          </a:p>
+        </p:txBody>
+      </p:sp>
+      <p:sp>
+        <p:nvSpPr>
+          <p:cNvPr id="5" name="Text 3"/>
+          <p:cNvSpPr/>
+          <p:nvPr/>
+        </p:nvSpPr>
+        <p:spPr>
+          <a:xfrm>
+            <a:off x="548640" y="841248"/>
+            <a:ext cx="11094415" cy="548640"/>
           </a:xfrm>
           <a:prstGeom prst="rect">
             <a:avLst/>
           </a:prstGeom>
           <a:noFill/>
-        </p:spPr>
-        <p:txBody>
-          <a:bodyPr wrap="square" lIns="0" tIns="0" rIns="0" bIns="0" anchor="ctr">
-            <a:spAutoFit/>
-          </a:bodyPr>
-          <a:lstStyle/>
-          <a:p>
-            <a:pPr algn="ctr"/>
-            <a:r>
-              <a:rPr sz="2160" b="1" i="0">
-                <a:solidFill>
-                  <a:srgbClr val="16A34A">
-                    <a:alpha val="100000"/>
-                  </a:srgbClr>
-                </a:solidFill>
-                <a:latin typeface="Arial"/>
-                <a:ea typeface="Arial"/>
-                <a:cs typeface="Arial"/>
-              </a:rPr>
-              <a:t>✅ 所有核心服務已驗證並運作中</a:t>
-            </a:r>
-          </a:p>
-        </p:txBody>
-      </p:sp>
-      <p:sp>
-        <p:nvSpPr>
-          <p:cNvPr id="5" name="TextBox 4"/>
-          <p:cNvSpPr txBox="1"/>
-          <p:nvPr/>
-        </p:nvSpPr>
-        <p:spPr>
-          <a:xfrm>
-            <a:off x="975335" y="1920240"/>
-            <a:ext cx="3291757" cy="342900"/>
+          <a:ln/>
+        </p:spPr>
+        <p:txBody>
+          <a:bodyPr wrap="square" rtlCol="0" anchor="ctr"/>
+          <a:lstStyle/>
+          <a:p>
+            <a:pPr marL="0" indent="0">
+              <a:buNone/>
+            </a:pPr>
+            <a:r>
+              <a:rPr lang="en-US" sz="2700" b="1" dirty="0">
+                <a:solidFill>
+                  <a:srgbClr val="FFFFFF"/>
+                </a:solidFill>
+                <a:latin typeface="Cambria" pitchFamily="34" charset="0"/>
+                <a:ea typeface="Cambria" pitchFamily="34" charset="-122"/>
+                <a:cs typeface="Cambria" pitchFamily="34" charset="-120"/>
+              </a:rPr>
+              <a:t>為什麼是我們：一支小團隊，扛起六個角色的紀律</a:t>
+            </a:r>
+            <a:endParaRPr lang="en-US" sz="2700" dirty="0"/>
+          </a:p>
+        </p:txBody>
+      </p:sp>
+      <p:sp>
+        <p:nvSpPr>
+          <p:cNvPr id="6" name="Text 4"/>
+          <p:cNvSpPr/>
+          <p:nvPr/>
+        </p:nvSpPr>
+        <p:spPr>
+          <a:xfrm>
+            <a:off x="548640" y="1426464"/>
+            <a:ext cx="11094415" cy="365760"/>
           </a:xfrm>
           <a:prstGeom prst="rect">
             <a:avLst/>
           </a:prstGeom>
           <a:noFill/>
-        </p:spPr>
-        <p:txBody>
-          <a:bodyPr wrap="square" lIns="0" tIns="0" rIns="0" bIns="0" anchor="ctr">
-            <a:spAutoFit/>
-          </a:bodyPr>
-          <a:lstStyle/>
-          <a:p>
-            <a:pPr algn="l"/>
-            <a:r>
-              <a:rPr sz="1728" b="1" i="0">
-                <a:solidFill>
-                  <a:srgbClr val="FF9900">
-                    <a:alpha val="100000"/>
-                  </a:srgbClr>
-                </a:solidFill>
-                <a:latin typeface="Arial"/>
-                <a:ea typeface="Arial"/>
-                <a:cs typeface="Arial"/>
-              </a:rPr>
-              <a:t>CloudFront CDN</a:t>
-            </a:r>
-          </a:p>
-        </p:txBody>
-      </p:sp>
-      <p:sp>
-        <p:nvSpPr>
-          <p:cNvPr id="6" name="TextBox 5"/>
-          <p:cNvSpPr txBox="1"/>
-          <p:nvPr/>
-        </p:nvSpPr>
-        <p:spPr>
-          <a:xfrm>
-            <a:off x="975335" y="2331720"/>
-            <a:ext cx="3291757" cy="960120"/>
+          <a:ln/>
+        </p:spPr>
+        <p:txBody>
+          <a:bodyPr wrap="square" rtlCol="0" anchor="ctr"/>
+          <a:lstStyle/>
+          <a:p>
+            <a:pPr marL="0" indent="0">
+              <a:buNone/>
+            </a:pPr>
+            <a:r>
+              <a:rPr lang="en-US" sz="2400" dirty="0">
+                <a:solidFill>
+                  <a:schemeClr val="accent2">
+                    <a:lumMod val="75000"/>
+                  </a:schemeClr>
+                </a:solidFill>
+                <a:latin typeface="Calibri" pitchFamily="34" charset="0"/>
+                <a:ea typeface="Calibri" pitchFamily="34" charset="-122"/>
+                <a:cs typeface="Calibri" pitchFamily="34" charset="-120"/>
+              </a:rPr>
+              <a:t>Profit-Prophet 團隊以 Kiro 驅動的多角色協作管線開發，讓小團隊具備大型產品組織的執行力與治理紀律</a:t>
+            </a:r>
+            <a:endParaRPr lang="en-US" sz="2400" dirty="0">
+              <a:solidFill>
+                <a:schemeClr val="accent2">
+                  <a:lumMod val="75000"/>
+                </a:schemeClr>
+              </a:solidFill>
+            </a:endParaRPr>
+          </a:p>
+        </p:txBody>
+      </p:sp>
+      <p:sp>
+        <p:nvSpPr>
+          <p:cNvPr id="7" name="Shape 5"/>
+          <p:cNvSpPr/>
+          <p:nvPr/>
+        </p:nvSpPr>
+        <p:spPr>
+          <a:xfrm>
+            <a:off x="548640" y="2148840"/>
+            <a:ext cx="3429000" cy="1417320"/>
+          </a:xfrm>
+          <a:prstGeom prst="roundRect">
+            <a:avLst>
+              <a:gd name="adj" fmla="val 7742"/>
+            </a:avLst>
+          </a:prstGeom>
+          <a:solidFill>
+            <a:srgbClr val="132A46"/>
+          </a:solidFill>
+          <a:ln/>
+        </p:spPr>
+      </p:sp>
+      <p:sp>
+        <p:nvSpPr>
+          <p:cNvPr id="8" name="Text 6"/>
+          <p:cNvSpPr/>
+          <p:nvPr/>
+        </p:nvSpPr>
+        <p:spPr>
+          <a:xfrm>
+            <a:off x="749808" y="2276856"/>
+            <a:ext cx="3026664" cy="365760"/>
           </a:xfrm>
           <a:prstGeom prst="rect">
             <a:avLst/>
           </a:prstGeom>
           <a:noFill/>
-        </p:spPr>
-        <p:txBody>
-          <a:bodyPr wrap="square" lIns="0" tIns="0" rIns="0" bIns="0" anchor="t">
-            <a:spAutoFit/>
-          </a:bodyPr>
-          <a:lstStyle/>
-          <a:p>
-            <a:pPr algn="l"/>
-            <a:r>
-              <a:rPr sz="1296" b="0" i="0">
-                <a:solidFill>
-                  <a:srgbClr val="232F3E">
-                    <a:alpha val="100000"/>
-                  </a:srgbClr>
-                </a:solidFill>
-                <a:latin typeface="Arial"/>
-                <a:ea typeface="Arial"/>
-                <a:cs typeface="Arial"/>
-              </a:rPr>
-              <a:t>• ID: E1NHT4ZC7ZFGUP</a:t>
-            </a:r>
-          </a:p>
-          <a:p>
-            <a:pPr algn="l"/>
-            <a:r>
-              <a:rPr sz="1296" b="0" i="0">
-                <a:solidFill>
-                  <a:srgbClr val="232F3E">
-                    <a:alpha val="100000"/>
-                  </a:srgbClr>
-                </a:solidFill>
-                <a:latin typeface="Arial"/>
-                <a:ea typeface="Arial"/>
-                <a:cs typeface="Arial"/>
-              </a:rPr>
-              <a:t>• Status: Deployed ✅</a:t>
-            </a:r>
-          </a:p>
-          <a:p>
-            <a:pPr algn="l"/>
-            <a:r>
-              <a:rPr sz="1296" b="0" i="0">
-                <a:solidFill>
-                  <a:srgbClr val="232F3E">
-                    <a:alpha val="100000"/>
-                  </a:srgbClr>
-                </a:solidFill>
-                <a:latin typeface="Arial"/>
-                <a:ea typeface="Arial"/>
-                <a:cs typeface="Arial"/>
-              </a:rPr>
-              <a:t>• d1qintm5rk17ye.cloudfront.net</a:t>
-            </a:r>
-          </a:p>
-          <a:p>
-            <a:pPr algn="l"/>
-            <a:r>
-              <a:rPr sz="1296" b="0" i="0">
-                <a:solidFill>
-                  <a:srgbClr val="232F3E">
-                    <a:alpha val="100000"/>
-                  </a:srgbClr>
-                </a:solidFill>
-                <a:latin typeface="Arial"/>
-                <a:ea typeface="Arial"/>
-                <a:cs typeface="Arial"/>
-              </a:rPr>
-              <a:t>• HTTP/2 + IPv6</a:t>
-            </a:r>
-          </a:p>
-        </p:txBody>
-      </p:sp>
-      <p:sp>
-        <p:nvSpPr>
-          <p:cNvPr id="7" name="TextBox 6"/>
-          <p:cNvSpPr txBox="1"/>
-          <p:nvPr/>
-        </p:nvSpPr>
-        <p:spPr>
-          <a:xfrm>
-            <a:off x="4510927" y="1920240"/>
-            <a:ext cx="3291757" cy="342900"/>
+          <a:ln/>
+        </p:spPr>
+        <p:txBody>
+          <a:bodyPr wrap="square" rtlCol="0" anchor="ctr"/>
+          <a:lstStyle/>
+          <a:p>
+            <a:pPr marL="0" indent="0">
+              <a:buNone/>
+            </a:pPr>
+            <a:r>
+              <a:rPr lang="en-US" sz="1450" b="1" dirty="0">
+                <a:solidFill>
+                  <a:srgbClr val="34D399"/>
+                </a:solidFill>
+                <a:latin typeface="Cambria" pitchFamily="34" charset="0"/>
+                <a:ea typeface="Cambria" pitchFamily="34" charset="-122"/>
+                <a:cs typeface="Cambria" pitchFamily="34" charset="-120"/>
+              </a:rPr>
+              <a:t>PM</a:t>
+            </a:r>
+            <a:endParaRPr lang="en-US" sz="1450" dirty="0"/>
+          </a:p>
+        </p:txBody>
+      </p:sp>
+      <p:sp>
+        <p:nvSpPr>
+          <p:cNvPr id="9" name="Text 7"/>
+          <p:cNvSpPr/>
+          <p:nvPr/>
+        </p:nvSpPr>
+        <p:spPr>
+          <a:xfrm>
+            <a:off x="749808" y="2660904"/>
+            <a:ext cx="3026664" cy="777240"/>
           </a:xfrm>
           <a:prstGeom prst="rect">
             <a:avLst/>
           </a:prstGeom>
           <a:noFill/>
-        </p:spPr>
-        <p:txBody>
-          <a:bodyPr wrap="square" lIns="0" tIns="0" rIns="0" bIns="0" anchor="ctr">
-            <a:spAutoFit/>
-          </a:bodyPr>
-          <a:lstStyle/>
-          <a:p>
-            <a:pPr algn="l"/>
-            <a:r>
-              <a:rPr sz="1728" b="1" i="0">
-                <a:solidFill>
-                  <a:srgbClr val="FF9900">
-                    <a:alpha val="100000"/>
-                  </a:srgbClr>
-                </a:solidFill>
-                <a:latin typeface="Arial"/>
-                <a:ea typeface="Arial"/>
-                <a:cs typeface="Arial"/>
-              </a:rPr>
-              <a:t>EC2 後端 (LiveCaption)</a:t>
-            </a:r>
-          </a:p>
-        </p:txBody>
-      </p:sp>
-      <p:sp>
-        <p:nvSpPr>
-          <p:cNvPr id="8" name="TextBox 7"/>
-          <p:cNvSpPr txBox="1"/>
-          <p:nvPr/>
-        </p:nvSpPr>
-        <p:spPr>
-          <a:xfrm>
-            <a:off x="4510927" y="2331720"/>
-            <a:ext cx="3291757" cy="960120"/>
+          <a:ln/>
+        </p:spPr>
+        <p:txBody>
+          <a:bodyPr wrap="square" rtlCol="0" anchor="t"/>
+          <a:lstStyle/>
+          <a:p>
+            <a:pPr marL="0" indent="0">
+              <a:buNone/>
+            </a:pPr>
+            <a:r>
+              <a:rPr lang="en-US" sz="1050" dirty="0">
+                <a:solidFill>
+                  <a:srgbClr val="DCE9E5"/>
+                </a:solidFill>
+                <a:latin typeface="Calibri" pitchFamily="34" charset="0"/>
+                <a:ea typeface="Calibri" pitchFamily="34" charset="-122"/>
+                <a:cs typeface="Calibri" pitchFamily="34" charset="-120"/>
+              </a:rPr>
+              <a:t>需求定義、使用者故事與驗收標準</a:t>
+            </a:r>
+            <a:endParaRPr lang="en-US" sz="1050" dirty="0"/>
+          </a:p>
+        </p:txBody>
+      </p:sp>
+      <p:sp>
+        <p:nvSpPr>
+          <p:cNvPr id="10" name="Shape 8"/>
+          <p:cNvSpPr/>
+          <p:nvPr/>
+        </p:nvSpPr>
+        <p:spPr>
+          <a:xfrm>
+            <a:off x="4274820" y="2203704"/>
+            <a:ext cx="3429000" cy="1417320"/>
+          </a:xfrm>
+          <a:prstGeom prst="roundRect">
+            <a:avLst>
+              <a:gd name="adj" fmla="val 7742"/>
+            </a:avLst>
+          </a:prstGeom>
+          <a:solidFill>
+            <a:srgbClr val="132A46"/>
+          </a:solidFill>
+          <a:ln/>
+        </p:spPr>
+      </p:sp>
+      <p:sp>
+        <p:nvSpPr>
+          <p:cNvPr id="11" name="Text 9"/>
+          <p:cNvSpPr/>
+          <p:nvPr/>
+        </p:nvSpPr>
+        <p:spPr>
+          <a:xfrm>
+            <a:off x="4361688" y="2276856"/>
+            <a:ext cx="3026664" cy="365760"/>
           </a:xfrm>
           <a:prstGeom prst="rect">
             <a:avLst/>
           </a:prstGeom>
           <a:noFill/>
-        </p:spPr>
-        <p:txBody>
-          <a:bodyPr wrap="square" lIns="0" tIns="0" rIns="0" bIns="0" anchor="t">
-            <a:spAutoFit/>
-          </a:bodyPr>
-          <a:lstStyle/>
-          <a:p>
-            <a:pPr algn="l"/>
-            <a:r>
-              <a:rPr sz="1296" b="0" i="0">
-                <a:solidFill>
-                  <a:srgbClr val="232F3E">
-                    <a:alpha val="100000"/>
-                  </a:srgbClr>
-                </a:solidFill>
-                <a:latin typeface="Arial"/>
-                <a:ea typeface="Arial"/>
-                <a:cs typeface="Arial"/>
-              </a:rPr>
-              <a:t>• Instance: t3.micro ✅</a:t>
-            </a:r>
-          </a:p>
-          <a:p>
-            <a:pPr algn="l"/>
-            <a:r>
-              <a:rPr sz="1296" b="0" i="0">
-                <a:solidFill>
-                  <a:srgbClr val="232F3E">
-                    <a:alpha val="100000"/>
-                  </a:srgbClr>
-                </a:solidFill>
-                <a:latin typeface="Arial"/>
-                <a:ea typeface="Arial"/>
-                <a:cs typeface="Arial"/>
-              </a:rPr>
-              <a:t>• WebSocket 服務 (Python)</a:t>
-            </a:r>
-          </a:p>
-          <a:p>
-            <a:pPr algn="l"/>
-            <a:r>
-              <a:rPr sz="1296" b="0" i="0">
-                <a:solidFill>
-                  <a:srgbClr val="232F3E">
-                    <a:alpha val="100000"/>
-                  </a:srgbClr>
-                </a:solidFill>
-                <a:latin typeface="Arial"/>
-                <a:ea typeface="Arial"/>
-                <a:cs typeface="Arial"/>
-              </a:rPr>
-              <a:t>• Transcribe Streaming 封裝</a:t>
-            </a:r>
-          </a:p>
-          <a:p>
-            <a:pPr algn="l"/>
-            <a:r>
-              <a:rPr sz="1296" b="0" i="0">
-                <a:solidFill>
-                  <a:srgbClr val="232F3E">
-                    <a:alpha val="100000"/>
-                  </a:srgbClr>
-                </a:solidFill>
-                <a:latin typeface="Arial"/>
-                <a:ea typeface="Arial"/>
-                <a:cs typeface="Arial"/>
-              </a:rPr>
-              <a:t>• 說話者辨識 + 多語言</a:t>
-            </a:r>
-          </a:p>
-        </p:txBody>
-      </p:sp>
-      <p:sp>
-        <p:nvSpPr>
-          <p:cNvPr id="9" name="TextBox 8"/>
-          <p:cNvSpPr txBox="1"/>
-          <p:nvPr/>
-        </p:nvSpPr>
-        <p:spPr>
-          <a:xfrm>
-            <a:off x="8046518" y="1920240"/>
-            <a:ext cx="3291757" cy="342900"/>
+          <a:ln/>
+        </p:spPr>
+        <p:txBody>
+          <a:bodyPr wrap="square" rtlCol="0" anchor="ctr"/>
+          <a:lstStyle/>
+          <a:p>
+            <a:pPr marL="0" indent="0">
+              <a:buNone/>
+            </a:pPr>
+            <a:r>
+              <a:rPr lang="en-US" sz="1450" b="1" dirty="0">
+                <a:solidFill>
+                  <a:srgbClr val="34D399"/>
+                </a:solidFill>
+                <a:latin typeface="Cambria" pitchFamily="34" charset="0"/>
+                <a:ea typeface="Cambria" pitchFamily="34" charset="-122"/>
+                <a:cs typeface="Cambria" pitchFamily="34" charset="-120"/>
+              </a:rPr>
+              <a:t>Architect</a:t>
+            </a:r>
+            <a:endParaRPr lang="en-US" sz="1450" dirty="0"/>
+          </a:p>
+        </p:txBody>
+      </p:sp>
+      <p:sp>
+        <p:nvSpPr>
+          <p:cNvPr id="12" name="Text 10"/>
+          <p:cNvSpPr/>
+          <p:nvPr/>
+        </p:nvSpPr>
+        <p:spPr>
+          <a:xfrm>
+            <a:off x="4361688" y="2660904"/>
+            <a:ext cx="3026664" cy="777240"/>
           </a:xfrm>
           <a:prstGeom prst="rect">
             <a:avLst/>
           </a:prstGeom>
           <a:noFill/>
-        </p:spPr>
-        <p:txBody>
-          <a:bodyPr wrap="square" lIns="0" tIns="0" rIns="0" bIns="0" anchor="ctr">
-            <a:spAutoFit/>
-          </a:bodyPr>
-          <a:lstStyle/>
-          <a:p>
-            <a:pPr algn="l"/>
-            <a:r>
-              <a:rPr sz="1728" b="1" i="0">
-                <a:solidFill>
-                  <a:srgbClr val="FF9900">
-                    <a:alpha val="100000"/>
-                  </a:srgbClr>
-                </a:solidFill>
-                <a:latin typeface="Arial"/>
-                <a:ea typeface="Arial"/>
-                <a:cs typeface="Arial"/>
-              </a:rPr>
-              <a:t>Bedrock Knowledge Base</a:t>
-            </a:r>
-          </a:p>
-        </p:txBody>
-      </p:sp>
-      <p:sp>
-        <p:nvSpPr>
-          <p:cNvPr id="10" name="TextBox 9"/>
-          <p:cNvSpPr txBox="1"/>
-          <p:nvPr/>
-        </p:nvSpPr>
-        <p:spPr>
-          <a:xfrm>
-            <a:off x="8046518" y="2331720"/>
-            <a:ext cx="3291757" cy="960120"/>
+          <a:ln/>
+        </p:spPr>
+        <p:txBody>
+          <a:bodyPr wrap="square" rtlCol="0" anchor="t"/>
+          <a:lstStyle/>
+          <a:p>
+            <a:pPr marL="0" indent="0">
+              <a:buNone/>
+            </a:pPr>
+            <a:r>
+              <a:rPr lang="en-US" sz="1050" dirty="0">
+                <a:solidFill>
+                  <a:srgbClr val="DCE9E5"/>
+                </a:solidFill>
+                <a:latin typeface="Calibri" pitchFamily="34" charset="0"/>
+                <a:ea typeface="Calibri" pitchFamily="34" charset="-122"/>
+                <a:cs typeface="Calibri" pitchFamily="34" charset="-120"/>
+              </a:rPr>
+              <a:t>AWS 雲端架構設計與技術取捨（v1→v2 降成本改版）</a:t>
+            </a:r>
+            <a:endParaRPr lang="en-US" sz="1050" dirty="0"/>
+          </a:p>
+        </p:txBody>
+      </p:sp>
+      <p:sp>
+        <p:nvSpPr>
+          <p:cNvPr id="13" name="Shape 11"/>
+          <p:cNvSpPr/>
+          <p:nvPr/>
+        </p:nvSpPr>
+        <p:spPr>
+          <a:xfrm>
+            <a:off x="7772400" y="2148840"/>
+            <a:ext cx="3429000" cy="1417320"/>
+          </a:xfrm>
+          <a:prstGeom prst="roundRect">
+            <a:avLst>
+              <a:gd name="adj" fmla="val 7742"/>
+            </a:avLst>
+          </a:prstGeom>
+          <a:solidFill>
+            <a:srgbClr val="132A46"/>
+          </a:solidFill>
+          <a:ln/>
+        </p:spPr>
+      </p:sp>
+      <p:sp>
+        <p:nvSpPr>
+          <p:cNvPr id="14" name="Text 12"/>
+          <p:cNvSpPr/>
+          <p:nvPr/>
+        </p:nvSpPr>
+        <p:spPr>
+          <a:xfrm>
+            <a:off x="7973568" y="2276856"/>
+            <a:ext cx="3026664" cy="365760"/>
           </a:xfrm>
           <a:prstGeom prst="rect">
             <a:avLst/>
           </a:prstGeom>
           <a:noFill/>
-        </p:spPr>
-        <p:txBody>
-          <a:bodyPr wrap="square" lIns="0" tIns="0" rIns="0" bIns="0" anchor="t">
-            <a:spAutoFit/>
-          </a:bodyPr>
-          <a:lstStyle/>
-          <a:p>
-            <a:pPr algn="l"/>
-            <a:r>
-              <a:rPr sz="1296" b="0" i="0">
-                <a:solidFill>
-                  <a:srgbClr val="232F3E">
-                    <a:alpha val="100000"/>
-                  </a:srgbClr>
-                </a:solidFill>
-                <a:latin typeface="Arial"/>
-                <a:ea typeface="Arial"/>
-                <a:cs typeface="Arial"/>
-              </a:rPr>
-              <a:t>• KB: H4NWXXP6DZ ✅</a:t>
-            </a:r>
-          </a:p>
-          <a:p>
-            <a:pPr algn="l"/>
-            <a:r>
-              <a:rPr sz="1296" b="0" i="0">
-                <a:solidFill>
-                  <a:srgbClr val="232F3E">
-                    <a:alpha val="100000"/>
-                  </a:srgbClr>
-                </a:solidFill>
-                <a:latin typeface="Arial"/>
-                <a:ea typeface="Arial"/>
-                <a:cs typeface="Arial"/>
-              </a:rPr>
-              <a:t>• Model: Claude Sonnet 4</a:t>
-            </a:r>
-          </a:p>
-          <a:p>
-            <a:pPr algn="l"/>
-            <a:r>
-              <a:rPr sz="1296" b="0" i="0">
-                <a:solidFill>
-                  <a:srgbClr val="232F3E">
-                    <a:alpha val="100000"/>
-                  </a:srgbClr>
-                </a:solidFill>
-                <a:latin typeface="Arial"/>
-                <a:ea typeface="Arial"/>
-                <a:cs typeface="Arial"/>
-              </a:rPr>
-              <a:t>• S3 Vectors 儲存</a:t>
-            </a:r>
-          </a:p>
-          <a:p>
-            <a:pPr algn="l"/>
-            <a:r>
-              <a:rPr sz="1296" b="0" i="0">
-                <a:solidFill>
-                  <a:srgbClr val="232F3E">
-                    <a:alpha val="100000"/>
-                  </a:srgbClr>
-                </a:solidFill>
-                <a:latin typeface="Arial"/>
-                <a:ea typeface="Arial"/>
-                <a:cs typeface="Arial"/>
-              </a:rPr>
-              <a:t>• RetrieveAndGenerate API</a:t>
-            </a:r>
-          </a:p>
-        </p:txBody>
-      </p:sp>
-      <p:sp>
-        <p:nvSpPr>
-          <p:cNvPr id="11" name="TextBox 10"/>
-          <p:cNvSpPr txBox="1"/>
-          <p:nvPr/>
-        </p:nvSpPr>
-        <p:spPr>
-          <a:xfrm>
-            <a:off x="975335" y="3566160"/>
-            <a:ext cx="3291757" cy="342900"/>
+          <a:ln/>
+        </p:spPr>
+        <p:txBody>
+          <a:bodyPr wrap="square" rtlCol="0" anchor="ctr"/>
+          <a:lstStyle/>
+          <a:p>
+            <a:pPr marL="0" indent="0">
+              <a:buNone/>
+            </a:pPr>
+            <a:r>
+              <a:rPr lang="en-US" sz="1450" b="1" dirty="0">
+                <a:solidFill>
+                  <a:srgbClr val="34D399"/>
+                </a:solidFill>
+                <a:latin typeface="Cambria" pitchFamily="34" charset="0"/>
+                <a:ea typeface="Cambria" pitchFamily="34" charset="-122"/>
+                <a:cs typeface="Cambria" pitchFamily="34" charset="-120"/>
+              </a:rPr>
+              <a:t>Full-stack Dev</a:t>
+            </a:r>
+            <a:endParaRPr lang="en-US" sz="1450" dirty="0"/>
+          </a:p>
+        </p:txBody>
+      </p:sp>
+      <p:sp>
+        <p:nvSpPr>
+          <p:cNvPr id="15" name="Text 13"/>
+          <p:cNvSpPr/>
+          <p:nvPr/>
+        </p:nvSpPr>
+        <p:spPr>
+          <a:xfrm>
+            <a:off x="7973568" y="2660904"/>
+            <a:ext cx="3026664" cy="777240"/>
           </a:xfrm>
           <a:prstGeom prst="rect">
             <a:avLst/>
           </a:prstGeom>
           <a:noFill/>
-        </p:spPr>
-        <p:txBody>
-          <a:bodyPr wrap="square" lIns="0" tIns="0" rIns="0" bIns="0" anchor="ctr">
-            <a:spAutoFit/>
-          </a:bodyPr>
-          <a:lstStyle/>
-          <a:p>
-            <a:pPr algn="l"/>
-            <a:r>
-              <a:rPr sz="1728" b="1" i="0">
-                <a:solidFill>
-                  <a:srgbClr val="FF9900">
-                    <a:alpha val="100000"/>
-                  </a:srgbClr>
-                </a:solidFill>
-                <a:latin typeface="Arial"/>
-                <a:ea typeface="Arial"/>
-                <a:cs typeface="Arial"/>
-              </a:rPr>
-              <a:t>DynamoDB (3 表)</a:t>
-            </a:r>
-          </a:p>
-        </p:txBody>
-      </p:sp>
-      <p:sp>
-        <p:nvSpPr>
-          <p:cNvPr id="12" name="TextBox 11"/>
-          <p:cNvSpPr txBox="1"/>
-          <p:nvPr/>
-        </p:nvSpPr>
-        <p:spPr>
-          <a:xfrm>
-            <a:off x="975335" y="3977639"/>
-            <a:ext cx="3291757" cy="960120"/>
+          <a:ln/>
+        </p:spPr>
+        <p:txBody>
+          <a:bodyPr wrap="square" rtlCol="0" anchor="t"/>
+          <a:lstStyle/>
+          <a:p>
+            <a:pPr marL="0" indent="0">
+              <a:buNone/>
+            </a:pPr>
+            <a:r>
+              <a:rPr lang="en-US" sz="1050" dirty="0">
+                <a:solidFill>
+                  <a:srgbClr val="DCE9E5"/>
+                </a:solidFill>
+                <a:latin typeface="Calibri" pitchFamily="34" charset="0"/>
+                <a:ea typeface="Calibri" pitchFamily="34" charset="-122"/>
+                <a:cs typeface="Calibri" pitchFamily="34" charset="-120"/>
+              </a:rPr>
+              <a:t>React 前端、語音串流、Bedrock 整合開發</a:t>
+            </a:r>
+            <a:endParaRPr lang="en-US" sz="1050" dirty="0"/>
+          </a:p>
+        </p:txBody>
+      </p:sp>
+      <p:sp>
+        <p:nvSpPr>
+          <p:cNvPr id="16" name="Shape 14"/>
+          <p:cNvSpPr/>
+          <p:nvPr/>
+        </p:nvSpPr>
+        <p:spPr>
+          <a:xfrm>
+            <a:off x="548640" y="3749040"/>
+            <a:ext cx="3429000" cy="1417320"/>
+          </a:xfrm>
+          <a:prstGeom prst="roundRect">
+            <a:avLst>
+              <a:gd name="adj" fmla="val 7742"/>
+            </a:avLst>
+          </a:prstGeom>
+          <a:solidFill>
+            <a:srgbClr val="132A46"/>
+          </a:solidFill>
+          <a:ln/>
+        </p:spPr>
+      </p:sp>
+      <p:sp>
+        <p:nvSpPr>
+          <p:cNvPr id="17" name="Text 15"/>
+          <p:cNvSpPr/>
+          <p:nvPr/>
+        </p:nvSpPr>
+        <p:spPr>
+          <a:xfrm>
+            <a:off x="749808" y="3877056"/>
+            <a:ext cx="3026664" cy="365760"/>
           </a:xfrm>
           <a:prstGeom prst="rect">
             <a:avLst/>
           </a:prstGeom>
           <a:noFill/>
-        </p:spPr>
-        <p:txBody>
-          <a:bodyPr wrap="square" lIns="0" tIns="0" rIns="0" bIns="0" anchor="t">
-            <a:spAutoFit/>
-          </a:bodyPr>
-          <a:lstStyle/>
-          <a:p>
-            <a:pPr algn="l"/>
-            <a:r>
-              <a:rPr sz="1296" b="0" i="0">
-                <a:solidFill>
-                  <a:srgbClr val="232F3E">
-                    <a:alpha val="100000"/>
-                  </a:srgbClr>
-                </a:solidFill>
-                <a:latin typeface="Arial"/>
-                <a:ea typeface="Arial"/>
-                <a:cs typeface="Arial"/>
-              </a:rPr>
-              <a:t>• conversations (對話記錄)</a:t>
-            </a:r>
-          </a:p>
-          <a:p>
-            <a:pPr algn="l"/>
-            <a:r>
-              <a:rPr sz="1296" b="0" i="0">
-                <a:solidFill>
-                  <a:srgbClr val="232F3E">
-                    <a:alpha val="100000"/>
-                  </a:srgbClr>
-                </a:solidFill>
-                <a:latin typeface="Arial"/>
-                <a:ea typeface="Arial"/>
-                <a:cs typeface="Arial"/>
-              </a:rPr>
-              <a:t>• elder_profile (11 筆)</a:t>
-            </a:r>
-          </a:p>
-          <a:p>
-            <a:pPr algn="l"/>
-            <a:r>
-              <a:rPr sz="1296" b="0" i="0">
-                <a:solidFill>
-                  <a:srgbClr val="232F3E">
-                    <a:alpha val="100000"/>
-                  </a:srgbClr>
-                </a:solidFill>
-                <a:latin typeface="Arial"/>
-                <a:ea typeface="Arial"/>
-                <a:cs typeface="Arial"/>
-              </a:rPr>
-              <a:t>• elder_memory (事件記錄)</a:t>
-            </a:r>
-          </a:p>
-          <a:p>
-            <a:pPr algn="l"/>
-            <a:r>
-              <a:rPr sz="1296" b="0" i="0">
-                <a:solidFill>
-                  <a:srgbClr val="232F3E">
-                    <a:alpha val="100000"/>
-                  </a:srgbClr>
-                </a:solidFill>
-                <a:latin typeface="Arial"/>
-                <a:ea typeface="Arial"/>
-                <a:cs typeface="Arial"/>
-              </a:rPr>
-              <a:t>✅ All ACTIVE</a:t>
-            </a:r>
-          </a:p>
-        </p:txBody>
-      </p:sp>
-      <p:sp>
-        <p:nvSpPr>
-          <p:cNvPr id="13" name="TextBox 12"/>
-          <p:cNvSpPr txBox="1"/>
-          <p:nvPr/>
-        </p:nvSpPr>
-        <p:spPr>
-          <a:xfrm>
-            <a:off x="4510927" y="3566160"/>
-            <a:ext cx="3291757" cy="342900"/>
+          <a:ln/>
+        </p:spPr>
+        <p:txBody>
+          <a:bodyPr wrap="square" rtlCol="0" anchor="ctr"/>
+          <a:lstStyle/>
+          <a:p>
+            <a:pPr marL="0" indent="0">
+              <a:buNone/>
+            </a:pPr>
+            <a:r>
+              <a:rPr lang="en-US" sz="1450" b="1" dirty="0">
+                <a:solidFill>
+                  <a:srgbClr val="34D399"/>
+                </a:solidFill>
+                <a:latin typeface="Cambria" pitchFamily="34" charset="0"/>
+                <a:ea typeface="Cambria" pitchFamily="34" charset="-122"/>
+                <a:cs typeface="Cambria" pitchFamily="34" charset="-120"/>
+              </a:rPr>
+              <a:t>QA</a:t>
+            </a:r>
+            <a:endParaRPr lang="en-US" sz="1450" dirty="0"/>
+          </a:p>
+        </p:txBody>
+      </p:sp>
+      <p:sp>
+        <p:nvSpPr>
+          <p:cNvPr id="18" name="Text 16"/>
+          <p:cNvSpPr/>
+          <p:nvPr/>
+        </p:nvSpPr>
+        <p:spPr>
+          <a:xfrm>
+            <a:off x="749808" y="4261104"/>
+            <a:ext cx="3026664" cy="777240"/>
           </a:xfrm>
           <a:prstGeom prst="rect">
             <a:avLst/>
           </a:prstGeom>
           <a:noFill/>
-        </p:spPr>
-        <p:txBody>
-          <a:bodyPr wrap="square" lIns="0" tIns="0" rIns="0" bIns="0" anchor="ctr">
-            <a:spAutoFit/>
-          </a:bodyPr>
-          <a:lstStyle/>
-          <a:p>
-            <a:pPr algn="l"/>
-            <a:r>
-              <a:rPr sz="1728" b="1" i="0">
-                <a:solidFill>
-                  <a:srgbClr val="FF9900">
-                    <a:alpha val="100000"/>
-                  </a:srgbClr>
-                </a:solidFill>
-                <a:latin typeface="Arial"/>
-                <a:ea typeface="Arial"/>
-                <a:cs typeface="Arial"/>
-              </a:rPr>
-              <a:t>Cognito + 語音服務</a:t>
-            </a:r>
-          </a:p>
-        </p:txBody>
-      </p:sp>
-      <p:sp>
-        <p:nvSpPr>
-          <p:cNvPr id="14" name="TextBox 13"/>
-          <p:cNvSpPr txBox="1"/>
-          <p:nvPr/>
-        </p:nvSpPr>
-        <p:spPr>
-          <a:xfrm>
-            <a:off x="4510927" y="3977639"/>
-            <a:ext cx="3291757" cy="960120"/>
+          <a:ln/>
+        </p:spPr>
+        <p:txBody>
+          <a:bodyPr wrap="square" rtlCol="0" anchor="t"/>
+          <a:lstStyle/>
+          <a:p>
+            <a:pPr marL="0" indent="0">
+              <a:buNone/>
+            </a:pPr>
+            <a:r>
+              <a:rPr lang="en-US" sz="1050" dirty="0">
+                <a:solidFill>
+                  <a:srgbClr val="DCE9E5"/>
+                </a:solidFill>
+                <a:latin typeface="Calibri" pitchFamily="34" charset="0"/>
+                <a:ea typeface="Calibri" pitchFamily="34" charset="-122"/>
+                <a:cs typeface="Calibri" pitchFamily="34" charset="-120"/>
+              </a:rPr>
+              <a:t>測試框架、CI 建置與驗收把關</a:t>
+            </a:r>
+            <a:endParaRPr lang="en-US" sz="1050" dirty="0"/>
+          </a:p>
+        </p:txBody>
+      </p:sp>
+      <p:sp>
+        <p:nvSpPr>
+          <p:cNvPr id="19" name="Shape 17"/>
+          <p:cNvSpPr/>
+          <p:nvPr/>
+        </p:nvSpPr>
+        <p:spPr>
+          <a:xfrm>
+            <a:off x="4160520" y="3749040"/>
+            <a:ext cx="3429000" cy="1417320"/>
+          </a:xfrm>
+          <a:prstGeom prst="roundRect">
+            <a:avLst>
+              <a:gd name="adj" fmla="val 7742"/>
+            </a:avLst>
+          </a:prstGeom>
+          <a:solidFill>
+            <a:srgbClr val="132A46"/>
+          </a:solidFill>
+          <a:ln/>
+        </p:spPr>
+      </p:sp>
+      <p:sp>
+        <p:nvSpPr>
+          <p:cNvPr id="20" name="Text 18"/>
+          <p:cNvSpPr/>
+          <p:nvPr/>
+        </p:nvSpPr>
+        <p:spPr>
+          <a:xfrm>
+            <a:off x="4361688" y="3877056"/>
+            <a:ext cx="3026664" cy="365760"/>
           </a:xfrm>
           <a:prstGeom prst="rect">
             <a:avLst/>
           </a:prstGeom>
           <a:noFill/>
-        </p:spPr>
-        <p:txBody>
-          <a:bodyPr wrap="square" lIns="0" tIns="0" rIns="0" bIns="0" anchor="t">
-            <a:spAutoFit/>
-          </a:bodyPr>
-          <a:lstStyle/>
-          <a:p>
-            <a:pPr algn="l"/>
-            <a:r>
-              <a:rPr sz="1296" b="0" i="0">
-                <a:solidFill>
-                  <a:srgbClr val="232F3E">
-                    <a:alpha val="100000"/>
-                  </a:srgbClr>
-                </a:solidFill>
-                <a:latin typeface="Arial"/>
-                <a:ea typeface="Arial"/>
-                <a:cs typeface="Arial"/>
-              </a:rPr>
-              <a:t>• Identity Pool ✅</a:t>
-            </a:r>
-          </a:p>
-          <a:p>
-            <a:pPr algn="l"/>
-            <a:r>
-              <a:rPr sz="1296" b="0" i="0">
-                <a:solidFill>
-                  <a:srgbClr val="232F3E">
-                    <a:alpha val="100000"/>
-                  </a:srgbClr>
-                </a:solidFill>
-                <a:latin typeface="Arial"/>
-                <a:ea typeface="Arial"/>
-                <a:cs typeface="Arial"/>
-              </a:rPr>
-              <a:t>• Transcribe (zh-TW)</a:t>
-            </a:r>
-          </a:p>
-          <a:p>
-            <a:pPr algn="l"/>
-            <a:r>
-              <a:rPr sz="1296" b="0" i="0">
-                <a:solidFill>
-                  <a:srgbClr val="232F3E">
-                    <a:alpha val="100000"/>
-                  </a:srgbClr>
-                </a:solidFill>
-                <a:latin typeface="Arial"/>
-                <a:ea typeface="Arial"/>
-                <a:cs typeface="Arial"/>
-              </a:rPr>
-              <a:t>• Polly (Zhiyu Neural)</a:t>
-            </a:r>
-          </a:p>
-          <a:p>
-            <a:pPr algn="l"/>
-            <a:r>
-              <a:rPr sz="1296" b="0" i="0">
-                <a:solidFill>
-                  <a:srgbClr val="232F3E">
-                    <a:alpha val="100000"/>
-                  </a:srgbClr>
-                </a:solidFill>
-                <a:latin typeface="Arial"/>
-                <a:ea typeface="Arial"/>
-                <a:cs typeface="Arial"/>
-              </a:rPr>
-              <a:t>• 最小 IAM 權限</a:t>
-            </a:r>
-          </a:p>
-        </p:txBody>
-      </p:sp>
-      <p:sp>
-        <p:nvSpPr>
-          <p:cNvPr id="15" name="TextBox 14"/>
-          <p:cNvSpPr txBox="1"/>
-          <p:nvPr/>
-        </p:nvSpPr>
-        <p:spPr>
-          <a:xfrm>
-            <a:off x="8046518" y="3566160"/>
-            <a:ext cx="3291757" cy="342900"/>
+          <a:ln/>
+        </p:spPr>
+        <p:txBody>
+          <a:bodyPr wrap="square" rtlCol="0" anchor="ctr"/>
+          <a:lstStyle/>
+          <a:p>
+            <a:pPr marL="0" indent="0">
+              <a:buNone/>
+            </a:pPr>
+            <a:r>
+              <a:rPr lang="en-US" sz="1450" b="1" dirty="0">
+                <a:solidFill>
+                  <a:srgbClr val="34D399"/>
+                </a:solidFill>
+                <a:latin typeface="Cambria" pitchFamily="34" charset="0"/>
+                <a:ea typeface="Cambria" pitchFamily="34" charset="-122"/>
+                <a:cs typeface="Cambria" pitchFamily="34" charset="-120"/>
+              </a:rPr>
+              <a:t>CloudOps</a:t>
+            </a:r>
+            <a:endParaRPr lang="en-US" sz="1450" dirty="0"/>
+          </a:p>
+        </p:txBody>
+      </p:sp>
+      <p:sp>
+        <p:nvSpPr>
+          <p:cNvPr id="21" name="Text 19"/>
+          <p:cNvSpPr/>
+          <p:nvPr/>
+        </p:nvSpPr>
+        <p:spPr>
+          <a:xfrm>
+            <a:off x="4361688" y="4261104"/>
+            <a:ext cx="3026664" cy="777240"/>
           </a:xfrm>
           <a:prstGeom prst="rect">
             <a:avLst/>
           </a:prstGeom>
           <a:noFill/>
-        </p:spPr>
-        <p:txBody>
-          <a:bodyPr wrap="square" lIns="0" tIns="0" rIns="0" bIns="0" anchor="ctr">
-            <a:spAutoFit/>
-          </a:bodyPr>
-          <a:lstStyle/>
-          <a:p>
-            <a:pPr algn="l"/>
-            <a:r>
-              <a:rPr sz="1728" b="1" i="0">
-                <a:solidFill>
-                  <a:srgbClr val="FF9900">
-                    <a:alpha val="100000"/>
-                  </a:srgbClr>
-                </a:solidFill>
-                <a:latin typeface="Arial"/>
-                <a:ea typeface="Arial"/>
-                <a:cs typeface="Arial"/>
-              </a:rPr>
-              <a:t>Lambda 函數群</a:t>
-            </a:r>
-          </a:p>
-        </p:txBody>
-      </p:sp>
-      <p:sp>
-        <p:nvSpPr>
-          <p:cNvPr id="16" name="TextBox 15"/>
-          <p:cNvSpPr txBox="1"/>
-          <p:nvPr/>
-        </p:nvSpPr>
-        <p:spPr>
-          <a:xfrm>
-            <a:off x="8046518" y="3977639"/>
-            <a:ext cx="3291757" cy="960120"/>
+          <a:ln/>
+        </p:spPr>
+        <p:txBody>
+          <a:bodyPr wrap="square" rtlCol="0" anchor="t"/>
+          <a:lstStyle/>
+          <a:p>
+            <a:pPr marL="0" indent="0">
+              <a:buNone/>
+            </a:pPr>
+            <a:r>
+              <a:rPr lang="en-US" sz="1050" dirty="0">
+                <a:solidFill>
+                  <a:srgbClr val="DCE9E5"/>
+                </a:solidFill>
+                <a:latin typeface="Calibri" pitchFamily="34" charset="0"/>
+                <a:ea typeface="Calibri" pitchFamily="34" charset="-122"/>
+                <a:cs typeface="Calibri" pitchFamily="34" charset="-120"/>
+              </a:rPr>
+              <a:t>部署、IAM 最小權限與維運手冊</a:t>
+            </a:r>
+            <a:endParaRPr lang="en-US" sz="1050" dirty="0"/>
+          </a:p>
+        </p:txBody>
+      </p:sp>
+      <p:sp>
+        <p:nvSpPr>
+          <p:cNvPr id="22" name="Shape 20"/>
+          <p:cNvSpPr/>
+          <p:nvPr/>
+        </p:nvSpPr>
+        <p:spPr>
+          <a:xfrm>
+            <a:off x="7772400" y="3749040"/>
+            <a:ext cx="3429000" cy="1417320"/>
+          </a:xfrm>
+          <a:prstGeom prst="roundRect">
+            <a:avLst>
+              <a:gd name="adj" fmla="val 7742"/>
+            </a:avLst>
+          </a:prstGeom>
+          <a:solidFill>
+            <a:srgbClr val="132A46"/>
+          </a:solidFill>
+          <a:ln/>
+        </p:spPr>
+      </p:sp>
+      <p:sp>
+        <p:nvSpPr>
+          <p:cNvPr id="23" name="Text 21"/>
+          <p:cNvSpPr/>
+          <p:nvPr/>
+        </p:nvSpPr>
+        <p:spPr>
+          <a:xfrm>
+            <a:off x="7973568" y="3877056"/>
+            <a:ext cx="3026664" cy="365760"/>
           </a:xfrm>
           <a:prstGeom prst="rect">
             <a:avLst/>
           </a:prstGeom>
           <a:noFill/>
-        </p:spPr>
-        <p:txBody>
-          <a:bodyPr wrap="square" lIns="0" tIns="0" rIns="0" bIns="0" anchor="t">
-            <a:spAutoFit/>
-          </a:bodyPr>
-          <a:lstStyle/>
-          <a:p>
-            <a:pPr algn="l"/>
-            <a:r>
-              <a:rPr sz="1296" b="0" i="0">
-                <a:solidFill>
-                  <a:srgbClr val="232F3E">
-                    <a:alpha val="100000"/>
-                  </a:srgbClr>
-                </a:solidFill>
-                <a:latin typeface="Arial"/>
-                <a:ea typeface="Arial"/>
-                <a:cs typeface="Arial"/>
-              </a:rPr>
-              <a:t>• caremate-ai-speech-dev</a:t>
-            </a:r>
-          </a:p>
-          <a:p>
-            <a:pPr algn="l"/>
-            <a:r>
-              <a:rPr sz="1296" b="0" i="0">
-                <a:solidFill>
-                  <a:srgbClr val="232F3E">
-                    <a:alpha val="100000"/>
-                  </a:srgbClr>
-                </a:solidFill>
-                <a:latin typeface="Arial"/>
-                <a:ea typeface="Arial"/>
-                <a:cs typeface="Arial"/>
-              </a:rPr>
-              <a:t>• caremate-ai-chat-dev</a:t>
-            </a:r>
-          </a:p>
-          <a:p>
-            <a:pPr algn="l"/>
-            <a:r>
-              <a:rPr sz="1296" b="0" i="0">
-                <a:solidFill>
-                  <a:srgbClr val="232F3E">
-                    <a:alpha val="100000"/>
-                  </a:srgbClr>
-                </a:solidFill>
-                <a:latin typeface="Arial"/>
-                <a:ea typeface="Arial"/>
-                <a:cs typeface="Arial"/>
-              </a:rPr>
-              <a:t>• caremate-ai-summary-dev</a:t>
-            </a:r>
-          </a:p>
-          <a:p>
-            <a:pPr algn="l"/>
-            <a:r>
-              <a:rPr sz="1296" b="0" i="0">
-                <a:solidFill>
-                  <a:srgbClr val="232F3E">
-                    <a:alpha val="100000"/>
-                  </a:srgbClr>
-                </a:solidFill>
-                <a:latin typeface="Arial"/>
-                <a:ea typeface="Arial"/>
-                <a:cs typeface="Arial"/>
-              </a:rPr>
-              <a:t>• +2 more functions</a:t>
-            </a:r>
-          </a:p>
-        </p:txBody>
-      </p:sp>
-      <p:sp>
-        <p:nvSpPr>
-          <p:cNvPr id="17" name="TextBox 16"/>
-          <p:cNvSpPr txBox="1"/>
-          <p:nvPr/>
-        </p:nvSpPr>
-        <p:spPr>
-          <a:xfrm>
-            <a:off x="1219169" y="5486400"/>
-            <a:ext cx="9753356" cy="342900"/>
+          <a:ln/>
+        </p:spPr>
+        <p:txBody>
+          <a:bodyPr wrap="square" rtlCol="0" anchor="ctr"/>
+          <a:lstStyle/>
+          <a:p>
+            <a:pPr marL="0" indent="0">
+              <a:buNone/>
+            </a:pPr>
+            <a:r>
+              <a:rPr lang="en-US" sz="1450" b="1" dirty="0">
+                <a:solidFill>
+                  <a:srgbClr val="34D399"/>
+                </a:solidFill>
+                <a:latin typeface="Cambria" pitchFamily="34" charset="0"/>
+                <a:ea typeface="Cambria" pitchFamily="34" charset="-122"/>
+                <a:cs typeface="Cambria" pitchFamily="34" charset="-120"/>
+              </a:rPr>
+              <a:t>Compliance Auditor</a:t>
+            </a:r>
+            <a:endParaRPr lang="en-US" sz="1450" dirty="0"/>
+          </a:p>
+        </p:txBody>
+      </p:sp>
+      <p:sp>
+        <p:nvSpPr>
+          <p:cNvPr id="24" name="Text 22"/>
+          <p:cNvSpPr/>
+          <p:nvPr/>
+        </p:nvSpPr>
+        <p:spPr>
+          <a:xfrm>
+            <a:off x="7973568" y="4261104"/>
+            <a:ext cx="3026664" cy="777240"/>
           </a:xfrm>
           <a:prstGeom prst="rect">
             <a:avLst/>
           </a:prstGeom>
           <a:noFill/>
-        </p:spPr>
-        <p:txBody>
-          <a:bodyPr wrap="square" lIns="0" tIns="0" rIns="0" bIns="0" anchor="ctr">
-            <a:spAutoFit/>
-          </a:bodyPr>
-          <a:lstStyle/>
-          <a:p>
-            <a:pPr algn="ctr"/>
-            <a:r>
-              <a:rPr sz="1404" b="1" i="0">
-                <a:solidFill>
-                  <a:srgbClr val="16A34A">
-                    <a:alpha val="100000"/>
-                  </a:srgbClr>
-                </a:solidFill>
-                <a:latin typeface="Arial"/>
-                <a:ea typeface="Arial"/>
-                <a:cs typeface="Arial"/>
-              </a:rPr>
-              <a:t>驗證時間: 2026-08-02 | 整體評分: 95% ✅</a:t>
-            </a:r>
+          <a:ln/>
+        </p:spPr>
+        <p:txBody>
+          <a:bodyPr wrap="square" rtlCol="0" anchor="t"/>
+          <a:lstStyle/>
+          <a:p>
+            <a:pPr marL="0" indent="0">
+              <a:buNone/>
+            </a:pPr>
+            <a:r>
+              <a:rPr lang="en-US" sz="1050" dirty="0">
+                <a:solidFill>
+                  <a:srgbClr val="DCE9E5"/>
+                </a:solidFill>
+                <a:latin typeface="Calibri" pitchFamily="34" charset="0"/>
+                <a:ea typeface="Calibri" pitchFamily="34" charset="-122"/>
+                <a:cs typeface="Calibri" pitchFamily="34" charset="-120"/>
+              </a:rPr>
+              <a:t>資安與個資稽核，產出正式稽核報告</a:t>
+            </a:r>
+            <a:endParaRPr lang="en-US" sz="1050" dirty="0"/>
+          </a:p>
+        </p:txBody>
+      </p:sp>
+      <p:sp>
+        <p:nvSpPr>
+          <p:cNvPr id="25" name="Text 23"/>
+          <p:cNvSpPr/>
+          <p:nvPr/>
+        </p:nvSpPr>
+        <p:spPr>
+          <a:xfrm>
+            <a:off x="548640" y="6080760"/>
+            <a:ext cx="10881360" cy="320040"/>
+          </a:xfrm>
+          <a:prstGeom prst="rect">
+            <a:avLst/>
+          </a:prstGeom>
+          <a:noFill/>
+          <a:ln/>
+        </p:spPr>
+        <p:txBody>
+          <a:bodyPr wrap="square" rtlCol="0" anchor="ctr"/>
+          <a:lstStyle/>
+          <a:p>
+            <a:pPr marL="0" indent="0" algn="ctr">
+              <a:buNone/>
+            </a:pPr>
+            <a:r>
+              <a:rPr lang="en-US" sz="1050" dirty="0">
+                <a:solidFill>
+                  <a:srgbClr val="9FB3C8"/>
+                </a:solidFill>
+                <a:latin typeface="Calibri" pitchFamily="34" charset="0"/>
+                <a:ea typeface="Calibri" pitchFamily="34" charset="-122"/>
+                <a:cs typeface="Calibri" pitchFamily="34" charset="-120"/>
+              </a:rPr>
+              <a:t>團隊主理：linjinhsien　｜　GitHub：github.com/linjinhsien/Profit-Prophet　｜　協作工具：AWS Kiro（含 6 支 steering / agent 規範文件）</a:t>
+            </a:r>
+            <a:endParaRPr lang="en-US" sz="1050" dirty="0"/>
+          </a:p>
+        </p:txBody>
+      </p:sp>
+      <p:sp>
+        <p:nvSpPr>
+          <p:cNvPr id="26" name="Text 24"/>
+          <p:cNvSpPr/>
+          <p:nvPr/>
+        </p:nvSpPr>
+        <p:spPr>
+          <a:xfrm>
+            <a:off x="457200" y="6473952"/>
+            <a:ext cx="3657600" cy="274320"/>
+          </a:xfrm>
+          <a:prstGeom prst="rect">
+            <a:avLst/>
+          </a:prstGeom>
+          <a:noFill/>
+          <a:ln/>
+        </p:spPr>
+        <p:txBody>
+          <a:bodyPr wrap="square" rtlCol="0" anchor="ctr"/>
+          <a:lstStyle/>
+          <a:p>
+            <a:pPr marL="0" indent="0">
+              <a:buNone/>
+            </a:pPr>
+            <a:r>
+              <a:rPr lang="en-US" sz="900" b="1" kern="0" spc="200" dirty="0">
+                <a:solidFill>
+                  <a:srgbClr val="9FB3C8"/>
+                </a:solidFill>
+                <a:latin typeface="Calibri" pitchFamily="34" charset="0"/>
+                <a:ea typeface="Calibri" pitchFamily="34" charset="-122"/>
+                <a:cs typeface="Calibri" pitchFamily="34" charset="-120"/>
+              </a:rPr>
+              <a:t>PROFIT-PROPHET</a:t>
+            </a:r>
+            <a:endParaRPr lang="en-US" sz="900" dirty="0"/>
+          </a:p>
+        </p:txBody>
+      </p:sp>
+      <p:sp>
+        <p:nvSpPr>
+          <p:cNvPr id="27" name="Text 25"/>
+          <p:cNvSpPr/>
+          <p:nvPr/>
+        </p:nvSpPr>
+        <p:spPr>
+          <a:xfrm>
+            <a:off x="4114800" y="6473952"/>
+            <a:ext cx="3962095" cy="274320"/>
+          </a:xfrm>
+          <a:prstGeom prst="rect">
+            <a:avLst/>
+          </a:prstGeom>
+          <a:noFill/>
+          <a:ln/>
+        </p:spPr>
+        <p:txBody>
+          <a:bodyPr wrap="square" rtlCol="0" anchor="ctr"/>
+          <a:lstStyle/>
+          <a:p>
+            <a:pPr marL="0" indent="0" algn="ctr">
+              <a:buNone/>
+            </a:pPr>
+            <a:r>
+              <a:rPr lang="en-US" sz="900" dirty="0">
+                <a:solidFill>
+                  <a:srgbClr val="9FB3C8"/>
+                </a:solidFill>
+                <a:latin typeface="Calibri" pitchFamily="34" charset="0"/>
+                <a:ea typeface="Calibri" pitchFamily="34" charset="-122"/>
+                <a:cs typeface="Calibri" pitchFamily="34" charset="-120"/>
+              </a:rPr>
+              <a:t>團隊介紹</a:t>
+            </a:r>
+            <a:endParaRPr lang="en-US" sz="900" dirty="0"/>
+          </a:p>
+        </p:txBody>
+      </p:sp>
+      <p:sp>
+        <p:nvSpPr>
+          <p:cNvPr id="28" name="Text 26"/>
+          <p:cNvSpPr/>
+          <p:nvPr/>
+        </p:nvSpPr>
+        <p:spPr>
+          <a:xfrm>
+            <a:off x="10911535" y="6473952"/>
+            <a:ext cx="822960" cy="274320"/>
+          </a:xfrm>
+          <a:prstGeom prst="rect">
+            <a:avLst/>
+          </a:prstGeom>
+          <a:noFill/>
+          <a:ln/>
+        </p:spPr>
+        <p:txBody>
+          <a:bodyPr wrap="square" rtlCol="0" anchor="ctr"/>
+          <a:lstStyle/>
+          <a:p>
+            <a:pPr marL="0" indent="0" algn="r">
+              <a:buNone/>
+            </a:pPr>
+            <a:r>
+              <a:rPr lang="en-US" sz="900" dirty="0">
+                <a:solidFill>
+                  <a:srgbClr val="9FB3C8"/>
+                </a:solidFill>
+                <a:latin typeface="Calibri" pitchFamily="34" charset="0"/>
+                <a:ea typeface="Calibri" pitchFamily="34" charset="-122"/>
+                <a:cs typeface="Calibri" pitchFamily="34" charset="-120"/>
+              </a:rPr>
+              <a:t>09 / 10</a:t>
+            </a:r>
+            <a:endParaRPr lang="en-US" sz="900" dirty="0"/>
           </a:p>
         </p:txBody>
       </p:sp>
@@ -9265,7 +9072,7 @@
             <a:avLst/>
           </a:prstGeom>
           <a:solidFill>
-            <a:srgbClr val="FFFFFF"/>
+            <a:srgbClr val="F8F9FA"/>
           </a:solidFill>
           <a:ln>
             <a:noFill/>
@@ -9297,148 +9104,7 @@
       </p:sp>
       <p:sp>
         <p:nvSpPr>
-          <p:cNvPr id="3" name="Rounded Rectangle 2"/>
-          <p:cNvSpPr/>
-          <p:nvPr/>
-        </p:nvSpPr>
-        <p:spPr>
-          <a:xfrm>
-            <a:off x="5242428" y="1577340"/>
-            <a:ext cx="1706837" cy="480060"/>
-          </a:xfrm>
-          <a:prstGeom prst="roundRect">
-            <a:avLst>
-              <a:gd name="adj" fmla="val 3000"/>
-            </a:avLst>
-          </a:prstGeom>
-          <a:solidFill>
-            <a:srgbClr val="2563EB"/>
-          </a:solidFill>
-          <a:ln>
-            <a:noFill/>
-          </a:ln>
-          <a:effectLst/>
-        </p:spPr>
-        <p:style>
-          <a:lnRef idx="1">
-            <a:schemeClr val="accent1"/>
-          </a:lnRef>
-          <a:fillRef idx="3">
-            <a:schemeClr val="accent1"/>
-          </a:fillRef>
-          <a:effectRef idx="2">
-            <a:schemeClr val="accent1"/>
-          </a:effectRef>
-          <a:fontRef idx="minor">
-            <a:schemeClr val="lt1"/>
-          </a:fontRef>
-        </p:style>
-        <p:txBody>
-          <a:bodyPr rtlCol="0" anchor="ctr"/>
-          <a:lstStyle/>
-          <a:p>
-            <a:pPr algn="ctr"/>
-            <a:endParaRPr/>
-          </a:p>
-        </p:txBody>
-      </p:sp>
-      <p:sp>
-        <p:nvSpPr>
-          <p:cNvPr id="4" name="Rounded Rectangle 3"/>
-          <p:cNvSpPr/>
-          <p:nvPr/>
-        </p:nvSpPr>
-        <p:spPr>
-          <a:xfrm>
-            <a:off x="3047923" y="2468880"/>
-            <a:ext cx="2194505" cy="617220"/>
-          </a:xfrm>
-          <a:prstGeom prst="roundRect">
-            <a:avLst>
-              <a:gd name="adj" fmla="val 3000"/>
-            </a:avLst>
-          </a:prstGeom>
-          <a:solidFill>
-            <a:srgbClr val="FF9900"/>
-          </a:solidFill>
-          <a:ln>
-            <a:noFill/>
-          </a:ln>
-          <a:effectLst/>
-        </p:spPr>
-        <p:style>
-          <a:lnRef idx="1">
-            <a:schemeClr val="accent1"/>
-          </a:lnRef>
-          <a:fillRef idx="3">
-            <a:schemeClr val="accent1"/>
-          </a:fillRef>
-          <a:effectRef idx="2">
-            <a:schemeClr val="accent1"/>
-          </a:effectRef>
-          <a:fontRef idx="minor">
-            <a:schemeClr val="lt1"/>
-          </a:fontRef>
-        </p:style>
-        <p:txBody>
-          <a:bodyPr rtlCol="0" anchor="ctr"/>
-          <a:lstStyle/>
-          <a:p>
-            <a:pPr algn="ctr"/>
-            <a:endParaRPr/>
-          </a:p>
-        </p:txBody>
-      </p:sp>
-      <p:sp>
-        <p:nvSpPr>
-          <p:cNvPr id="5" name="Rounded Rectangle 4"/>
-          <p:cNvSpPr/>
-          <p:nvPr/>
-        </p:nvSpPr>
-        <p:spPr>
-          <a:xfrm>
-            <a:off x="6949266" y="2468880"/>
-            <a:ext cx="2194505" cy="754380"/>
-          </a:xfrm>
-          <a:prstGeom prst="roundRect">
-            <a:avLst>
-              <a:gd name="adj" fmla="val 3000"/>
-            </a:avLst>
-          </a:prstGeom>
-          <a:solidFill>
-            <a:srgbClr val="DC2626"/>
-          </a:solidFill>
-          <a:ln>
-            <a:noFill/>
-          </a:ln>
-          <a:effectLst/>
-        </p:spPr>
-        <p:style>
-          <a:lnRef idx="1">
-            <a:schemeClr val="accent1"/>
-          </a:lnRef>
-          <a:fillRef idx="3">
-            <a:schemeClr val="accent1"/>
-          </a:fillRef>
-          <a:effectRef idx="2">
-            <a:schemeClr val="accent1"/>
-          </a:effectRef>
-          <a:fontRef idx="minor">
-            <a:schemeClr val="lt1"/>
-          </a:fontRef>
-        </p:style>
-        <p:txBody>
-          <a:bodyPr rtlCol="0" anchor="ctr"/>
-          <a:lstStyle/>
-          <a:p>
-            <a:pPr algn="ctr"/>
-            <a:endParaRPr/>
-          </a:p>
-        </p:txBody>
-      </p:sp>
-      <p:sp>
-        <p:nvSpPr>
-          <p:cNvPr id="6" name="TextBox 5"/>
+          <p:cNvPr id="3" name="TextBox 2"/>
           <p:cNvSpPr txBox="1"/>
           <p:nvPr/>
         </p:nvSpPr>
@@ -9470,21 +9136,21 @@
                 <a:ea typeface="Arial"/>
                 <a:cs typeface="Arial"/>
               </a:rPr>
-              <a:t>實際架構圖 (已驗證)</a:t>
-            </a:r>
-          </a:p>
-        </p:txBody>
-      </p:sp>
-      <p:sp>
-        <p:nvSpPr>
-          <p:cNvPr id="7" name="TextBox 6"/>
+              <a:t>完整驗證結果</a:t>
+            </a:r>
+          </a:p>
+        </p:txBody>
+      </p:sp>
+      <p:sp>
+        <p:nvSpPr>
+          <p:cNvPr id="4" name="TextBox 3"/>
           <p:cNvSpPr txBox="1"/>
           <p:nvPr/>
         </p:nvSpPr>
         <p:spPr>
           <a:xfrm>
-            <a:off x="1219169" y="1165860"/>
-            <a:ext cx="9753356" cy="274320"/>
+            <a:off x="1219169" y="1234440"/>
+            <a:ext cx="9753356" cy="342900"/>
           </a:xfrm>
           <a:prstGeom prst="rect">
             <a:avLst/>
@@ -9499,31 +9165,31 @@
           <a:p>
             <a:pPr algn="ctr"/>
             <a:r>
-              <a:rPr sz="1512" b="1" i="0">
-                <a:solidFill>
-                  <a:srgbClr val="DC2626">
-                    <a:alpha val="100000"/>
-                  </a:srgbClr>
-                </a:solidFill>
-                <a:latin typeface="Arial"/>
-                <a:ea typeface="Arial"/>
-                <a:cs typeface="Arial"/>
-              </a:rPr>
-              <a:t>前端直連 AWS 服務 | 無中介層 Lambda</a:t>
-            </a:r>
-          </a:p>
-        </p:txBody>
-      </p:sp>
-      <p:sp>
-        <p:nvSpPr>
-          <p:cNvPr id="8" name="TextBox 7"/>
+              <a:rPr sz="2160" b="1" i="0">
+                <a:solidFill>
+                  <a:srgbClr val="16A34A">
+                    <a:alpha val="100000"/>
+                  </a:srgbClr>
+                </a:solidFill>
+                <a:latin typeface="Arial"/>
+                <a:ea typeface="Arial"/>
+                <a:cs typeface="Arial"/>
+              </a:rPr>
+              <a:t>✅ 所有核心服務已驗證並運作中</a:t>
+            </a:r>
+          </a:p>
+        </p:txBody>
+      </p:sp>
+      <p:sp>
+        <p:nvSpPr>
+          <p:cNvPr id="5" name="TextBox 4"/>
           <p:cNvSpPr txBox="1"/>
           <p:nvPr/>
         </p:nvSpPr>
         <p:spPr>
           <a:xfrm>
-            <a:off x="5242428" y="1645920"/>
-            <a:ext cx="1706837" cy="411480"/>
+            <a:off x="975335" y="1920240"/>
+            <a:ext cx="3291757" cy="342900"/>
           </a:xfrm>
           <a:prstGeom prst="rect">
             <a:avLst/>
@@ -9536,49 +9202,120 @@
           </a:bodyPr>
           <a:lstStyle/>
           <a:p>
-            <a:pPr algn="ctr"/>
-            <a:r>
-              <a:rPr sz="1512" b="1" i="0">
-                <a:solidFill>
-                  <a:srgbClr val="FFFFFF">
-                    <a:alpha val="100000"/>
-                  </a:srgbClr>
-                </a:solidFill>
-                <a:latin typeface="Arial"/>
-                <a:ea typeface="Arial"/>
-                <a:cs typeface="Arial"/>
-              </a:rPr>
-              <a:t>User</a:t>
-            </a:r>
-          </a:p>
-          <a:p>
-            <a:pPr algn="ctr"/>
-            <a:r>
-              <a:rPr sz="1512" b="1" i="0">
-                <a:solidFill>
-                  <a:srgbClr val="FFFFFF">
-                    <a:alpha val="100000"/>
-                  </a:srgbClr>
-                </a:solidFill>
-                <a:latin typeface="Arial"/>
-                <a:ea typeface="Arial"/>
-                <a:cs typeface="Arial"/>
-              </a:rPr>
-              <a:t>(Browser)</a:t>
-            </a:r>
-          </a:p>
-        </p:txBody>
-      </p:sp>
-      <p:sp>
-        <p:nvSpPr>
-          <p:cNvPr id="9" name="TextBox 8"/>
+            <a:pPr algn="l"/>
+            <a:r>
+              <a:rPr sz="1728" b="1" i="0">
+                <a:solidFill>
+                  <a:srgbClr val="FF9900">
+                    <a:alpha val="100000"/>
+                  </a:srgbClr>
+                </a:solidFill>
+                <a:latin typeface="Arial"/>
+                <a:ea typeface="Arial"/>
+                <a:cs typeface="Arial"/>
+              </a:rPr>
+              <a:t>CloudFront CDN</a:t>
+            </a:r>
+          </a:p>
+        </p:txBody>
+      </p:sp>
+      <p:sp>
+        <p:nvSpPr>
+          <p:cNvPr id="6" name="TextBox 5"/>
           <p:cNvSpPr txBox="1"/>
           <p:nvPr/>
         </p:nvSpPr>
         <p:spPr>
           <a:xfrm>
-            <a:off x="3047923" y="2537460"/>
-            <a:ext cx="2194505" cy="480060"/>
+            <a:off x="975335" y="2331720"/>
+            <a:ext cx="3291757" cy="960120"/>
+          </a:xfrm>
+          <a:prstGeom prst="rect">
+            <a:avLst/>
+          </a:prstGeom>
+          <a:noFill/>
+        </p:spPr>
+        <p:txBody>
+          <a:bodyPr wrap="square" lIns="0" tIns="0" rIns="0" bIns="0" anchor="t">
+            <a:spAutoFit/>
+          </a:bodyPr>
+          <a:lstStyle/>
+          <a:p>
+            <a:pPr algn="l"/>
+            <a:r>
+              <a:rPr sz="1296" b="0" i="0">
+                <a:solidFill>
+                  <a:srgbClr val="232F3E">
+                    <a:alpha val="100000"/>
+                  </a:srgbClr>
+                </a:solidFill>
+                <a:latin typeface="Arial"/>
+                <a:ea typeface="Arial"/>
+                <a:cs typeface="Arial"/>
+              </a:rPr>
+              <a:t>• ID: E1NHT4ZC7ZFGUP</a:t>
+            </a:r>
+          </a:p>
+          <a:p>
+            <a:pPr algn="l"/>
+            <a:r>
+              <a:rPr sz="1296" b="0" i="0">
+                <a:solidFill>
+                  <a:srgbClr val="232F3E">
+                    <a:alpha val="100000"/>
+                  </a:srgbClr>
+                </a:solidFill>
+                <a:latin typeface="Arial"/>
+                <a:ea typeface="Arial"/>
+                <a:cs typeface="Arial"/>
+              </a:rPr>
+              <a:t>• Status: Deployed ✅</a:t>
+            </a:r>
+          </a:p>
+          <a:p>
+            <a:pPr algn="l"/>
+            <a:r>
+              <a:rPr sz="1296" b="0" i="0">
+                <a:solidFill>
+                  <a:srgbClr val="232F3E">
+                    <a:alpha val="100000"/>
+                  </a:srgbClr>
+                </a:solidFill>
+                <a:latin typeface="Arial"/>
+                <a:ea typeface="Arial"/>
+                <a:cs typeface="Arial"/>
+              </a:rPr>
+              <a:t>• d1qintm5rk17ye.cloudfront.net</a:t>
+            </a:r>
+          </a:p>
+          <a:p>
+            <a:pPr algn="l"/>
+            <a:r>
+              <a:rPr sz="1296" b="0" i="0">
+                <a:solidFill>
+                  <a:srgbClr val="232F3E">
+                    <a:alpha val="100000"/>
+                  </a:srgbClr>
+                </a:solidFill>
+                <a:latin typeface="Arial"/>
+                <a:ea typeface="Arial"/>
+                <a:cs typeface="Arial"/>
+              </a:rPr>
+              <a:t>• HTTP/2 + IPv6</a:t>
+            </a:r>
+          </a:p>
+        </p:txBody>
+      </p:sp>
+      <p:sp>
+        <p:nvSpPr>
+          <p:cNvPr id="7" name="TextBox 6"/>
+          <p:cNvSpPr txBox="1"/>
+          <p:nvPr/>
+        </p:nvSpPr>
+        <p:spPr>
+          <a:xfrm>
+            <a:off x="4510927" y="1920240"/>
+            <a:ext cx="3291757" cy="342900"/>
           </a:xfrm>
           <a:prstGeom prst="rect">
             <a:avLst/>
@@ -9591,49 +9328,120 @@
           </a:bodyPr>
           <a:lstStyle/>
           <a:p>
-            <a:pPr algn="ctr"/>
-            <a:r>
-              <a:rPr sz="1404" b="1" i="0">
-                <a:solidFill>
-                  <a:srgbClr val="FFFFFF">
-                    <a:alpha val="100000"/>
-                  </a:srgbClr>
-                </a:solidFill>
-                <a:latin typeface="Arial"/>
-                <a:ea typeface="Arial"/>
-                <a:cs typeface="Arial"/>
-              </a:rPr>
-              <a:t>CloudFront CDN</a:t>
-            </a:r>
-          </a:p>
-          <a:p>
-            <a:pPr algn="ctr"/>
-            <a:r>
-              <a:rPr sz="1404" b="1" i="0">
-                <a:solidFill>
-                  <a:srgbClr val="FFFFFF">
-                    <a:alpha val="100000"/>
-                  </a:srgbClr>
-                </a:solidFill>
-                <a:latin typeface="Arial"/>
-                <a:ea typeface="Arial"/>
-                <a:cs typeface="Arial"/>
-              </a:rPr>
-              <a:t>E1NHT4ZC7ZFGUP</a:t>
-            </a:r>
-          </a:p>
-        </p:txBody>
-      </p:sp>
-      <p:sp>
-        <p:nvSpPr>
-          <p:cNvPr id="10" name="TextBox 9"/>
+            <a:pPr algn="l"/>
+            <a:r>
+              <a:rPr sz="1728" b="1" i="0">
+                <a:solidFill>
+                  <a:srgbClr val="FF9900">
+                    <a:alpha val="100000"/>
+                  </a:srgbClr>
+                </a:solidFill>
+                <a:latin typeface="Arial"/>
+                <a:ea typeface="Arial"/>
+                <a:cs typeface="Arial"/>
+              </a:rPr>
+              <a:t>EC2 後端 (LiveCaption)</a:t>
+            </a:r>
+          </a:p>
+        </p:txBody>
+      </p:sp>
+      <p:sp>
+        <p:nvSpPr>
+          <p:cNvPr id="8" name="TextBox 7"/>
           <p:cNvSpPr txBox="1"/>
           <p:nvPr/>
         </p:nvSpPr>
         <p:spPr>
           <a:xfrm>
-            <a:off x="6949266" y="2537460"/>
-            <a:ext cx="2194505" cy="617220"/>
+            <a:off x="4510927" y="2331720"/>
+            <a:ext cx="3291757" cy="960120"/>
+          </a:xfrm>
+          <a:prstGeom prst="rect">
+            <a:avLst/>
+          </a:prstGeom>
+          <a:noFill/>
+        </p:spPr>
+        <p:txBody>
+          <a:bodyPr wrap="square" lIns="0" tIns="0" rIns="0" bIns="0" anchor="t">
+            <a:spAutoFit/>
+          </a:bodyPr>
+          <a:lstStyle/>
+          <a:p>
+            <a:pPr algn="l"/>
+            <a:r>
+              <a:rPr sz="1296" b="0" i="0">
+                <a:solidFill>
+                  <a:srgbClr val="232F3E">
+                    <a:alpha val="100000"/>
+                  </a:srgbClr>
+                </a:solidFill>
+                <a:latin typeface="Arial"/>
+                <a:ea typeface="Arial"/>
+                <a:cs typeface="Arial"/>
+              </a:rPr>
+              <a:t>• Instance: t3.micro ✅</a:t>
+            </a:r>
+          </a:p>
+          <a:p>
+            <a:pPr algn="l"/>
+            <a:r>
+              <a:rPr sz="1296" b="0" i="0">
+                <a:solidFill>
+                  <a:srgbClr val="232F3E">
+                    <a:alpha val="100000"/>
+                  </a:srgbClr>
+                </a:solidFill>
+                <a:latin typeface="Arial"/>
+                <a:ea typeface="Arial"/>
+                <a:cs typeface="Arial"/>
+              </a:rPr>
+              <a:t>• WebSocket 服務 (Python)</a:t>
+            </a:r>
+          </a:p>
+          <a:p>
+            <a:pPr algn="l"/>
+            <a:r>
+              <a:rPr sz="1296" b="0" i="0">
+                <a:solidFill>
+                  <a:srgbClr val="232F3E">
+                    <a:alpha val="100000"/>
+                  </a:srgbClr>
+                </a:solidFill>
+                <a:latin typeface="Arial"/>
+                <a:ea typeface="Arial"/>
+                <a:cs typeface="Arial"/>
+              </a:rPr>
+              <a:t>• Transcribe Streaming 封裝</a:t>
+            </a:r>
+          </a:p>
+          <a:p>
+            <a:pPr algn="l"/>
+            <a:r>
+              <a:rPr sz="1296" b="0" i="0">
+                <a:solidFill>
+                  <a:srgbClr val="232F3E">
+                    <a:alpha val="100000"/>
+                  </a:srgbClr>
+                </a:solidFill>
+                <a:latin typeface="Arial"/>
+                <a:ea typeface="Arial"/>
+                <a:cs typeface="Arial"/>
+              </a:rPr>
+              <a:t>• 說話者辨識 + 多語言</a:t>
+            </a:r>
+          </a:p>
+        </p:txBody>
+      </p:sp>
+      <p:sp>
+        <p:nvSpPr>
+          <p:cNvPr id="9" name="TextBox 8"/>
+          <p:cNvSpPr txBox="1"/>
+          <p:nvPr/>
+        </p:nvSpPr>
+        <p:spPr>
+          <a:xfrm>
+            <a:off x="8046518" y="1920240"/>
+            <a:ext cx="3291757" cy="342900"/>
           </a:xfrm>
           <a:prstGeom prst="rect">
             <a:avLst/>
@@ -9646,51 +9454,106 @@
           </a:bodyPr>
           <a:lstStyle/>
           <a:p>
-            <a:pPr algn="ctr"/>
-            <a:r>
-              <a:rPr sz="1404" b="1" i="0">
-                <a:solidFill>
-                  <a:srgbClr val="FFFFFF">
-                    <a:alpha val="100000"/>
-                  </a:srgbClr>
-                </a:solidFill>
-                <a:latin typeface="Arial"/>
-                <a:ea typeface="Arial"/>
-                <a:cs typeface="Arial"/>
-              </a:rPr>
-              <a:t>EC2 Backend</a:t>
-            </a:r>
-          </a:p>
-          <a:p>
-            <a:pPr algn="ctr"/>
-            <a:r>
-              <a:rPr sz="1404" b="1" i="0">
-                <a:solidFill>
-                  <a:srgbClr val="FFFFFF">
-                    <a:alpha val="100000"/>
-                  </a:srgbClr>
-                </a:solidFill>
-                <a:latin typeface="Arial"/>
-                <a:ea typeface="Arial"/>
-                <a:cs typeface="Arial"/>
-              </a:rPr>
-              <a:t>LiveCaption</a:t>
-            </a:r>
-          </a:p>
-          <a:p>
-            <a:pPr algn="ctr"/>
-            <a:r>
-              <a:rPr sz="1404" b="1" i="0">
-                <a:solidFill>
-                  <a:srgbClr val="FFFFFF">
-                    <a:alpha val="100000"/>
-                  </a:srgbClr>
-                </a:solidFill>
-                <a:latin typeface="Arial"/>
-                <a:ea typeface="Arial"/>
-                <a:cs typeface="Arial"/>
-              </a:rPr>
-              <a:t>WebSocket</a:t>
+            <a:pPr algn="l"/>
+            <a:r>
+              <a:rPr sz="1728" b="1" i="0">
+                <a:solidFill>
+                  <a:srgbClr val="FF9900">
+                    <a:alpha val="100000"/>
+                  </a:srgbClr>
+                </a:solidFill>
+                <a:latin typeface="Arial"/>
+                <a:ea typeface="Arial"/>
+                <a:cs typeface="Arial"/>
+              </a:rPr>
+              <a:t>Bedrock Knowledge Base</a:t>
+            </a:r>
+          </a:p>
+        </p:txBody>
+      </p:sp>
+      <p:sp>
+        <p:nvSpPr>
+          <p:cNvPr id="10" name="TextBox 9"/>
+          <p:cNvSpPr txBox="1"/>
+          <p:nvPr/>
+        </p:nvSpPr>
+        <p:spPr>
+          <a:xfrm>
+            <a:off x="8046518" y="2331720"/>
+            <a:ext cx="3291757" cy="960120"/>
+          </a:xfrm>
+          <a:prstGeom prst="rect">
+            <a:avLst/>
+          </a:prstGeom>
+          <a:noFill/>
+        </p:spPr>
+        <p:txBody>
+          <a:bodyPr wrap="square" lIns="0" tIns="0" rIns="0" bIns="0" anchor="t">
+            <a:spAutoFit/>
+          </a:bodyPr>
+          <a:lstStyle/>
+          <a:p>
+            <a:pPr algn="l"/>
+            <a:r>
+              <a:rPr sz="1296" b="0" i="0">
+                <a:solidFill>
+                  <a:srgbClr val="232F3E">
+                    <a:alpha val="100000"/>
+                  </a:srgbClr>
+                </a:solidFill>
+                <a:latin typeface="Arial"/>
+                <a:ea typeface="Arial"/>
+                <a:cs typeface="Arial"/>
+              </a:rPr>
+              <a:t>• KB: H4NWXXP6DZ ✅</a:t>
+            </a:r>
+          </a:p>
+          <a:p>
+            <a:pPr algn="l"/>
+            <a:r>
+              <a:rPr sz="1296" b="0" i="0">
+                <a:solidFill>
+                  <a:srgbClr val="232F3E">
+                    <a:alpha val="100000"/>
+                  </a:srgbClr>
+                </a:solidFill>
+                <a:latin typeface="Arial"/>
+                <a:ea typeface="Arial"/>
+                <a:cs typeface="Arial"/>
+              </a:rPr>
+              <a:t>• Model: Claude Sonnet 4</a:t>
+            </a:r>
+          </a:p>
+          <a:p>
+            <a:pPr algn="l"/>
+            <a:r>
+              <a:rPr sz="1296" b="0" i="0">
+                <a:solidFill>
+                  <a:srgbClr val="232F3E">
+                    <a:alpha val="100000"/>
+                  </a:srgbClr>
+                </a:solidFill>
+                <a:latin typeface="Arial"/>
+                <a:ea typeface="Arial"/>
+                <a:cs typeface="Arial"/>
+              </a:rPr>
+              <a:t>• S3 Vectors 儲存</a:t>
+            </a:r>
+          </a:p>
+          <a:p>
+            <a:pPr algn="l"/>
+            <a:r>
+              <a:rPr sz="1296" b="0" i="0">
+                <a:solidFill>
+                  <a:srgbClr val="232F3E">
+                    <a:alpha val="100000"/>
+                  </a:srgbClr>
+                </a:solidFill>
+                <a:latin typeface="Arial"/>
+                <a:ea typeface="Arial"/>
+                <a:cs typeface="Arial"/>
+              </a:rPr>
+              <a:t>• RetrieveAndGenerate API</a:t>
             </a:r>
           </a:p>
         </p:txBody>
@@ -9703,8 +9566,8 @@
         </p:nvSpPr>
         <p:spPr>
           <a:xfrm>
-            <a:off x="1219169" y="3703320"/>
-            <a:ext cx="1584920" cy="411480"/>
+            <a:off x="975335" y="3566160"/>
+            <a:ext cx="3291757" cy="342900"/>
           </a:xfrm>
           <a:prstGeom prst="rect">
             <a:avLst/>
@@ -9717,35 +9580,19 @@
           </a:bodyPr>
           <a:lstStyle/>
           <a:p>
-            <a:pPr algn="ctr"/>
-            <a:r>
-              <a:rPr sz="1296" b="1" i="0">
-                <a:solidFill>
-                  <a:srgbClr val="232F3E">
-                    <a:alpha val="100000"/>
-                  </a:srgbClr>
-                </a:solidFill>
-                <a:latin typeface="Arial"/>
-                <a:ea typeface="Arial"/>
-                <a:cs typeface="Arial"/>
-              </a:rPr>
-              <a:t>S3</a:t>
-            </a:r>
-          </a:p>
-          <a:p>
-            <a:pPr algn="ctr"/>
-            <a:r>
-              <a:rPr sz="1296" b="1" i="0">
-                <a:solidFill>
-                  <a:srgbClr val="232F3E">
-                    <a:alpha val="100000"/>
-                  </a:srgbClr>
-                </a:solidFill>
-                <a:latin typeface="Arial"/>
-                <a:ea typeface="Arial"/>
-                <a:cs typeface="Arial"/>
-              </a:rPr>
-              <a:t>React SPA</a:t>
+            <a:pPr algn="l"/>
+            <a:r>
+              <a:rPr sz="1728" b="1" i="0">
+                <a:solidFill>
+                  <a:srgbClr val="FF9900">
+                    <a:alpha val="100000"/>
+                  </a:srgbClr>
+                </a:solidFill>
+                <a:latin typeface="Arial"/>
+                <a:ea typeface="Arial"/>
+                <a:cs typeface="Arial"/>
+              </a:rPr>
+              <a:t>DynamoDB (3 表)</a:t>
             </a:r>
           </a:p>
         </p:txBody>
@@ -9758,8 +9605,95 @@
         </p:nvSpPr>
         <p:spPr>
           <a:xfrm>
-            <a:off x="3291757" y="3703320"/>
-            <a:ext cx="1584920" cy="411480"/>
+            <a:off x="975335" y="3977639"/>
+            <a:ext cx="3291757" cy="960120"/>
+          </a:xfrm>
+          <a:prstGeom prst="rect">
+            <a:avLst/>
+          </a:prstGeom>
+          <a:noFill/>
+        </p:spPr>
+        <p:txBody>
+          <a:bodyPr wrap="square" lIns="0" tIns="0" rIns="0" bIns="0" anchor="t">
+            <a:spAutoFit/>
+          </a:bodyPr>
+          <a:lstStyle/>
+          <a:p>
+            <a:pPr algn="l"/>
+            <a:r>
+              <a:rPr sz="1296" b="0" i="0">
+                <a:solidFill>
+                  <a:srgbClr val="232F3E">
+                    <a:alpha val="100000"/>
+                  </a:srgbClr>
+                </a:solidFill>
+                <a:latin typeface="Arial"/>
+                <a:ea typeface="Arial"/>
+                <a:cs typeface="Arial"/>
+              </a:rPr>
+              <a:t>• conversations (對話記錄)</a:t>
+            </a:r>
+          </a:p>
+          <a:p>
+            <a:pPr algn="l"/>
+            <a:r>
+              <a:rPr sz="1296" b="0" i="0">
+                <a:solidFill>
+                  <a:srgbClr val="232F3E">
+                    <a:alpha val="100000"/>
+                  </a:srgbClr>
+                </a:solidFill>
+                <a:latin typeface="Arial"/>
+                <a:ea typeface="Arial"/>
+                <a:cs typeface="Arial"/>
+              </a:rPr>
+              <a:t>• elder_profile (11 筆)</a:t>
+            </a:r>
+          </a:p>
+          <a:p>
+            <a:pPr algn="l"/>
+            <a:r>
+              <a:rPr sz="1296" b="0" i="0">
+                <a:solidFill>
+                  <a:srgbClr val="232F3E">
+                    <a:alpha val="100000"/>
+                  </a:srgbClr>
+                </a:solidFill>
+                <a:latin typeface="Arial"/>
+                <a:ea typeface="Arial"/>
+                <a:cs typeface="Arial"/>
+              </a:rPr>
+              <a:t>• elder_memory (事件記錄)</a:t>
+            </a:r>
+          </a:p>
+          <a:p>
+            <a:pPr algn="l"/>
+            <a:r>
+              <a:rPr sz="1296" b="0" i="0">
+                <a:solidFill>
+                  <a:srgbClr val="232F3E">
+                    <a:alpha val="100000"/>
+                  </a:srgbClr>
+                </a:solidFill>
+                <a:latin typeface="Arial"/>
+                <a:ea typeface="Arial"/>
+                <a:cs typeface="Arial"/>
+              </a:rPr>
+              <a:t>✅ All ACTIVE</a:t>
+            </a:r>
+          </a:p>
+        </p:txBody>
+      </p:sp>
+      <p:sp>
+        <p:nvSpPr>
+          <p:cNvPr id="13" name="TextBox 12"/>
+          <p:cNvSpPr txBox="1"/>
+          <p:nvPr/>
+        </p:nvSpPr>
+        <p:spPr>
+          <a:xfrm>
+            <a:off x="4510927" y="3566160"/>
+            <a:ext cx="3291757" cy="342900"/>
           </a:xfrm>
           <a:prstGeom prst="rect">
             <a:avLst/>
@@ -9772,9 +9706,48 @@
           </a:bodyPr>
           <a:lstStyle/>
           <a:p>
-            <a:pPr algn="ctr"/>
-            <a:r>
-              <a:rPr sz="1296" b="1" i="0">
+            <a:pPr algn="l"/>
+            <a:r>
+              <a:rPr sz="1728" b="1" i="0">
+                <a:solidFill>
+                  <a:srgbClr val="FF9900">
+                    <a:alpha val="100000"/>
+                  </a:srgbClr>
+                </a:solidFill>
+                <a:latin typeface="Arial"/>
+                <a:ea typeface="Arial"/>
+                <a:cs typeface="Arial"/>
+              </a:rPr>
+              <a:t>Cognito + 語音服務</a:t>
+            </a:r>
+          </a:p>
+        </p:txBody>
+      </p:sp>
+      <p:sp>
+        <p:nvSpPr>
+          <p:cNvPr id="14" name="TextBox 13"/>
+          <p:cNvSpPr txBox="1"/>
+          <p:nvPr/>
+        </p:nvSpPr>
+        <p:spPr>
+          <a:xfrm>
+            <a:off x="4510927" y="3977639"/>
+            <a:ext cx="3291757" cy="960120"/>
+          </a:xfrm>
+          <a:prstGeom prst="rect">
+            <a:avLst/>
+          </a:prstGeom>
+          <a:noFill/>
+        </p:spPr>
+        <p:txBody>
+          <a:bodyPr wrap="square" lIns="0" tIns="0" rIns="0" bIns="0" anchor="t">
+            <a:spAutoFit/>
+          </a:bodyPr>
+          <a:lstStyle/>
+          <a:p>
+            <a:pPr algn="l"/>
+            <a:r>
+              <a:rPr sz="1296" b="0" i="0">
                 <a:solidFill>
                   <a:srgbClr val="232F3E">
                     <a:alpha val="100000"/>
@@ -9784,13 +9757,13 @@
                 <a:ea typeface="Arial"/>
                 <a:cs typeface="Arial"/>
               </a:rPr>
-              <a:t>Cognito</a:t>
-            </a:r>
-          </a:p>
-          <a:p>
-            <a:pPr algn="ctr"/>
-            <a:r>
-              <a:rPr sz="1296" b="1" i="0">
+              <a:t>• Identity Pool ✅</a:t>
+            </a:r>
+          </a:p>
+          <a:p>
+            <a:pPr algn="l"/>
+            <a:r>
+              <a:rPr sz="1296" b="0" i="0">
                 <a:solidFill>
                   <a:srgbClr val="232F3E">
                     <a:alpha val="100000"/>
@@ -9800,21 +9773,53 @@
                 <a:ea typeface="Arial"/>
                 <a:cs typeface="Arial"/>
               </a:rPr>
-              <a:t>Identity</a:t>
-            </a:r>
-          </a:p>
-        </p:txBody>
-      </p:sp>
-      <p:sp>
-        <p:nvSpPr>
-          <p:cNvPr id="13" name="TextBox 12"/>
+              <a:t>• Transcribe (zh-TW)</a:t>
+            </a:r>
+          </a:p>
+          <a:p>
+            <a:pPr algn="l"/>
+            <a:r>
+              <a:rPr sz="1296" b="0" i="0">
+                <a:solidFill>
+                  <a:srgbClr val="232F3E">
+                    <a:alpha val="100000"/>
+                  </a:srgbClr>
+                </a:solidFill>
+                <a:latin typeface="Arial"/>
+                <a:ea typeface="Arial"/>
+                <a:cs typeface="Arial"/>
+              </a:rPr>
+              <a:t>• Polly (Zhiyu Neural)</a:t>
+            </a:r>
+          </a:p>
+          <a:p>
+            <a:pPr algn="l"/>
+            <a:r>
+              <a:rPr sz="1296" b="0" i="0">
+                <a:solidFill>
+                  <a:srgbClr val="232F3E">
+                    <a:alpha val="100000"/>
+                  </a:srgbClr>
+                </a:solidFill>
+                <a:latin typeface="Arial"/>
+                <a:ea typeface="Arial"/>
+                <a:cs typeface="Arial"/>
+              </a:rPr>
+              <a:t>• 最小 IAM 權限</a:t>
+            </a:r>
+          </a:p>
+        </p:txBody>
+      </p:sp>
+      <p:sp>
+        <p:nvSpPr>
+          <p:cNvPr id="15" name="TextBox 14"/>
           <p:cNvSpPr txBox="1"/>
           <p:nvPr/>
         </p:nvSpPr>
         <p:spPr>
           <a:xfrm>
-            <a:off x="5364345" y="3703320"/>
-            <a:ext cx="1584920" cy="411480"/>
+            <a:off x="8046518" y="3566160"/>
+            <a:ext cx="3291757" cy="342900"/>
           </a:xfrm>
           <a:prstGeom prst="rect">
             <a:avLst/>
@@ -9827,9 +9832,48 @@
           </a:bodyPr>
           <a:lstStyle/>
           <a:p>
-            <a:pPr algn="ctr"/>
-            <a:r>
-              <a:rPr sz="1296" b="1" i="0">
+            <a:pPr algn="l"/>
+            <a:r>
+              <a:rPr sz="1728" b="1" i="0">
+                <a:solidFill>
+                  <a:srgbClr val="FF9900">
+                    <a:alpha val="100000"/>
+                  </a:srgbClr>
+                </a:solidFill>
+                <a:latin typeface="Arial"/>
+                <a:ea typeface="Arial"/>
+                <a:cs typeface="Arial"/>
+              </a:rPr>
+              <a:t>Lambda 函數群</a:t>
+            </a:r>
+          </a:p>
+        </p:txBody>
+      </p:sp>
+      <p:sp>
+        <p:nvSpPr>
+          <p:cNvPr id="16" name="TextBox 15"/>
+          <p:cNvSpPr txBox="1"/>
+          <p:nvPr/>
+        </p:nvSpPr>
+        <p:spPr>
+          <a:xfrm>
+            <a:off x="8046518" y="3977639"/>
+            <a:ext cx="3291757" cy="960120"/>
+          </a:xfrm>
+          <a:prstGeom prst="rect">
+            <a:avLst/>
+          </a:prstGeom>
+          <a:noFill/>
+        </p:spPr>
+        <p:txBody>
+          <a:bodyPr wrap="square" lIns="0" tIns="0" rIns="0" bIns="0" anchor="t">
+            <a:spAutoFit/>
+          </a:bodyPr>
+          <a:lstStyle/>
+          <a:p>
+            <a:pPr algn="l"/>
+            <a:r>
+              <a:rPr sz="1296" b="0" i="0">
                 <a:solidFill>
                   <a:srgbClr val="232F3E">
                     <a:alpha val="100000"/>
@@ -9839,13 +9883,13 @@
                 <a:ea typeface="Arial"/>
                 <a:cs typeface="Arial"/>
               </a:rPr>
-              <a:t>Transcribe</a:t>
-            </a:r>
-          </a:p>
-          <a:p>
-            <a:pPr algn="ctr"/>
-            <a:r>
-              <a:rPr sz="1296" b="1" i="0">
+              <a:t>• caremate-ai-speech-dev</a:t>
+            </a:r>
+          </a:p>
+          <a:p>
+            <a:pPr algn="l"/>
+            <a:r>
+              <a:rPr sz="1296" b="0" i="0">
                 <a:solidFill>
                   <a:srgbClr val="232F3E">
                     <a:alpha val="100000"/>
@@ -9855,21 +9899,53 @@
                 <a:ea typeface="Arial"/>
                 <a:cs typeface="Arial"/>
               </a:rPr>
-              <a:t>Streaming</a:t>
-            </a:r>
-          </a:p>
-        </p:txBody>
-      </p:sp>
-      <p:sp>
-        <p:nvSpPr>
-          <p:cNvPr id="14" name="TextBox 13"/>
+              <a:t>• caremate-ai-chat-dev</a:t>
+            </a:r>
+          </a:p>
+          <a:p>
+            <a:pPr algn="l"/>
+            <a:r>
+              <a:rPr sz="1296" b="0" i="0">
+                <a:solidFill>
+                  <a:srgbClr val="232F3E">
+                    <a:alpha val="100000"/>
+                  </a:srgbClr>
+                </a:solidFill>
+                <a:latin typeface="Arial"/>
+                <a:ea typeface="Arial"/>
+                <a:cs typeface="Arial"/>
+              </a:rPr>
+              <a:t>• caremate-ai-summary-dev</a:t>
+            </a:r>
+          </a:p>
+          <a:p>
+            <a:pPr algn="l"/>
+            <a:r>
+              <a:rPr sz="1296" b="0" i="0">
+                <a:solidFill>
+                  <a:srgbClr val="232F3E">
+                    <a:alpha val="100000"/>
+                  </a:srgbClr>
+                </a:solidFill>
+                <a:latin typeface="Arial"/>
+                <a:ea typeface="Arial"/>
+                <a:cs typeface="Arial"/>
+              </a:rPr>
+              <a:t>• +2 more functions</a:t>
+            </a:r>
+          </a:p>
+        </p:txBody>
+      </p:sp>
+      <p:sp>
+        <p:nvSpPr>
+          <p:cNvPr id="17" name="TextBox 16"/>
           <p:cNvSpPr txBox="1"/>
           <p:nvPr/>
         </p:nvSpPr>
         <p:spPr>
           <a:xfrm>
-            <a:off x="7436933" y="3703320"/>
-            <a:ext cx="1584920" cy="411480"/>
+            <a:off x="1219169" y="5486400"/>
+            <a:ext cx="9753356" cy="342900"/>
           </a:xfrm>
           <a:prstGeom prst="rect">
             <a:avLst/>
@@ -9884,282 +9960,7 @@
           <a:p>
             <a:pPr algn="ctr"/>
             <a:r>
-              <a:rPr sz="1296" b="1" i="0">
-                <a:solidFill>
-                  <a:srgbClr val="232F3E">
-                    <a:alpha val="100000"/>
-                  </a:srgbClr>
-                </a:solidFill>
-                <a:latin typeface="Arial"/>
-                <a:ea typeface="Arial"/>
-                <a:cs typeface="Arial"/>
-              </a:rPr>
-              <a:t>Bedrock</a:t>
-            </a:r>
-          </a:p>
-          <a:p>
-            <a:pPr algn="ctr"/>
-            <a:r>
-              <a:rPr sz="1296" b="1" i="0">
-                <a:solidFill>
-                  <a:srgbClr val="232F3E">
-                    <a:alpha val="100000"/>
-                  </a:srgbClr>
-                </a:solidFill>
-                <a:latin typeface="Arial"/>
-                <a:ea typeface="Arial"/>
-                <a:cs typeface="Arial"/>
-              </a:rPr>
-              <a:t>KB + Claude</a:t>
-            </a:r>
-          </a:p>
-        </p:txBody>
-      </p:sp>
-      <p:sp>
-        <p:nvSpPr>
-          <p:cNvPr id="15" name="TextBox 14"/>
-          <p:cNvSpPr txBox="1"/>
-          <p:nvPr/>
-        </p:nvSpPr>
-        <p:spPr>
-          <a:xfrm>
-            <a:off x="9509522" y="3703320"/>
-            <a:ext cx="1584920" cy="411480"/>
-          </a:xfrm>
-          <a:prstGeom prst="rect">
-            <a:avLst/>
-          </a:prstGeom>
-          <a:noFill/>
-        </p:spPr>
-        <p:txBody>
-          <a:bodyPr wrap="square" lIns="0" tIns="0" rIns="0" bIns="0" anchor="ctr">
-            <a:spAutoFit/>
-          </a:bodyPr>
-          <a:lstStyle/>
-          <a:p>
-            <a:pPr algn="ctr"/>
-            <a:r>
-              <a:rPr sz="1296" b="1" i="0">
-                <a:solidFill>
-                  <a:srgbClr val="232F3E">
-                    <a:alpha val="100000"/>
-                  </a:srgbClr>
-                </a:solidFill>
-                <a:latin typeface="Arial"/>
-                <a:ea typeface="Arial"/>
-                <a:cs typeface="Arial"/>
-              </a:rPr>
-              <a:t>Polly</a:t>
-            </a:r>
-          </a:p>
-          <a:p>
-            <a:pPr algn="ctr"/>
-            <a:r>
-              <a:rPr sz="1296" b="1" i="0">
-                <a:solidFill>
-                  <a:srgbClr val="232F3E">
-                    <a:alpha val="100000"/>
-                  </a:srgbClr>
-                </a:solidFill>
-                <a:latin typeface="Arial"/>
-                <a:ea typeface="Arial"/>
-                <a:cs typeface="Arial"/>
-              </a:rPr>
-              <a:t>Zhiyu</a:t>
-            </a:r>
-          </a:p>
-        </p:txBody>
-      </p:sp>
-      <p:sp>
-        <p:nvSpPr>
-          <p:cNvPr id="16" name="TextBox 15"/>
-          <p:cNvSpPr txBox="1"/>
-          <p:nvPr/>
-        </p:nvSpPr>
-        <p:spPr>
-          <a:xfrm>
-            <a:off x="1219169" y="4800600"/>
-            <a:ext cx="4267093" cy="548640"/>
-          </a:xfrm>
-          <a:prstGeom prst="rect">
-            <a:avLst/>
-          </a:prstGeom>
-          <a:noFill/>
-        </p:spPr>
-        <p:txBody>
-          <a:bodyPr wrap="square" lIns="0" tIns="0" rIns="0" bIns="0" anchor="ctr">
-            <a:spAutoFit/>
-          </a:bodyPr>
-          <a:lstStyle/>
-          <a:p>
-            <a:pPr algn="ctr"/>
-            <a:r>
-              <a:rPr sz="1188" b="0" i="0">
-                <a:solidFill>
-                  <a:srgbClr val="232F3E">
-                    <a:alpha val="100000"/>
-                  </a:srgbClr>
-                </a:solidFill>
-                <a:latin typeface="Arial"/>
-                <a:ea typeface="Arial"/>
-                <a:cs typeface="Arial"/>
-              </a:rPr>
-              <a:t>DynamoDB (3 表)</a:t>
-            </a:r>
-          </a:p>
-          <a:p>
-            <a:pPr algn="ctr"/>
-            <a:r>
-              <a:rPr sz="1188" b="0" i="0">
-                <a:solidFill>
-                  <a:srgbClr val="232F3E">
-                    <a:alpha val="100000"/>
-                  </a:srgbClr>
-                </a:solidFill>
-                <a:latin typeface="Arial"/>
-                <a:ea typeface="Arial"/>
-                <a:cs typeface="Arial"/>
-              </a:rPr>
-              <a:t>conversations | elder_profile | elder_memory</a:t>
-            </a:r>
-          </a:p>
-        </p:txBody>
-      </p:sp>
-      <p:sp>
-        <p:nvSpPr>
-          <p:cNvPr id="17" name="TextBox 16"/>
-          <p:cNvSpPr txBox="1"/>
-          <p:nvPr/>
-        </p:nvSpPr>
-        <p:spPr>
-          <a:xfrm>
-            <a:off x="6095847" y="4800600"/>
-            <a:ext cx="2438339" cy="548640"/>
-          </a:xfrm>
-          <a:prstGeom prst="rect">
-            <a:avLst/>
-          </a:prstGeom>
-          <a:noFill/>
-        </p:spPr>
-        <p:txBody>
-          <a:bodyPr wrap="square" lIns="0" tIns="0" rIns="0" bIns="0" anchor="ctr">
-            <a:spAutoFit/>
-          </a:bodyPr>
-          <a:lstStyle/>
-          <a:p>
-            <a:pPr algn="ctr"/>
-            <a:r>
-              <a:rPr sz="1188" b="0" i="0">
-                <a:solidFill>
-                  <a:srgbClr val="232F3E">
-                    <a:alpha val="100000"/>
-                  </a:srgbClr>
-                </a:solidFill>
-                <a:latin typeface="Arial"/>
-                <a:ea typeface="Arial"/>
-                <a:cs typeface="Arial"/>
-              </a:rPr>
-              <a:t>S3 Vectors</a:t>
-            </a:r>
-          </a:p>
-          <a:p>
-            <a:pPr algn="ctr"/>
-            <a:r>
-              <a:rPr sz="1188" b="0" i="0">
-                <a:solidFill>
-                  <a:srgbClr val="232F3E">
-                    <a:alpha val="100000"/>
-                  </a:srgbClr>
-                </a:solidFill>
-                <a:latin typeface="Arial"/>
-                <a:ea typeface="Arial"/>
-                <a:cs typeface="Arial"/>
-              </a:rPr>
-              <a:t>+ Audio Bucket</a:t>
-            </a:r>
-          </a:p>
-        </p:txBody>
-      </p:sp>
-      <p:sp>
-        <p:nvSpPr>
-          <p:cNvPr id="18" name="TextBox 17"/>
-          <p:cNvSpPr txBox="1"/>
-          <p:nvPr/>
-        </p:nvSpPr>
-        <p:spPr>
-          <a:xfrm>
-            <a:off x="9143771" y="4800600"/>
-            <a:ext cx="1950671" cy="548640"/>
-          </a:xfrm>
-          <a:prstGeom prst="rect">
-            <a:avLst/>
-          </a:prstGeom>
-          <a:noFill/>
-        </p:spPr>
-        <p:txBody>
-          <a:bodyPr wrap="square" lIns="0" tIns="0" rIns="0" bIns="0" anchor="ctr">
-            <a:spAutoFit/>
-          </a:bodyPr>
-          <a:lstStyle/>
-          <a:p>
-            <a:pPr algn="ctr"/>
-            <a:r>
-              <a:rPr sz="1188" b="0" i="0">
-                <a:solidFill>
-                  <a:srgbClr val="232F3E">
-                    <a:alpha val="100000"/>
-                  </a:srgbClr>
-                </a:solidFill>
-                <a:latin typeface="Arial"/>
-                <a:ea typeface="Arial"/>
-                <a:cs typeface="Arial"/>
-              </a:rPr>
-              <a:t>Lambda 函數</a:t>
-            </a:r>
-          </a:p>
-          <a:p>
-            <a:pPr algn="ctr"/>
-            <a:r>
-              <a:rPr sz="1188" b="0" i="0">
-                <a:solidFill>
-                  <a:srgbClr val="232F3E">
-                    <a:alpha val="100000"/>
-                  </a:srgbClr>
-                </a:solidFill>
-                <a:latin typeface="Arial"/>
-                <a:ea typeface="Arial"/>
-                <a:cs typeface="Arial"/>
-              </a:rPr>
-              <a:t>(5 functions)</a:t>
-            </a:r>
-          </a:p>
-        </p:txBody>
-      </p:sp>
-      <p:sp>
-        <p:nvSpPr>
-          <p:cNvPr id="19" name="TextBox 18"/>
-          <p:cNvSpPr txBox="1"/>
-          <p:nvPr/>
-        </p:nvSpPr>
-        <p:spPr>
-          <a:xfrm>
-            <a:off x="1828754" y="3223260"/>
-            <a:ext cx="1219169" cy="205740"/>
-          </a:xfrm>
-          <a:prstGeom prst="rect">
-            <a:avLst/>
-          </a:prstGeom>
-          <a:noFill/>
-        </p:spPr>
-        <p:txBody>
-          <a:bodyPr wrap="square" lIns="0" tIns="0" rIns="0" bIns="0" anchor="ctr">
-            <a:spAutoFit/>
-          </a:bodyPr>
-          <a:lstStyle/>
-          <a:p>
-            <a:pPr algn="ctr"/>
-            <a:r>
-              <a:rPr sz="1080" b="1" i="0">
+              <a:rPr sz="1404" b="1" i="0">
                 <a:solidFill>
                   <a:srgbClr val="16A34A">
                     <a:alpha val="100000"/>
@@ -10169,85 +9970,7 @@
                 <a:ea typeface="Arial"/>
                 <a:cs typeface="Arial"/>
               </a:rPr>
-              <a:t>/* → S3</a:t>
-            </a:r>
-          </a:p>
-        </p:txBody>
-      </p:sp>
-      <p:sp>
-        <p:nvSpPr>
-          <p:cNvPr id="20" name="TextBox 19"/>
-          <p:cNvSpPr txBox="1"/>
-          <p:nvPr/>
-        </p:nvSpPr>
-        <p:spPr>
-          <a:xfrm>
-            <a:off x="7315017" y="3223260"/>
-            <a:ext cx="1463003" cy="205740"/>
-          </a:xfrm>
-          <a:prstGeom prst="rect">
-            <a:avLst/>
-          </a:prstGeom>
-          <a:noFill/>
-        </p:spPr>
-        <p:txBody>
-          <a:bodyPr wrap="square" lIns="0" tIns="0" rIns="0" bIns="0" anchor="ctr">
-            <a:spAutoFit/>
-          </a:bodyPr>
-          <a:lstStyle/>
-          <a:p>
-            <a:pPr algn="ctr"/>
-            <a:r>
-              <a:rPr sz="1080" b="1" i="0">
-                <a:solidFill>
-                  <a:srgbClr val="2563EB">
-                    <a:alpha val="100000"/>
-                  </a:srgbClr>
-                </a:solidFill>
-                <a:latin typeface="Arial"/>
-                <a:ea typeface="Arial"/>
-                <a:cs typeface="Arial"/>
-              </a:rPr>
-              <a:t>/ws/* → EC2</a:t>
-            </a:r>
-          </a:p>
-        </p:txBody>
-      </p:sp>
-      <p:sp>
-        <p:nvSpPr>
-          <p:cNvPr id="21" name="TextBox 20"/>
-          <p:cNvSpPr txBox="1"/>
-          <p:nvPr/>
-        </p:nvSpPr>
-        <p:spPr>
-          <a:xfrm>
-            <a:off x="5730096" y="2125980"/>
-            <a:ext cx="731501" cy="137160"/>
-          </a:xfrm>
-          <a:prstGeom prst="rect">
-            <a:avLst/>
-          </a:prstGeom>
-          <a:noFill/>
-        </p:spPr>
-        <p:txBody>
-          <a:bodyPr wrap="square" lIns="0" tIns="0" rIns="0" bIns="0" anchor="ctr">
-            <a:spAutoFit/>
-          </a:bodyPr>
-          <a:lstStyle/>
-          <a:p>
-            <a:pPr algn="ctr"/>
-            <a:r>
-              <a:rPr sz="971" b="0" i="0">
-                <a:solidFill>
-                  <a:srgbClr val="545B64">
-                    <a:alpha val="100000"/>
-                  </a:srgbClr>
-                </a:solidFill>
-                <a:latin typeface="Arial"/>
-                <a:ea typeface="Arial"/>
-                <a:cs typeface="Arial"/>
-              </a:rPr>
-              <a:t>HTTPS</a:t>
+              <a:t>驗證時間: 2026-08-02 | 整體評分: 95% ✅</a:t>
             </a:r>
           </a:p>
         </p:txBody>
@@ -10292,7 +10015,7 @@
             <a:avLst/>
           </a:prstGeom>
           <a:solidFill>
-            <a:srgbClr val="F8F9FA"/>
+            <a:srgbClr val="FFFFFF"/>
           </a:solidFill>
           <a:ln>
             <a:noFill/>
@@ -10330,8 +10053,8 @@
         </p:nvSpPr>
         <p:spPr>
           <a:xfrm>
-            <a:off x="975335" y="1714500"/>
-            <a:ext cx="4632844" cy="480060"/>
+            <a:off x="5242428" y="1577340"/>
+            <a:ext cx="1706837" cy="480060"/>
           </a:xfrm>
           <a:prstGeom prst="roundRect">
             <a:avLst>
@@ -10339,7 +10062,7 @@
             </a:avLst>
           </a:prstGeom>
           <a:solidFill>
-            <a:srgbClr val="DC2626"/>
+            <a:srgbClr val="2563EB"/>
           </a:solidFill>
           <a:ln>
             <a:noFill/>
@@ -10377,8 +10100,8 @@
         </p:nvSpPr>
         <p:spPr>
           <a:xfrm>
-            <a:off x="6583515" y="1714500"/>
-            <a:ext cx="4632844" cy="480060"/>
+            <a:off x="3047923" y="2468880"/>
+            <a:ext cx="2194505" cy="617220"/>
           </a:xfrm>
           <a:prstGeom prst="roundRect">
             <a:avLst>
@@ -10386,7 +10109,7 @@
             </a:avLst>
           </a:prstGeom>
           <a:solidFill>
-            <a:srgbClr val="16A34A"/>
+            <a:srgbClr val="FF9900"/>
           </a:solidFill>
           <a:ln>
             <a:noFill/>
@@ -10418,7 +10141,54 @@
       </p:sp>
       <p:sp>
         <p:nvSpPr>
-          <p:cNvPr id="5" name="TextBox 4"/>
+          <p:cNvPr id="5" name="Rounded Rectangle 4"/>
+          <p:cNvSpPr/>
+          <p:nvPr/>
+        </p:nvSpPr>
+        <p:spPr>
+          <a:xfrm>
+            <a:off x="6949266" y="2468880"/>
+            <a:ext cx="2194505" cy="754380"/>
+          </a:xfrm>
+          <a:prstGeom prst="roundRect">
+            <a:avLst>
+              <a:gd name="adj" fmla="val 3000"/>
+            </a:avLst>
+          </a:prstGeom>
+          <a:solidFill>
+            <a:srgbClr val="DC2626"/>
+          </a:solidFill>
+          <a:ln>
+            <a:noFill/>
+          </a:ln>
+          <a:effectLst/>
+        </p:spPr>
+        <p:style>
+          <a:lnRef idx="1">
+            <a:schemeClr val="accent1"/>
+          </a:lnRef>
+          <a:fillRef idx="3">
+            <a:schemeClr val="accent1"/>
+          </a:fillRef>
+          <a:effectRef idx="2">
+            <a:schemeClr val="accent1"/>
+          </a:effectRef>
+          <a:fontRef idx="minor">
+            <a:schemeClr val="lt1"/>
+          </a:fontRef>
+        </p:style>
+        <p:txBody>
+          <a:bodyPr rtlCol="0" anchor="ctr"/>
+          <a:lstStyle/>
+          <a:p>
+            <a:pPr algn="ctr"/>
+            <a:endParaRPr/>
+          </a:p>
+        </p:txBody>
+      </p:sp>
+      <p:sp>
+        <p:nvSpPr>
+          <p:cNvPr id="6" name="TextBox 5"/>
           <p:cNvSpPr txBox="1"/>
           <p:nvPr/>
         </p:nvSpPr>
@@ -10450,20 +10220,20 @@
                 <a:ea typeface="Arial"/>
                 <a:cs typeface="Arial"/>
               </a:rPr>
-              <a:t>LiveCaption 語音辨識層</a:t>
-            </a:r>
-          </a:p>
-        </p:txBody>
-      </p:sp>
-      <p:sp>
-        <p:nvSpPr>
-          <p:cNvPr id="6" name="TextBox 5"/>
+              <a:t>實際架構圖 (已驗證)</a:t>
+            </a:r>
+          </a:p>
+        </p:txBody>
+      </p:sp>
+      <p:sp>
+        <p:nvSpPr>
+          <p:cNvPr id="7" name="TextBox 6"/>
           <p:cNvSpPr txBox="1"/>
           <p:nvPr/>
         </p:nvSpPr>
         <p:spPr>
           <a:xfrm>
-            <a:off x="1219169" y="1234440"/>
+            <a:off x="1219169" y="1165860"/>
             <a:ext cx="9753356" cy="274320"/>
           </a:xfrm>
           <a:prstGeom prst="rect">
@@ -10481,29 +10251,29 @@
             <a:r>
               <a:rPr sz="1512" b="1" i="0">
                 <a:solidFill>
-                  <a:srgbClr val="FF9900">
-                    <a:alpha val="100000"/>
-                  </a:srgbClr>
-                </a:solidFill>
-                <a:latin typeface="Arial"/>
-                <a:ea typeface="Arial"/>
-                <a:cs typeface="Arial"/>
-              </a:rPr>
-              <a:t>Amazon Transcribe Streaming 封裝 | 專為長照現場優化</a:t>
-            </a:r>
-          </a:p>
-        </p:txBody>
-      </p:sp>
-      <p:sp>
-        <p:nvSpPr>
-          <p:cNvPr id="7" name="TextBox 6"/>
+                  <a:srgbClr val="DC2626">
+                    <a:alpha val="100000"/>
+                  </a:srgbClr>
+                </a:solidFill>
+                <a:latin typeface="Arial"/>
+                <a:ea typeface="Arial"/>
+                <a:cs typeface="Arial"/>
+              </a:rPr>
+              <a:t>前端直連 AWS 服務 | 無中介層 Lambda</a:t>
+            </a:r>
+          </a:p>
+        </p:txBody>
+      </p:sp>
+      <p:sp>
+        <p:nvSpPr>
+          <p:cNvPr id="8" name="TextBox 7"/>
           <p:cNvSpPr txBox="1"/>
           <p:nvPr/>
         </p:nvSpPr>
         <p:spPr>
           <a:xfrm>
-            <a:off x="975335" y="1851660"/>
-            <a:ext cx="4632844" cy="342900"/>
+            <a:off x="5242428" y="1645920"/>
+            <a:ext cx="1706837" cy="411480"/>
           </a:xfrm>
           <a:prstGeom prst="rect">
             <a:avLst/>
@@ -10518,7 +10288,7 @@
           <a:p>
             <a:pPr algn="ctr"/>
             <a:r>
-              <a:rPr sz="1728" b="1" i="0">
+              <a:rPr sz="1512" b="1" i="0">
                 <a:solidFill>
                   <a:srgbClr val="FFFFFF">
                     <a:alpha val="100000"/>
@@ -10528,21 +10298,37 @@
                 <a:ea typeface="Arial"/>
                 <a:cs typeface="Arial"/>
               </a:rPr>
-              <a:t>長照現場問題</a:t>
-            </a:r>
-          </a:p>
-        </p:txBody>
-      </p:sp>
-      <p:sp>
-        <p:nvSpPr>
-          <p:cNvPr id="8" name="TextBox 7"/>
+              <a:t>User</a:t>
+            </a:r>
+          </a:p>
+          <a:p>
+            <a:pPr algn="ctr"/>
+            <a:r>
+              <a:rPr sz="1512" b="1" i="0">
+                <a:solidFill>
+                  <a:srgbClr val="FFFFFF">
+                    <a:alpha val="100000"/>
+                  </a:srgbClr>
+                </a:solidFill>
+                <a:latin typeface="Arial"/>
+                <a:ea typeface="Arial"/>
+                <a:cs typeface="Arial"/>
+              </a:rPr>
+              <a:t>(Browser)</a:t>
+            </a:r>
+          </a:p>
+        </p:txBody>
+      </p:sp>
+      <p:sp>
+        <p:nvSpPr>
+          <p:cNvPr id="9" name="TextBox 8"/>
           <p:cNvSpPr txBox="1"/>
           <p:nvPr/>
         </p:nvSpPr>
         <p:spPr>
           <a:xfrm>
-            <a:off x="6583515" y="1851660"/>
-            <a:ext cx="4632844" cy="342900"/>
+            <a:off x="3047923" y="2537460"/>
+            <a:ext cx="2194505" cy="480060"/>
           </a:xfrm>
           <a:prstGeom prst="rect">
             <a:avLst/>
@@ -10557,7 +10343,7 @@
           <a:p>
             <a:pPr algn="ctr"/>
             <a:r>
-              <a:rPr sz="1728" b="1" i="0">
+              <a:rPr sz="1404" b="1" i="0">
                 <a:solidFill>
                   <a:srgbClr val="FFFFFF">
                     <a:alpha val="100000"/>
@@ -10567,62 +10353,23 @@
                 <a:ea typeface="Arial"/>
                 <a:cs typeface="Arial"/>
               </a:rPr>
-              <a:t>LiveCaption 解決方案</a:t>
-            </a:r>
-          </a:p>
-        </p:txBody>
-      </p:sp>
-      <p:sp>
-        <p:nvSpPr>
-          <p:cNvPr id="9" name="TextBox 8"/>
-          <p:cNvSpPr txBox="1"/>
-          <p:nvPr/>
-        </p:nvSpPr>
-        <p:spPr>
-          <a:xfrm>
-            <a:off x="975335" y="2331720"/>
-            <a:ext cx="4632844" cy="548640"/>
-          </a:xfrm>
-          <a:prstGeom prst="rect">
-            <a:avLst/>
-          </a:prstGeom>
-          <a:noFill/>
-        </p:spPr>
-        <p:txBody>
-          <a:bodyPr wrap="square" lIns="0" tIns="0" rIns="0" bIns="0" anchor="t">
-            <a:spAutoFit/>
-          </a:bodyPr>
-          <a:lstStyle/>
-          <a:p>
-            <a:pPr algn="l"/>
-            <a:r>
-              <a:rPr sz="1296" b="0" i="0">
-                <a:solidFill>
-                  <a:srgbClr val="232F3E">
-                    <a:alpha val="100000"/>
-                  </a:srgbClr>
-                </a:solidFill>
-                <a:latin typeface="Arial"/>
-                <a:ea typeface="Arial"/>
-                <a:cs typeface="Arial"/>
-              </a:rPr>
-              <a:t>長者講話慢、停頓長 (數十秒)</a:t>
-            </a:r>
-          </a:p>
-          <a:p>
-            <a:pPr algn="l"/>
-            <a:r>
-              <a:rPr sz="1296" b="0" i="0">
-                <a:solidFill>
-                  <a:srgbClr val="232F3E">
-                    <a:alpha val="100000"/>
-                  </a:srgbClr>
-                </a:solidFill>
-                <a:latin typeface="Arial"/>
-                <a:ea typeface="Arial"/>
-                <a:cs typeface="Arial"/>
-              </a:rPr>
-              <a:t>→ Transcribe 收不到音訊就斷線</a:t>
+              <a:t>CloudFront CDN</a:t>
+            </a:r>
+          </a:p>
+          <a:p>
+            <a:pPr algn="ctr"/>
+            <a:r>
+              <a:rPr sz="1404" b="1" i="0">
+                <a:solidFill>
+                  <a:srgbClr val="FFFFFF">
+                    <a:alpha val="100000"/>
+                  </a:srgbClr>
+                </a:solidFill>
+                <a:latin typeface="Arial"/>
+                <a:ea typeface="Arial"/>
+                <a:cs typeface="Arial"/>
+              </a:rPr>
+              <a:t>E1NHT4ZC7ZFGUP</a:t>
             </a:r>
           </a:p>
         </p:txBody>
@@ -10635,393 +10382,8 @@
         </p:nvSpPr>
         <p:spPr>
           <a:xfrm>
-            <a:off x="6583515" y="2331720"/>
-            <a:ext cx="4632844" cy="548640"/>
-          </a:xfrm>
-          <a:prstGeom prst="rect">
-            <a:avLst/>
-          </a:prstGeom>
-          <a:noFill/>
-        </p:spPr>
-        <p:txBody>
-          <a:bodyPr wrap="square" lIns="0" tIns="0" rIns="0" bIns="0" anchor="t">
-            <a:spAutoFit/>
-          </a:bodyPr>
-          <a:lstStyle/>
-          <a:p>
-            <a:pPr algn="l"/>
-            <a:r>
-              <a:rPr sz="1296" b="1" i="0">
-                <a:solidFill>
-                  <a:srgbClr val="16A34A">
-                    <a:alpha val="100000"/>
-                  </a:srgbClr>
-                </a:solidFill>
-                <a:latin typeface="Arial"/>
-                <a:ea typeface="Arial"/>
-                <a:cs typeface="Arial"/>
-              </a:rPr>
-              <a:t>silence_keepalive</a:t>
-            </a:r>
-          </a:p>
-          <a:p>
-            <a:pPr algn="l"/>
-            <a:r>
-              <a:rPr sz="1296" b="1" i="0">
-                <a:solidFill>
-                  <a:srgbClr val="16A34A">
-                    <a:alpha val="100000"/>
-                  </a:srgbClr>
-                </a:solidFill>
-                <a:latin typeface="Arial"/>
-                <a:ea typeface="Arial"/>
-                <a:cs typeface="Arial"/>
-              </a:rPr>
-              <a:t>閒置 3 秒自動補靜音幀維持連線</a:t>
-            </a:r>
-          </a:p>
-        </p:txBody>
-      </p:sp>
-      <p:sp>
-        <p:nvSpPr>
-          <p:cNvPr id="11" name="TextBox 10"/>
-          <p:cNvSpPr txBox="1"/>
-          <p:nvPr/>
-        </p:nvSpPr>
-        <p:spPr>
-          <a:xfrm>
-            <a:off x="975335" y="3017520"/>
-            <a:ext cx="4632844" cy="548640"/>
-          </a:xfrm>
-          <a:prstGeom prst="rect">
-            <a:avLst/>
-          </a:prstGeom>
-          <a:noFill/>
-        </p:spPr>
-        <p:txBody>
-          <a:bodyPr wrap="square" lIns="0" tIns="0" rIns="0" bIns="0" anchor="t">
-            <a:spAutoFit/>
-          </a:bodyPr>
-          <a:lstStyle/>
-          <a:p>
-            <a:pPr algn="l"/>
-            <a:r>
-              <a:rPr sz="1296" b="0" i="0">
-                <a:solidFill>
-                  <a:srgbClr val="232F3E">
-                    <a:alpha val="100000"/>
-                  </a:srgbClr>
-                </a:solidFill>
-                <a:latin typeface="Arial"/>
-                <a:ea typeface="Arial"/>
-                <a:cs typeface="Arial"/>
-              </a:rPr>
-              <a:t>partial 結果反覆改寫</a:t>
-            </a:r>
-          </a:p>
-          <a:p>
-            <a:pPr algn="l"/>
-            <a:r>
-              <a:rPr sz="1296" b="0" i="0">
-                <a:solidFill>
-                  <a:srgbClr val="232F3E">
-                    <a:alpha val="100000"/>
-                  </a:srgbClr>
-                </a:solidFill>
-                <a:latin typeface="Arial"/>
-                <a:ea typeface="Arial"/>
-                <a:cs typeface="Arial"/>
-              </a:rPr>
-              <a:t>→ 字幕在螢幕上跳動，長者讀不完</a:t>
-            </a:r>
-          </a:p>
-        </p:txBody>
-      </p:sp>
-      <p:sp>
-        <p:nvSpPr>
-          <p:cNvPr id="12" name="TextBox 11"/>
-          <p:cNvSpPr txBox="1"/>
-          <p:nvPr/>
-        </p:nvSpPr>
-        <p:spPr>
-          <a:xfrm>
-            <a:off x="6583515" y="3017520"/>
-            <a:ext cx="4632844" cy="548640"/>
-          </a:xfrm>
-          <a:prstGeom prst="rect">
-            <a:avLst/>
-          </a:prstGeom>
-          <a:noFill/>
-        </p:spPr>
-        <p:txBody>
-          <a:bodyPr wrap="square" lIns="0" tIns="0" rIns="0" bIns="0" anchor="t">
-            <a:spAutoFit/>
-          </a:bodyPr>
-          <a:lstStyle/>
-          <a:p>
-            <a:pPr algn="l"/>
-            <a:r>
-              <a:rPr sz="1296" b="1" i="0">
-                <a:solidFill>
-                  <a:srgbClr val="16A34A">
-                    <a:alpha val="100000"/>
-                  </a:srgbClr>
-                </a:solidFill>
-                <a:latin typeface="Arial"/>
-                <a:ea typeface="Arial"/>
-                <a:cs typeface="Arial"/>
-              </a:rPr>
-              <a:t>enable_partial_results_stabilization=high</a:t>
-            </a:r>
-          </a:p>
-          <a:p>
-            <a:pPr algn="l"/>
-            <a:r>
-              <a:rPr sz="1296" b="1" i="0">
-                <a:solidFill>
-                  <a:srgbClr val="16A34A">
-                    <a:alpha val="100000"/>
-                  </a:srgbClr>
-                </a:solidFill>
-                <a:latin typeface="Arial"/>
-                <a:ea typeface="Arial"/>
-                <a:cs typeface="Arial"/>
-              </a:rPr>
-              <a:t>已辨識的字不再變動</a:t>
-            </a:r>
-          </a:p>
-        </p:txBody>
-      </p:sp>
-      <p:sp>
-        <p:nvSpPr>
-          <p:cNvPr id="13" name="TextBox 12"/>
-          <p:cNvSpPr txBox="1"/>
-          <p:nvPr/>
-        </p:nvSpPr>
-        <p:spPr>
-          <a:xfrm>
-            <a:off x="975335" y="3703320"/>
-            <a:ext cx="4632844" cy="548640"/>
-          </a:xfrm>
-          <a:prstGeom prst="rect">
-            <a:avLst/>
-          </a:prstGeom>
-          <a:noFill/>
-        </p:spPr>
-        <p:txBody>
-          <a:bodyPr wrap="square" lIns="0" tIns="0" rIns="0" bIns="0" anchor="t">
-            <a:spAutoFit/>
-          </a:bodyPr>
-          <a:lstStyle/>
-          <a:p>
-            <a:pPr algn="l"/>
-            <a:r>
-              <a:rPr sz="1296" b="0" i="0">
-                <a:solidFill>
-                  <a:srgbClr val="232F3E">
-                    <a:alpha val="100000"/>
-                  </a:srgbClr>
-                </a:solidFill>
-                <a:latin typeface="Arial"/>
-                <a:ea typeface="Arial"/>
-                <a:cs typeface="Arial"/>
-              </a:rPr>
-              <a:t>印尼/越南籍照服員與長者混講</a:t>
-            </a:r>
-          </a:p>
-          <a:p>
-            <a:pPr algn="l"/>
-            <a:r>
-              <a:rPr sz="1296" b="0" i="0">
-                <a:solidFill>
-                  <a:srgbClr val="232F3E">
-                    <a:alpha val="100000"/>
-                  </a:srgbClr>
-                </a:solidFill>
-                <a:latin typeface="Arial"/>
-                <a:ea typeface="Arial"/>
-                <a:cs typeface="Arial"/>
-              </a:rPr>
-              <a:t>→ 無法事先指定語言</a:t>
-            </a:r>
-          </a:p>
-        </p:txBody>
-      </p:sp>
-      <p:sp>
-        <p:nvSpPr>
-          <p:cNvPr id="14" name="TextBox 13"/>
-          <p:cNvSpPr txBox="1"/>
-          <p:nvPr/>
-        </p:nvSpPr>
-        <p:spPr>
-          <a:xfrm>
-            <a:off x="6583515" y="3703320"/>
-            <a:ext cx="4632844" cy="548640"/>
-          </a:xfrm>
-          <a:prstGeom prst="rect">
-            <a:avLst/>
-          </a:prstGeom>
-          <a:noFill/>
-        </p:spPr>
-        <p:txBody>
-          <a:bodyPr wrap="square" lIns="0" tIns="0" rIns="0" bIns="0" anchor="t">
-            <a:spAutoFit/>
-          </a:bodyPr>
-          <a:lstStyle/>
-          <a:p>
-            <a:pPr algn="l"/>
-            <a:r>
-              <a:rPr sz="1296" b="1" i="0">
-                <a:solidFill>
-                  <a:srgbClr val="16A34A">
-                    <a:alpha val="100000"/>
-                  </a:srgbClr>
-                </a:solidFill>
-                <a:latin typeface="Arial"/>
-                <a:ea typeface="Arial"/>
-                <a:cs typeface="Arial"/>
-              </a:rPr>
-              <a:t>identify_language 自動判定</a:t>
-            </a:r>
-          </a:p>
-          <a:p>
-            <a:pPr algn="l"/>
-            <a:r>
-              <a:rPr sz="1296" b="1" i="0">
-                <a:solidFill>
-                  <a:srgbClr val="16A34A">
-                    <a:alpha val="100000"/>
-                  </a:srgbClr>
-                </a:solidFill>
-                <a:latin typeface="Arial"/>
-                <a:ea typeface="Arial"/>
-                <a:cs typeface="Arial"/>
-              </a:rPr>
-              <a:t>zh-TW/id-ID/vi-VN/en/ja/th</a:t>
-            </a:r>
-          </a:p>
-        </p:txBody>
-      </p:sp>
-      <p:sp>
-        <p:nvSpPr>
-          <p:cNvPr id="15" name="TextBox 14"/>
-          <p:cNvSpPr txBox="1"/>
-          <p:nvPr/>
-        </p:nvSpPr>
-        <p:spPr>
-          <a:xfrm>
-            <a:off x="975335" y="4389120"/>
-            <a:ext cx="4632844" cy="548640"/>
-          </a:xfrm>
-          <a:prstGeom prst="rect">
-            <a:avLst/>
-          </a:prstGeom>
-          <a:noFill/>
-        </p:spPr>
-        <p:txBody>
-          <a:bodyPr wrap="square" lIns="0" tIns="0" rIns="0" bIns="0" anchor="t">
-            <a:spAutoFit/>
-          </a:bodyPr>
-          <a:lstStyle/>
-          <a:p>
-            <a:pPr algn="l"/>
-            <a:r>
-              <a:rPr sz="1296" b="0" i="0">
-                <a:solidFill>
-                  <a:srgbClr val="232F3E">
-                    <a:alpha val="100000"/>
-                  </a:srgbClr>
-                </a:solidFill>
-                <a:latin typeface="Arial"/>
-                <a:ea typeface="Arial"/>
-                <a:cs typeface="Arial"/>
-              </a:rPr>
-              <a:t>需分辨「照服員說的」vs「長者說的」</a:t>
-            </a:r>
-          </a:p>
-          <a:p>
-            <a:pPr algn="l"/>
-            <a:r>
-              <a:rPr sz="1296" b="0" i="0">
-                <a:solidFill>
-                  <a:srgbClr val="232F3E">
-                    <a:alpha val="100000"/>
-                  </a:srgbClr>
-                </a:solidFill>
-                <a:latin typeface="Arial"/>
-                <a:ea typeface="Arial"/>
-                <a:cs typeface="Arial"/>
-              </a:rPr>
-              <a:t>→ 交班記錄需要語者標示</a:t>
-            </a:r>
-          </a:p>
-        </p:txBody>
-      </p:sp>
-      <p:sp>
-        <p:nvSpPr>
-          <p:cNvPr id="16" name="TextBox 15"/>
-          <p:cNvSpPr txBox="1"/>
-          <p:nvPr/>
-        </p:nvSpPr>
-        <p:spPr>
-          <a:xfrm>
-            <a:off x="6583515" y="4389120"/>
-            <a:ext cx="4632844" cy="548640"/>
-          </a:xfrm>
-          <a:prstGeom prst="rect">
-            <a:avLst/>
-          </a:prstGeom>
-          <a:noFill/>
-        </p:spPr>
-        <p:txBody>
-          <a:bodyPr wrap="square" lIns="0" tIns="0" rIns="0" bIns="0" anchor="t">
-            <a:spAutoFit/>
-          </a:bodyPr>
-          <a:lstStyle/>
-          <a:p>
-            <a:pPr algn="l"/>
-            <a:r>
-              <a:rPr sz="1296" b="1" i="0">
-                <a:solidFill>
-                  <a:srgbClr val="16A34A">
-                    <a:alpha val="100000"/>
-                  </a:srgbClr>
-                </a:solidFill>
-                <a:latin typeface="Arial"/>
-                <a:ea typeface="Arial"/>
-                <a:cs typeface="Arial"/>
-              </a:rPr>
-              <a:t>show_speaker_label</a:t>
-            </a:r>
-          </a:p>
-          <a:p>
-            <a:pPr algn="l"/>
-            <a:r>
-              <a:rPr sz="1296" b="1" i="0">
-                <a:solidFill>
-                  <a:srgbClr val="16A34A">
-                    <a:alpha val="100000"/>
-                  </a:srgbClr>
-                </a:solidFill>
-                <a:latin typeface="Arial"/>
-                <a:ea typeface="Arial"/>
-                <a:cs typeface="Arial"/>
-              </a:rPr>
-              <a:t>產生語者標籤寫入 segment.speakers</a:t>
-            </a:r>
-          </a:p>
-        </p:txBody>
-      </p:sp>
-      <p:sp>
-        <p:nvSpPr>
-          <p:cNvPr id="17" name="TextBox 16"/>
-          <p:cNvSpPr txBox="1"/>
-          <p:nvPr/>
-        </p:nvSpPr>
-        <p:spPr>
-          <a:xfrm>
-            <a:off x="1219169" y="5486400"/>
-            <a:ext cx="9753356" cy="342900"/>
+            <a:off x="6949266" y="2537460"/>
+            <a:ext cx="2194505" cy="617220"/>
           </a:xfrm>
           <a:prstGeom prst="rect">
             <a:avLst/>
@@ -11038,6 +10400,556 @@
             <a:r>
               <a:rPr sz="1404" b="1" i="0">
                 <a:solidFill>
+                  <a:srgbClr val="FFFFFF">
+                    <a:alpha val="100000"/>
+                  </a:srgbClr>
+                </a:solidFill>
+                <a:latin typeface="Arial"/>
+                <a:ea typeface="Arial"/>
+                <a:cs typeface="Arial"/>
+              </a:rPr>
+              <a:t>EC2 Backend</a:t>
+            </a:r>
+          </a:p>
+          <a:p>
+            <a:pPr algn="ctr"/>
+            <a:r>
+              <a:rPr sz="1404" b="1" i="0">
+                <a:solidFill>
+                  <a:srgbClr val="FFFFFF">
+                    <a:alpha val="100000"/>
+                  </a:srgbClr>
+                </a:solidFill>
+                <a:latin typeface="Arial"/>
+                <a:ea typeface="Arial"/>
+                <a:cs typeface="Arial"/>
+              </a:rPr>
+              <a:t>LiveCaption</a:t>
+            </a:r>
+          </a:p>
+          <a:p>
+            <a:pPr algn="ctr"/>
+            <a:r>
+              <a:rPr sz="1404" b="1" i="0">
+                <a:solidFill>
+                  <a:srgbClr val="FFFFFF">
+                    <a:alpha val="100000"/>
+                  </a:srgbClr>
+                </a:solidFill>
+                <a:latin typeface="Arial"/>
+                <a:ea typeface="Arial"/>
+                <a:cs typeface="Arial"/>
+              </a:rPr>
+              <a:t>WebSocket</a:t>
+            </a:r>
+          </a:p>
+        </p:txBody>
+      </p:sp>
+      <p:sp>
+        <p:nvSpPr>
+          <p:cNvPr id="11" name="TextBox 10"/>
+          <p:cNvSpPr txBox="1"/>
+          <p:nvPr/>
+        </p:nvSpPr>
+        <p:spPr>
+          <a:xfrm>
+            <a:off x="1219169" y="3703320"/>
+            <a:ext cx="1584920" cy="411480"/>
+          </a:xfrm>
+          <a:prstGeom prst="rect">
+            <a:avLst/>
+          </a:prstGeom>
+          <a:noFill/>
+        </p:spPr>
+        <p:txBody>
+          <a:bodyPr wrap="square" lIns="0" tIns="0" rIns="0" bIns="0" anchor="ctr">
+            <a:spAutoFit/>
+          </a:bodyPr>
+          <a:lstStyle/>
+          <a:p>
+            <a:pPr algn="ctr"/>
+            <a:r>
+              <a:rPr sz="1296" b="1" i="0">
+                <a:solidFill>
+                  <a:srgbClr val="232F3E">
+                    <a:alpha val="100000"/>
+                  </a:srgbClr>
+                </a:solidFill>
+                <a:latin typeface="Arial"/>
+                <a:ea typeface="Arial"/>
+                <a:cs typeface="Arial"/>
+              </a:rPr>
+              <a:t>S3</a:t>
+            </a:r>
+          </a:p>
+          <a:p>
+            <a:pPr algn="ctr"/>
+            <a:r>
+              <a:rPr sz="1296" b="1" i="0">
+                <a:solidFill>
+                  <a:srgbClr val="232F3E">
+                    <a:alpha val="100000"/>
+                  </a:srgbClr>
+                </a:solidFill>
+                <a:latin typeface="Arial"/>
+                <a:ea typeface="Arial"/>
+                <a:cs typeface="Arial"/>
+              </a:rPr>
+              <a:t>React SPA</a:t>
+            </a:r>
+          </a:p>
+        </p:txBody>
+      </p:sp>
+      <p:sp>
+        <p:nvSpPr>
+          <p:cNvPr id="12" name="TextBox 11"/>
+          <p:cNvSpPr txBox="1"/>
+          <p:nvPr/>
+        </p:nvSpPr>
+        <p:spPr>
+          <a:xfrm>
+            <a:off x="3291757" y="3703320"/>
+            <a:ext cx="1584920" cy="411480"/>
+          </a:xfrm>
+          <a:prstGeom prst="rect">
+            <a:avLst/>
+          </a:prstGeom>
+          <a:noFill/>
+        </p:spPr>
+        <p:txBody>
+          <a:bodyPr wrap="square" lIns="0" tIns="0" rIns="0" bIns="0" anchor="ctr">
+            <a:spAutoFit/>
+          </a:bodyPr>
+          <a:lstStyle/>
+          <a:p>
+            <a:pPr algn="ctr"/>
+            <a:r>
+              <a:rPr sz="1296" b="1" i="0">
+                <a:solidFill>
+                  <a:srgbClr val="232F3E">
+                    <a:alpha val="100000"/>
+                  </a:srgbClr>
+                </a:solidFill>
+                <a:latin typeface="Arial"/>
+                <a:ea typeface="Arial"/>
+                <a:cs typeface="Arial"/>
+              </a:rPr>
+              <a:t>Cognito</a:t>
+            </a:r>
+          </a:p>
+          <a:p>
+            <a:pPr algn="ctr"/>
+            <a:r>
+              <a:rPr sz="1296" b="1" i="0">
+                <a:solidFill>
+                  <a:srgbClr val="232F3E">
+                    <a:alpha val="100000"/>
+                  </a:srgbClr>
+                </a:solidFill>
+                <a:latin typeface="Arial"/>
+                <a:ea typeface="Arial"/>
+                <a:cs typeface="Arial"/>
+              </a:rPr>
+              <a:t>Identity</a:t>
+            </a:r>
+          </a:p>
+        </p:txBody>
+      </p:sp>
+      <p:sp>
+        <p:nvSpPr>
+          <p:cNvPr id="13" name="TextBox 12"/>
+          <p:cNvSpPr txBox="1"/>
+          <p:nvPr/>
+        </p:nvSpPr>
+        <p:spPr>
+          <a:xfrm>
+            <a:off x="5364345" y="3703320"/>
+            <a:ext cx="1584920" cy="411480"/>
+          </a:xfrm>
+          <a:prstGeom prst="rect">
+            <a:avLst/>
+          </a:prstGeom>
+          <a:noFill/>
+        </p:spPr>
+        <p:txBody>
+          <a:bodyPr wrap="square" lIns="0" tIns="0" rIns="0" bIns="0" anchor="ctr">
+            <a:spAutoFit/>
+          </a:bodyPr>
+          <a:lstStyle/>
+          <a:p>
+            <a:pPr algn="ctr"/>
+            <a:r>
+              <a:rPr sz="1296" b="1" i="0">
+                <a:solidFill>
+                  <a:srgbClr val="232F3E">
+                    <a:alpha val="100000"/>
+                  </a:srgbClr>
+                </a:solidFill>
+                <a:latin typeface="Arial"/>
+                <a:ea typeface="Arial"/>
+                <a:cs typeface="Arial"/>
+              </a:rPr>
+              <a:t>Transcribe</a:t>
+            </a:r>
+          </a:p>
+          <a:p>
+            <a:pPr algn="ctr"/>
+            <a:r>
+              <a:rPr sz="1296" b="1" i="0">
+                <a:solidFill>
+                  <a:srgbClr val="232F3E">
+                    <a:alpha val="100000"/>
+                  </a:srgbClr>
+                </a:solidFill>
+                <a:latin typeface="Arial"/>
+                <a:ea typeface="Arial"/>
+                <a:cs typeface="Arial"/>
+              </a:rPr>
+              <a:t>Streaming</a:t>
+            </a:r>
+          </a:p>
+        </p:txBody>
+      </p:sp>
+      <p:sp>
+        <p:nvSpPr>
+          <p:cNvPr id="14" name="TextBox 13"/>
+          <p:cNvSpPr txBox="1"/>
+          <p:nvPr/>
+        </p:nvSpPr>
+        <p:spPr>
+          <a:xfrm>
+            <a:off x="7436933" y="3703320"/>
+            <a:ext cx="1584920" cy="411480"/>
+          </a:xfrm>
+          <a:prstGeom prst="rect">
+            <a:avLst/>
+          </a:prstGeom>
+          <a:noFill/>
+        </p:spPr>
+        <p:txBody>
+          <a:bodyPr wrap="square" lIns="0" tIns="0" rIns="0" bIns="0" anchor="ctr">
+            <a:spAutoFit/>
+          </a:bodyPr>
+          <a:lstStyle/>
+          <a:p>
+            <a:pPr algn="ctr"/>
+            <a:r>
+              <a:rPr sz="1296" b="1" i="0">
+                <a:solidFill>
+                  <a:srgbClr val="232F3E">
+                    <a:alpha val="100000"/>
+                  </a:srgbClr>
+                </a:solidFill>
+                <a:latin typeface="Arial"/>
+                <a:ea typeface="Arial"/>
+                <a:cs typeface="Arial"/>
+              </a:rPr>
+              <a:t>Bedrock</a:t>
+            </a:r>
+          </a:p>
+          <a:p>
+            <a:pPr algn="ctr"/>
+            <a:r>
+              <a:rPr sz="1296" b="1" i="0">
+                <a:solidFill>
+                  <a:srgbClr val="232F3E">
+                    <a:alpha val="100000"/>
+                  </a:srgbClr>
+                </a:solidFill>
+                <a:latin typeface="Arial"/>
+                <a:ea typeface="Arial"/>
+                <a:cs typeface="Arial"/>
+              </a:rPr>
+              <a:t>KB + Claude</a:t>
+            </a:r>
+          </a:p>
+        </p:txBody>
+      </p:sp>
+      <p:sp>
+        <p:nvSpPr>
+          <p:cNvPr id="15" name="TextBox 14"/>
+          <p:cNvSpPr txBox="1"/>
+          <p:nvPr/>
+        </p:nvSpPr>
+        <p:spPr>
+          <a:xfrm>
+            <a:off x="9509522" y="3703320"/>
+            <a:ext cx="1584920" cy="411480"/>
+          </a:xfrm>
+          <a:prstGeom prst="rect">
+            <a:avLst/>
+          </a:prstGeom>
+          <a:noFill/>
+        </p:spPr>
+        <p:txBody>
+          <a:bodyPr wrap="square" lIns="0" tIns="0" rIns="0" bIns="0" anchor="ctr">
+            <a:spAutoFit/>
+          </a:bodyPr>
+          <a:lstStyle/>
+          <a:p>
+            <a:pPr algn="ctr"/>
+            <a:r>
+              <a:rPr sz="1296" b="1" i="0">
+                <a:solidFill>
+                  <a:srgbClr val="232F3E">
+                    <a:alpha val="100000"/>
+                  </a:srgbClr>
+                </a:solidFill>
+                <a:latin typeface="Arial"/>
+                <a:ea typeface="Arial"/>
+                <a:cs typeface="Arial"/>
+              </a:rPr>
+              <a:t>Polly</a:t>
+            </a:r>
+          </a:p>
+          <a:p>
+            <a:pPr algn="ctr"/>
+            <a:r>
+              <a:rPr sz="1296" b="1" i="0">
+                <a:solidFill>
+                  <a:srgbClr val="232F3E">
+                    <a:alpha val="100000"/>
+                  </a:srgbClr>
+                </a:solidFill>
+                <a:latin typeface="Arial"/>
+                <a:ea typeface="Arial"/>
+                <a:cs typeface="Arial"/>
+              </a:rPr>
+              <a:t>Zhiyu</a:t>
+            </a:r>
+          </a:p>
+        </p:txBody>
+      </p:sp>
+      <p:sp>
+        <p:nvSpPr>
+          <p:cNvPr id="16" name="TextBox 15"/>
+          <p:cNvSpPr txBox="1"/>
+          <p:nvPr/>
+        </p:nvSpPr>
+        <p:spPr>
+          <a:xfrm>
+            <a:off x="1219169" y="4800600"/>
+            <a:ext cx="4267093" cy="548640"/>
+          </a:xfrm>
+          <a:prstGeom prst="rect">
+            <a:avLst/>
+          </a:prstGeom>
+          <a:noFill/>
+        </p:spPr>
+        <p:txBody>
+          <a:bodyPr wrap="square" lIns="0" tIns="0" rIns="0" bIns="0" anchor="ctr">
+            <a:spAutoFit/>
+          </a:bodyPr>
+          <a:lstStyle/>
+          <a:p>
+            <a:pPr algn="ctr"/>
+            <a:r>
+              <a:rPr sz="1188" b="0" i="0">
+                <a:solidFill>
+                  <a:srgbClr val="232F3E">
+                    <a:alpha val="100000"/>
+                  </a:srgbClr>
+                </a:solidFill>
+                <a:latin typeface="Arial"/>
+                <a:ea typeface="Arial"/>
+                <a:cs typeface="Arial"/>
+              </a:rPr>
+              <a:t>DynamoDB (3 表)</a:t>
+            </a:r>
+          </a:p>
+          <a:p>
+            <a:pPr algn="ctr"/>
+            <a:r>
+              <a:rPr sz="1188" b="0" i="0">
+                <a:solidFill>
+                  <a:srgbClr val="232F3E">
+                    <a:alpha val="100000"/>
+                  </a:srgbClr>
+                </a:solidFill>
+                <a:latin typeface="Arial"/>
+                <a:ea typeface="Arial"/>
+                <a:cs typeface="Arial"/>
+              </a:rPr>
+              <a:t>conversations | elder_profile | elder_memory</a:t>
+            </a:r>
+          </a:p>
+        </p:txBody>
+      </p:sp>
+      <p:sp>
+        <p:nvSpPr>
+          <p:cNvPr id="17" name="TextBox 16"/>
+          <p:cNvSpPr txBox="1"/>
+          <p:nvPr/>
+        </p:nvSpPr>
+        <p:spPr>
+          <a:xfrm>
+            <a:off x="6095847" y="4800600"/>
+            <a:ext cx="2438339" cy="548640"/>
+          </a:xfrm>
+          <a:prstGeom prst="rect">
+            <a:avLst/>
+          </a:prstGeom>
+          <a:noFill/>
+        </p:spPr>
+        <p:txBody>
+          <a:bodyPr wrap="square" lIns="0" tIns="0" rIns="0" bIns="0" anchor="ctr">
+            <a:spAutoFit/>
+          </a:bodyPr>
+          <a:lstStyle/>
+          <a:p>
+            <a:pPr algn="ctr"/>
+            <a:r>
+              <a:rPr sz="1188" b="0" i="0">
+                <a:solidFill>
+                  <a:srgbClr val="232F3E">
+                    <a:alpha val="100000"/>
+                  </a:srgbClr>
+                </a:solidFill>
+                <a:latin typeface="Arial"/>
+                <a:ea typeface="Arial"/>
+                <a:cs typeface="Arial"/>
+              </a:rPr>
+              <a:t>S3 Vectors</a:t>
+            </a:r>
+          </a:p>
+          <a:p>
+            <a:pPr algn="ctr"/>
+            <a:r>
+              <a:rPr sz="1188" b="0" i="0">
+                <a:solidFill>
+                  <a:srgbClr val="232F3E">
+                    <a:alpha val="100000"/>
+                  </a:srgbClr>
+                </a:solidFill>
+                <a:latin typeface="Arial"/>
+                <a:ea typeface="Arial"/>
+                <a:cs typeface="Arial"/>
+              </a:rPr>
+              <a:t>+ Audio Bucket</a:t>
+            </a:r>
+          </a:p>
+        </p:txBody>
+      </p:sp>
+      <p:sp>
+        <p:nvSpPr>
+          <p:cNvPr id="18" name="TextBox 17"/>
+          <p:cNvSpPr txBox="1"/>
+          <p:nvPr/>
+        </p:nvSpPr>
+        <p:spPr>
+          <a:xfrm>
+            <a:off x="9143771" y="4800600"/>
+            <a:ext cx="1950671" cy="548640"/>
+          </a:xfrm>
+          <a:prstGeom prst="rect">
+            <a:avLst/>
+          </a:prstGeom>
+          <a:noFill/>
+        </p:spPr>
+        <p:txBody>
+          <a:bodyPr wrap="square" lIns="0" tIns="0" rIns="0" bIns="0" anchor="ctr">
+            <a:spAutoFit/>
+          </a:bodyPr>
+          <a:lstStyle/>
+          <a:p>
+            <a:pPr algn="ctr"/>
+            <a:r>
+              <a:rPr sz="1188" b="0" i="0">
+                <a:solidFill>
+                  <a:srgbClr val="232F3E">
+                    <a:alpha val="100000"/>
+                  </a:srgbClr>
+                </a:solidFill>
+                <a:latin typeface="Arial"/>
+                <a:ea typeface="Arial"/>
+                <a:cs typeface="Arial"/>
+              </a:rPr>
+              <a:t>Lambda 函數</a:t>
+            </a:r>
+          </a:p>
+          <a:p>
+            <a:pPr algn="ctr"/>
+            <a:r>
+              <a:rPr sz="1188" b="0" i="0">
+                <a:solidFill>
+                  <a:srgbClr val="232F3E">
+                    <a:alpha val="100000"/>
+                  </a:srgbClr>
+                </a:solidFill>
+                <a:latin typeface="Arial"/>
+                <a:ea typeface="Arial"/>
+                <a:cs typeface="Arial"/>
+              </a:rPr>
+              <a:t>(5 functions)</a:t>
+            </a:r>
+          </a:p>
+        </p:txBody>
+      </p:sp>
+      <p:sp>
+        <p:nvSpPr>
+          <p:cNvPr id="19" name="TextBox 18"/>
+          <p:cNvSpPr txBox="1"/>
+          <p:nvPr/>
+        </p:nvSpPr>
+        <p:spPr>
+          <a:xfrm>
+            <a:off x="1828754" y="3223260"/>
+            <a:ext cx="1219169" cy="205740"/>
+          </a:xfrm>
+          <a:prstGeom prst="rect">
+            <a:avLst/>
+          </a:prstGeom>
+          <a:noFill/>
+        </p:spPr>
+        <p:txBody>
+          <a:bodyPr wrap="square" lIns="0" tIns="0" rIns="0" bIns="0" anchor="ctr">
+            <a:spAutoFit/>
+          </a:bodyPr>
+          <a:lstStyle/>
+          <a:p>
+            <a:pPr algn="ctr"/>
+            <a:r>
+              <a:rPr sz="1080" b="1" i="0">
+                <a:solidFill>
+                  <a:srgbClr val="16A34A">
+                    <a:alpha val="100000"/>
+                  </a:srgbClr>
+                </a:solidFill>
+                <a:latin typeface="Arial"/>
+                <a:ea typeface="Arial"/>
+                <a:cs typeface="Arial"/>
+              </a:rPr>
+              <a:t>/* → S3</a:t>
+            </a:r>
+          </a:p>
+        </p:txBody>
+      </p:sp>
+      <p:sp>
+        <p:nvSpPr>
+          <p:cNvPr id="20" name="TextBox 19"/>
+          <p:cNvSpPr txBox="1"/>
+          <p:nvPr/>
+        </p:nvSpPr>
+        <p:spPr>
+          <a:xfrm>
+            <a:off x="7315017" y="3223260"/>
+            <a:ext cx="1463003" cy="205740"/>
+          </a:xfrm>
+          <a:prstGeom prst="rect">
+            <a:avLst/>
+          </a:prstGeom>
+          <a:noFill/>
+        </p:spPr>
+        <p:txBody>
+          <a:bodyPr wrap="square" lIns="0" tIns="0" rIns="0" bIns="0" anchor="ctr">
+            <a:spAutoFit/>
+          </a:bodyPr>
+          <a:lstStyle/>
+          <a:p>
+            <a:pPr algn="ctr"/>
+            <a:r>
+              <a:rPr sz="1080" b="1" i="0">
+                <a:solidFill>
                   <a:srgbClr val="2563EB">
                     <a:alpha val="100000"/>
                   </a:srgbClr>
@@ -11046,7 +10958,46 @@
                 <a:ea typeface="Arial"/>
                 <a:cs typeface="Arial"/>
               </a:rPr>
-              <a:t>部署位置: EC2 t3.micro (Python 3.12 FastAPI) | /ws/* WebSocket 端點</a:t>
+              <a:t>/ws/* → EC2</a:t>
+            </a:r>
+          </a:p>
+        </p:txBody>
+      </p:sp>
+      <p:sp>
+        <p:nvSpPr>
+          <p:cNvPr id="21" name="TextBox 20"/>
+          <p:cNvSpPr txBox="1"/>
+          <p:nvPr/>
+        </p:nvSpPr>
+        <p:spPr>
+          <a:xfrm>
+            <a:off x="5730096" y="2125980"/>
+            <a:ext cx="731501" cy="137160"/>
+          </a:xfrm>
+          <a:prstGeom prst="rect">
+            <a:avLst/>
+          </a:prstGeom>
+          <a:noFill/>
+        </p:spPr>
+        <p:txBody>
+          <a:bodyPr wrap="square" lIns="0" tIns="0" rIns="0" bIns="0" anchor="ctr">
+            <a:spAutoFit/>
+          </a:bodyPr>
+          <a:lstStyle/>
+          <a:p>
+            <a:pPr algn="ctr"/>
+            <a:r>
+              <a:rPr sz="971" b="0" i="0">
+                <a:solidFill>
+                  <a:srgbClr val="545B64">
+                    <a:alpha val="100000"/>
+                  </a:srgbClr>
+                </a:solidFill>
+                <a:latin typeface="Arial"/>
+                <a:ea typeface="Arial"/>
+                <a:cs typeface="Arial"/>
+              </a:rPr>
+              <a:t>HTTPS</a:t>
             </a:r>
           </a:p>
         </p:txBody>
@@ -11091,7 +11042,7 @@
             <a:avLst/>
           </a:prstGeom>
           <a:solidFill>
-            <a:srgbClr val="FFFFFF"/>
+            <a:srgbClr val="F8F9FA"/>
           </a:solidFill>
           <a:ln>
             <a:noFill/>
@@ -11123,7 +11074,101 @@
       </p:sp>
       <p:sp>
         <p:nvSpPr>
-          <p:cNvPr id="3" name="TextBox 2"/>
+          <p:cNvPr id="3" name="Rounded Rectangle 2"/>
+          <p:cNvSpPr/>
+          <p:nvPr/>
+        </p:nvSpPr>
+        <p:spPr>
+          <a:xfrm>
+            <a:off x="975335" y="1714500"/>
+            <a:ext cx="4632844" cy="480060"/>
+          </a:xfrm>
+          <a:prstGeom prst="roundRect">
+            <a:avLst>
+              <a:gd name="adj" fmla="val 3000"/>
+            </a:avLst>
+          </a:prstGeom>
+          <a:solidFill>
+            <a:srgbClr val="DC2626"/>
+          </a:solidFill>
+          <a:ln>
+            <a:noFill/>
+          </a:ln>
+          <a:effectLst/>
+        </p:spPr>
+        <p:style>
+          <a:lnRef idx="1">
+            <a:schemeClr val="accent1"/>
+          </a:lnRef>
+          <a:fillRef idx="3">
+            <a:schemeClr val="accent1"/>
+          </a:fillRef>
+          <a:effectRef idx="2">
+            <a:schemeClr val="accent1"/>
+          </a:effectRef>
+          <a:fontRef idx="minor">
+            <a:schemeClr val="lt1"/>
+          </a:fontRef>
+        </p:style>
+        <p:txBody>
+          <a:bodyPr rtlCol="0" anchor="ctr"/>
+          <a:lstStyle/>
+          <a:p>
+            <a:pPr algn="ctr"/>
+            <a:endParaRPr/>
+          </a:p>
+        </p:txBody>
+      </p:sp>
+      <p:sp>
+        <p:nvSpPr>
+          <p:cNvPr id="4" name="Rounded Rectangle 3"/>
+          <p:cNvSpPr/>
+          <p:nvPr/>
+        </p:nvSpPr>
+        <p:spPr>
+          <a:xfrm>
+            <a:off x="6583515" y="1714500"/>
+            <a:ext cx="4632844" cy="480060"/>
+          </a:xfrm>
+          <a:prstGeom prst="roundRect">
+            <a:avLst>
+              <a:gd name="adj" fmla="val 3000"/>
+            </a:avLst>
+          </a:prstGeom>
+          <a:solidFill>
+            <a:srgbClr val="16A34A"/>
+          </a:solidFill>
+          <a:ln>
+            <a:noFill/>
+          </a:ln>
+          <a:effectLst/>
+        </p:spPr>
+        <p:style>
+          <a:lnRef idx="1">
+            <a:schemeClr val="accent1"/>
+          </a:lnRef>
+          <a:fillRef idx="3">
+            <a:schemeClr val="accent1"/>
+          </a:fillRef>
+          <a:effectRef idx="2">
+            <a:schemeClr val="accent1"/>
+          </a:effectRef>
+          <a:fontRef idx="minor">
+            <a:schemeClr val="lt1"/>
+          </a:fontRef>
+        </p:style>
+        <p:txBody>
+          <a:bodyPr rtlCol="0" anchor="ctr"/>
+          <a:lstStyle/>
+          <a:p>
+            <a:pPr algn="ctr"/>
+            <a:endParaRPr/>
+          </a:p>
+        </p:txBody>
+      </p:sp>
+      <p:sp>
+        <p:nvSpPr>
+          <p:cNvPr id="5" name="TextBox 4"/>
           <p:cNvSpPr txBox="1"/>
           <p:nvPr/>
         </p:nvSpPr>
@@ -11155,14 +11200,14 @@
                 <a:ea typeface="Arial"/>
                 <a:cs typeface="Arial"/>
               </a:rPr>
-              <a:t>v1 → v2 架構演進</a:t>
-            </a:r>
-          </a:p>
-        </p:txBody>
-      </p:sp>
-      <p:sp>
-        <p:nvSpPr>
-          <p:cNvPr id="4" name="TextBox 3"/>
+              <a:t>LiveCaption 語音辨識層</a:t>
+            </a:r>
+          </a:p>
+        </p:txBody>
+      </p:sp>
+      <p:sp>
+        <p:nvSpPr>
+          <p:cNvPr id="6" name="TextBox 5"/>
           <p:cNvSpPr txBox="1"/>
           <p:nvPr/>
         </p:nvSpPr>
@@ -11186,29 +11231,29 @@
             <a:r>
               <a:rPr sz="1512" b="1" i="0">
                 <a:solidFill>
-                  <a:srgbClr val="16A34A">
-                    <a:alpha val="100000"/>
-                  </a:srgbClr>
-                </a:solidFill>
-                <a:latin typeface="Arial"/>
-                <a:ea typeface="Arial"/>
-                <a:cs typeface="Arial"/>
-              </a:rPr>
-              <a:t>24 小時 MVP | 最少服務數 | 最低固定成本</a:t>
-            </a:r>
-          </a:p>
-        </p:txBody>
-      </p:sp>
-      <p:sp>
-        <p:nvSpPr>
-          <p:cNvPr id="5" name="TextBox 4"/>
+                  <a:srgbClr val="FF9900">
+                    <a:alpha val="100000"/>
+                  </a:srgbClr>
+                </a:solidFill>
+                <a:latin typeface="Arial"/>
+                <a:ea typeface="Arial"/>
+                <a:cs typeface="Arial"/>
+              </a:rPr>
+              <a:t>Amazon Transcribe Streaming 封裝 | 專為長照現場優化</a:t>
+            </a:r>
+          </a:p>
+        </p:txBody>
+      </p:sp>
+      <p:sp>
+        <p:nvSpPr>
+          <p:cNvPr id="7" name="TextBox 6"/>
           <p:cNvSpPr txBox="1"/>
           <p:nvPr/>
         </p:nvSpPr>
         <p:spPr>
           <a:xfrm>
-            <a:off x="1219169" y="1920240"/>
-            <a:ext cx="9753356" cy="342900"/>
+            <a:off x="975335" y="1851660"/>
+            <a:ext cx="4632844" cy="342900"/>
           </a:xfrm>
           <a:prstGeom prst="rect">
             <a:avLst/>
@@ -11221,33 +11266,72 @@
           </a:bodyPr>
           <a:lstStyle/>
           <a:p>
-            <a:pPr algn="l"/>
+            <a:pPr algn="ctr"/>
             <a:r>
               <a:rPr sz="1728" b="1" i="0">
                 <a:solidFill>
-                  <a:srgbClr val="DC2626">
-                    <a:alpha val="100000"/>
-                  </a:srgbClr>
-                </a:solidFill>
-                <a:latin typeface="Arial"/>
-                <a:ea typeface="Arial"/>
-                <a:cs typeface="Arial"/>
-              </a:rPr>
-              <a:t>❌ 移除 API Gateway + Lambda</a:t>
-            </a:r>
-          </a:p>
-        </p:txBody>
-      </p:sp>
-      <p:sp>
-        <p:nvSpPr>
-          <p:cNvPr id="6" name="TextBox 5"/>
+                  <a:srgbClr val="FFFFFF">
+                    <a:alpha val="100000"/>
+                  </a:srgbClr>
+                </a:solidFill>
+                <a:latin typeface="Arial"/>
+                <a:ea typeface="Arial"/>
+                <a:cs typeface="Arial"/>
+              </a:rPr>
+              <a:t>長照現場問題</a:t>
+            </a:r>
+          </a:p>
+        </p:txBody>
+      </p:sp>
+      <p:sp>
+        <p:nvSpPr>
+          <p:cNvPr id="8" name="TextBox 7"/>
           <p:cNvSpPr txBox="1"/>
           <p:nvPr/>
         </p:nvSpPr>
         <p:spPr>
           <a:xfrm>
-            <a:off x="1463003" y="2331720"/>
-            <a:ext cx="9509522" cy="754380"/>
+            <a:off x="6583515" y="1851660"/>
+            <a:ext cx="4632844" cy="342900"/>
+          </a:xfrm>
+          <a:prstGeom prst="rect">
+            <a:avLst/>
+          </a:prstGeom>
+          <a:noFill/>
+        </p:spPr>
+        <p:txBody>
+          <a:bodyPr wrap="square" lIns="0" tIns="0" rIns="0" bIns="0" anchor="ctr">
+            <a:spAutoFit/>
+          </a:bodyPr>
+          <a:lstStyle/>
+          <a:p>
+            <a:pPr algn="ctr"/>
+            <a:r>
+              <a:rPr sz="1728" b="1" i="0">
+                <a:solidFill>
+                  <a:srgbClr val="FFFFFF">
+                    <a:alpha val="100000"/>
+                  </a:srgbClr>
+                </a:solidFill>
+                <a:latin typeface="Arial"/>
+                <a:ea typeface="Arial"/>
+                <a:cs typeface="Arial"/>
+              </a:rPr>
+              <a:t>LiveCaption 解決方案</a:t>
+            </a:r>
+          </a:p>
+        </p:txBody>
+      </p:sp>
+      <p:sp>
+        <p:nvSpPr>
+          <p:cNvPr id="9" name="TextBox 8"/>
+          <p:cNvSpPr txBox="1"/>
+          <p:nvPr/>
+        </p:nvSpPr>
+        <p:spPr>
+          <a:xfrm>
+            <a:off x="975335" y="2331720"/>
+            <a:ext cx="4632844" cy="548640"/>
           </a:xfrm>
           <a:prstGeom prst="rect">
             <a:avLst/>
@@ -11262,7 +11346,7 @@
           <a:p>
             <a:pPr algn="l"/>
             <a:r>
-              <a:rPr sz="1404" b="0" i="0">
+              <a:rPr sz="1296" b="0" i="0">
                 <a:solidFill>
                   <a:srgbClr val="232F3E">
                     <a:alpha val="100000"/>
@@ -11272,13 +11356,13 @@
                 <a:ea typeface="Arial"/>
                 <a:cs typeface="Arial"/>
               </a:rPr>
-              <a:t>• v1: API Gateway + Lambda 中介層</a:t>
+              <a:t>長者講話慢、停頓長 (數十秒)</a:t>
             </a:r>
           </a:p>
           <a:p>
             <a:pPr algn="l"/>
             <a:r>
-              <a:rPr sz="1404" b="0" i="0">
+              <a:rPr sz="1296" b="0" i="0">
                 <a:solidFill>
                   <a:srgbClr val="232F3E">
                     <a:alpha val="100000"/>
@@ -11288,13 +11372,91 @@
                 <a:ea typeface="Arial"/>
                 <a:cs typeface="Arial"/>
               </a:rPr>
-              <a:t>• v2: 前端直接呼叫 AWS SDK</a:t>
-            </a:r>
-          </a:p>
+              <a:t>→ Transcribe 收不到音訊就斷線</a:t>
+            </a:r>
+          </a:p>
+        </p:txBody>
+      </p:sp>
+      <p:sp>
+        <p:nvSpPr>
+          <p:cNvPr id="10" name="TextBox 9"/>
+          <p:cNvSpPr txBox="1"/>
+          <p:nvPr/>
+        </p:nvSpPr>
+        <p:spPr>
+          <a:xfrm>
+            <a:off x="6583515" y="2331720"/>
+            <a:ext cx="4632844" cy="548640"/>
+          </a:xfrm>
+          <a:prstGeom prst="rect">
+            <a:avLst/>
+          </a:prstGeom>
+          <a:noFill/>
+        </p:spPr>
+        <p:txBody>
+          <a:bodyPr wrap="square" lIns="0" tIns="0" rIns="0" bIns="0" anchor="t">
+            <a:spAutoFit/>
+          </a:bodyPr>
+          <a:lstStyle/>
           <a:p>
             <a:pPr algn="l"/>
             <a:r>
-              <a:rPr sz="1404" b="0" i="0">
+              <a:rPr sz="1296" b="1" i="0">
+                <a:solidFill>
+                  <a:srgbClr val="16A34A">
+                    <a:alpha val="100000"/>
+                  </a:srgbClr>
+                </a:solidFill>
+                <a:latin typeface="Arial"/>
+                <a:ea typeface="Arial"/>
+                <a:cs typeface="Arial"/>
+              </a:rPr>
+              <a:t>silence_keepalive</a:t>
+            </a:r>
+          </a:p>
+          <a:p>
+            <a:pPr algn="l"/>
+            <a:r>
+              <a:rPr sz="1296" b="1" i="0">
+                <a:solidFill>
+                  <a:srgbClr val="16A34A">
+                    <a:alpha val="100000"/>
+                  </a:srgbClr>
+                </a:solidFill>
+                <a:latin typeface="Arial"/>
+                <a:ea typeface="Arial"/>
+                <a:cs typeface="Arial"/>
+              </a:rPr>
+              <a:t>閒置 3 秒自動補靜音幀維持連線</a:t>
+            </a:r>
+          </a:p>
+        </p:txBody>
+      </p:sp>
+      <p:sp>
+        <p:nvSpPr>
+          <p:cNvPr id="11" name="TextBox 10"/>
+          <p:cNvSpPr txBox="1"/>
+          <p:nvPr/>
+        </p:nvSpPr>
+        <p:spPr>
+          <a:xfrm>
+            <a:off x="975335" y="3017520"/>
+            <a:ext cx="4632844" cy="548640"/>
+          </a:xfrm>
+          <a:prstGeom prst="rect">
+            <a:avLst/>
+          </a:prstGeom>
+          <a:noFill/>
+        </p:spPr>
+        <p:txBody>
+          <a:bodyPr wrap="square" lIns="0" tIns="0" rIns="0" bIns="0" anchor="t">
+            <a:spAutoFit/>
+          </a:bodyPr>
+          <a:lstStyle/>
+          <a:p>
+            <a:pPr algn="l"/>
+            <a:r>
+              <a:rPr sz="1296" b="0" i="0">
                 <a:solidFill>
                   <a:srgbClr val="232F3E">
                     <a:alpha val="100000"/>
@@ -11304,20 +11466,311 @@
                 <a:ea typeface="Arial"/>
                 <a:cs typeface="Arial"/>
               </a:rPr>
-              <a:t>→ 少一層部署與除錯，24h 內最省時間</a:t>
-            </a:r>
-          </a:p>
-        </p:txBody>
-      </p:sp>
-      <p:sp>
-        <p:nvSpPr>
-          <p:cNvPr id="7" name="TextBox 6"/>
+              <a:t>partial 結果反覆改寫</a:t>
+            </a:r>
+          </a:p>
+          <a:p>
+            <a:pPr algn="l"/>
+            <a:r>
+              <a:rPr sz="1296" b="0" i="0">
+                <a:solidFill>
+                  <a:srgbClr val="232F3E">
+                    <a:alpha val="100000"/>
+                  </a:srgbClr>
+                </a:solidFill>
+                <a:latin typeface="Arial"/>
+                <a:ea typeface="Arial"/>
+                <a:cs typeface="Arial"/>
+              </a:rPr>
+              <a:t>→ 字幕在螢幕上跳動，長者讀不完</a:t>
+            </a:r>
+          </a:p>
+        </p:txBody>
+      </p:sp>
+      <p:sp>
+        <p:nvSpPr>
+          <p:cNvPr id="12" name="TextBox 11"/>
           <p:cNvSpPr txBox="1"/>
           <p:nvPr/>
         </p:nvSpPr>
         <p:spPr>
           <a:xfrm>
-            <a:off x="1219169" y="3291840"/>
+            <a:off x="6583515" y="3017520"/>
+            <a:ext cx="4632844" cy="548640"/>
+          </a:xfrm>
+          <a:prstGeom prst="rect">
+            <a:avLst/>
+          </a:prstGeom>
+          <a:noFill/>
+        </p:spPr>
+        <p:txBody>
+          <a:bodyPr wrap="square" lIns="0" tIns="0" rIns="0" bIns="0" anchor="t">
+            <a:spAutoFit/>
+          </a:bodyPr>
+          <a:lstStyle/>
+          <a:p>
+            <a:pPr algn="l"/>
+            <a:r>
+              <a:rPr sz="1296" b="1" i="0">
+                <a:solidFill>
+                  <a:srgbClr val="16A34A">
+                    <a:alpha val="100000"/>
+                  </a:srgbClr>
+                </a:solidFill>
+                <a:latin typeface="Arial"/>
+                <a:ea typeface="Arial"/>
+                <a:cs typeface="Arial"/>
+              </a:rPr>
+              <a:t>enable_partial_results_stabilization=high</a:t>
+            </a:r>
+          </a:p>
+          <a:p>
+            <a:pPr algn="l"/>
+            <a:r>
+              <a:rPr sz="1296" b="1" i="0">
+                <a:solidFill>
+                  <a:srgbClr val="16A34A">
+                    <a:alpha val="100000"/>
+                  </a:srgbClr>
+                </a:solidFill>
+                <a:latin typeface="Arial"/>
+                <a:ea typeface="Arial"/>
+                <a:cs typeface="Arial"/>
+              </a:rPr>
+              <a:t>已辨識的字不再變動</a:t>
+            </a:r>
+          </a:p>
+        </p:txBody>
+      </p:sp>
+      <p:sp>
+        <p:nvSpPr>
+          <p:cNvPr id="13" name="TextBox 12"/>
+          <p:cNvSpPr txBox="1"/>
+          <p:nvPr/>
+        </p:nvSpPr>
+        <p:spPr>
+          <a:xfrm>
+            <a:off x="975335" y="3703320"/>
+            <a:ext cx="4632844" cy="548640"/>
+          </a:xfrm>
+          <a:prstGeom prst="rect">
+            <a:avLst/>
+          </a:prstGeom>
+          <a:noFill/>
+        </p:spPr>
+        <p:txBody>
+          <a:bodyPr wrap="square" lIns="0" tIns="0" rIns="0" bIns="0" anchor="t">
+            <a:spAutoFit/>
+          </a:bodyPr>
+          <a:lstStyle/>
+          <a:p>
+            <a:pPr algn="l"/>
+            <a:r>
+              <a:rPr sz="1296" b="0" i="0">
+                <a:solidFill>
+                  <a:srgbClr val="232F3E">
+                    <a:alpha val="100000"/>
+                  </a:srgbClr>
+                </a:solidFill>
+                <a:latin typeface="Arial"/>
+                <a:ea typeface="Arial"/>
+                <a:cs typeface="Arial"/>
+              </a:rPr>
+              <a:t>印尼/越南籍照服員與長者混講</a:t>
+            </a:r>
+          </a:p>
+          <a:p>
+            <a:pPr algn="l"/>
+            <a:r>
+              <a:rPr sz="1296" b="0" i="0">
+                <a:solidFill>
+                  <a:srgbClr val="232F3E">
+                    <a:alpha val="100000"/>
+                  </a:srgbClr>
+                </a:solidFill>
+                <a:latin typeface="Arial"/>
+                <a:ea typeface="Arial"/>
+                <a:cs typeface="Arial"/>
+              </a:rPr>
+              <a:t>→ 無法事先指定語言</a:t>
+            </a:r>
+          </a:p>
+        </p:txBody>
+      </p:sp>
+      <p:sp>
+        <p:nvSpPr>
+          <p:cNvPr id="14" name="TextBox 13"/>
+          <p:cNvSpPr txBox="1"/>
+          <p:nvPr/>
+        </p:nvSpPr>
+        <p:spPr>
+          <a:xfrm>
+            <a:off x="6583515" y="3703320"/>
+            <a:ext cx="4632844" cy="548640"/>
+          </a:xfrm>
+          <a:prstGeom prst="rect">
+            <a:avLst/>
+          </a:prstGeom>
+          <a:noFill/>
+        </p:spPr>
+        <p:txBody>
+          <a:bodyPr wrap="square" lIns="0" tIns="0" rIns="0" bIns="0" anchor="t">
+            <a:spAutoFit/>
+          </a:bodyPr>
+          <a:lstStyle/>
+          <a:p>
+            <a:pPr algn="l"/>
+            <a:r>
+              <a:rPr sz="1296" b="1" i="0">
+                <a:solidFill>
+                  <a:srgbClr val="16A34A">
+                    <a:alpha val="100000"/>
+                  </a:srgbClr>
+                </a:solidFill>
+                <a:latin typeface="Arial"/>
+                <a:ea typeface="Arial"/>
+                <a:cs typeface="Arial"/>
+              </a:rPr>
+              <a:t>identify_language 自動判定</a:t>
+            </a:r>
+          </a:p>
+          <a:p>
+            <a:pPr algn="l"/>
+            <a:r>
+              <a:rPr sz="1296" b="1" i="0">
+                <a:solidFill>
+                  <a:srgbClr val="16A34A">
+                    <a:alpha val="100000"/>
+                  </a:srgbClr>
+                </a:solidFill>
+                <a:latin typeface="Arial"/>
+                <a:ea typeface="Arial"/>
+                <a:cs typeface="Arial"/>
+              </a:rPr>
+              <a:t>zh-TW/id-ID/vi-VN/en/ja/th</a:t>
+            </a:r>
+          </a:p>
+        </p:txBody>
+      </p:sp>
+      <p:sp>
+        <p:nvSpPr>
+          <p:cNvPr id="15" name="TextBox 14"/>
+          <p:cNvSpPr txBox="1"/>
+          <p:nvPr/>
+        </p:nvSpPr>
+        <p:spPr>
+          <a:xfrm>
+            <a:off x="975335" y="4389120"/>
+            <a:ext cx="4632844" cy="548640"/>
+          </a:xfrm>
+          <a:prstGeom prst="rect">
+            <a:avLst/>
+          </a:prstGeom>
+          <a:noFill/>
+        </p:spPr>
+        <p:txBody>
+          <a:bodyPr wrap="square" lIns="0" tIns="0" rIns="0" bIns="0" anchor="t">
+            <a:spAutoFit/>
+          </a:bodyPr>
+          <a:lstStyle/>
+          <a:p>
+            <a:pPr algn="l"/>
+            <a:r>
+              <a:rPr sz="1296" b="0" i="0">
+                <a:solidFill>
+                  <a:srgbClr val="232F3E">
+                    <a:alpha val="100000"/>
+                  </a:srgbClr>
+                </a:solidFill>
+                <a:latin typeface="Arial"/>
+                <a:ea typeface="Arial"/>
+                <a:cs typeface="Arial"/>
+              </a:rPr>
+              <a:t>需分辨「照服員說的」vs「長者說的」</a:t>
+            </a:r>
+          </a:p>
+          <a:p>
+            <a:pPr algn="l"/>
+            <a:r>
+              <a:rPr sz="1296" b="0" i="0">
+                <a:solidFill>
+                  <a:srgbClr val="232F3E">
+                    <a:alpha val="100000"/>
+                  </a:srgbClr>
+                </a:solidFill>
+                <a:latin typeface="Arial"/>
+                <a:ea typeface="Arial"/>
+                <a:cs typeface="Arial"/>
+              </a:rPr>
+              <a:t>→ 交班記錄需要語者標示</a:t>
+            </a:r>
+          </a:p>
+        </p:txBody>
+      </p:sp>
+      <p:sp>
+        <p:nvSpPr>
+          <p:cNvPr id="16" name="TextBox 15"/>
+          <p:cNvSpPr txBox="1"/>
+          <p:nvPr/>
+        </p:nvSpPr>
+        <p:spPr>
+          <a:xfrm>
+            <a:off x="6583515" y="4389120"/>
+            <a:ext cx="4632844" cy="548640"/>
+          </a:xfrm>
+          <a:prstGeom prst="rect">
+            <a:avLst/>
+          </a:prstGeom>
+          <a:noFill/>
+        </p:spPr>
+        <p:txBody>
+          <a:bodyPr wrap="square" lIns="0" tIns="0" rIns="0" bIns="0" anchor="t">
+            <a:spAutoFit/>
+          </a:bodyPr>
+          <a:lstStyle/>
+          <a:p>
+            <a:pPr algn="l"/>
+            <a:r>
+              <a:rPr sz="1296" b="1" i="0">
+                <a:solidFill>
+                  <a:srgbClr val="16A34A">
+                    <a:alpha val="100000"/>
+                  </a:srgbClr>
+                </a:solidFill>
+                <a:latin typeface="Arial"/>
+                <a:ea typeface="Arial"/>
+                <a:cs typeface="Arial"/>
+              </a:rPr>
+              <a:t>show_speaker_label</a:t>
+            </a:r>
+          </a:p>
+          <a:p>
+            <a:pPr algn="l"/>
+            <a:r>
+              <a:rPr sz="1296" b="1" i="0">
+                <a:solidFill>
+                  <a:srgbClr val="16A34A">
+                    <a:alpha val="100000"/>
+                  </a:srgbClr>
+                </a:solidFill>
+                <a:latin typeface="Arial"/>
+                <a:ea typeface="Arial"/>
+                <a:cs typeface="Arial"/>
+              </a:rPr>
+              <a:t>產生語者標籤寫入 segment.speakers</a:t>
+            </a:r>
+          </a:p>
+        </p:txBody>
+      </p:sp>
+      <p:sp>
+        <p:nvSpPr>
+          <p:cNvPr id="17" name="TextBox 16"/>
+          <p:cNvSpPr txBox="1"/>
+          <p:nvPr/>
+        </p:nvSpPr>
+        <p:spPr>
+          <a:xfrm>
+            <a:off x="1219169" y="5486400"/>
             <a:ext cx="9753356" cy="342900"/>
           </a:xfrm>
           <a:prstGeom prst="rect">
@@ -11331,119 +11784,9 @@
           </a:bodyPr>
           <a:lstStyle/>
           <a:p>
-            <a:pPr algn="l"/>
-            <a:r>
-              <a:rPr sz="1728" b="1" i="0">
-                <a:solidFill>
-                  <a:srgbClr val="16A34A">
-                    <a:alpha val="100000"/>
-                  </a:srgbClr>
-                </a:solidFill>
-                <a:latin typeface="Arial"/>
-                <a:ea typeface="Arial"/>
-                <a:cs typeface="Arial"/>
-              </a:rPr>
-              <a:t>✅ 成本優化 90%: S3 Vectors</a:t>
-            </a:r>
-          </a:p>
-        </p:txBody>
-      </p:sp>
-      <p:sp>
-        <p:nvSpPr>
-          <p:cNvPr id="8" name="TextBox 7"/>
-          <p:cNvSpPr txBox="1"/>
-          <p:nvPr/>
-        </p:nvSpPr>
-        <p:spPr>
-          <a:xfrm>
-            <a:off x="1463003" y="3703320"/>
-            <a:ext cx="9509522" cy="754380"/>
-          </a:xfrm>
-          <a:prstGeom prst="rect">
-            <a:avLst/>
-          </a:prstGeom>
-          <a:noFill/>
-        </p:spPr>
-        <p:txBody>
-          <a:bodyPr wrap="square" lIns="0" tIns="0" rIns="0" bIns="0" anchor="t">
-            <a:spAutoFit/>
-          </a:bodyPr>
-          <a:lstStyle/>
-          <a:p>
-            <a:pPr algn="l"/>
-            <a:r>
-              <a:rPr sz="1404" b="0" i="0">
-                <a:solidFill>
-                  <a:srgbClr val="232F3E">
-                    <a:alpha val="100000"/>
-                  </a:srgbClr>
-                </a:solidFill>
-                <a:latin typeface="Arial"/>
-                <a:ea typeface="Arial"/>
-                <a:cs typeface="Arial"/>
-              </a:rPr>
-              <a:t>• v1: OpenSearch Serverless (昂貴)</a:t>
-            </a:r>
-          </a:p>
-          <a:p>
-            <a:pPr algn="l"/>
-            <a:r>
-              <a:rPr sz="1404" b="0" i="0">
-                <a:solidFill>
-                  <a:srgbClr val="232F3E">
-                    <a:alpha val="100000"/>
-                  </a:srgbClr>
-                </a:solidFill>
-                <a:latin typeface="Arial"/>
-                <a:ea typeface="Arial"/>
-                <a:cs typeface="Arial"/>
-              </a:rPr>
-              <a:t>• v2: S3 Vectors (2025/12 GA)</a:t>
-            </a:r>
-          </a:p>
-          <a:p>
-            <a:pPr algn="l"/>
-            <a:r>
-              <a:rPr sz="1404" b="0" i="0">
-                <a:solidFill>
-                  <a:srgbClr val="232F3E">
-                    <a:alpha val="100000"/>
-                  </a:srgbClr>
-                </a:solidFill>
-                <a:latin typeface="Arial"/>
-                <a:ea typeface="Arial"/>
-                <a:cs typeface="Arial"/>
-              </a:rPr>
-              <a:t>→ 成本降約 90%，無需管理 collection</a:t>
-            </a:r>
-          </a:p>
-        </p:txBody>
-      </p:sp>
-      <p:sp>
-        <p:nvSpPr>
-          <p:cNvPr id="9" name="TextBox 8"/>
-          <p:cNvSpPr txBox="1"/>
-          <p:nvPr/>
-        </p:nvSpPr>
-        <p:spPr>
-          <a:xfrm>
-            <a:off x="1219169" y="4663440"/>
-            <a:ext cx="9753356" cy="342900"/>
-          </a:xfrm>
-          <a:prstGeom prst="rect">
-            <a:avLst/>
-          </a:prstGeom>
-          <a:noFill/>
-        </p:spPr>
-        <p:txBody>
-          <a:bodyPr wrap="square" lIns="0" tIns="0" rIns="0" bIns="0" anchor="ctr">
-            <a:spAutoFit/>
-          </a:bodyPr>
-          <a:lstStyle/>
-          <a:p>
-            <a:pPr algn="l"/>
-            <a:r>
-              <a:rPr sz="1728" b="1" i="0">
+            <a:pPr algn="ctr"/>
+            <a:r>
+              <a:rPr sz="1404" b="1" i="0">
                 <a:solidFill>
                   <a:srgbClr val="2563EB">
                     <a:alpha val="100000"/>
@@ -11453,78 +11796,7 @@
                 <a:ea typeface="Arial"/>
                 <a:cs typeface="Arial"/>
               </a:rPr>
-              <a:t>✅ AI 服務升級</a:t>
-            </a:r>
-          </a:p>
-        </p:txBody>
-      </p:sp>
-      <p:sp>
-        <p:nvSpPr>
-          <p:cNvPr id="10" name="TextBox 9"/>
-          <p:cNvSpPr txBox="1"/>
-          <p:nvPr/>
-        </p:nvSpPr>
-        <p:spPr>
-          <a:xfrm>
-            <a:off x="1463003" y="5074920"/>
-            <a:ext cx="9509522" cy="891540"/>
-          </a:xfrm>
-          <a:prstGeom prst="rect">
-            <a:avLst/>
-          </a:prstGeom>
-          <a:noFill/>
-        </p:spPr>
-        <p:txBody>
-          <a:bodyPr wrap="square" lIns="0" tIns="0" rIns="0" bIns="0" anchor="t">
-            <a:spAutoFit/>
-          </a:bodyPr>
-          <a:lstStyle/>
-          <a:p>
-            <a:pPr algn="l"/>
-            <a:r>
-              <a:rPr sz="1404" b="0" i="0">
-                <a:solidFill>
-                  <a:srgbClr val="232F3E">
-                    <a:alpha val="100000"/>
-                  </a:srgbClr>
-                </a:solidFill>
-                <a:latin typeface="Arial"/>
-                <a:ea typeface="Arial"/>
-                <a:cs typeface="Arial"/>
-              </a:rPr>
-              <a:t>• LLM: Claude 3 Sonnet → Claude Sonnet 4 (高性能推理)</a:t>
-            </a:r>
-          </a:p>
-          <a:p>
-            <a:pPr algn="l"/>
-            <a:r>
-              <a:rPr sz="1404" b="0" i="0">
-                <a:solidFill>
-                  <a:srgbClr val="232F3E">
-                    <a:alpha val="100000"/>
-                  </a:srgbClr>
-                </a:solidFill>
-                <a:latin typeface="Arial"/>
-                <a:ea typeface="Arial"/>
-                <a:cs typeface="Arial"/>
-              </a:rPr>
-              <a:t>• RAG: 自建 (向量查詢+摘要) → Bedrock RetrieveAndGenerate (一個 API)</a:t>
-            </a:r>
-          </a:p>
-          <a:p>
-            <a:pPr algn="l"/>
-            <a:r>
-              <a:rPr sz="1404" b="0" i="0">
-                <a:solidFill>
-                  <a:srgbClr val="232F3E">
-                    <a:alpha val="100000"/>
-                  </a:srgbClr>
-                </a:solidFill>
-                <a:latin typeface="Arial"/>
-                <a:ea typeface="Arial"/>
-                <a:cs typeface="Arial"/>
-              </a:rPr>
-              <a:t>• 分類: Amazon Comprehend → Claude structured output (省一次網路往返)</a:t>
+              <a:t>部署位置: EC2 t3.micro (Python 3.12 FastAPI) | /ws/* WebSocket 端點</a:t>
             </a:r>
           </a:p>
         </p:txBody>
